--- a/folletos/2026-04/pptx/FIP_VANTRUST_LIQUIDEZ_TEMPORAL.pptx
+++ b/folletos/2026-04/pptx/FIP_VANTRUST_LIQUIDEZ_TEMPORAL.pptx
@@ -2855,7 +2855,7 @@
                 <a:ea typeface="Calibri" pitchFamily="34" charset="-122"/>
                 <a:cs typeface="Calibri" pitchFamily="34" charset="-120"/>
               </a:rPr>
-              <a:t>prueba CLP</a:t>
+              <a:t>prueba 2 CLP</a:t>
             </a:r>
             <a:endParaRPr lang="en-US" sz="800" dirty="0"/>
           </a:p>

--- a/folletos/2026-04/pptx/FIP_VANTRUST_LIQUIDEZ_TEMPORAL.pptx
+++ b/folletos/2026-04/pptx/FIP_VANTRUST_LIQUIDEZ_TEMPORAL.pptx
@@ -189,20 +189,260 @@
           </c:marker>
           <c:cat>
             <c:multiLvlStrRef>
-              <c:f>Sheet1!$A$2:$A$5</c:f>
+              <c:f>Sheet1!$A$2:$A$85</c:f>
               <c:multiLvlStrCache>
-                <c:ptCount val="4"/>
+                <c:ptCount val="84"/>
                 <c:lvl>
                   <c:pt idx="0">
                     <c:v>Feb 2026</c:v>
                   </c:pt>
                   <c:pt idx="1">
+                    <c:v>Feb 2026</c:v>
+                  </c:pt>
+                  <c:pt idx="2">
+                    <c:v>Feb 2026</c:v>
+                  </c:pt>
+                  <c:pt idx="3">
+                    <c:v>Feb 2026</c:v>
+                  </c:pt>
+                  <c:pt idx="4">
+                    <c:v>Feb 2026</c:v>
+                  </c:pt>
+                  <c:pt idx="5">
+                    <c:v>Feb 2026</c:v>
+                  </c:pt>
+                  <c:pt idx="6">
+                    <c:v>Feb 2026</c:v>
+                  </c:pt>
+                  <c:pt idx="7">
+                    <c:v>Feb 2026</c:v>
+                  </c:pt>
+                  <c:pt idx="8">
+                    <c:v>Feb 2026</c:v>
+                  </c:pt>
+                  <c:pt idx="9">
+                    <c:v>Feb 2026</c:v>
+                  </c:pt>
+                  <c:pt idx="10">
+                    <c:v>Feb 2026</c:v>
+                  </c:pt>
+                  <c:pt idx="11">
+                    <c:v>Feb 2026</c:v>
+                  </c:pt>
+                  <c:pt idx="12">
+                    <c:v>Feb 2026</c:v>
+                  </c:pt>
+                  <c:pt idx="13">
+                    <c:v>Feb 2026</c:v>
+                  </c:pt>
+                  <c:pt idx="14">
+                    <c:v>Feb 2026</c:v>
+                  </c:pt>
+                  <c:pt idx="15">
+                    <c:v>Feb 2026</c:v>
+                  </c:pt>
+                  <c:pt idx="16">
+                    <c:v>Feb 2026</c:v>
+                  </c:pt>
+                  <c:pt idx="17">
+                    <c:v>Feb 2026</c:v>
+                  </c:pt>
+                  <c:pt idx="18">
                     <c:v>Mar 2026</c:v>
                   </c:pt>
-                  <c:pt idx="2">
+                  <c:pt idx="19">
+                    <c:v>Mar 2026</c:v>
+                  </c:pt>
+                  <c:pt idx="20">
+                    <c:v>Mar 2026</c:v>
+                  </c:pt>
+                  <c:pt idx="21">
+                    <c:v>Mar 2026</c:v>
+                  </c:pt>
+                  <c:pt idx="22">
+                    <c:v>Mar 2026</c:v>
+                  </c:pt>
+                  <c:pt idx="23">
+                    <c:v>Mar 2026</c:v>
+                  </c:pt>
+                  <c:pt idx="24">
+                    <c:v>Mar 2026</c:v>
+                  </c:pt>
+                  <c:pt idx="25">
+                    <c:v>Mar 2026</c:v>
+                  </c:pt>
+                  <c:pt idx="26">
+                    <c:v>Mar 2026</c:v>
+                  </c:pt>
+                  <c:pt idx="27">
+                    <c:v>Mar 2026</c:v>
+                  </c:pt>
+                  <c:pt idx="28">
+                    <c:v>Mar 2026</c:v>
+                  </c:pt>
+                  <c:pt idx="29">
+                    <c:v>Mar 2026</c:v>
+                  </c:pt>
+                  <c:pt idx="30">
+                    <c:v>Mar 2026</c:v>
+                  </c:pt>
+                  <c:pt idx="31">
+                    <c:v>Mar 2026</c:v>
+                  </c:pt>
+                  <c:pt idx="32">
+                    <c:v>Mar 2026</c:v>
+                  </c:pt>
+                  <c:pt idx="33">
+                    <c:v>Mar 2026</c:v>
+                  </c:pt>
+                  <c:pt idx="34">
+                    <c:v>Mar 2026</c:v>
+                  </c:pt>
+                  <c:pt idx="35">
+                    <c:v>Mar 2026</c:v>
+                  </c:pt>
+                  <c:pt idx="36">
+                    <c:v>Mar 2026</c:v>
+                  </c:pt>
+                  <c:pt idx="37">
+                    <c:v>Mar 2026</c:v>
+                  </c:pt>
+                  <c:pt idx="38">
+                    <c:v>Mar 2026</c:v>
+                  </c:pt>
+                  <c:pt idx="39">
+                    <c:v>Mar 2026</c:v>
+                  </c:pt>
+                  <c:pt idx="40">
+                    <c:v>Mar 2026</c:v>
+                  </c:pt>
+                  <c:pt idx="41">
+                    <c:v>Mar 2026</c:v>
+                  </c:pt>
+                  <c:pt idx="42">
+                    <c:v>Mar 2026</c:v>
+                  </c:pt>
+                  <c:pt idx="43">
+                    <c:v>Mar 2026</c:v>
+                  </c:pt>
+                  <c:pt idx="44">
+                    <c:v>Mar 2026</c:v>
+                  </c:pt>
+                  <c:pt idx="45">
+                    <c:v>Mar 2026</c:v>
+                  </c:pt>
+                  <c:pt idx="46">
+                    <c:v>Mar 2026</c:v>
+                  </c:pt>
+                  <c:pt idx="47">
+                    <c:v>Mar 2026</c:v>
+                  </c:pt>
+                  <c:pt idx="48">
+                    <c:v>Mar 2026</c:v>
+                  </c:pt>
+                  <c:pt idx="49">
                     <c:v>Apr 2026</c:v>
                   </c:pt>
-                  <c:pt idx="3">
+                  <c:pt idx="50">
+                    <c:v>Apr 2026</c:v>
+                  </c:pt>
+                  <c:pt idx="51">
+                    <c:v>Apr 2026</c:v>
+                  </c:pt>
+                  <c:pt idx="52">
+                    <c:v>Apr 2026</c:v>
+                  </c:pt>
+                  <c:pt idx="53">
+                    <c:v>Apr 2026</c:v>
+                  </c:pt>
+                  <c:pt idx="54">
+                    <c:v>Apr 2026</c:v>
+                  </c:pt>
+                  <c:pt idx="55">
+                    <c:v>Apr 2026</c:v>
+                  </c:pt>
+                  <c:pt idx="56">
+                    <c:v>Apr 2026</c:v>
+                  </c:pt>
+                  <c:pt idx="57">
+                    <c:v>Apr 2026</c:v>
+                  </c:pt>
+                  <c:pt idx="58">
+                    <c:v>Apr 2026</c:v>
+                  </c:pt>
+                  <c:pt idx="59">
+                    <c:v>Apr 2026</c:v>
+                  </c:pt>
+                  <c:pt idx="60">
+                    <c:v>Apr 2026</c:v>
+                  </c:pt>
+                  <c:pt idx="61">
+                    <c:v>Apr 2026</c:v>
+                  </c:pt>
+                  <c:pt idx="62">
+                    <c:v>Apr 2026</c:v>
+                  </c:pt>
+                  <c:pt idx="63">
+                    <c:v>Apr 2026</c:v>
+                  </c:pt>
+                  <c:pt idx="64">
+                    <c:v>Apr 2026</c:v>
+                  </c:pt>
+                  <c:pt idx="65">
+                    <c:v>Apr 2026</c:v>
+                  </c:pt>
+                  <c:pt idx="66">
+                    <c:v>Apr 2026</c:v>
+                  </c:pt>
+                  <c:pt idx="67">
+                    <c:v>Apr 2026</c:v>
+                  </c:pt>
+                  <c:pt idx="68">
+                    <c:v>Apr 2026</c:v>
+                  </c:pt>
+                  <c:pt idx="69">
+                    <c:v>Apr 2026</c:v>
+                  </c:pt>
+                  <c:pt idx="70">
+                    <c:v>Apr 2026</c:v>
+                  </c:pt>
+                  <c:pt idx="71">
+                    <c:v>Apr 2026</c:v>
+                  </c:pt>
+                  <c:pt idx="72">
+                    <c:v>Apr 2026</c:v>
+                  </c:pt>
+                  <c:pt idx="73">
+                    <c:v>Apr 2026</c:v>
+                  </c:pt>
+                  <c:pt idx="74">
+                    <c:v>Apr 2026</c:v>
+                  </c:pt>
+                  <c:pt idx="75">
+                    <c:v>Apr 2026</c:v>
+                  </c:pt>
+                  <c:pt idx="76">
+                    <c:v>Apr 2026</c:v>
+                  </c:pt>
+                  <c:pt idx="77">
+                    <c:v>Apr 2026</c:v>
+                  </c:pt>
+                  <c:pt idx="78">
+                    <c:v>Apr 2026</c:v>
+                  </c:pt>
+                  <c:pt idx="79">
+                    <c:v>May 2026</c:v>
+                  </c:pt>
+                  <c:pt idx="80">
+                    <c:v>May 2026</c:v>
+                  </c:pt>
+                  <c:pt idx="81">
+                    <c:v>May 2026</c:v>
+                  </c:pt>
+                  <c:pt idx="82">
+                    <c:v>May 2026</c:v>
+                  </c:pt>
+                  <c:pt idx="83">
                     <c:v>May 2026</c:v>
                   </c:pt>
                 </c:lvl>
@@ -211,21 +451,261 @@
           </c:cat>
           <c:val>
             <c:numRef>
-              <c:f>Sheet1!$B$2:$B$5</c:f>
+              <c:f>Sheet1!$B$2:$B$85</c:f>
               <c:numCache>
                 <c:formatCode>General</c:formatCode>
-                <c:ptCount val="4"/>
+                <c:ptCount val="84"/>
                 <c:pt idx="0">
                   <c:v>1000</c:v>
                 </c:pt>
                 <c:pt idx="1">
-                  <c:v>1005.79</c:v>
+                  <c:v>1000.49</c:v>
                 </c:pt>
                 <c:pt idx="2">
-                  <c:v>1010.96</c:v>
+                  <c:v>1000.84</c:v>
                 </c:pt>
                 <c:pt idx="3">
-                  <c:v>1011.88</c:v>
+                  <c:v>1001.2</c:v>
+                </c:pt>
+                <c:pt idx="4">
+                  <c:v>1001.56</c:v>
+                </c:pt>
+                <c:pt idx="5">
+                  <c:v>1001.58</c:v>
+                </c:pt>
+                <c:pt idx="6">
+                  <c:v>1001.59</c:v>
+                </c:pt>
+                <c:pt idx="7">
+                  <c:v>1001.72</c:v>
+                </c:pt>
+                <c:pt idx="8">
+                  <c:v>1002.08</c:v>
+                </c:pt>
+                <c:pt idx="9">
+                  <c:v>1002.53</c:v>
+                </c:pt>
+                <c:pt idx="10">
+                  <c:v>1002.92</c:v>
+                </c:pt>
+                <c:pt idx="11">
+                  <c:v>1003.3</c:v>
+                </c:pt>
+                <c:pt idx="12">
+                  <c:v>1003.65</c:v>
+                </c:pt>
+                <c:pt idx="13">
+                  <c:v>1003.92</c:v>
+                </c:pt>
+                <c:pt idx="14">
+                  <c:v>1004.13</c:v>
+                </c:pt>
+                <c:pt idx="15">
+                  <c:v>1004.34</c:v>
+                </c:pt>
+                <c:pt idx="16">
+                  <c:v>1004.44</c:v>
+                </c:pt>
+                <c:pt idx="17">
+                  <c:v>1004.64</c:v>
+                </c:pt>
+                <c:pt idx="18">
+                  <c:v>1004.85</c:v>
+                </c:pt>
+                <c:pt idx="19">
+                  <c:v>1005.05</c:v>
+                </c:pt>
+                <c:pt idx="20">
+                  <c:v>1005.26</c:v>
+                </c:pt>
+                <c:pt idx="21">
+                  <c:v>1005.46</c:v>
+                </c:pt>
+                <c:pt idx="22">
+                  <c:v>1005.66</c:v>
+                </c:pt>
+                <c:pt idx="23">
+                  <c:v>1005.85</c:v>
+                </c:pt>
+                <c:pt idx="24">
+                  <c:v>1006.05</c:v>
+                </c:pt>
+                <c:pt idx="25">
+                  <c:v>1006.25</c:v>
+                </c:pt>
+                <c:pt idx="26">
+                  <c:v>1006.44</c:v>
+                </c:pt>
+                <c:pt idx="27">
+                  <c:v>1006.63</c:v>
+                </c:pt>
+                <c:pt idx="28">
+                  <c:v>1006.82</c:v>
+                </c:pt>
+                <c:pt idx="29">
+                  <c:v>1007.01</c:v>
+                </c:pt>
+                <c:pt idx="30">
+                  <c:v>1007.2</c:v>
+                </c:pt>
+                <c:pt idx="31">
+                  <c:v>1007.38</c:v>
+                </c:pt>
+                <c:pt idx="32">
+                  <c:v>1007.57</c:v>
+                </c:pt>
+                <c:pt idx="33">
+                  <c:v>1007.74</c:v>
+                </c:pt>
+                <c:pt idx="34">
+                  <c:v>1007.93</c:v>
+                </c:pt>
+                <c:pt idx="35">
+                  <c:v>1008.12</c:v>
+                </c:pt>
+                <c:pt idx="36">
+                  <c:v>1008.31</c:v>
+                </c:pt>
+                <c:pt idx="37">
+                  <c:v>1008.6</c:v>
+                </c:pt>
+                <c:pt idx="38">
+                  <c:v>1008.8</c:v>
+                </c:pt>
+                <c:pt idx="39">
+                  <c:v>1009</c:v>
+                </c:pt>
+                <c:pt idx="40">
+                  <c:v>1009.2</c:v>
+                </c:pt>
+                <c:pt idx="41">
+                  <c:v>1009.4</c:v>
+                </c:pt>
+                <c:pt idx="42">
+                  <c:v>1009.51</c:v>
+                </c:pt>
+                <c:pt idx="43">
+                  <c:v>1009.62</c:v>
+                </c:pt>
+                <c:pt idx="44">
+                  <c:v>1009.75</c:v>
+                </c:pt>
+                <c:pt idx="45">
+                  <c:v>1009.95</c:v>
+                </c:pt>
+                <c:pt idx="46">
+                  <c:v>1010.14</c:v>
+                </c:pt>
+                <c:pt idx="47">
+                  <c:v>1010.31</c:v>
+                </c:pt>
+                <c:pt idx="48">
+                  <c:v>1010.46</c:v>
+                </c:pt>
+                <c:pt idx="49">
+                  <c:v>1010.62</c:v>
+                </c:pt>
+                <c:pt idx="50">
+                  <c:v>1010.78</c:v>
+                </c:pt>
+                <c:pt idx="51">
+                  <c:v>1010.98</c:v>
+                </c:pt>
+                <c:pt idx="52">
+                  <c:v>1011.18</c:v>
+                </c:pt>
+                <c:pt idx="53">
+                  <c:v>1011.39</c:v>
+                </c:pt>
+                <c:pt idx="54">
+                  <c:v>1011.54</c:v>
+                </c:pt>
+                <c:pt idx="55">
+                  <c:v>1011.7</c:v>
+                </c:pt>
+                <c:pt idx="56">
+                  <c:v>1011.9</c:v>
+                </c:pt>
+                <c:pt idx="57">
+                  <c:v>1012.05</c:v>
+                </c:pt>
+                <c:pt idx="58">
+                  <c:v>1012.24</c:v>
+                </c:pt>
+                <c:pt idx="59">
+                  <c:v>1012.44</c:v>
+                </c:pt>
+                <c:pt idx="60">
+                  <c:v>1012.63</c:v>
+                </c:pt>
+                <c:pt idx="61">
+                  <c:v>1012.78</c:v>
+                </c:pt>
+                <c:pt idx="62">
+                  <c:v>1012.93</c:v>
+                </c:pt>
+                <c:pt idx="63">
+                  <c:v>1013.07</c:v>
+                </c:pt>
+                <c:pt idx="64">
+                  <c:v>1013.27</c:v>
+                </c:pt>
+                <c:pt idx="65">
+                  <c:v>1013.45</c:v>
+                </c:pt>
+                <c:pt idx="66">
+                  <c:v>1013.64</c:v>
+                </c:pt>
+                <c:pt idx="67">
+                  <c:v>1013.83</c:v>
+                </c:pt>
+                <c:pt idx="68">
+                  <c:v>1013.95</c:v>
+                </c:pt>
+                <c:pt idx="69">
+                  <c:v>1014.14</c:v>
+                </c:pt>
+                <c:pt idx="70">
+                  <c:v>1014.29</c:v>
+                </c:pt>
+                <c:pt idx="71">
+                  <c:v>1014.44</c:v>
+                </c:pt>
+                <c:pt idx="72">
+                  <c:v>1014.63</c:v>
+                </c:pt>
+                <c:pt idx="73">
+                  <c:v>1014.83</c:v>
+                </c:pt>
+                <c:pt idx="74">
+                  <c:v>1015.02</c:v>
+                </c:pt>
+                <c:pt idx="75">
+                  <c:v>1015.17</c:v>
+                </c:pt>
+                <c:pt idx="76">
+                  <c:v>1015.33</c:v>
+                </c:pt>
+                <c:pt idx="77">
+                  <c:v>1015.49</c:v>
+                </c:pt>
+                <c:pt idx="78">
+                  <c:v>1015.66</c:v>
+                </c:pt>
+                <c:pt idx="79">
+                  <c:v>1015.86</c:v>
+                </c:pt>
+                <c:pt idx="80">
+                  <c:v>1016.07</c:v>
+                </c:pt>
+                <c:pt idx="81">
+                  <c:v>1016.28</c:v>
+                </c:pt>
+                <c:pt idx="82">
+                  <c:v>1016.44</c:v>
+                </c:pt>
+                <c:pt idx="83">
+                  <c:v>1016.58</c:v>
                 </c:pt>
               </c:numCache>
             </c:numRef>
@@ -303,20 +783,260 @@
           </c:marker>
           <c:cat>
             <c:multiLvlStrRef>
-              <c:f>Sheet1!$A$2:$A$5</c:f>
+              <c:f>Sheet1!$A$2:$A$85</c:f>
               <c:multiLvlStrCache>
-                <c:ptCount val="4"/>
+                <c:ptCount val="84"/>
                 <c:lvl>
                   <c:pt idx="0">
                     <c:v>Feb 2026</c:v>
                   </c:pt>
                   <c:pt idx="1">
+                    <c:v>Feb 2026</c:v>
+                  </c:pt>
+                  <c:pt idx="2">
+                    <c:v>Feb 2026</c:v>
+                  </c:pt>
+                  <c:pt idx="3">
+                    <c:v>Feb 2026</c:v>
+                  </c:pt>
+                  <c:pt idx="4">
+                    <c:v>Feb 2026</c:v>
+                  </c:pt>
+                  <c:pt idx="5">
+                    <c:v>Feb 2026</c:v>
+                  </c:pt>
+                  <c:pt idx="6">
+                    <c:v>Feb 2026</c:v>
+                  </c:pt>
+                  <c:pt idx="7">
+                    <c:v>Feb 2026</c:v>
+                  </c:pt>
+                  <c:pt idx="8">
+                    <c:v>Feb 2026</c:v>
+                  </c:pt>
+                  <c:pt idx="9">
+                    <c:v>Feb 2026</c:v>
+                  </c:pt>
+                  <c:pt idx="10">
+                    <c:v>Feb 2026</c:v>
+                  </c:pt>
+                  <c:pt idx="11">
+                    <c:v>Feb 2026</c:v>
+                  </c:pt>
+                  <c:pt idx="12">
+                    <c:v>Feb 2026</c:v>
+                  </c:pt>
+                  <c:pt idx="13">
+                    <c:v>Feb 2026</c:v>
+                  </c:pt>
+                  <c:pt idx="14">
+                    <c:v>Feb 2026</c:v>
+                  </c:pt>
+                  <c:pt idx="15">
+                    <c:v>Feb 2026</c:v>
+                  </c:pt>
+                  <c:pt idx="16">
+                    <c:v>Feb 2026</c:v>
+                  </c:pt>
+                  <c:pt idx="17">
+                    <c:v>Feb 2026</c:v>
+                  </c:pt>
+                  <c:pt idx="18">
                     <c:v>Mar 2026</c:v>
                   </c:pt>
-                  <c:pt idx="2">
+                  <c:pt idx="19">
+                    <c:v>Mar 2026</c:v>
+                  </c:pt>
+                  <c:pt idx="20">
+                    <c:v>Mar 2026</c:v>
+                  </c:pt>
+                  <c:pt idx="21">
+                    <c:v>Mar 2026</c:v>
+                  </c:pt>
+                  <c:pt idx="22">
+                    <c:v>Mar 2026</c:v>
+                  </c:pt>
+                  <c:pt idx="23">
+                    <c:v>Mar 2026</c:v>
+                  </c:pt>
+                  <c:pt idx="24">
+                    <c:v>Mar 2026</c:v>
+                  </c:pt>
+                  <c:pt idx="25">
+                    <c:v>Mar 2026</c:v>
+                  </c:pt>
+                  <c:pt idx="26">
+                    <c:v>Mar 2026</c:v>
+                  </c:pt>
+                  <c:pt idx="27">
+                    <c:v>Mar 2026</c:v>
+                  </c:pt>
+                  <c:pt idx="28">
+                    <c:v>Mar 2026</c:v>
+                  </c:pt>
+                  <c:pt idx="29">
+                    <c:v>Mar 2026</c:v>
+                  </c:pt>
+                  <c:pt idx="30">
+                    <c:v>Mar 2026</c:v>
+                  </c:pt>
+                  <c:pt idx="31">
+                    <c:v>Mar 2026</c:v>
+                  </c:pt>
+                  <c:pt idx="32">
+                    <c:v>Mar 2026</c:v>
+                  </c:pt>
+                  <c:pt idx="33">
+                    <c:v>Mar 2026</c:v>
+                  </c:pt>
+                  <c:pt idx="34">
+                    <c:v>Mar 2026</c:v>
+                  </c:pt>
+                  <c:pt idx="35">
+                    <c:v>Mar 2026</c:v>
+                  </c:pt>
+                  <c:pt idx="36">
+                    <c:v>Mar 2026</c:v>
+                  </c:pt>
+                  <c:pt idx="37">
+                    <c:v>Mar 2026</c:v>
+                  </c:pt>
+                  <c:pt idx="38">
+                    <c:v>Mar 2026</c:v>
+                  </c:pt>
+                  <c:pt idx="39">
+                    <c:v>Mar 2026</c:v>
+                  </c:pt>
+                  <c:pt idx="40">
+                    <c:v>Mar 2026</c:v>
+                  </c:pt>
+                  <c:pt idx="41">
+                    <c:v>Mar 2026</c:v>
+                  </c:pt>
+                  <c:pt idx="42">
+                    <c:v>Mar 2026</c:v>
+                  </c:pt>
+                  <c:pt idx="43">
+                    <c:v>Mar 2026</c:v>
+                  </c:pt>
+                  <c:pt idx="44">
+                    <c:v>Mar 2026</c:v>
+                  </c:pt>
+                  <c:pt idx="45">
+                    <c:v>Mar 2026</c:v>
+                  </c:pt>
+                  <c:pt idx="46">
+                    <c:v>Mar 2026</c:v>
+                  </c:pt>
+                  <c:pt idx="47">
+                    <c:v>Mar 2026</c:v>
+                  </c:pt>
+                  <c:pt idx="48">
+                    <c:v>Mar 2026</c:v>
+                  </c:pt>
+                  <c:pt idx="49">
                     <c:v>Apr 2026</c:v>
                   </c:pt>
-                  <c:pt idx="3">
+                  <c:pt idx="50">
+                    <c:v>Apr 2026</c:v>
+                  </c:pt>
+                  <c:pt idx="51">
+                    <c:v>Apr 2026</c:v>
+                  </c:pt>
+                  <c:pt idx="52">
+                    <c:v>Apr 2026</c:v>
+                  </c:pt>
+                  <c:pt idx="53">
+                    <c:v>Apr 2026</c:v>
+                  </c:pt>
+                  <c:pt idx="54">
+                    <c:v>Apr 2026</c:v>
+                  </c:pt>
+                  <c:pt idx="55">
+                    <c:v>Apr 2026</c:v>
+                  </c:pt>
+                  <c:pt idx="56">
+                    <c:v>Apr 2026</c:v>
+                  </c:pt>
+                  <c:pt idx="57">
+                    <c:v>Apr 2026</c:v>
+                  </c:pt>
+                  <c:pt idx="58">
+                    <c:v>Apr 2026</c:v>
+                  </c:pt>
+                  <c:pt idx="59">
+                    <c:v>Apr 2026</c:v>
+                  </c:pt>
+                  <c:pt idx="60">
+                    <c:v>Apr 2026</c:v>
+                  </c:pt>
+                  <c:pt idx="61">
+                    <c:v>Apr 2026</c:v>
+                  </c:pt>
+                  <c:pt idx="62">
+                    <c:v>Apr 2026</c:v>
+                  </c:pt>
+                  <c:pt idx="63">
+                    <c:v>Apr 2026</c:v>
+                  </c:pt>
+                  <c:pt idx="64">
+                    <c:v>Apr 2026</c:v>
+                  </c:pt>
+                  <c:pt idx="65">
+                    <c:v>Apr 2026</c:v>
+                  </c:pt>
+                  <c:pt idx="66">
+                    <c:v>Apr 2026</c:v>
+                  </c:pt>
+                  <c:pt idx="67">
+                    <c:v>Apr 2026</c:v>
+                  </c:pt>
+                  <c:pt idx="68">
+                    <c:v>Apr 2026</c:v>
+                  </c:pt>
+                  <c:pt idx="69">
+                    <c:v>Apr 2026</c:v>
+                  </c:pt>
+                  <c:pt idx="70">
+                    <c:v>Apr 2026</c:v>
+                  </c:pt>
+                  <c:pt idx="71">
+                    <c:v>Apr 2026</c:v>
+                  </c:pt>
+                  <c:pt idx="72">
+                    <c:v>Apr 2026</c:v>
+                  </c:pt>
+                  <c:pt idx="73">
+                    <c:v>Apr 2026</c:v>
+                  </c:pt>
+                  <c:pt idx="74">
+                    <c:v>Apr 2026</c:v>
+                  </c:pt>
+                  <c:pt idx="75">
+                    <c:v>Apr 2026</c:v>
+                  </c:pt>
+                  <c:pt idx="76">
+                    <c:v>Apr 2026</c:v>
+                  </c:pt>
+                  <c:pt idx="77">
+                    <c:v>Apr 2026</c:v>
+                  </c:pt>
+                  <c:pt idx="78">
+                    <c:v>Apr 2026</c:v>
+                  </c:pt>
+                  <c:pt idx="79">
+                    <c:v>May 2026</c:v>
+                  </c:pt>
+                  <c:pt idx="80">
+                    <c:v>May 2026</c:v>
+                  </c:pt>
+                  <c:pt idx="81">
+                    <c:v>May 2026</c:v>
+                  </c:pt>
+                  <c:pt idx="82">
+                    <c:v>May 2026</c:v>
+                  </c:pt>
+                  <c:pt idx="83">
                     <c:v>May 2026</c:v>
                   </c:pt>
                 </c:lvl>
@@ -325,15 +1045,18 @@
           </c:cat>
           <c:val>
             <c:numRef>
-              <c:f>Sheet1!$C$2:$C$5</c:f>
+              <c:f>Sheet1!$C$2:$C$85</c:f>
               <c:numCache>
                 <c:formatCode>General</c:formatCode>
-                <c:ptCount val="4"/>
+                <c:ptCount val="84"/>
                 <c:pt idx="0">
                   <c:v>1000</c:v>
                 </c:pt>
                 <c:pt idx="1">
-                  <c:v>1003.76</c:v>
+                  <c:v>1004.01</c:v>
+                </c:pt>
+                <c:pt idx="2">
+                  <c:v>1007.78</c:v>
                 </c:pt>
               </c:numCache>
             </c:numRef>
@@ -409,7 +1132,7 @@
         <c:auto val="1"/>
         <c:lblAlgn val="ctr"/>
         <c:noMultiLvlLbl val="1"/>
-        <c:tickLblSkip val="1"/>
+        <c:tickLblSkip val="10"/>
       </c:catAx>
       <c:valAx>
         <c:axId val="2094734552"/>
@@ -2855,7 +3578,7 @@
                 <a:ea typeface="Calibri" pitchFamily="34" charset="-122"/>
                 <a:cs typeface="Calibri" pitchFamily="34" charset="-120"/>
               </a:rPr>
-              <a:t>prueba 2 CLP</a:t>
+              <a:t>prueba CLP</a:t>
             </a:r>
             <a:endParaRPr lang="en-US" sz="800" dirty="0"/>
           </a:p>
@@ -3426,7 +4149,7 @@
                         <a:buNone/>
                       </a:pPr>
                       <a:r>
-                        <a:rPr lang="en-US" sz="750" b="1" dirty="0">
+                        <a:rPr lang="en-US" sz="750" dirty="0">
                           <a:solidFill>
                             <a:srgbClr val="000000"/>
                           </a:solidFill>
@@ -3434,7 +4157,7 @@
                           <a:ea typeface="Calibri" pitchFamily="34" charset="-122"/>
                           <a:cs typeface="Calibri" pitchFamily="34" charset="-120"/>
                         </a:rPr>
-                        <a:t>Fondo</a:t>
+                        <a:t>ICP (Benchmark)</a:t>
                       </a:r>
                       <a:endParaRPr lang="en-US" sz="750" dirty="0">
                         <a:latin typeface="Calibri" charset="0"/>
@@ -3502,7 +4225,7 @@
                           <a:ea typeface="Calibri" pitchFamily="34" charset="-122"/>
                           <a:cs typeface="Calibri" pitchFamily="34" charset="-120"/>
                         </a:rPr>
-                        <a:t>1,10%</a:t>
+                        <a:t>0,38%</a:t>
                       </a:r>
                       <a:endParaRPr lang="en-US" sz="750" dirty="0">
                         <a:latin typeface="Calibri" charset="0"/>
@@ -3561,6 +4284,17 @@
                       <a:pPr algn="ctr" indent="0" marL="0">
                         <a:buNone/>
                       </a:pPr>
+                      <a:r>
+                        <a:rPr lang="en-US" sz="750" dirty="0">
+                          <a:solidFill>
+                            <a:srgbClr val="333333"/>
+                          </a:solidFill>
+                          <a:latin typeface="Calibri" pitchFamily="34" charset="0"/>
+                          <a:ea typeface="Calibri" pitchFamily="34" charset="-122"/>
+                          <a:cs typeface="Calibri" pitchFamily="34" charset="-120"/>
+                        </a:rPr>
+                        <a:t>1,13%</a:t>
+                      </a:r>
                       <a:endParaRPr lang="en-US" sz="750" dirty="0">
                         <a:latin typeface="Calibri" charset="0"/>
                         <a:ea typeface="Calibri" charset="0"/>
@@ -3618,6 +4352,17 @@
                       <a:pPr algn="ctr" indent="0" marL="0">
                         <a:buNone/>
                       </a:pPr>
+                      <a:r>
+                        <a:rPr lang="en-US" sz="750" dirty="0">
+                          <a:solidFill>
+                            <a:srgbClr val="333333"/>
+                          </a:solidFill>
+                          <a:latin typeface="Calibri" pitchFamily="34" charset="0"/>
+                          <a:ea typeface="Calibri" pitchFamily="34" charset="-122"/>
+                          <a:cs typeface="Calibri" pitchFamily="34" charset="-120"/>
+                        </a:rPr>
+                        <a:t>2,34%</a:t>
+                      </a:r>
                       <a:endParaRPr lang="en-US" sz="750" dirty="0">
                         <a:latin typeface="Calibri" charset="0"/>
                         <a:ea typeface="Calibri" charset="0"/>
@@ -3675,6 +4420,17 @@
                       <a:pPr algn="ctr" indent="0" marL="0">
                         <a:buNone/>
                       </a:pPr>
+                      <a:r>
+                        <a:rPr lang="en-US" sz="750" dirty="0">
+                          <a:solidFill>
+                            <a:srgbClr val="333333"/>
+                          </a:solidFill>
+                          <a:latin typeface="Calibri" pitchFamily="34" charset="0"/>
+                          <a:ea typeface="Calibri" pitchFamily="34" charset="-122"/>
+                          <a:cs typeface="Calibri" pitchFamily="34" charset="-120"/>
+                        </a:rPr>
+                        <a:t>4,90%</a:t>
+                      </a:r>
                       <a:endParaRPr lang="en-US" sz="750" dirty="0">
                         <a:latin typeface="Calibri" charset="0"/>
                         <a:ea typeface="Calibri" charset="0"/>
@@ -3732,6 +4488,17 @@
                       <a:pPr algn="ctr" indent="0" marL="0">
                         <a:buNone/>
                       </a:pPr>
+                      <a:r>
+                        <a:rPr lang="en-US" sz="750" dirty="0">
+                          <a:solidFill>
+                            <a:srgbClr val="333333"/>
+                          </a:solidFill>
+                          <a:latin typeface="Calibri" pitchFamily="34" charset="0"/>
+                          <a:ea typeface="Calibri" pitchFamily="34" charset="-122"/>
+                          <a:cs typeface="Calibri" pitchFamily="34" charset="-120"/>
+                        </a:rPr>
+                        <a:t>1,13%</a:t>
+                      </a:r>
                       <a:endParaRPr lang="en-US" sz="750" dirty="0">
                         <a:latin typeface="Calibri" charset="0"/>
                         <a:ea typeface="Calibri" charset="0"/>
@@ -4155,7 +4922,7 @@
                           <a:ea typeface="Calibri" pitchFamily="34" charset="-122"/>
                           <a:cs typeface="Calibri" pitchFamily="34" charset="-120"/>
                         </a:rPr>
-                        <a:t>ICP</a:t>
+                        <a:t>FIP LIQUIDEZ TEMPORAL</a:t>
                       </a:r>
                       <a:endParaRPr lang="en-US" sz="750" dirty="0">
                         <a:latin typeface="Calibri" charset="0"/>
@@ -4223,8 +4990,179 @@
                           <a:ea typeface="Calibri" pitchFamily="34" charset="-122"/>
                           <a:cs typeface="Calibri" pitchFamily="34" charset="-120"/>
                         </a:rPr>
-                        <a:t>0,78%</a:t>
+                        <a:t>0,51%</a:t>
                       </a:r>
+                      <a:endParaRPr lang="en-US" sz="750" dirty="0">
+                        <a:latin typeface="Calibri" charset="0"/>
+                        <a:ea typeface="Calibri" charset="0"/>
+                        <a:cs typeface="Calibri" charset="0"/>
+                      </a:endParaRPr>
+                    </a:p>
+                  </a:txBody>
+                  <a:tcPr marL="91440" marR="91440" marT="45720" marB="45720">
+                    <a:lnL w="3810" cap="flat" cmpd="sng" algn="ctr">
+                      <a:solidFill>
+                        <a:srgbClr val="CCCCCC"/>
+                      </a:solidFill>
+                      <a:prstDash val="solid"/>
+                      <a:round/>
+                      <a:headEnd type="none" w="med" len="med"/>
+                      <a:tailEnd type="none" w="med" len="med"/>
+                    </a:lnL>
+                    <a:lnR w="3810" cap="flat" cmpd="sng" algn="ctr">
+                      <a:solidFill>
+                        <a:srgbClr val="CCCCCC"/>
+                      </a:solidFill>
+                      <a:prstDash val="solid"/>
+                      <a:round/>
+                      <a:headEnd type="none" w="med" len="med"/>
+                      <a:tailEnd type="none" w="med" len="med"/>
+                    </a:lnR>
+                    <a:lnT w="3810" cap="flat" cmpd="sng" algn="ctr">
+                      <a:solidFill>
+                        <a:srgbClr val="CCCCCC"/>
+                      </a:solidFill>
+                      <a:prstDash val="solid"/>
+                      <a:round/>
+                      <a:headEnd type="none" w="med" len="med"/>
+                      <a:tailEnd type="none" w="med" len="med"/>
+                    </a:lnT>
+                    <a:lnB w="3810" cap="flat" cmpd="sng" algn="ctr">
+                      <a:solidFill>
+                        <a:srgbClr val="CCCCCC"/>
+                      </a:solidFill>
+                      <a:prstDash val="solid"/>
+                      <a:round/>
+                      <a:headEnd type="none" w="med" len="med"/>
+                      <a:tailEnd type="none" w="med" len="med"/>
+                    </a:lnB>
+                    <a:solidFill>
+                      <a:srgbClr val="F9F9F9"/>
+                    </a:solidFill>
+                  </a:tcPr>
+                </a:tc>
+                <a:tc>
+                  <a:txBody>
+                    <a:bodyPr/>
+                    <a:lstStyle/>
+                    <a:p>
+                      <a:pPr algn="ctr" indent="0" marL="0">
+                        <a:buNone/>
+                      </a:pPr>
+                      <a:endParaRPr lang="en-US" sz="750" dirty="0">
+                        <a:latin typeface="Calibri" charset="0"/>
+                        <a:ea typeface="Calibri" charset="0"/>
+                        <a:cs typeface="Calibri" charset="0"/>
+                      </a:endParaRPr>
+                    </a:p>
+                  </a:txBody>
+                  <a:tcPr marL="91440" marR="91440" marT="45720" marB="45720">
+                    <a:lnL w="3810" cap="flat" cmpd="sng" algn="ctr">
+                      <a:solidFill>
+                        <a:srgbClr val="CCCCCC"/>
+                      </a:solidFill>
+                      <a:prstDash val="solid"/>
+                      <a:round/>
+                      <a:headEnd type="none" w="med" len="med"/>
+                      <a:tailEnd type="none" w="med" len="med"/>
+                    </a:lnL>
+                    <a:lnR w="3810" cap="flat" cmpd="sng" algn="ctr">
+                      <a:solidFill>
+                        <a:srgbClr val="CCCCCC"/>
+                      </a:solidFill>
+                      <a:prstDash val="solid"/>
+                      <a:round/>
+                      <a:headEnd type="none" w="med" len="med"/>
+                      <a:tailEnd type="none" w="med" len="med"/>
+                    </a:lnR>
+                    <a:lnT w="3810" cap="flat" cmpd="sng" algn="ctr">
+                      <a:solidFill>
+                        <a:srgbClr val="CCCCCC"/>
+                      </a:solidFill>
+                      <a:prstDash val="solid"/>
+                      <a:round/>
+                      <a:headEnd type="none" w="med" len="med"/>
+                      <a:tailEnd type="none" w="med" len="med"/>
+                    </a:lnT>
+                    <a:lnB w="3810" cap="flat" cmpd="sng" algn="ctr">
+                      <a:solidFill>
+                        <a:srgbClr val="CCCCCC"/>
+                      </a:solidFill>
+                      <a:prstDash val="solid"/>
+                      <a:round/>
+                      <a:headEnd type="none" w="med" len="med"/>
+                      <a:tailEnd type="none" w="med" len="med"/>
+                    </a:lnB>
+                    <a:solidFill>
+                      <a:srgbClr val="F9F9F9"/>
+                    </a:solidFill>
+                  </a:tcPr>
+                </a:tc>
+                <a:tc>
+                  <a:txBody>
+                    <a:bodyPr/>
+                    <a:lstStyle/>
+                    <a:p>
+                      <a:pPr algn="ctr" indent="0" marL="0">
+                        <a:buNone/>
+                      </a:pPr>
+                      <a:endParaRPr lang="en-US" sz="750" dirty="0">
+                        <a:latin typeface="Calibri" charset="0"/>
+                        <a:ea typeface="Calibri" charset="0"/>
+                        <a:cs typeface="Calibri" charset="0"/>
+                      </a:endParaRPr>
+                    </a:p>
+                  </a:txBody>
+                  <a:tcPr marL="91440" marR="91440" marT="45720" marB="45720">
+                    <a:lnL w="3810" cap="flat" cmpd="sng" algn="ctr">
+                      <a:solidFill>
+                        <a:srgbClr val="CCCCCC"/>
+                      </a:solidFill>
+                      <a:prstDash val="solid"/>
+                      <a:round/>
+                      <a:headEnd type="none" w="med" len="med"/>
+                      <a:tailEnd type="none" w="med" len="med"/>
+                    </a:lnL>
+                    <a:lnR w="3810" cap="flat" cmpd="sng" algn="ctr">
+                      <a:solidFill>
+                        <a:srgbClr val="CCCCCC"/>
+                      </a:solidFill>
+                      <a:prstDash val="solid"/>
+                      <a:round/>
+                      <a:headEnd type="none" w="med" len="med"/>
+                      <a:tailEnd type="none" w="med" len="med"/>
+                    </a:lnR>
+                    <a:lnT w="3810" cap="flat" cmpd="sng" algn="ctr">
+                      <a:solidFill>
+                        <a:srgbClr val="CCCCCC"/>
+                      </a:solidFill>
+                      <a:prstDash val="solid"/>
+                      <a:round/>
+                      <a:headEnd type="none" w="med" len="med"/>
+                      <a:tailEnd type="none" w="med" len="med"/>
+                    </a:lnT>
+                    <a:lnB w="3810" cap="flat" cmpd="sng" algn="ctr">
+                      <a:solidFill>
+                        <a:srgbClr val="CCCCCC"/>
+                      </a:solidFill>
+                      <a:prstDash val="solid"/>
+                      <a:round/>
+                      <a:headEnd type="none" w="med" len="med"/>
+                      <a:tailEnd type="none" w="med" len="med"/>
+                    </a:lnB>
+                    <a:solidFill>
+                      <a:srgbClr val="F9F9F9"/>
+                    </a:solidFill>
+                  </a:tcPr>
+                </a:tc>
+                <a:tc>
+                  <a:txBody>
+                    <a:bodyPr/>
+                    <a:lstStyle/>
+                    <a:p>
+                      <a:pPr algn="ctr" indent="0" marL="0">
+                        <a:buNone/>
+                      </a:pPr>
                       <a:endParaRPr lang="en-US" sz="750" dirty="0">
                         <a:latin typeface="Calibri" charset="0"/>
                         <a:ea typeface="Calibri" charset="0"/>
@@ -4291,211 +5229,7 @@
                           <a:ea typeface="Calibri" pitchFamily="34" charset="-122"/>
                           <a:cs typeface="Calibri" pitchFamily="34" charset="-120"/>
                         </a:rPr>
-                        <a:t>1,13%</a:t>
-                      </a:r>
-                      <a:endParaRPr lang="en-US" sz="750" dirty="0">
-                        <a:latin typeface="Calibri" charset="0"/>
-                        <a:ea typeface="Calibri" charset="0"/>
-                        <a:cs typeface="Calibri" charset="0"/>
-                      </a:endParaRPr>
-                    </a:p>
-                  </a:txBody>
-                  <a:tcPr marL="91440" marR="91440" marT="45720" marB="45720">
-                    <a:lnL w="3810" cap="flat" cmpd="sng" algn="ctr">
-                      <a:solidFill>
-                        <a:srgbClr val="CCCCCC"/>
-                      </a:solidFill>
-                      <a:prstDash val="solid"/>
-                      <a:round/>
-                      <a:headEnd type="none" w="med" len="med"/>
-                      <a:tailEnd type="none" w="med" len="med"/>
-                    </a:lnL>
-                    <a:lnR w="3810" cap="flat" cmpd="sng" algn="ctr">
-                      <a:solidFill>
-                        <a:srgbClr val="CCCCCC"/>
-                      </a:solidFill>
-                      <a:prstDash val="solid"/>
-                      <a:round/>
-                      <a:headEnd type="none" w="med" len="med"/>
-                      <a:tailEnd type="none" w="med" len="med"/>
-                    </a:lnR>
-                    <a:lnT w="3810" cap="flat" cmpd="sng" algn="ctr">
-                      <a:solidFill>
-                        <a:srgbClr val="CCCCCC"/>
-                      </a:solidFill>
-                      <a:prstDash val="solid"/>
-                      <a:round/>
-                      <a:headEnd type="none" w="med" len="med"/>
-                      <a:tailEnd type="none" w="med" len="med"/>
-                    </a:lnT>
-                    <a:lnB w="3810" cap="flat" cmpd="sng" algn="ctr">
-                      <a:solidFill>
-                        <a:srgbClr val="CCCCCC"/>
-                      </a:solidFill>
-                      <a:prstDash val="solid"/>
-                      <a:round/>
-                      <a:headEnd type="none" w="med" len="med"/>
-                      <a:tailEnd type="none" w="med" len="med"/>
-                    </a:lnB>
-                    <a:solidFill>
-                      <a:srgbClr val="F9F9F9"/>
-                    </a:solidFill>
-                  </a:tcPr>
-                </a:tc>
-                <a:tc>
-                  <a:txBody>
-                    <a:bodyPr/>
-                    <a:lstStyle/>
-                    <a:p>
-                      <a:pPr algn="ctr" indent="0" marL="0">
-                        <a:buNone/>
-                      </a:pPr>
-                      <a:r>
-                        <a:rPr lang="en-US" sz="750" dirty="0">
-                          <a:solidFill>
-                            <a:srgbClr val="333333"/>
-                          </a:solidFill>
-                          <a:latin typeface="Calibri" pitchFamily="34" charset="0"/>
-                          <a:ea typeface="Calibri" pitchFamily="34" charset="-122"/>
-                          <a:cs typeface="Calibri" pitchFamily="34" charset="-120"/>
-                        </a:rPr>
-                        <a:t>2,34%</a:t>
-                      </a:r>
-                      <a:endParaRPr lang="en-US" sz="750" dirty="0">
-                        <a:latin typeface="Calibri" charset="0"/>
-                        <a:ea typeface="Calibri" charset="0"/>
-                        <a:cs typeface="Calibri" charset="0"/>
-                      </a:endParaRPr>
-                    </a:p>
-                  </a:txBody>
-                  <a:tcPr marL="91440" marR="91440" marT="45720" marB="45720">
-                    <a:lnL w="3810" cap="flat" cmpd="sng" algn="ctr">
-                      <a:solidFill>
-                        <a:srgbClr val="CCCCCC"/>
-                      </a:solidFill>
-                      <a:prstDash val="solid"/>
-                      <a:round/>
-                      <a:headEnd type="none" w="med" len="med"/>
-                      <a:tailEnd type="none" w="med" len="med"/>
-                    </a:lnL>
-                    <a:lnR w="3810" cap="flat" cmpd="sng" algn="ctr">
-                      <a:solidFill>
-                        <a:srgbClr val="CCCCCC"/>
-                      </a:solidFill>
-                      <a:prstDash val="solid"/>
-                      <a:round/>
-                      <a:headEnd type="none" w="med" len="med"/>
-                      <a:tailEnd type="none" w="med" len="med"/>
-                    </a:lnR>
-                    <a:lnT w="3810" cap="flat" cmpd="sng" algn="ctr">
-                      <a:solidFill>
-                        <a:srgbClr val="CCCCCC"/>
-                      </a:solidFill>
-                      <a:prstDash val="solid"/>
-                      <a:round/>
-                      <a:headEnd type="none" w="med" len="med"/>
-                      <a:tailEnd type="none" w="med" len="med"/>
-                    </a:lnT>
-                    <a:lnB w="3810" cap="flat" cmpd="sng" algn="ctr">
-                      <a:solidFill>
-                        <a:srgbClr val="CCCCCC"/>
-                      </a:solidFill>
-                      <a:prstDash val="solid"/>
-                      <a:round/>
-                      <a:headEnd type="none" w="med" len="med"/>
-                      <a:tailEnd type="none" w="med" len="med"/>
-                    </a:lnB>
-                    <a:solidFill>
-                      <a:srgbClr val="F9F9F9"/>
-                    </a:solidFill>
-                  </a:tcPr>
-                </a:tc>
-                <a:tc>
-                  <a:txBody>
-                    <a:bodyPr/>
-                    <a:lstStyle/>
-                    <a:p>
-                      <a:pPr algn="ctr" indent="0" marL="0">
-                        <a:buNone/>
-                      </a:pPr>
-                      <a:r>
-                        <a:rPr lang="en-US" sz="750" dirty="0">
-                          <a:solidFill>
-                            <a:srgbClr val="333333"/>
-                          </a:solidFill>
-                          <a:latin typeface="Calibri" pitchFamily="34" charset="0"/>
-                          <a:ea typeface="Calibri" pitchFamily="34" charset="-122"/>
-                          <a:cs typeface="Calibri" pitchFamily="34" charset="-120"/>
-                        </a:rPr>
-                        <a:t>4,90%</a:t>
-                      </a:r>
-                      <a:endParaRPr lang="en-US" sz="750" dirty="0">
-                        <a:latin typeface="Calibri" charset="0"/>
-                        <a:ea typeface="Calibri" charset="0"/>
-                        <a:cs typeface="Calibri" charset="0"/>
-                      </a:endParaRPr>
-                    </a:p>
-                  </a:txBody>
-                  <a:tcPr marL="91440" marR="91440" marT="45720" marB="45720">
-                    <a:lnL w="3810" cap="flat" cmpd="sng" algn="ctr">
-                      <a:solidFill>
-                        <a:srgbClr val="CCCCCC"/>
-                      </a:solidFill>
-                      <a:prstDash val="solid"/>
-                      <a:round/>
-                      <a:headEnd type="none" w="med" len="med"/>
-                      <a:tailEnd type="none" w="med" len="med"/>
-                    </a:lnL>
-                    <a:lnR w="3810" cap="flat" cmpd="sng" algn="ctr">
-                      <a:solidFill>
-                        <a:srgbClr val="CCCCCC"/>
-                      </a:solidFill>
-                      <a:prstDash val="solid"/>
-                      <a:round/>
-                      <a:headEnd type="none" w="med" len="med"/>
-                      <a:tailEnd type="none" w="med" len="med"/>
-                    </a:lnR>
-                    <a:lnT w="3810" cap="flat" cmpd="sng" algn="ctr">
-                      <a:solidFill>
-                        <a:srgbClr val="CCCCCC"/>
-                      </a:solidFill>
-                      <a:prstDash val="solid"/>
-                      <a:round/>
-                      <a:headEnd type="none" w="med" len="med"/>
-                      <a:tailEnd type="none" w="med" len="med"/>
-                    </a:lnT>
-                    <a:lnB w="3810" cap="flat" cmpd="sng" algn="ctr">
-                      <a:solidFill>
-                        <a:srgbClr val="CCCCCC"/>
-                      </a:solidFill>
-                      <a:prstDash val="solid"/>
-                      <a:round/>
-                      <a:headEnd type="none" w="med" len="med"/>
-                      <a:tailEnd type="none" w="med" len="med"/>
-                    </a:lnB>
-                    <a:solidFill>
-                      <a:srgbClr val="F9F9F9"/>
-                    </a:solidFill>
-                  </a:tcPr>
-                </a:tc>
-                <a:tc>
-                  <a:txBody>
-                    <a:bodyPr/>
-                    <a:lstStyle/>
-                    <a:p>
-                      <a:pPr algn="ctr" indent="0" marL="0">
-                        <a:buNone/>
-                      </a:pPr>
-                      <a:r>
-                        <a:rPr lang="en-US" sz="750" dirty="0">
-                          <a:solidFill>
-                            <a:srgbClr val="333333"/>
-                          </a:solidFill>
-                          <a:latin typeface="Calibri" pitchFamily="34" charset="0"/>
-                          <a:ea typeface="Calibri" pitchFamily="34" charset="-122"/>
-                          <a:cs typeface="Calibri" pitchFamily="34" charset="-120"/>
-                        </a:rPr>
-                        <a:t>1,13%</a:t>
+                        <a:t>1,09%</a:t>
                       </a:r>
                       <a:endParaRPr lang="en-US" sz="750" dirty="0">
                         <a:latin typeface="Calibri" charset="0"/>
@@ -5668,7 +6402,7 @@
                           <a:ea typeface="Calibri" pitchFamily="34" charset="-122"/>
                           <a:cs typeface="Calibri" pitchFamily="34" charset="-120"/>
                         </a:rPr>
-                        <a:t>2025</a:t>
+                        <a:t>2024</a:t>
                       </a:r>
                       <a:endParaRPr lang="en-US" sz="580" dirty="0">
                         <a:latin typeface="Calibri" charset="0"/>
@@ -5843,6 +6577,17 @@
                       <a:pPr algn="ctr" indent="0" marL="0">
                         <a:buNone/>
                       </a:pPr>
+                      <a:r>
+                        <a:rPr lang="en-US" sz="580" dirty="0">
+                          <a:solidFill>
+                            <a:srgbClr val="666666"/>
+                          </a:solidFill>
+                          <a:latin typeface="Calibri" pitchFamily="34" charset="0"/>
+                          <a:ea typeface="Calibri" pitchFamily="34" charset="-122"/>
+                          <a:cs typeface="Calibri" pitchFamily="34" charset="-120"/>
+                        </a:rPr>
+                        <a:t>0,59%</a:t>
+                      </a:r>
                       <a:endParaRPr lang="en-US" sz="580" dirty="0">
                         <a:latin typeface="Calibri" charset="0"/>
                         <a:ea typeface="Calibri" charset="0"/>
@@ -5897,6 +6642,17 @@
                       <a:pPr algn="ctr" indent="0" marL="0">
                         <a:buNone/>
                       </a:pPr>
+                      <a:r>
+                        <a:rPr lang="en-US" sz="580" dirty="0">
+                          <a:solidFill>
+                            <a:srgbClr val="666666"/>
+                          </a:solidFill>
+                          <a:latin typeface="Calibri" pitchFamily="34" charset="0"/>
+                          <a:ea typeface="Calibri" pitchFamily="34" charset="-122"/>
+                          <a:cs typeface="Calibri" pitchFamily="34" charset="-120"/>
+                        </a:rPr>
+                        <a:t>0,57%</a:t>
+                      </a:r>
                       <a:endParaRPr lang="en-US" sz="580" dirty="0">
                         <a:latin typeface="Calibri" charset="0"/>
                         <a:ea typeface="Calibri" charset="0"/>
@@ -5951,6 +6707,2575 @@
                       <a:pPr algn="ctr" indent="0" marL="0">
                         <a:buNone/>
                       </a:pPr>
+                      <a:r>
+                        <a:rPr lang="en-US" sz="580" dirty="0">
+                          <a:solidFill>
+                            <a:srgbClr val="666666"/>
+                          </a:solidFill>
+                          <a:latin typeface="Calibri" pitchFamily="34" charset="0"/>
+                          <a:ea typeface="Calibri" pitchFamily="34" charset="-122"/>
+                          <a:cs typeface="Calibri" pitchFamily="34" charset="-120"/>
+                        </a:rPr>
+                        <a:t>0,61%</a:t>
+                      </a:r>
+                      <a:endParaRPr lang="en-US" sz="580" dirty="0">
+                        <a:latin typeface="Calibri" charset="0"/>
+                        <a:ea typeface="Calibri" charset="0"/>
+                        <a:cs typeface="Calibri" charset="0"/>
+                      </a:endParaRPr>
+                    </a:p>
+                  </a:txBody>
+                  <a:tcPr marL="91440" marR="91440" marT="45720" marB="45720">
+                    <a:lnL w="2540" cap="flat" cmpd="sng" algn="ctr">
+                      <a:solidFill>
+                        <a:srgbClr val="EEEEEE"/>
+                      </a:solidFill>
+                      <a:prstDash val="solid"/>
+                      <a:round/>
+                      <a:headEnd type="none" w="med" len="med"/>
+                      <a:tailEnd type="none" w="med" len="med"/>
+                    </a:lnL>
+                    <a:lnR w="2540" cap="flat" cmpd="sng" algn="ctr">
+                      <a:solidFill>
+                        <a:srgbClr val="EEEEEE"/>
+                      </a:solidFill>
+                      <a:prstDash val="solid"/>
+                      <a:round/>
+                      <a:headEnd type="none" w="med" len="med"/>
+                      <a:tailEnd type="none" w="med" len="med"/>
+                    </a:lnR>
+                    <a:lnT w="2540" cap="flat" cmpd="sng" algn="ctr">
+                      <a:solidFill>
+                        <a:srgbClr val="EEEEEE"/>
+                      </a:solidFill>
+                      <a:prstDash val="solid"/>
+                      <a:round/>
+                      <a:headEnd type="none" w="med" len="med"/>
+                      <a:tailEnd type="none" w="med" len="med"/>
+                    </a:lnT>
+                    <a:lnB w="2540" cap="flat" cmpd="sng" algn="ctr">
+                      <a:solidFill>
+                        <a:srgbClr val="EEEEEE"/>
+                      </a:solidFill>
+                      <a:prstDash val="solid"/>
+                      <a:round/>
+                      <a:headEnd type="none" w="med" len="med"/>
+                      <a:tailEnd type="none" w="med" len="med"/>
+                    </a:lnB>
+                  </a:tcPr>
+                </a:tc>
+                <a:tc>
+                  <a:txBody>
+                    <a:bodyPr/>
+                    <a:lstStyle/>
+                    <a:p>
+                      <a:pPr algn="ctr" indent="0" marL="0">
+                        <a:buNone/>
+                      </a:pPr>
+                      <a:r>
+                        <a:rPr lang="en-US" sz="580" dirty="0">
+                          <a:solidFill>
+                            <a:srgbClr val="666666"/>
+                          </a:solidFill>
+                          <a:latin typeface="Calibri" pitchFamily="34" charset="0"/>
+                          <a:ea typeface="Calibri" pitchFamily="34" charset="-122"/>
+                          <a:cs typeface="Calibri" pitchFamily="34" charset="-120"/>
+                        </a:rPr>
+                        <a:t>0,55%</a:t>
+                      </a:r>
+                      <a:endParaRPr lang="en-US" sz="580" dirty="0">
+                        <a:latin typeface="Calibri" charset="0"/>
+                        <a:ea typeface="Calibri" charset="0"/>
+                        <a:cs typeface="Calibri" charset="0"/>
+                      </a:endParaRPr>
+                    </a:p>
+                  </a:txBody>
+                  <a:tcPr marL="91440" marR="91440" marT="45720" marB="45720">
+                    <a:lnL w="2540" cap="flat" cmpd="sng" algn="ctr">
+                      <a:solidFill>
+                        <a:srgbClr val="EEEEEE"/>
+                      </a:solidFill>
+                      <a:prstDash val="solid"/>
+                      <a:round/>
+                      <a:headEnd type="none" w="med" len="med"/>
+                      <a:tailEnd type="none" w="med" len="med"/>
+                    </a:lnL>
+                    <a:lnR w="2540" cap="flat" cmpd="sng" algn="ctr">
+                      <a:solidFill>
+                        <a:srgbClr val="EEEEEE"/>
+                      </a:solidFill>
+                      <a:prstDash val="solid"/>
+                      <a:round/>
+                      <a:headEnd type="none" w="med" len="med"/>
+                      <a:tailEnd type="none" w="med" len="med"/>
+                    </a:lnR>
+                    <a:lnT w="2540" cap="flat" cmpd="sng" algn="ctr">
+                      <a:solidFill>
+                        <a:srgbClr val="EEEEEE"/>
+                      </a:solidFill>
+                      <a:prstDash val="solid"/>
+                      <a:round/>
+                      <a:headEnd type="none" w="med" len="med"/>
+                      <a:tailEnd type="none" w="med" len="med"/>
+                    </a:lnT>
+                    <a:lnB w="2540" cap="flat" cmpd="sng" algn="ctr">
+                      <a:solidFill>
+                        <a:srgbClr val="EEEEEE"/>
+                      </a:solidFill>
+                      <a:prstDash val="solid"/>
+                      <a:round/>
+                      <a:headEnd type="none" w="med" len="med"/>
+                      <a:tailEnd type="none" w="med" len="med"/>
+                    </a:lnB>
+                  </a:tcPr>
+                </a:tc>
+                <a:tc>
+                  <a:txBody>
+                    <a:bodyPr/>
+                    <a:lstStyle/>
+                    <a:p>
+                      <a:pPr algn="ctr" indent="0" marL="0">
+                        <a:buNone/>
+                      </a:pPr>
+                      <a:r>
+                        <a:rPr lang="en-US" sz="580" dirty="0">
+                          <a:solidFill>
+                            <a:srgbClr val="666666"/>
+                          </a:solidFill>
+                          <a:latin typeface="Calibri" pitchFamily="34" charset="0"/>
+                          <a:ea typeface="Calibri" pitchFamily="34" charset="-122"/>
+                          <a:cs typeface="Calibri" pitchFamily="34" charset="-120"/>
+                        </a:rPr>
+                        <a:t>0,46%</a:t>
+                      </a:r>
+                      <a:endParaRPr lang="en-US" sz="580" dirty="0">
+                        <a:latin typeface="Calibri" charset="0"/>
+                        <a:ea typeface="Calibri" charset="0"/>
+                        <a:cs typeface="Calibri" charset="0"/>
+                      </a:endParaRPr>
+                    </a:p>
+                  </a:txBody>
+                  <a:tcPr marL="91440" marR="91440" marT="45720" marB="45720">
+                    <a:lnL w="2540" cap="flat" cmpd="sng" algn="ctr">
+                      <a:solidFill>
+                        <a:srgbClr val="EEEEEE"/>
+                      </a:solidFill>
+                      <a:prstDash val="solid"/>
+                      <a:round/>
+                      <a:headEnd type="none" w="med" len="med"/>
+                      <a:tailEnd type="none" w="med" len="med"/>
+                    </a:lnL>
+                    <a:lnR w="2540" cap="flat" cmpd="sng" algn="ctr">
+                      <a:solidFill>
+                        <a:srgbClr val="EEEEEE"/>
+                      </a:solidFill>
+                      <a:prstDash val="solid"/>
+                      <a:round/>
+                      <a:headEnd type="none" w="med" len="med"/>
+                      <a:tailEnd type="none" w="med" len="med"/>
+                    </a:lnR>
+                    <a:lnT w="2540" cap="flat" cmpd="sng" algn="ctr">
+                      <a:solidFill>
+                        <a:srgbClr val="EEEEEE"/>
+                      </a:solidFill>
+                      <a:prstDash val="solid"/>
+                      <a:round/>
+                      <a:headEnd type="none" w="med" len="med"/>
+                      <a:tailEnd type="none" w="med" len="med"/>
+                    </a:lnT>
+                    <a:lnB w="2540" cap="flat" cmpd="sng" algn="ctr">
+                      <a:solidFill>
+                        <a:srgbClr val="EEEEEE"/>
+                      </a:solidFill>
+                      <a:prstDash val="solid"/>
+                      <a:round/>
+                      <a:headEnd type="none" w="med" len="med"/>
+                      <a:tailEnd type="none" w="med" len="med"/>
+                    </a:lnB>
+                  </a:tcPr>
+                </a:tc>
+                <a:tc>
+                  <a:txBody>
+                    <a:bodyPr/>
+                    <a:lstStyle/>
+                    <a:p>
+                      <a:pPr algn="ctr" indent="0" marL="0">
+                        <a:buNone/>
+                      </a:pPr>
+                      <a:r>
+                        <a:rPr lang="en-US" sz="580" dirty="0">
+                          <a:solidFill>
+                            <a:srgbClr val="666666"/>
+                          </a:solidFill>
+                          <a:latin typeface="Calibri" pitchFamily="34" charset="0"/>
+                          <a:ea typeface="Calibri" pitchFamily="34" charset="-122"/>
+                          <a:cs typeface="Calibri" pitchFamily="34" charset="-120"/>
+                        </a:rPr>
+                        <a:t>0,53%</a:t>
+                      </a:r>
+                      <a:endParaRPr lang="en-US" sz="580" dirty="0">
+                        <a:latin typeface="Calibri" charset="0"/>
+                        <a:ea typeface="Calibri" charset="0"/>
+                        <a:cs typeface="Calibri" charset="0"/>
+                      </a:endParaRPr>
+                    </a:p>
+                  </a:txBody>
+                  <a:tcPr marL="91440" marR="91440" marT="45720" marB="45720">
+                    <a:lnL w="2540" cap="flat" cmpd="sng" algn="ctr">
+                      <a:solidFill>
+                        <a:srgbClr val="EEEEEE"/>
+                      </a:solidFill>
+                      <a:prstDash val="solid"/>
+                      <a:round/>
+                      <a:headEnd type="none" w="med" len="med"/>
+                      <a:tailEnd type="none" w="med" len="med"/>
+                    </a:lnL>
+                    <a:lnR w="2540" cap="flat" cmpd="sng" algn="ctr">
+                      <a:solidFill>
+                        <a:srgbClr val="EEEEEE"/>
+                      </a:solidFill>
+                      <a:prstDash val="solid"/>
+                      <a:round/>
+                      <a:headEnd type="none" w="med" len="med"/>
+                      <a:tailEnd type="none" w="med" len="med"/>
+                    </a:lnR>
+                    <a:lnT w="2540" cap="flat" cmpd="sng" algn="ctr">
+                      <a:solidFill>
+                        <a:srgbClr val="EEEEEE"/>
+                      </a:solidFill>
+                      <a:prstDash val="solid"/>
+                      <a:round/>
+                      <a:headEnd type="none" w="med" len="med"/>
+                      <a:tailEnd type="none" w="med" len="med"/>
+                    </a:lnT>
+                    <a:lnB w="2540" cap="flat" cmpd="sng" algn="ctr">
+                      <a:solidFill>
+                        <a:srgbClr val="EEEEEE"/>
+                      </a:solidFill>
+                      <a:prstDash val="solid"/>
+                      <a:round/>
+                      <a:headEnd type="none" w="med" len="med"/>
+                      <a:tailEnd type="none" w="med" len="med"/>
+                    </a:lnB>
+                  </a:tcPr>
+                </a:tc>
+                <a:tc>
+                  <a:txBody>
+                    <a:bodyPr/>
+                    <a:lstStyle/>
+                    <a:p>
+                      <a:pPr algn="ctr" indent="0" marL="0">
+                        <a:buNone/>
+                      </a:pPr>
+                      <a:r>
+                        <a:rPr lang="en-US" sz="580" dirty="0">
+                          <a:solidFill>
+                            <a:srgbClr val="666666"/>
+                          </a:solidFill>
+                          <a:latin typeface="Calibri" pitchFamily="34" charset="0"/>
+                          <a:ea typeface="Calibri" pitchFamily="34" charset="-122"/>
+                          <a:cs typeface="Calibri" pitchFamily="34" charset="-120"/>
+                        </a:rPr>
+                        <a:t>0,48%</a:t>
+                      </a:r>
+                      <a:endParaRPr lang="en-US" sz="580" dirty="0">
+                        <a:latin typeface="Calibri" charset="0"/>
+                        <a:ea typeface="Calibri" charset="0"/>
+                        <a:cs typeface="Calibri" charset="0"/>
+                      </a:endParaRPr>
+                    </a:p>
+                  </a:txBody>
+                  <a:tcPr marL="91440" marR="91440" marT="45720" marB="45720">
+                    <a:lnL w="2540" cap="flat" cmpd="sng" algn="ctr">
+                      <a:solidFill>
+                        <a:srgbClr val="EEEEEE"/>
+                      </a:solidFill>
+                      <a:prstDash val="solid"/>
+                      <a:round/>
+                      <a:headEnd type="none" w="med" len="med"/>
+                      <a:tailEnd type="none" w="med" len="med"/>
+                    </a:lnL>
+                    <a:lnR w="2540" cap="flat" cmpd="sng" algn="ctr">
+                      <a:solidFill>
+                        <a:srgbClr val="EEEEEE"/>
+                      </a:solidFill>
+                      <a:prstDash val="solid"/>
+                      <a:round/>
+                      <a:headEnd type="none" w="med" len="med"/>
+                      <a:tailEnd type="none" w="med" len="med"/>
+                    </a:lnR>
+                    <a:lnT w="2540" cap="flat" cmpd="sng" algn="ctr">
+                      <a:solidFill>
+                        <a:srgbClr val="EEEEEE"/>
+                      </a:solidFill>
+                      <a:prstDash val="solid"/>
+                      <a:round/>
+                      <a:headEnd type="none" w="med" len="med"/>
+                      <a:tailEnd type="none" w="med" len="med"/>
+                    </a:lnT>
+                    <a:lnB w="2540" cap="flat" cmpd="sng" algn="ctr">
+                      <a:solidFill>
+                        <a:srgbClr val="EEEEEE"/>
+                      </a:solidFill>
+                      <a:prstDash val="solid"/>
+                      <a:round/>
+                      <a:headEnd type="none" w="med" len="med"/>
+                      <a:tailEnd type="none" w="med" len="med"/>
+                    </a:lnB>
+                  </a:tcPr>
+                </a:tc>
+                <a:tc>
+                  <a:txBody>
+                    <a:bodyPr/>
+                    <a:lstStyle/>
+                    <a:p>
+                      <a:pPr algn="ctr" indent="0" marL="0">
+                        <a:buNone/>
+                      </a:pPr>
+                      <a:r>
+                        <a:rPr lang="en-US" sz="580" dirty="0">
+                          <a:solidFill>
+                            <a:srgbClr val="666666"/>
+                          </a:solidFill>
+                          <a:latin typeface="Calibri" pitchFamily="34" charset="0"/>
+                          <a:ea typeface="Calibri" pitchFamily="34" charset="-122"/>
+                          <a:cs typeface="Calibri" pitchFamily="34" charset="-120"/>
+                        </a:rPr>
+                        <a:t>0,48%</a:t>
+                      </a:r>
+                      <a:endParaRPr lang="en-US" sz="580" dirty="0">
+                        <a:latin typeface="Calibri" charset="0"/>
+                        <a:ea typeface="Calibri" charset="0"/>
+                        <a:cs typeface="Calibri" charset="0"/>
+                      </a:endParaRPr>
+                    </a:p>
+                  </a:txBody>
+                  <a:tcPr marL="91440" marR="91440" marT="45720" marB="45720">
+                    <a:lnL w="2540" cap="flat" cmpd="sng" algn="ctr">
+                      <a:solidFill>
+                        <a:srgbClr val="EEEEEE"/>
+                      </a:solidFill>
+                      <a:prstDash val="solid"/>
+                      <a:round/>
+                      <a:headEnd type="none" w="med" len="med"/>
+                      <a:tailEnd type="none" w="med" len="med"/>
+                    </a:lnL>
+                    <a:lnR w="2540" cap="flat" cmpd="sng" algn="ctr">
+                      <a:solidFill>
+                        <a:srgbClr val="EEEEEE"/>
+                      </a:solidFill>
+                      <a:prstDash val="solid"/>
+                      <a:round/>
+                      <a:headEnd type="none" w="med" len="med"/>
+                      <a:tailEnd type="none" w="med" len="med"/>
+                    </a:lnR>
+                    <a:lnT w="2540" cap="flat" cmpd="sng" algn="ctr">
+                      <a:solidFill>
+                        <a:srgbClr val="EEEEEE"/>
+                      </a:solidFill>
+                      <a:prstDash val="solid"/>
+                      <a:round/>
+                      <a:headEnd type="none" w="med" len="med"/>
+                      <a:tailEnd type="none" w="med" len="med"/>
+                    </a:lnT>
+                    <a:lnB w="2540" cap="flat" cmpd="sng" algn="ctr">
+                      <a:solidFill>
+                        <a:srgbClr val="EEEEEE"/>
+                      </a:solidFill>
+                      <a:prstDash val="solid"/>
+                      <a:round/>
+                      <a:headEnd type="none" w="med" len="med"/>
+                      <a:tailEnd type="none" w="med" len="med"/>
+                    </a:lnB>
+                  </a:tcPr>
+                </a:tc>
+                <a:tc>
+                  <a:txBody>
+                    <a:bodyPr/>
+                    <a:lstStyle/>
+                    <a:p>
+                      <a:pPr algn="ctr" indent="0" marL="0">
+                        <a:buNone/>
+                      </a:pPr>
+                      <a:r>
+                        <a:rPr lang="en-US" sz="580" dirty="0">
+                          <a:solidFill>
+                            <a:srgbClr val="666666"/>
+                          </a:solidFill>
+                          <a:latin typeface="Calibri" pitchFamily="34" charset="0"/>
+                          <a:ea typeface="Calibri" pitchFamily="34" charset="-122"/>
+                          <a:cs typeface="Calibri" pitchFamily="34" charset="-120"/>
+                        </a:rPr>
+                        <a:t>0,45%</a:t>
+                      </a:r>
+                      <a:endParaRPr lang="en-US" sz="580" dirty="0">
+                        <a:latin typeface="Calibri" charset="0"/>
+                        <a:ea typeface="Calibri" charset="0"/>
+                        <a:cs typeface="Calibri" charset="0"/>
+                      </a:endParaRPr>
+                    </a:p>
+                  </a:txBody>
+                  <a:tcPr marL="91440" marR="91440" marT="45720" marB="45720">
+                    <a:lnL w="2540" cap="flat" cmpd="sng" algn="ctr">
+                      <a:solidFill>
+                        <a:srgbClr val="EEEEEE"/>
+                      </a:solidFill>
+                      <a:prstDash val="solid"/>
+                      <a:round/>
+                      <a:headEnd type="none" w="med" len="med"/>
+                      <a:tailEnd type="none" w="med" len="med"/>
+                    </a:lnL>
+                    <a:lnR w="2540" cap="flat" cmpd="sng" algn="ctr">
+                      <a:solidFill>
+                        <a:srgbClr val="EEEEEE"/>
+                      </a:solidFill>
+                      <a:prstDash val="solid"/>
+                      <a:round/>
+                      <a:headEnd type="none" w="med" len="med"/>
+                      <a:tailEnd type="none" w="med" len="med"/>
+                    </a:lnR>
+                    <a:lnT w="2540" cap="flat" cmpd="sng" algn="ctr">
+                      <a:solidFill>
+                        <a:srgbClr val="EEEEEE"/>
+                      </a:solidFill>
+                      <a:prstDash val="solid"/>
+                      <a:round/>
+                      <a:headEnd type="none" w="med" len="med"/>
+                      <a:tailEnd type="none" w="med" len="med"/>
+                    </a:lnT>
+                    <a:lnB w="2540" cap="flat" cmpd="sng" algn="ctr">
+                      <a:solidFill>
+                        <a:srgbClr val="EEEEEE"/>
+                      </a:solidFill>
+                      <a:prstDash val="solid"/>
+                      <a:round/>
+                      <a:headEnd type="none" w="med" len="med"/>
+                      <a:tailEnd type="none" w="med" len="med"/>
+                    </a:lnB>
+                  </a:tcPr>
+                </a:tc>
+                <a:tc>
+                  <a:txBody>
+                    <a:bodyPr/>
+                    <a:lstStyle/>
+                    <a:p>
+                      <a:pPr algn="ctr" indent="0" marL="0">
+                        <a:buNone/>
+                      </a:pPr>
+                      <a:r>
+                        <a:rPr lang="en-US" sz="580" dirty="0">
+                          <a:solidFill>
+                            <a:srgbClr val="666666"/>
+                          </a:solidFill>
+                          <a:latin typeface="Calibri" pitchFamily="34" charset="0"/>
+                          <a:ea typeface="Calibri" pitchFamily="34" charset="-122"/>
+                          <a:cs typeface="Calibri" pitchFamily="34" charset="-120"/>
+                        </a:rPr>
+                        <a:t>0,44%</a:t>
+                      </a:r>
+                      <a:endParaRPr lang="en-US" sz="580" dirty="0">
+                        <a:latin typeface="Calibri" charset="0"/>
+                        <a:ea typeface="Calibri" charset="0"/>
+                        <a:cs typeface="Calibri" charset="0"/>
+                      </a:endParaRPr>
+                    </a:p>
+                  </a:txBody>
+                  <a:tcPr marL="91440" marR="91440" marT="45720" marB="45720">
+                    <a:lnL w="2540" cap="flat" cmpd="sng" algn="ctr">
+                      <a:solidFill>
+                        <a:srgbClr val="EEEEEE"/>
+                      </a:solidFill>
+                      <a:prstDash val="solid"/>
+                      <a:round/>
+                      <a:headEnd type="none" w="med" len="med"/>
+                      <a:tailEnd type="none" w="med" len="med"/>
+                    </a:lnL>
+                    <a:lnR w="2540" cap="flat" cmpd="sng" algn="ctr">
+                      <a:solidFill>
+                        <a:srgbClr val="EEEEEE"/>
+                      </a:solidFill>
+                      <a:prstDash val="solid"/>
+                      <a:round/>
+                      <a:headEnd type="none" w="med" len="med"/>
+                      <a:tailEnd type="none" w="med" len="med"/>
+                    </a:lnR>
+                    <a:lnT w="2540" cap="flat" cmpd="sng" algn="ctr">
+                      <a:solidFill>
+                        <a:srgbClr val="EEEEEE"/>
+                      </a:solidFill>
+                      <a:prstDash val="solid"/>
+                      <a:round/>
+                      <a:headEnd type="none" w="med" len="med"/>
+                      <a:tailEnd type="none" w="med" len="med"/>
+                    </a:lnT>
+                    <a:lnB w="2540" cap="flat" cmpd="sng" algn="ctr">
+                      <a:solidFill>
+                        <a:srgbClr val="EEEEEE"/>
+                      </a:solidFill>
+                      <a:prstDash val="solid"/>
+                      <a:round/>
+                      <a:headEnd type="none" w="med" len="med"/>
+                      <a:tailEnd type="none" w="med" len="med"/>
+                    </a:lnB>
+                  </a:tcPr>
+                </a:tc>
+                <a:tc>
+                  <a:txBody>
+                    <a:bodyPr/>
+                    <a:lstStyle/>
+                    <a:p>
+                      <a:pPr algn="ctr" indent="0" marL="0">
+                        <a:buNone/>
+                      </a:pPr>
+                      <a:r>
+                        <a:rPr lang="en-US" sz="580" dirty="0">
+                          <a:solidFill>
+                            <a:srgbClr val="666666"/>
+                          </a:solidFill>
+                          <a:latin typeface="Calibri" pitchFamily="34" charset="0"/>
+                          <a:ea typeface="Calibri" pitchFamily="34" charset="-122"/>
+                          <a:cs typeface="Calibri" pitchFamily="34" charset="-120"/>
+                        </a:rPr>
+                        <a:t>0,89%</a:t>
+                      </a:r>
+                      <a:endParaRPr lang="en-US" sz="580" dirty="0">
+                        <a:latin typeface="Calibri" charset="0"/>
+                        <a:ea typeface="Calibri" charset="0"/>
+                        <a:cs typeface="Calibri" charset="0"/>
+                      </a:endParaRPr>
+                    </a:p>
+                  </a:txBody>
+                  <a:tcPr marL="91440" marR="91440" marT="45720" marB="45720">
+                    <a:lnL w="2540" cap="flat" cmpd="sng" algn="ctr">
+                      <a:solidFill>
+                        <a:srgbClr val="EEEEEE"/>
+                      </a:solidFill>
+                      <a:prstDash val="solid"/>
+                      <a:round/>
+                      <a:headEnd type="none" w="med" len="med"/>
+                      <a:tailEnd type="none" w="med" len="med"/>
+                    </a:lnL>
+                    <a:lnR w="2540" cap="flat" cmpd="sng" algn="ctr">
+                      <a:solidFill>
+                        <a:srgbClr val="EEEEEE"/>
+                      </a:solidFill>
+                      <a:prstDash val="solid"/>
+                      <a:round/>
+                      <a:headEnd type="none" w="med" len="med"/>
+                      <a:tailEnd type="none" w="med" len="med"/>
+                    </a:lnR>
+                    <a:lnT w="2540" cap="flat" cmpd="sng" algn="ctr">
+                      <a:solidFill>
+                        <a:srgbClr val="EEEEEE"/>
+                      </a:solidFill>
+                      <a:prstDash val="solid"/>
+                      <a:round/>
+                      <a:headEnd type="none" w="med" len="med"/>
+                      <a:tailEnd type="none" w="med" len="med"/>
+                    </a:lnT>
+                    <a:lnB w="2540" cap="flat" cmpd="sng" algn="ctr">
+                      <a:solidFill>
+                        <a:srgbClr val="EEEEEE"/>
+                      </a:solidFill>
+                      <a:prstDash val="solid"/>
+                      <a:round/>
+                      <a:headEnd type="none" w="med" len="med"/>
+                      <a:tailEnd type="none" w="med" len="med"/>
+                    </a:lnB>
+                  </a:tcPr>
+                </a:tc>
+                <a:tc>
+                  <a:txBody>
+                    <a:bodyPr/>
+                    <a:lstStyle/>
+                    <a:p>
+                      <a:pPr algn="ctr" indent="0" marL="0">
+                        <a:buNone/>
+                      </a:pPr>
+                      <a:r>
+                        <a:rPr lang="en-US" sz="580" dirty="0">
+                          <a:solidFill>
+                            <a:srgbClr val="666666"/>
+                          </a:solidFill>
+                          <a:latin typeface="Calibri" pitchFamily="34" charset="0"/>
+                          <a:ea typeface="Calibri" pitchFamily="34" charset="-122"/>
+                          <a:cs typeface="Calibri" pitchFamily="34" charset="-120"/>
+                        </a:rPr>
+                        <a:t>6,21%</a:t>
+                      </a:r>
+                      <a:endParaRPr lang="en-US" sz="580" dirty="0">
+                        <a:latin typeface="Calibri" charset="0"/>
+                        <a:ea typeface="Calibri" charset="0"/>
+                        <a:cs typeface="Calibri" charset="0"/>
+                      </a:endParaRPr>
+                    </a:p>
+                  </a:txBody>
+                  <a:tcPr marL="91440" marR="91440" marT="45720" marB="45720">
+                    <a:lnL w="2540" cap="flat" cmpd="sng" algn="ctr">
+                      <a:solidFill>
+                        <a:srgbClr val="EEEEEE"/>
+                      </a:solidFill>
+                      <a:prstDash val="solid"/>
+                      <a:round/>
+                      <a:headEnd type="none" w="med" len="med"/>
+                      <a:tailEnd type="none" w="med" len="med"/>
+                    </a:lnL>
+                    <a:lnR w="2540" cap="flat" cmpd="sng" algn="ctr">
+                      <a:solidFill>
+                        <a:srgbClr val="EEEEEE"/>
+                      </a:solidFill>
+                      <a:prstDash val="solid"/>
+                      <a:round/>
+                      <a:headEnd type="none" w="med" len="med"/>
+                      <a:tailEnd type="none" w="med" len="med"/>
+                    </a:lnR>
+                    <a:lnT w="2540" cap="flat" cmpd="sng" algn="ctr">
+                      <a:solidFill>
+                        <a:srgbClr val="EEEEEE"/>
+                      </a:solidFill>
+                      <a:prstDash val="solid"/>
+                      <a:round/>
+                      <a:headEnd type="none" w="med" len="med"/>
+                      <a:tailEnd type="none" w="med" len="med"/>
+                    </a:lnT>
+                    <a:lnB w="2540" cap="flat" cmpd="sng" algn="ctr">
+                      <a:solidFill>
+                        <a:srgbClr val="EEEEEE"/>
+                      </a:solidFill>
+                      <a:prstDash val="solid"/>
+                      <a:round/>
+                      <a:headEnd type="none" w="med" len="med"/>
+                      <a:tailEnd type="none" w="med" len="med"/>
+                    </a:lnB>
+                  </a:tcPr>
+                </a:tc>
+              </a:tr>
+              <a:tr h="123444">
+                <a:tc>
+                  <a:txBody>
+                    <a:bodyPr/>
+                    <a:lstStyle/>
+                    <a:p>
+                      <a:pPr algn="l" indent="0" marL="0">
+                        <a:buNone/>
+                      </a:pPr>
+                      <a:endParaRPr lang="en-US" sz="580" dirty="0">
+                        <a:latin typeface="Calibri" charset="0"/>
+                        <a:ea typeface="Calibri" charset="0"/>
+                        <a:cs typeface="Calibri" charset="0"/>
+                      </a:endParaRPr>
+                    </a:p>
+                  </a:txBody>
+                  <a:tcPr marL="91440" marR="91440" marT="45720" marB="45720">
+                    <a:lnL w="2540" cap="flat" cmpd="sng" algn="ctr">
+                      <a:solidFill>
+                        <a:srgbClr val="EEEEEE"/>
+                      </a:solidFill>
+                      <a:prstDash val="solid"/>
+                      <a:round/>
+                      <a:headEnd type="none" w="med" len="med"/>
+                      <a:tailEnd type="none" w="med" len="med"/>
+                    </a:lnL>
+                    <a:lnR w="2540" cap="flat" cmpd="sng" algn="ctr">
+                      <a:solidFill>
+                        <a:srgbClr val="EEEEEE"/>
+                      </a:solidFill>
+                      <a:prstDash val="solid"/>
+                      <a:round/>
+                      <a:headEnd type="none" w="med" len="med"/>
+                      <a:tailEnd type="none" w="med" len="med"/>
+                    </a:lnR>
+                    <a:lnT w="2540" cap="flat" cmpd="sng" algn="ctr">
+                      <a:solidFill>
+                        <a:srgbClr val="EEEEEE"/>
+                      </a:solidFill>
+                      <a:prstDash val="solid"/>
+                      <a:round/>
+                      <a:headEnd type="none" w="med" len="med"/>
+                      <a:tailEnd type="none" w="med" len="med"/>
+                    </a:lnT>
+                    <a:lnB w="2540" cap="flat" cmpd="sng" algn="ctr">
+                      <a:solidFill>
+                        <a:srgbClr val="EEEEEE"/>
+                      </a:solidFill>
+                      <a:prstDash val="solid"/>
+                      <a:round/>
+                      <a:headEnd type="none" w="med" len="med"/>
+                      <a:tailEnd type="none" w="med" len="med"/>
+                    </a:lnB>
+                  </a:tcPr>
+                </a:tc>
+                <a:tc>
+                  <a:txBody>
+                    <a:bodyPr/>
+                    <a:lstStyle/>
+                    <a:p>
+                      <a:pPr algn="l" indent="0" marL="0">
+                        <a:buNone/>
+                      </a:pPr>
+                      <a:r>
+                        <a:rPr lang="en-US" sz="580" dirty="0">
+                          <a:solidFill>
+                            <a:srgbClr val="666666"/>
+                          </a:solidFill>
+                          <a:latin typeface="Calibri" pitchFamily="34" charset="0"/>
+                          <a:ea typeface="Calibri" pitchFamily="34" charset="-122"/>
+                          <a:cs typeface="Calibri" pitchFamily="34" charset="-120"/>
+                        </a:rPr>
+                        <a:t>Competencia</a:t>
+                      </a:r>
+                      <a:endParaRPr lang="en-US" sz="580" dirty="0">
+                        <a:latin typeface="Calibri" charset="0"/>
+                        <a:ea typeface="Calibri" charset="0"/>
+                        <a:cs typeface="Calibri" charset="0"/>
+                      </a:endParaRPr>
+                    </a:p>
+                  </a:txBody>
+                  <a:tcPr marL="91440" marR="91440" marT="45720" marB="45720">
+                    <a:lnL w="2540" cap="flat" cmpd="sng" algn="ctr">
+                      <a:solidFill>
+                        <a:srgbClr val="EEEEEE"/>
+                      </a:solidFill>
+                      <a:prstDash val="solid"/>
+                      <a:round/>
+                      <a:headEnd type="none" w="med" len="med"/>
+                      <a:tailEnd type="none" w="med" len="med"/>
+                    </a:lnL>
+                    <a:lnR w="2540" cap="flat" cmpd="sng" algn="ctr">
+                      <a:solidFill>
+                        <a:srgbClr val="EEEEEE"/>
+                      </a:solidFill>
+                      <a:prstDash val="solid"/>
+                      <a:round/>
+                      <a:headEnd type="none" w="med" len="med"/>
+                      <a:tailEnd type="none" w="med" len="med"/>
+                    </a:lnR>
+                    <a:lnT w="2540" cap="flat" cmpd="sng" algn="ctr">
+                      <a:solidFill>
+                        <a:srgbClr val="EEEEEE"/>
+                      </a:solidFill>
+                      <a:prstDash val="solid"/>
+                      <a:round/>
+                      <a:headEnd type="none" w="med" len="med"/>
+                      <a:tailEnd type="none" w="med" len="med"/>
+                    </a:lnT>
+                    <a:lnB w="2540" cap="flat" cmpd="sng" algn="ctr">
+                      <a:solidFill>
+                        <a:srgbClr val="EEEEEE"/>
+                      </a:solidFill>
+                      <a:prstDash val="solid"/>
+                      <a:round/>
+                      <a:headEnd type="none" w="med" len="med"/>
+                      <a:tailEnd type="none" w="med" len="med"/>
+                    </a:lnB>
+                  </a:tcPr>
+                </a:tc>
+                <a:tc>
+                  <a:txBody>
+                    <a:bodyPr/>
+                    <a:lstStyle/>
+                    <a:p>
+                      <a:pPr algn="ctr" indent="0" marL="0">
+                        <a:buNone/>
+                      </a:pPr>
+                      <a:endParaRPr lang="en-US" sz="580" dirty="0">
+                        <a:latin typeface="Calibri" charset="0"/>
+                        <a:ea typeface="Calibri" charset="0"/>
+                        <a:cs typeface="Calibri" charset="0"/>
+                      </a:endParaRPr>
+                    </a:p>
+                  </a:txBody>
+                  <a:tcPr marL="91440" marR="91440" marT="45720" marB="45720">
+                    <a:lnL w="2540" cap="flat" cmpd="sng" algn="ctr">
+                      <a:solidFill>
+                        <a:srgbClr val="EEEEEE"/>
+                      </a:solidFill>
+                      <a:prstDash val="solid"/>
+                      <a:round/>
+                      <a:headEnd type="none" w="med" len="med"/>
+                      <a:tailEnd type="none" w="med" len="med"/>
+                    </a:lnL>
+                    <a:lnR w="2540" cap="flat" cmpd="sng" algn="ctr">
+                      <a:solidFill>
+                        <a:srgbClr val="EEEEEE"/>
+                      </a:solidFill>
+                      <a:prstDash val="solid"/>
+                      <a:round/>
+                      <a:headEnd type="none" w="med" len="med"/>
+                      <a:tailEnd type="none" w="med" len="med"/>
+                    </a:lnR>
+                    <a:lnT w="2540" cap="flat" cmpd="sng" algn="ctr">
+                      <a:solidFill>
+                        <a:srgbClr val="EEEEEE"/>
+                      </a:solidFill>
+                      <a:prstDash val="solid"/>
+                      <a:round/>
+                      <a:headEnd type="none" w="med" len="med"/>
+                      <a:tailEnd type="none" w="med" len="med"/>
+                    </a:lnT>
+                    <a:lnB w="2540" cap="flat" cmpd="sng" algn="ctr">
+                      <a:solidFill>
+                        <a:srgbClr val="EEEEEE"/>
+                      </a:solidFill>
+                      <a:prstDash val="solid"/>
+                      <a:round/>
+                      <a:headEnd type="none" w="med" len="med"/>
+                      <a:tailEnd type="none" w="med" len="med"/>
+                    </a:lnB>
+                  </a:tcPr>
+                </a:tc>
+                <a:tc>
+                  <a:txBody>
+                    <a:bodyPr/>
+                    <a:lstStyle/>
+                    <a:p>
+                      <a:pPr algn="ctr" indent="0" marL="0">
+                        <a:buNone/>
+                      </a:pPr>
+                      <a:endParaRPr lang="en-US" sz="580" dirty="0">
+                        <a:latin typeface="Calibri" charset="0"/>
+                        <a:ea typeface="Calibri" charset="0"/>
+                        <a:cs typeface="Calibri" charset="0"/>
+                      </a:endParaRPr>
+                    </a:p>
+                  </a:txBody>
+                  <a:tcPr marL="91440" marR="91440" marT="45720" marB="45720">
+                    <a:lnL w="2540" cap="flat" cmpd="sng" algn="ctr">
+                      <a:solidFill>
+                        <a:srgbClr val="EEEEEE"/>
+                      </a:solidFill>
+                      <a:prstDash val="solid"/>
+                      <a:round/>
+                      <a:headEnd type="none" w="med" len="med"/>
+                      <a:tailEnd type="none" w="med" len="med"/>
+                    </a:lnL>
+                    <a:lnR w="2540" cap="flat" cmpd="sng" algn="ctr">
+                      <a:solidFill>
+                        <a:srgbClr val="EEEEEE"/>
+                      </a:solidFill>
+                      <a:prstDash val="solid"/>
+                      <a:round/>
+                      <a:headEnd type="none" w="med" len="med"/>
+                      <a:tailEnd type="none" w="med" len="med"/>
+                    </a:lnR>
+                    <a:lnT w="2540" cap="flat" cmpd="sng" algn="ctr">
+                      <a:solidFill>
+                        <a:srgbClr val="EEEEEE"/>
+                      </a:solidFill>
+                      <a:prstDash val="solid"/>
+                      <a:round/>
+                      <a:headEnd type="none" w="med" len="med"/>
+                      <a:tailEnd type="none" w="med" len="med"/>
+                    </a:lnT>
+                    <a:lnB w="2540" cap="flat" cmpd="sng" algn="ctr">
+                      <a:solidFill>
+                        <a:srgbClr val="EEEEEE"/>
+                      </a:solidFill>
+                      <a:prstDash val="solid"/>
+                      <a:round/>
+                      <a:headEnd type="none" w="med" len="med"/>
+                      <a:tailEnd type="none" w="med" len="med"/>
+                    </a:lnB>
+                  </a:tcPr>
+                </a:tc>
+                <a:tc>
+                  <a:txBody>
+                    <a:bodyPr/>
+                    <a:lstStyle/>
+                    <a:p>
+                      <a:pPr algn="ctr" indent="0" marL="0">
+                        <a:buNone/>
+                      </a:pPr>
+                      <a:endParaRPr lang="en-US" sz="580" dirty="0">
+                        <a:latin typeface="Calibri" charset="0"/>
+                        <a:ea typeface="Calibri" charset="0"/>
+                        <a:cs typeface="Calibri" charset="0"/>
+                      </a:endParaRPr>
+                    </a:p>
+                  </a:txBody>
+                  <a:tcPr marL="91440" marR="91440" marT="45720" marB="45720">
+                    <a:lnL w="2540" cap="flat" cmpd="sng" algn="ctr">
+                      <a:solidFill>
+                        <a:srgbClr val="EEEEEE"/>
+                      </a:solidFill>
+                      <a:prstDash val="solid"/>
+                      <a:round/>
+                      <a:headEnd type="none" w="med" len="med"/>
+                      <a:tailEnd type="none" w="med" len="med"/>
+                    </a:lnL>
+                    <a:lnR w="2540" cap="flat" cmpd="sng" algn="ctr">
+                      <a:solidFill>
+                        <a:srgbClr val="EEEEEE"/>
+                      </a:solidFill>
+                      <a:prstDash val="solid"/>
+                      <a:round/>
+                      <a:headEnd type="none" w="med" len="med"/>
+                      <a:tailEnd type="none" w="med" len="med"/>
+                    </a:lnR>
+                    <a:lnT w="2540" cap="flat" cmpd="sng" algn="ctr">
+                      <a:solidFill>
+                        <a:srgbClr val="EEEEEE"/>
+                      </a:solidFill>
+                      <a:prstDash val="solid"/>
+                      <a:round/>
+                      <a:headEnd type="none" w="med" len="med"/>
+                      <a:tailEnd type="none" w="med" len="med"/>
+                    </a:lnT>
+                    <a:lnB w="2540" cap="flat" cmpd="sng" algn="ctr">
+                      <a:solidFill>
+                        <a:srgbClr val="EEEEEE"/>
+                      </a:solidFill>
+                      <a:prstDash val="solid"/>
+                      <a:round/>
+                      <a:headEnd type="none" w="med" len="med"/>
+                      <a:tailEnd type="none" w="med" len="med"/>
+                    </a:lnB>
+                  </a:tcPr>
+                </a:tc>
+                <a:tc>
+                  <a:txBody>
+                    <a:bodyPr/>
+                    <a:lstStyle/>
+                    <a:p>
+                      <a:pPr algn="ctr" indent="0" marL="0">
+                        <a:buNone/>
+                      </a:pPr>
+                      <a:endParaRPr lang="en-US" sz="580" dirty="0">
+                        <a:latin typeface="Calibri" charset="0"/>
+                        <a:ea typeface="Calibri" charset="0"/>
+                        <a:cs typeface="Calibri" charset="0"/>
+                      </a:endParaRPr>
+                    </a:p>
+                  </a:txBody>
+                  <a:tcPr marL="91440" marR="91440" marT="45720" marB="45720">
+                    <a:lnL w="2540" cap="flat" cmpd="sng" algn="ctr">
+                      <a:solidFill>
+                        <a:srgbClr val="EEEEEE"/>
+                      </a:solidFill>
+                      <a:prstDash val="solid"/>
+                      <a:round/>
+                      <a:headEnd type="none" w="med" len="med"/>
+                      <a:tailEnd type="none" w="med" len="med"/>
+                    </a:lnL>
+                    <a:lnR w="2540" cap="flat" cmpd="sng" algn="ctr">
+                      <a:solidFill>
+                        <a:srgbClr val="EEEEEE"/>
+                      </a:solidFill>
+                      <a:prstDash val="solid"/>
+                      <a:round/>
+                      <a:headEnd type="none" w="med" len="med"/>
+                      <a:tailEnd type="none" w="med" len="med"/>
+                    </a:lnR>
+                    <a:lnT w="2540" cap="flat" cmpd="sng" algn="ctr">
+                      <a:solidFill>
+                        <a:srgbClr val="EEEEEE"/>
+                      </a:solidFill>
+                      <a:prstDash val="solid"/>
+                      <a:round/>
+                      <a:headEnd type="none" w="med" len="med"/>
+                      <a:tailEnd type="none" w="med" len="med"/>
+                    </a:lnT>
+                    <a:lnB w="2540" cap="flat" cmpd="sng" algn="ctr">
+                      <a:solidFill>
+                        <a:srgbClr val="EEEEEE"/>
+                      </a:solidFill>
+                      <a:prstDash val="solid"/>
+                      <a:round/>
+                      <a:headEnd type="none" w="med" len="med"/>
+                      <a:tailEnd type="none" w="med" len="med"/>
+                    </a:lnB>
+                  </a:tcPr>
+                </a:tc>
+                <a:tc>
+                  <a:txBody>
+                    <a:bodyPr/>
+                    <a:lstStyle/>
+                    <a:p>
+                      <a:pPr algn="ctr" indent="0" marL="0">
+                        <a:buNone/>
+                      </a:pPr>
+                      <a:endParaRPr lang="en-US" sz="580" dirty="0">
+                        <a:latin typeface="Calibri" charset="0"/>
+                        <a:ea typeface="Calibri" charset="0"/>
+                        <a:cs typeface="Calibri" charset="0"/>
+                      </a:endParaRPr>
+                    </a:p>
+                  </a:txBody>
+                  <a:tcPr marL="91440" marR="91440" marT="45720" marB="45720">
+                    <a:lnL w="2540" cap="flat" cmpd="sng" algn="ctr">
+                      <a:solidFill>
+                        <a:srgbClr val="EEEEEE"/>
+                      </a:solidFill>
+                      <a:prstDash val="solid"/>
+                      <a:round/>
+                      <a:headEnd type="none" w="med" len="med"/>
+                      <a:tailEnd type="none" w="med" len="med"/>
+                    </a:lnL>
+                    <a:lnR w="2540" cap="flat" cmpd="sng" algn="ctr">
+                      <a:solidFill>
+                        <a:srgbClr val="EEEEEE"/>
+                      </a:solidFill>
+                      <a:prstDash val="solid"/>
+                      <a:round/>
+                      <a:headEnd type="none" w="med" len="med"/>
+                      <a:tailEnd type="none" w="med" len="med"/>
+                    </a:lnR>
+                    <a:lnT w="2540" cap="flat" cmpd="sng" algn="ctr">
+                      <a:solidFill>
+                        <a:srgbClr val="EEEEEE"/>
+                      </a:solidFill>
+                      <a:prstDash val="solid"/>
+                      <a:round/>
+                      <a:headEnd type="none" w="med" len="med"/>
+                      <a:tailEnd type="none" w="med" len="med"/>
+                    </a:lnT>
+                    <a:lnB w="2540" cap="flat" cmpd="sng" algn="ctr">
+                      <a:solidFill>
+                        <a:srgbClr val="EEEEEE"/>
+                      </a:solidFill>
+                      <a:prstDash val="solid"/>
+                      <a:round/>
+                      <a:headEnd type="none" w="med" len="med"/>
+                      <a:tailEnd type="none" w="med" len="med"/>
+                    </a:lnB>
+                  </a:tcPr>
+                </a:tc>
+                <a:tc>
+                  <a:txBody>
+                    <a:bodyPr/>
+                    <a:lstStyle/>
+                    <a:p>
+                      <a:pPr algn="ctr" indent="0" marL="0">
+                        <a:buNone/>
+                      </a:pPr>
+                      <a:endParaRPr lang="en-US" sz="580" dirty="0">
+                        <a:latin typeface="Calibri" charset="0"/>
+                        <a:ea typeface="Calibri" charset="0"/>
+                        <a:cs typeface="Calibri" charset="0"/>
+                      </a:endParaRPr>
+                    </a:p>
+                  </a:txBody>
+                  <a:tcPr marL="91440" marR="91440" marT="45720" marB="45720">
+                    <a:lnL w="2540" cap="flat" cmpd="sng" algn="ctr">
+                      <a:solidFill>
+                        <a:srgbClr val="EEEEEE"/>
+                      </a:solidFill>
+                      <a:prstDash val="solid"/>
+                      <a:round/>
+                      <a:headEnd type="none" w="med" len="med"/>
+                      <a:tailEnd type="none" w="med" len="med"/>
+                    </a:lnL>
+                    <a:lnR w="2540" cap="flat" cmpd="sng" algn="ctr">
+                      <a:solidFill>
+                        <a:srgbClr val="EEEEEE"/>
+                      </a:solidFill>
+                      <a:prstDash val="solid"/>
+                      <a:round/>
+                      <a:headEnd type="none" w="med" len="med"/>
+                      <a:tailEnd type="none" w="med" len="med"/>
+                    </a:lnR>
+                    <a:lnT w="2540" cap="flat" cmpd="sng" algn="ctr">
+                      <a:solidFill>
+                        <a:srgbClr val="EEEEEE"/>
+                      </a:solidFill>
+                      <a:prstDash val="solid"/>
+                      <a:round/>
+                      <a:headEnd type="none" w="med" len="med"/>
+                      <a:tailEnd type="none" w="med" len="med"/>
+                    </a:lnT>
+                    <a:lnB w="2540" cap="flat" cmpd="sng" algn="ctr">
+                      <a:solidFill>
+                        <a:srgbClr val="EEEEEE"/>
+                      </a:solidFill>
+                      <a:prstDash val="solid"/>
+                      <a:round/>
+                      <a:headEnd type="none" w="med" len="med"/>
+                      <a:tailEnd type="none" w="med" len="med"/>
+                    </a:lnB>
+                  </a:tcPr>
+                </a:tc>
+                <a:tc>
+                  <a:txBody>
+                    <a:bodyPr/>
+                    <a:lstStyle/>
+                    <a:p>
+                      <a:pPr algn="ctr" indent="0" marL="0">
+                        <a:buNone/>
+                      </a:pPr>
+                      <a:endParaRPr lang="en-US" sz="580" dirty="0">
+                        <a:latin typeface="Calibri" charset="0"/>
+                        <a:ea typeface="Calibri" charset="0"/>
+                        <a:cs typeface="Calibri" charset="0"/>
+                      </a:endParaRPr>
+                    </a:p>
+                  </a:txBody>
+                  <a:tcPr marL="91440" marR="91440" marT="45720" marB="45720">
+                    <a:lnL w="2540" cap="flat" cmpd="sng" algn="ctr">
+                      <a:solidFill>
+                        <a:srgbClr val="EEEEEE"/>
+                      </a:solidFill>
+                      <a:prstDash val="solid"/>
+                      <a:round/>
+                      <a:headEnd type="none" w="med" len="med"/>
+                      <a:tailEnd type="none" w="med" len="med"/>
+                    </a:lnL>
+                    <a:lnR w="2540" cap="flat" cmpd="sng" algn="ctr">
+                      <a:solidFill>
+                        <a:srgbClr val="EEEEEE"/>
+                      </a:solidFill>
+                      <a:prstDash val="solid"/>
+                      <a:round/>
+                      <a:headEnd type="none" w="med" len="med"/>
+                      <a:tailEnd type="none" w="med" len="med"/>
+                    </a:lnR>
+                    <a:lnT w="2540" cap="flat" cmpd="sng" algn="ctr">
+                      <a:solidFill>
+                        <a:srgbClr val="EEEEEE"/>
+                      </a:solidFill>
+                      <a:prstDash val="solid"/>
+                      <a:round/>
+                      <a:headEnd type="none" w="med" len="med"/>
+                      <a:tailEnd type="none" w="med" len="med"/>
+                    </a:lnT>
+                    <a:lnB w="2540" cap="flat" cmpd="sng" algn="ctr">
+                      <a:solidFill>
+                        <a:srgbClr val="EEEEEE"/>
+                      </a:solidFill>
+                      <a:prstDash val="solid"/>
+                      <a:round/>
+                      <a:headEnd type="none" w="med" len="med"/>
+                      <a:tailEnd type="none" w="med" len="med"/>
+                    </a:lnB>
+                  </a:tcPr>
+                </a:tc>
+                <a:tc>
+                  <a:txBody>
+                    <a:bodyPr/>
+                    <a:lstStyle/>
+                    <a:p>
+                      <a:pPr algn="ctr" indent="0" marL="0">
+                        <a:buNone/>
+                      </a:pPr>
+                      <a:endParaRPr lang="en-US" sz="580" dirty="0">
+                        <a:latin typeface="Calibri" charset="0"/>
+                        <a:ea typeface="Calibri" charset="0"/>
+                        <a:cs typeface="Calibri" charset="0"/>
+                      </a:endParaRPr>
+                    </a:p>
+                  </a:txBody>
+                  <a:tcPr marL="91440" marR="91440" marT="45720" marB="45720">
+                    <a:lnL w="2540" cap="flat" cmpd="sng" algn="ctr">
+                      <a:solidFill>
+                        <a:srgbClr val="EEEEEE"/>
+                      </a:solidFill>
+                      <a:prstDash val="solid"/>
+                      <a:round/>
+                      <a:headEnd type="none" w="med" len="med"/>
+                      <a:tailEnd type="none" w="med" len="med"/>
+                    </a:lnL>
+                    <a:lnR w="2540" cap="flat" cmpd="sng" algn="ctr">
+                      <a:solidFill>
+                        <a:srgbClr val="EEEEEE"/>
+                      </a:solidFill>
+                      <a:prstDash val="solid"/>
+                      <a:round/>
+                      <a:headEnd type="none" w="med" len="med"/>
+                      <a:tailEnd type="none" w="med" len="med"/>
+                    </a:lnR>
+                    <a:lnT w="2540" cap="flat" cmpd="sng" algn="ctr">
+                      <a:solidFill>
+                        <a:srgbClr val="EEEEEE"/>
+                      </a:solidFill>
+                      <a:prstDash val="solid"/>
+                      <a:round/>
+                      <a:headEnd type="none" w="med" len="med"/>
+                      <a:tailEnd type="none" w="med" len="med"/>
+                    </a:lnT>
+                    <a:lnB w="2540" cap="flat" cmpd="sng" algn="ctr">
+                      <a:solidFill>
+                        <a:srgbClr val="EEEEEE"/>
+                      </a:solidFill>
+                      <a:prstDash val="solid"/>
+                      <a:round/>
+                      <a:headEnd type="none" w="med" len="med"/>
+                      <a:tailEnd type="none" w="med" len="med"/>
+                    </a:lnB>
+                  </a:tcPr>
+                </a:tc>
+                <a:tc>
+                  <a:txBody>
+                    <a:bodyPr/>
+                    <a:lstStyle/>
+                    <a:p>
+                      <a:pPr algn="ctr" indent="0" marL="0">
+                        <a:buNone/>
+                      </a:pPr>
+                      <a:endParaRPr lang="en-US" sz="580" dirty="0">
+                        <a:latin typeface="Calibri" charset="0"/>
+                        <a:ea typeface="Calibri" charset="0"/>
+                        <a:cs typeface="Calibri" charset="0"/>
+                      </a:endParaRPr>
+                    </a:p>
+                  </a:txBody>
+                  <a:tcPr marL="91440" marR="91440" marT="45720" marB="45720">
+                    <a:lnL w="2540" cap="flat" cmpd="sng" algn="ctr">
+                      <a:solidFill>
+                        <a:srgbClr val="EEEEEE"/>
+                      </a:solidFill>
+                      <a:prstDash val="solid"/>
+                      <a:round/>
+                      <a:headEnd type="none" w="med" len="med"/>
+                      <a:tailEnd type="none" w="med" len="med"/>
+                    </a:lnL>
+                    <a:lnR w="2540" cap="flat" cmpd="sng" algn="ctr">
+                      <a:solidFill>
+                        <a:srgbClr val="EEEEEE"/>
+                      </a:solidFill>
+                      <a:prstDash val="solid"/>
+                      <a:round/>
+                      <a:headEnd type="none" w="med" len="med"/>
+                      <a:tailEnd type="none" w="med" len="med"/>
+                    </a:lnR>
+                    <a:lnT w="2540" cap="flat" cmpd="sng" algn="ctr">
+                      <a:solidFill>
+                        <a:srgbClr val="EEEEEE"/>
+                      </a:solidFill>
+                      <a:prstDash val="solid"/>
+                      <a:round/>
+                      <a:headEnd type="none" w="med" len="med"/>
+                      <a:tailEnd type="none" w="med" len="med"/>
+                    </a:lnT>
+                    <a:lnB w="2540" cap="flat" cmpd="sng" algn="ctr">
+                      <a:solidFill>
+                        <a:srgbClr val="EEEEEE"/>
+                      </a:solidFill>
+                      <a:prstDash val="solid"/>
+                      <a:round/>
+                      <a:headEnd type="none" w="med" len="med"/>
+                      <a:tailEnd type="none" w="med" len="med"/>
+                    </a:lnB>
+                  </a:tcPr>
+                </a:tc>
+                <a:tc>
+                  <a:txBody>
+                    <a:bodyPr/>
+                    <a:lstStyle/>
+                    <a:p>
+                      <a:pPr algn="ctr" indent="0" marL="0">
+                        <a:buNone/>
+                      </a:pPr>
+                      <a:endParaRPr lang="en-US" sz="580" dirty="0">
+                        <a:latin typeface="Calibri" charset="0"/>
+                        <a:ea typeface="Calibri" charset="0"/>
+                        <a:cs typeface="Calibri" charset="0"/>
+                      </a:endParaRPr>
+                    </a:p>
+                  </a:txBody>
+                  <a:tcPr marL="91440" marR="91440" marT="45720" marB="45720">
+                    <a:lnL w="2540" cap="flat" cmpd="sng" algn="ctr">
+                      <a:solidFill>
+                        <a:srgbClr val="EEEEEE"/>
+                      </a:solidFill>
+                      <a:prstDash val="solid"/>
+                      <a:round/>
+                      <a:headEnd type="none" w="med" len="med"/>
+                      <a:tailEnd type="none" w="med" len="med"/>
+                    </a:lnL>
+                    <a:lnR w="2540" cap="flat" cmpd="sng" algn="ctr">
+                      <a:solidFill>
+                        <a:srgbClr val="EEEEEE"/>
+                      </a:solidFill>
+                      <a:prstDash val="solid"/>
+                      <a:round/>
+                      <a:headEnd type="none" w="med" len="med"/>
+                      <a:tailEnd type="none" w="med" len="med"/>
+                    </a:lnR>
+                    <a:lnT w="2540" cap="flat" cmpd="sng" algn="ctr">
+                      <a:solidFill>
+                        <a:srgbClr val="EEEEEE"/>
+                      </a:solidFill>
+                      <a:prstDash val="solid"/>
+                      <a:round/>
+                      <a:headEnd type="none" w="med" len="med"/>
+                      <a:tailEnd type="none" w="med" len="med"/>
+                    </a:lnT>
+                    <a:lnB w="2540" cap="flat" cmpd="sng" algn="ctr">
+                      <a:solidFill>
+                        <a:srgbClr val="EEEEEE"/>
+                      </a:solidFill>
+                      <a:prstDash val="solid"/>
+                      <a:round/>
+                      <a:headEnd type="none" w="med" len="med"/>
+                      <a:tailEnd type="none" w="med" len="med"/>
+                    </a:lnB>
+                  </a:tcPr>
+                </a:tc>
+                <a:tc>
+                  <a:txBody>
+                    <a:bodyPr/>
+                    <a:lstStyle/>
+                    <a:p>
+                      <a:pPr algn="ctr" indent="0" marL="0">
+                        <a:buNone/>
+                      </a:pPr>
+                      <a:endParaRPr lang="en-US" sz="580" dirty="0">
+                        <a:latin typeface="Calibri" charset="0"/>
+                        <a:ea typeface="Calibri" charset="0"/>
+                        <a:cs typeface="Calibri" charset="0"/>
+                      </a:endParaRPr>
+                    </a:p>
+                  </a:txBody>
+                  <a:tcPr marL="91440" marR="91440" marT="45720" marB="45720">
+                    <a:lnL w="2540" cap="flat" cmpd="sng" algn="ctr">
+                      <a:solidFill>
+                        <a:srgbClr val="EEEEEE"/>
+                      </a:solidFill>
+                      <a:prstDash val="solid"/>
+                      <a:round/>
+                      <a:headEnd type="none" w="med" len="med"/>
+                      <a:tailEnd type="none" w="med" len="med"/>
+                    </a:lnL>
+                    <a:lnR w="2540" cap="flat" cmpd="sng" algn="ctr">
+                      <a:solidFill>
+                        <a:srgbClr val="EEEEEE"/>
+                      </a:solidFill>
+                      <a:prstDash val="solid"/>
+                      <a:round/>
+                      <a:headEnd type="none" w="med" len="med"/>
+                      <a:tailEnd type="none" w="med" len="med"/>
+                    </a:lnR>
+                    <a:lnT w="2540" cap="flat" cmpd="sng" algn="ctr">
+                      <a:solidFill>
+                        <a:srgbClr val="EEEEEE"/>
+                      </a:solidFill>
+                      <a:prstDash val="solid"/>
+                      <a:round/>
+                      <a:headEnd type="none" w="med" len="med"/>
+                      <a:tailEnd type="none" w="med" len="med"/>
+                    </a:lnT>
+                    <a:lnB w="2540" cap="flat" cmpd="sng" algn="ctr">
+                      <a:solidFill>
+                        <a:srgbClr val="EEEEEE"/>
+                      </a:solidFill>
+                      <a:prstDash val="solid"/>
+                      <a:round/>
+                      <a:headEnd type="none" w="med" len="med"/>
+                      <a:tailEnd type="none" w="med" len="med"/>
+                    </a:lnB>
+                  </a:tcPr>
+                </a:tc>
+                <a:tc>
+                  <a:txBody>
+                    <a:bodyPr/>
+                    <a:lstStyle/>
+                    <a:p>
+                      <a:pPr algn="ctr" indent="0" marL="0">
+                        <a:buNone/>
+                      </a:pPr>
+                      <a:endParaRPr lang="en-US" sz="580" dirty="0">
+                        <a:latin typeface="Calibri" charset="0"/>
+                        <a:ea typeface="Calibri" charset="0"/>
+                        <a:cs typeface="Calibri" charset="0"/>
+                      </a:endParaRPr>
+                    </a:p>
+                  </a:txBody>
+                  <a:tcPr marL="91440" marR="91440" marT="45720" marB="45720">
+                    <a:lnL w="2540" cap="flat" cmpd="sng" algn="ctr">
+                      <a:solidFill>
+                        <a:srgbClr val="EEEEEE"/>
+                      </a:solidFill>
+                      <a:prstDash val="solid"/>
+                      <a:round/>
+                      <a:headEnd type="none" w="med" len="med"/>
+                      <a:tailEnd type="none" w="med" len="med"/>
+                    </a:lnL>
+                    <a:lnR w="2540" cap="flat" cmpd="sng" algn="ctr">
+                      <a:solidFill>
+                        <a:srgbClr val="EEEEEE"/>
+                      </a:solidFill>
+                      <a:prstDash val="solid"/>
+                      <a:round/>
+                      <a:headEnd type="none" w="med" len="med"/>
+                      <a:tailEnd type="none" w="med" len="med"/>
+                    </a:lnR>
+                    <a:lnT w="2540" cap="flat" cmpd="sng" algn="ctr">
+                      <a:solidFill>
+                        <a:srgbClr val="EEEEEE"/>
+                      </a:solidFill>
+                      <a:prstDash val="solid"/>
+                      <a:round/>
+                      <a:headEnd type="none" w="med" len="med"/>
+                      <a:tailEnd type="none" w="med" len="med"/>
+                    </a:lnT>
+                    <a:lnB w="2540" cap="flat" cmpd="sng" algn="ctr">
+                      <a:solidFill>
+                        <a:srgbClr val="EEEEEE"/>
+                      </a:solidFill>
+                      <a:prstDash val="solid"/>
+                      <a:round/>
+                      <a:headEnd type="none" w="med" len="med"/>
+                      <a:tailEnd type="none" w="med" len="med"/>
+                    </a:lnB>
+                  </a:tcPr>
+                </a:tc>
+                <a:tc>
+                  <a:txBody>
+                    <a:bodyPr/>
+                    <a:lstStyle/>
+                    <a:p>
+                      <a:pPr algn="ctr" indent="0" marL="0">
+                        <a:buNone/>
+                      </a:pPr>
+                      <a:endParaRPr lang="en-US" sz="580" dirty="0">
+                        <a:latin typeface="Calibri" charset="0"/>
+                        <a:ea typeface="Calibri" charset="0"/>
+                        <a:cs typeface="Calibri" charset="0"/>
+                      </a:endParaRPr>
+                    </a:p>
+                  </a:txBody>
+                  <a:tcPr marL="91440" marR="91440" marT="45720" marB="45720">
+                    <a:lnL w="2540" cap="flat" cmpd="sng" algn="ctr">
+                      <a:solidFill>
+                        <a:srgbClr val="EEEEEE"/>
+                      </a:solidFill>
+                      <a:prstDash val="solid"/>
+                      <a:round/>
+                      <a:headEnd type="none" w="med" len="med"/>
+                      <a:tailEnd type="none" w="med" len="med"/>
+                    </a:lnL>
+                    <a:lnR w="2540" cap="flat" cmpd="sng" algn="ctr">
+                      <a:solidFill>
+                        <a:srgbClr val="EEEEEE"/>
+                      </a:solidFill>
+                      <a:prstDash val="solid"/>
+                      <a:round/>
+                      <a:headEnd type="none" w="med" len="med"/>
+                      <a:tailEnd type="none" w="med" len="med"/>
+                    </a:lnR>
+                    <a:lnT w="2540" cap="flat" cmpd="sng" algn="ctr">
+                      <a:solidFill>
+                        <a:srgbClr val="EEEEEE"/>
+                      </a:solidFill>
+                      <a:prstDash val="solid"/>
+                      <a:round/>
+                      <a:headEnd type="none" w="med" len="med"/>
+                      <a:tailEnd type="none" w="med" len="med"/>
+                    </a:lnT>
+                    <a:lnB w="2540" cap="flat" cmpd="sng" algn="ctr">
+                      <a:solidFill>
+                        <a:srgbClr val="EEEEEE"/>
+                      </a:solidFill>
+                      <a:prstDash val="solid"/>
+                      <a:round/>
+                      <a:headEnd type="none" w="med" len="med"/>
+                      <a:tailEnd type="none" w="med" len="med"/>
+                    </a:lnB>
+                  </a:tcPr>
+                </a:tc>
+              </a:tr>
+              <a:tr h="123444">
+                <a:tc>
+                  <a:txBody>
+                    <a:bodyPr/>
+                    <a:lstStyle/>
+                    <a:p>
+                      <a:pPr algn="l" indent="0" marL="0">
+                        <a:buNone/>
+                      </a:pPr>
+                      <a:endParaRPr lang="en-US" sz="580" dirty="0">
+                        <a:latin typeface="Calibri" charset="0"/>
+                        <a:ea typeface="Calibri" charset="0"/>
+                        <a:cs typeface="Calibri" charset="0"/>
+                      </a:endParaRPr>
+                    </a:p>
+                  </a:txBody>
+                  <a:tcPr marL="91440" marR="91440" marT="45720" marB="45720">
+                    <a:lnL w="2540" cap="flat" cmpd="sng" algn="ctr">
+                      <a:solidFill>
+                        <a:srgbClr val="EEEEEE"/>
+                      </a:solidFill>
+                      <a:prstDash val="solid"/>
+                      <a:round/>
+                      <a:headEnd type="none" w="med" len="med"/>
+                      <a:tailEnd type="none" w="med" len="med"/>
+                    </a:lnL>
+                    <a:lnR w="2540" cap="flat" cmpd="sng" algn="ctr">
+                      <a:solidFill>
+                        <a:srgbClr val="EEEEEE"/>
+                      </a:solidFill>
+                      <a:prstDash val="solid"/>
+                      <a:round/>
+                      <a:headEnd type="none" w="med" len="med"/>
+                      <a:tailEnd type="none" w="med" len="med"/>
+                    </a:lnR>
+                    <a:lnT w="2540" cap="flat" cmpd="sng" algn="ctr">
+                      <a:solidFill>
+                        <a:srgbClr val="EEEEEE"/>
+                      </a:solidFill>
+                      <a:prstDash val="solid"/>
+                      <a:round/>
+                      <a:headEnd type="none" w="med" len="med"/>
+                      <a:tailEnd type="none" w="med" len="med"/>
+                    </a:lnT>
+                    <a:lnB w="2540" cap="flat" cmpd="sng" algn="ctr">
+                      <a:solidFill>
+                        <a:srgbClr val="EEEEEE"/>
+                      </a:solidFill>
+                      <a:prstDash val="solid"/>
+                      <a:round/>
+                      <a:headEnd type="none" w="med" len="med"/>
+                      <a:tailEnd type="none" w="med" len="med"/>
+                    </a:lnB>
+                  </a:tcPr>
+                </a:tc>
+                <a:tc>
+                  <a:txBody>
+                    <a:bodyPr/>
+                    <a:lstStyle/>
+                    <a:p>
+                      <a:pPr algn="l" indent="0" marL="0">
+                        <a:buNone/>
+                      </a:pPr>
+                      <a:r>
+                        <a:rPr lang="en-US" sz="580" b="1" dirty="0">
+                          <a:solidFill>
+                            <a:srgbClr val="000000"/>
+                          </a:solidFill>
+                          <a:latin typeface="Calibri" pitchFamily="34" charset="0"/>
+                          <a:ea typeface="Calibri" pitchFamily="34" charset="-122"/>
+                          <a:cs typeface="Calibri" pitchFamily="34" charset="-120"/>
+                        </a:rPr>
+                        <a:t>FIP LIQUIDEZ TEMPORAL</a:t>
+                      </a:r>
+                      <a:endParaRPr lang="en-US" sz="580" dirty="0">
+                        <a:latin typeface="Calibri" charset="0"/>
+                        <a:ea typeface="Calibri" charset="0"/>
+                        <a:cs typeface="Calibri" charset="0"/>
+                      </a:endParaRPr>
+                    </a:p>
+                  </a:txBody>
+                  <a:tcPr marL="91440" marR="91440" marT="45720" marB="45720">
+                    <a:lnL w="2540" cap="flat" cmpd="sng" algn="ctr">
+                      <a:solidFill>
+                        <a:srgbClr val="EEEEEE"/>
+                      </a:solidFill>
+                      <a:prstDash val="solid"/>
+                      <a:round/>
+                      <a:headEnd type="none" w="med" len="med"/>
+                      <a:tailEnd type="none" w="med" len="med"/>
+                    </a:lnL>
+                    <a:lnR w="2540" cap="flat" cmpd="sng" algn="ctr">
+                      <a:solidFill>
+                        <a:srgbClr val="EEEEEE"/>
+                      </a:solidFill>
+                      <a:prstDash val="solid"/>
+                      <a:round/>
+                      <a:headEnd type="none" w="med" len="med"/>
+                      <a:tailEnd type="none" w="med" len="med"/>
+                    </a:lnR>
+                    <a:lnT w="2540" cap="flat" cmpd="sng" algn="ctr">
+                      <a:solidFill>
+                        <a:srgbClr val="EEEEEE"/>
+                      </a:solidFill>
+                      <a:prstDash val="solid"/>
+                      <a:round/>
+                      <a:headEnd type="none" w="med" len="med"/>
+                      <a:tailEnd type="none" w="med" len="med"/>
+                    </a:lnT>
+                    <a:lnB w="2540" cap="flat" cmpd="sng" algn="ctr">
+                      <a:solidFill>
+                        <a:srgbClr val="EEEEEE"/>
+                      </a:solidFill>
+                      <a:prstDash val="solid"/>
+                      <a:round/>
+                      <a:headEnd type="none" w="med" len="med"/>
+                      <a:tailEnd type="none" w="med" len="med"/>
+                    </a:lnB>
+                  </a:tcPr>
+                </a:tc>
+                <a:tc>
+                  <a:txBody>
+                    <a:bodyPr/>
+                    <a:lstStyle/>
+                    <a:p>
+                      <a:pPr algn="ctr" indent="0" marL="0">
+                        <a:buNone/>
+                      </a:pPr>
+                      <a:endParaRPr lang="en-US" sz="580" dirty="0">
+                        <a:latin typeface="Calibri" charset="0"/>
+                        <a:ea typeface="Calibri" charset="0"/>
+                        <a:cs typeface="Calibri" charset="0"/>
+                      </a:endParaRPr>
+                    </a:p>
+                  </a:txBody>
+                  <a:tcPr marL="91440" marR="91440" marT="45720" marB="45720">
+                    <a:lnL w="2540" cap="flat" cmpd="sng" algn="ctr">
+                      <a:solidFill>
+                        <a:srgbClr val="EEEEEE"/>
+                      </a:solidFill>
+                      <a:prstDash val="solid"/>
+                      <a:round/>
+                      <a:headEnd type="none" w="med" len="med"/>
+                      <a:tailEnd type="none" w="med" len="med"/>
+                    </a:lnL>
+                    <a:lnR w="2540" cap="flat" cmpd="sng" algn="ctr">
+                      <a:solidFill>
+                        <a:srgbClr val="EEEEEE"/>
+                      </a:solidFill>
+                      <a:prstDash val="solid"/>
+                      <a:round/>
+                      <a:headEnd type="none" w="med" len="med"/>
+                      <a:tailEnd type="none" w="med" len="med"/>
+                    </a:lnR>
+                    <a:lnT w="2540" cap="flat" cmpd="sng" algn="ctr">
+                      <a:solidFill>
+                        <a:srgbClr val="EEEEEE"/>
+                      </a:solidFill>
+                      <a:prstDash val="solid"/>
+                      <a:round/>
+                      <a:headEnd type="none" w="med" len="med"/>
+                      <a:tailEnd type="none" w="med" len="med"/>
+                    </a:lnT>
+                    <a:lnB w="2540" cap="flat" cmpd="sng" algn="ctr">
+                      <a:solidFill>
+                        <a:srgbClr val="EEEEEE"/>
+                      </a:solidFill>
+                      <a:prstDash val="solid"/>
+                      <a:round/>
+                      <a:headEnd type="none" w="med" len="med"/>
+                      <a:tailEnd type="none" w="med" len="med"/>
+                    </a:lnB>
+                  </a:tcPr>
+                </a:tc>
+                <a:tc>
+                  <a:txBody>
+                    <a:bodyPr/>
+                    <a:lstStyle/>
+                    <a:p>
+                      <a:pPr algn="ctr" indent="0" marL="0">
+                        <a:buNone/>
+                      </a:pPr>
+                      <a:endParaRPr lang="en-US" sz="580" dirty="0">
+                        <a:latin typeface="Calibri" charset="0"/>
+                        <a:ea typeface="Calibri" charset="0"/>
+                        <a:cs typeface="Calibri" charset="0"/>
+                      </a:endParaRPr>
+                    </a:p>
+                  </a:txBody>
+                  <a:tcPr marL="91440" marR="91440" marT="45720" marB="45720">
+                    <a:lnL w="2540" cap="flat" cmpd="sng" algn="ctr">
+                      <a:solidFill>
+                        <a:srgbClr val="EEEEEE"/>
+                      </a:solidFill>
+                      <a:prstDash val="solid"/>
+                      <a:round/>
+                      <a:headEnd type="none" w="med" len="med"/>
+                      <a:tailEnd type="none" w="med" len="med"/>
+                    </a:lnL>
+                    <a:lnR w="2540" cap="flat" cmpd="sng" algn="ctr">
+                      <a:solidFill>
+                        <a:srgbClr val="EEEEEE"/>
+                      </a:solidFill>
+                      <a:prstDash val="solid"/>
+                      <a:round/>
+                      <a:headEnd type="none" w="med" len="med"/>
+                      <a:tailEnd type="none" w="med" len="med"/>
+                    </a:lnR>
+                    <a:lnT w="2540" cap="flat" cmpd="sng" algn="ctr">
+                      <a:solidFill>
+                        <a:srgbClr val="EEEEEE"/>
+                      </a:solidFill>
+                      <a:prstDash val="solid"/>
+                      <a:round/>
+                      <a:headEnd type="none" w="med" len="med"/>
+                      <a:tailEnd type="none" w="med" len="med"/>
+                    </a:lnT>
+                    <a:lnB w="2540" cap="flat" cmpd="sng" algn="ctr">
+                      <a:solidFill>
+                        <a:srgbClr val="EEEEEE"/>
+                      </a:solidFill>
+                      <a:prstDash val="solid"/>
+                      <a:round/>
+                      <a:headEnd type="none" w="med" len="med"/>
+                      <a:tailEnd type="none" w="med" len="med"/>
+                    </a:lnB>
+                  </a:tcPr>
+                </a:tc>
+                <a:tc>
+                  <a:txBody>
+                    <a:bodyPr/>
+                    <a:lstStyle/>
+                    <a:p>
+                      <a:pPr algn="ctr" indent="0" marL="0">
+                        <a:buNone/>
+                      </a:pPr>
+                      <a:endParaRPr lang="en-US" sz="580" dirty="0">
+                        <a:latin typeface="Calibri" charset="0"/>
+                        <a:ea typeface="Calibri" charset="0"/>
+                        <a:cs typeface="Calibri" charset="0"/>
+                      </a:endParaRPr>
+                    </a:p>
+                  </a:txBody>
+                  <a:tcPr marL="91440" marR="91440" marT="45720" marB="45720">
+                    <a:lnL w="2540" cap="flat" cmpd="sng" algn="ctr">
+                      <a:solidFill>
+                        <a:srgbClr val="EEEEEE"/>
+                      </a:solidFill>
+                      <a:prstDash val="solid"/>
+                      <a:round/>
+                      <a:headEnd type="none" w="med" len="med"/>
+                      <a:tailEnd type="none" w="med" len="med"/>
+                    </a:lnL>
+                    <a:lnR w="2540" cap="flat" cmpd="sng" algn="ctr">
+                      <a:solidFill>
+                        <a:srgbClr val="EEEEEE"/>
+                      </a:solidFill>
+                      <a:prstDash val="solid"/>
+                      <a:round/>
+                      <a:headEnd type="none" w="med" len="med"/>
+                      <a:tailEnd type="none" w="med" len="med"/>
+                    </a:lnR>
+                    <a:lnT w="2540" cap="flat" cmpd="sng" algn="ctr">
+                      <a:solidFill>
+                        <a:srgbClr val="EEEEEE"/>
+                      </a:solidFill>
+                      <a:prstDash val="solid"/>
+                      <a:round/>
+                      <a:headEnd type="none" w="med" len="med"/>
+                      <a:tailEnd type="none" w="med" len="med"/>
+                    </a:lnT>
+                    <a:lnB w="2540" cap="flat" cmpd="sng" algn="ctr">
+                      <a:solidFill>
+                        <a:srgbClr val="EEEEEE"/>
+                      </a:solidFill>
+                      <a:prstDash val="solid"/>
+                      <a:round/>
+                      <a:headEnd type="none" w="med" len="med"/>
+                      <a:tailEnd type="none" w="med" len="med"/>
+                    </a:lnB>
+                  </a:tcPr>
+                </a:tc>
+                <a:tc>
+                  <a:txBody>
+                    <a:bodyPr/>
+                    <a:lstStyle/>
+                    <a:p>
+                      <a:pPr algn="ctr" indent="0" marL="0">
+                        <a:buNone/>
+                      </a:pPr>
+                      <a:endParaRPr lang="en-US" sz="580" dirty="0">
+                        <a:latin typeface="Calibri" charset="0"/>
+                        <a:ea typeface="Calibri" charset="0"/>
+                        <a:cs typeface="Calibri" charset="0"/>
+                      </a:endParaRPr>
+                    </a:p>
+                  </a:txBody>
+                  <a:tcPr marL="91440" marR="91440" marT="45720" marB="45720">
+                    <a:lnL w="2540" cap="flat" cmpd="sng" algn="ctr">
+                      <a:solidFill>
+                        <a:srgbClr val="EEEEEE"/>
+                      </a:solidFill>
+                      <a:prstDash val="solid"/>
+                      <a:round/>
+                      <a:headEnd type="none" w="med" len="med"/>
+                      <a:tailEnd type="none" w="med" len="med"/>
+                    </a:lnL>
+                    <a:lnR w="2540" cap="flat" cmpd="sng" algn="ctr">
+                      <a:solidFill>
+                        <a:srgbClr val="EEEEEE"/>
+                      </a:solidFill>
+                      <a:prstDash val="solid"/>
+                      <a:round/>
+                      <a:headEnd type="none" w="med" len="med"/>
+                      <a:tailEnd type="none" w="med" len="med"/>
+                    </a:lnR>
+                    <a:lnT w="2540" cap="flat" cmpd="sng" algn="ctr">
+                      <a:solidFill>
+                        <a:srgbClr val="EEEEEE"/>
+                      </a:solidFill>
+                      <a:prstDash val="solid"/>
+                      <a:round/>
+                      <a:headEnd type="none" w="med" len="med"/>
+                      <a:tailEnd type="none" w="med" len="med"/>
+                    </a:lnT>
+                    <a:lnB w="2540" cap="flat" cmpd="sng" algn="ctr">
+                      <a:solidFill>
+                        <a:srgbClr val="EEEEEE"/>
+                      </a:solidFill>
+                      <a:prstDash val="solid"/>
+                      <a:round/>
+                      <a:headEnd type="none" w="med" len="med"/>
+                      <a:tailEnd type="none" w="med" len="med"/>
+                    </a:lnB>
+                  </a:tcPr>
+                </a:tc>
+                <a:tc>
+                  <a:txBody>
+                    <a:bodyPr/>
+                    <a:lstStyle/>
+                    <a:p>
+                      <a:pPr algn="ctr" indent="0" marL="0">
+                        <a:buNone/>
+                      </a:pPr>
+                      <a:endParaRPr lang="en-US" sz="580" dirty="0">
+                        <a:latin typeface="Calibri" charset="0"/>
+                        <a:ea typeface="Calibri" charset="0"/>
+                        <a:cs typeface="Calibri" charset="0"/>
+                      </a:endParaRPr>
+                    </a:p>
+                  </a:txBody>
+                  <a:tcPr marL="91440" marR="91440" marT="45720" marB="45720">
+                    <a:lnL w="2540" cap="flat" cmpd="sng" algn="ctr">
+                      <a:solidFill>
+                        <a:srgbClr val="EEEEEE"/>
+                      </a:solidFill>
+                      <a:prstDash val="solid"/>
+                      <a:round/>
+                      <a:headEnd type="none" w="med" len="med"/>
+                      <a:tailEnd type="none" w="med" len="med"/>
+                    </a:lnL>
+                    <a:lnR w="2540" cap="flat" cmpd="sng" algn="ctr">
+                      <a:solidFill>
+                        <a:srgbClr val="EEEEEE"/>
+                      </a:solidFill>
+                      <a:prstDash val="solid"/>
+                      <a:round/>
+                      <a:headEnd type="none" w="med" len="med"/>
+                      <a:tailEnd type="none" w="med" len="med"/>
+                    </a:lnR>
+                    <a:lnT w="2540" cap="flat" cmpd="sng" algn="ctr">
+                      <a:solidFill>
+                        <a:srgbClr val="EEEEEE"/>
+                      </a:solidFill>
+                      <a:prstDash val="solid"/>
+                      <a:round/>
+                      <a:headEnd type="none" w="med" len="med"/>
+                      <a:tailEnd type="none" w="med" len="med"/>
+                    </a:lnT>
+                    <a:lnB w="2540" cap="flat" cmpd="sng" algn="ctr">
+                      <a:solidFill>
+                        <a:srgbClr val="EEEEEE"/>
+                      </a:solidFill>
+                      <a:prstDash val="solid"/>
+                      <a:round/>
+                      <a:headEnd type="none" w="med" len="med"/>
+                      <a:tailEnd type="none" w="med" len="med"/>
+                    </a:lnB>
+                  </a:tcPr>
+                </a:tc>
+                <a:tc>
+                  <a:txBody>
+                    <a:bodyPr/>
+                    <a:lstStyle/>
+                    <a:p>
+                      <a:pPr algn="ctr" indent="0" marL="0">
+                        <a:buNone/>
+                      </a:pPr>
+                      <a:endParaRPr lang="en-US" sz="580" dirty="0">
+                        <a:latin typeface="Calibri" charset="0"/>
+                        <a:ea typeface="Calibri" charset="0"/>
+                        <a:cs typeface="Calibri" charset="0"/>
+                      </a:endParaRPr>
+                    </a:p>
+                  </a:txBody>
+                  <a:tcPr marL="91440" marR="91440" marT="45720" marB="45720">
+                    <a:lnL w="2540" cap="flat" cmpd="sng" algn="ctr">
+                      <a:solidFill>
+                        <a:srgbClr val="EEEEEE"/>
+                      </a:solidFill>
+                      <a:prstDash val="solid"/>
+                      <a:round/>
+                      <a:headEnd type="none" w="med" len="med"/>
+                      <a:tailEnd type="none" w="med" len="med"/>
+                    </a:lnL>
+                    <a:lnR w="2540" cap="flat" cmpd="sng" algn="ctr">
+                      <a:solidFill>
+                        <a:srgbClr val="EEEEEE"/>
+                      </a:solidFill>
+                      <a:prstDash val="solid"/>
+                      <a:round/>
+                      <a:headEnd type="none" w="med" len="med"/>
+                      <a:tailEnd type="none" w="med" len="med"/>
+                    </a:lnR>
+                    <a:lnT w="2540" cap="flat" cmpd="sng" algn="ctr">
+                      <a:solidFill>
+                        <a:srgbClr val="EEEEEE"/>
+                      </a:solidFill>
+                      <a:prstDash val="solid"/>
+                      <a:round/>
+                      <a:headEnd type="none" w="med" len="med"/>
+                      <a:tailEnd type="none" w="med" len="med"/>
+                    </a:lnT>
+                    <a:lnB w="2540" cap="flat" cmpd="sng" algn="ctr">
+                      <a:solidFill>
+                        <a:srgbClr val="EEEEEE"/>
+                      </a:solidFill>
+                      <a:prstDash val="solid"/>
+                      <a:round/>
+                      <a:headEnd type="none" w="med" len="med"/>
+                      <a:tailEnd type="none" w="med" len="med"/>
+                    </a:lnB>
+                  </a:tcPr>
+                </a:tc>
+                <a:tc>
+                  <a:txBody>
+                    <a:bodyPr/>
+                    <a:lstStyle/>
+                    <a:p>
+                      <a:pPr algn="ctr" indent="0" marL="0">
+                        <a:buNone/>
+                      </a:pPr>
+                      <a:endParaRPr lang="en-US" sz="580" dirty="0">
+                        <a:latin typeface="Calibri" charset="0"/>
+                        <a:ea typeface="Calibri" charset="0"/>
+                        <a:cs typeface="Calibri" charset="0"/>
+                      </a:endParaRPr>
+                    </a:p>
+                  </a:txBody>
+                  <a:tcPr marL="91440" marR="91440" marT="45720" marB="45720">
+                    <a:lnL w="2540" cap="flat" cmpd="sng" algn="ctr">
+                      <a:solidFill>
+                        <a:srgbClr val="EEEEEE"/>
+                      </a:solidFill>
+                      <a:prstDash val="solid"/>
+                      <a:round/>
+                      <a:headEnd type="none" w="med" len="med"/>
+                      <a:tailEnd type="none" w="med" len="med"/>
+                    </a:lnL>
+                    <a:lnR w="2540" cap="flat" cmpd="sng" algn="ctr">
+                      <a:solidFill>
+                        <a:srgbClr val="EEEEEE"/>
+                      </a:solidFill>
+                      <a:prstDash val="solid"/>
+                      <a:round/>
+                      <a:headEnd type="none" w="med" len="med"/>
+                      <a:tailEnd type="none" w="med" len="med"/>
+                    </a:lnR>
+                    <a:lnT w="2540" cap="flat" cmpd="sng" algn="ctr">
+                      <a:solidFill>
+                        <a:srgbClr val="EEEEEE"/>
+                      </a:solidFill>
+                      <a:prstDash val="solid"/>
+                      <a:round/>
+                      <a:headEnd type="none" w="med" len="med"/>
+                      <a:tailEnd type="none" w="med" len="med"/>
+                    </a:lnT>
+                    <a:lnB w="2540" cap="flat" cmpd="sng" algn="ctr">
+                      <a:solidFill>
+                        <a:srgbClr val="EEEEEE"/>
+                      </a:solidFill>
+                      <a:prstDash val="solid"/>
+                      <a:round/>
+                      <a:headEnd type="none" w="med" len="med"/>
+                      <a:tailEnd type="none" w="med" len="med"/>
+                    </a:lnB>
+                  </a:tcPr>
+                </a:tc>
+                <a:tc>
+                  <a:txBody>
+                    <a:bodyPr/>
+                    <a:lstStyle/>
+                    <a:p>
+                      <a:pPr algn="ctr" indent="0" marL="0">
+                        <a:buNone/>
+                      </a:pPr>
+                      <a:endParaRPr lang="en-US" sz="580" dirty="0">
+                        <a:latin typeface="Calibri" charset="0"/>
+                        <a:ea typeface="Calibri" charset="0"/>
+                        <a:cs typeface="Calibri" charset="0"/>
+                      </a:endParaRPr>
+                    </a:p>
+                  </a:txBody>
+                  <a:tcPr marL="91440" marR="91440" marT="45720" marB="45720">
+                    <a:lnL w="2540" cap="flat" cmpd="sng" algn="ctr">
+                      <a:solidFill>
+                        <a:srgbClr val="EEEEEE"/>
+                      </a:solidFill>
+                      <a:prstDash val="solid"/>
+                      <a:round/>
+                      <a:headEnd type="none" w="med" len="med"/>
+                      <a:tailEnd type="none" w="med" len="med"/>
+                    </a:lnL>
+                    <a:lnR w="2540" cap="flat" cmpd="sng" algn="ctr">
+                      <a:solidFill>
+                        <a:srgbClr val="EEEEEE"/>
+                      </a:solidFill>
+                      <a:prstDash val="solid"/>
+                      <a:round/>
+                      <a:headEnd type="none" w="med" len="med"/>
+                      <a:tailEnd type="none" w="med" len="med"/>
+                    </a:lnR>
+                    <a:lnT w="2540" cap="flat" cmpd="sng" algn="ctr">
+                      <a:solidFill>
+                        <a:srgbClr val="EEEEEE"/>
+                      </a:solidFill>
+                      <a:prstDash val="solid"/>
+                      <a:round/>
+                      <a:headEnd type="none" w="med" len="med"/>
+                      <a:tailEnd type="none" w="med" len="med"/>
+                    </a:lnT>
+                    <a:lnB w="2540" cap="flat" cmpd="sng" algn="ctr">
+                      <a:solidFill>
+                        <a:srgbClr val="EEEEEE"/>
+                      </a:solidFill>
+                      <a:prstDash val="solid"/>
+                      <a:round/>
+                      <a:headEnd type="none" w="med" len="med"/>
+                      <a:tailEnd type="none" w="med" len="med"/>
+                    </a:lnB>
+                  </a:tcPr>
+                </a:tc>
+                <a:tc>
+                  <a:txBody>
+                    <a:bodyPr/>
+                    <a:lstStyle/>
+                    <a:p>
+                      <a:pPr algn="ctr" indent="0" marL="0">
+                        <a:buNone/>
+                      </a:pPr>
+                      <a:endParaRPr lang="en-US" sz="580" dirty="0">
+                        <a:latin typeface="Calibri" charset="0"/>
+                        <a:ea typeface="Calibri" charset="0"/>
+                        <a:cs typeface="Calibri" charset="0"/>
+                      </a:endParaRPr>
+                    </a:p>
+                  </a:txBody>
+                  <a:tcPr marL="91440" marR="91440" marT="45720" marB="45720">
+                    <a:lnL w="2540" cap="flat" cmpd="sng" algn="ctr">
+                      <a:solidFill>
+                        <a:srgbClr val="EEEEEE"/>
+                      </a:solidFill>
+                      <a:prstDash val="solid"/>
+                      <a:round/>
+                      <a:headEnd type="none" w="med" len="med"/>
+                      <a:tailEnd type="none" w="med" len="med"/>
+                    </a:lnL>
+                    <a:lnR w="2540" cap="flat" cmpd="sng" algn="ctr">
+                      <a:solidFill>
+                        <a:srgbClr val="EEEEEE"/>
+                      </a:solidFill>
+                      <a:prstDash val="solid"/>
+                      <a:round/>
+                      <a:headEnd type="none" w="med" len="med"/>
+                      <a:tailEnd type="none" w="med" len="med"/>
+                    </a:lnR>
+                    <a:lnT w="2540" cap="flat" cmpd="sng" algn="ctr">
+                      <a:solidFill>
+                        <a:srgbClr val="EEEEEE"/>
+                      </a:solidFill>
+                      <a:prstDash val="solid"/>
+                      <a:round/>
+                      <a:headEnd type="none" w="med" len="med"/>
+                      <a:tailEnd type="none" w="med" len="med"/>
+                    </a:lnT>
+                    <a:lnB w="2540" cap="flat" cmpd="sng" algn="ctr">
+                      <a:solidFill>
+                        <a:srgbClr val="EEEEEE"/>
+                      </a:solidFill>
+                      <a:prstDash val="solid"/>
+                      <a:round/>
+                      <a:headEnd type="none" w="med" len="med"/>
+                      <a:tailEnd type="none" w="med" len="med"/>
+                    </a:lnB>
+                  </a:tcPr>
+                </a:tc>
+                <a:tc>
+                  <a:txBody>
+                    <a:bodyPr/>
+                    <a:lstStyle/>
+                    <a:p>
+                      <a:pPr algn="ctr" indent="0" marL="0">
+                        <a:buNone/>
+                      </a:pPr>
+                      <a:endParaRPr lang="en-US" sz="580" dirty="0">
+                        <a:latin typeface="Calibri" charset="0"/>
+                        <a:ea typeface="Calibri" charset="0"/>
+                        <a:cs typeface="Calibri" charset="0"/>
+                      </a:endParaRPr>
+                    </a:p>
+                  </a:txBody>
+                  <a:tcPr marL="91440" marR="91440" marT="45720" marB="45720">
+                    <a:lnL w="2540" cap="flat" cmpd="sng" algn="ctr">
+                      <a:solidFill>
+                        <a:srgbClr val="EEEEEE"/>
+                      </a:solidFill>
+                      <a:prstDash val="solid"/>
+                      <a:round/>
+                      <a:headEnd type="none" w="med" len="med"/>
+                      <a:tailEnd type="none" w="med" len="med"/>
+                    </a:lnL>
+                    <a:lnR w="2540" cap="flat" cmpd="sng" algn="ctr">
+                      <a:solidFill>
+                        <a:srgbClr val="EEEEEE"/>
+                      </a:solidFill>
+                      <a:prstDash val="solid"/>
+                      <a:round/>
+                      <a:headEnd type="none" w="med" len="med"/>
+                      <a:tailEnd type="none" w="med" len="med"/>
+                    </a:lnR>
+                    <a:lnT w="2540" cap="flat" cmpd="sng" algn="ctr">
+                      <a:solidFill>
+                        <a:srgbClr val="EEEEEE"/>
+                      </a:solidFill>
+                      <a:prstDash val="solid"/>
+                      <a:round/>
+                      <a:headEnd type="none" w="med" len="med"/>
+                      <a:tailEnd type="none" w="med" len="med"/>
+                    </a:lnT>
+                    <a:lnB w="2540" cap="flat" cmpd="sng" algn="ctr">
+                      <a:solidFill>
+                        <a:srgbClr val="EEEEEE"/>
+                      </a:solidFill>
+                      <a:prstDash val="solid"/>
+                      <a:round/>
+                      <a:headEnd type="none" w="med" len="med"/>
+                      <a:tailEnd type="none" w="med" len="med"/>
+                    </a:lnB>
+                  </a:tcPr>
+                </a:tc>
+                <a:tc>
+                  <a:txBody>
+                    <a:bodyPr/>
+                    <a:lstStyle/>
+                    <a:p>
+                      <a:pPr algn="ctr" indent="0" marL="0">
+                        <a:buNone/>
+                      </a:pPr>
+                      <a:endParaRPr lang="en-US" sz="580" dirty="0">
+                        <a:latin typeface="Calibri" charset="0"/>
+                        <a:ea typeface="Calibri" charset="0"/>
+                        <a:cs typeface="Calibri" charset="0"/>
+                      </a:endParaRPr>
+                    </a:p>
+                  </a:txBody>
+                  <a:tcPr marL="91440" marR="91440" marT="45720" marB="45720">
+                    <a:lnL w="2540" cap="flat" cmpd="sng" algn="ctr">
+                      <a:solidFill>
+                        <a:srgbClr val="EEEEEE"/>
+                      </a:solidFill>
+                      <a:prstDash val="solid"/>
+                      <a:round/>
+                      <a:headEnd type="none" w="med" len="med"/>
+                      <a:tailEnd type="none" w="med" len="med"/>
+                    </a:lnL>
+                    <a:lnR w="2540" cap="flat" cmpd="sng" algn="ctr">
+                      <a:solidFill>
+                        <a:srgbClr val="EEEEEE"/>
+                      </a:solidFill>
+                      <a:prstDash val="solid"/>
+                      <a:round/>
+                      <a:headEnd type="none" w="med" len="med"/>
+                      <a:tailEnd type="none" w="med" len="med"/>
+                    </a:lnR>
+                    <a:lnT w="2540" cap="flat" cmpd="sng" algn="ctr">
+                      <a:solidFill>
+                        <a:srgbClr val="EEEEEE"/>
+                      </a:solidFill>
+                      <a:prstDash val="solid"/>
+                      <a:round/>
+                      <a:headEnd type="none" w="med" len="med"/>
+                      <a:tailEnd type="none" w="med" len="med"/>
+                    </a:lnT>
+                    <a:lnB w="2540" cap="flat" cmpd="sng" algn="ctr">
+                      <a:solidFill>
+                        <a:srgbClr val="EEEEEE"/>
+                      </a:solidFill>
+                      <a:prstDash val="solid"/>
+                      <a:round/>
+                      <a:headEnd type="none" w="med" len="med"/>
+                      <a:tailEnd type="none" w="med" len="med"/>
+                    </a:lnB>
+                  </a:tcPr>
+                </a:tc>
+                <a:tc>
+                  <a:txBody>
+                    <a:bodyPr/>
+                    <a:lstStyle/>
+                    <a:p>
+                      <a:pPr algn="ctr" indent="0" marL="0">
+                        <a:buNone/>
+                      </a:pPr>
+                      <a:endParaRPr lang="en-US" sz="580" dirty="0">
+                        <a:latin typeface="Calibri" charset="0"/>
+                        <a:ea typeface="Calibri" charset="0"/>
+                        <a:cs typeface="Calibri" charset="0"/>
+                      </a:endParaRPr>
+                    </a:p>
+                  </a:txBody>
+                  <a:tcPr marL="91440" marR="91440" marT="45720" marB="45720">
+                    <a:lnL w="2540" cap="flat" cmpd="sng" algn="ctr">
+                      <a:solidFill>
+                        <a:srgbClr val="EEEEEE"/>
+                      </a:solidFill>
+                      <a:prstDash val="solid"/>
+                      <a:round/>
+                      <a:headEnd type="none" w="med" len="med"/>
+                      <a:tailEnd type="none" w="med" len="med"/>
+                    </a:lnL>
+                    <a:lnR w="2540" cap="flat" cmpd="sng" algn="ctr">
+                      <a:solidFill>
+                        <a:srgbClr val="EEEEEE"/>
+                      </a:solidFill>
+                      <a:prstDash val="solid"/>
+                      <a:round/>
+                      <a:headEnd type="none" w="med" len="med"/>
+                      <a:tailEnd type="none" w="med" len="med"/>
+                    </a:lnR>
+                    <a:lnT w="2540" cap="flat" cmpd="sng" algn="ctr">
+                      <a:solidFill>
+                        <a:srgbClr val="EEEEEE"/>
+                      </a:solidFill>
+                      <a:prstDash val="solid"/>
+                      <a:round/>
+                      <a:headEnd type="none" w="med" len="med"/>
+                      <a:tailEnd type="none" w="med" len="med"/>
+                    </a:lnT>
+                    <a:lnB w="2540" cap="flat" cmpd="sng" algn="ctr">
+                      <a:solidFill>
+                        <a:srgbClr val="EEEEEE"/>
+                      </a:solidFill>
+                      <a:prstDash val="solid"/>
+                      <a:round/>
+                      <a:headEnd type="none" w="med" len="med"/>
+                      <a:tailEnd type="none" w="med" len="med"/>
+                    </a:lnB>
+                  </a:tcPr>
+                </a:tc>
+                <a:tc>
+                  <a:txBody>
+                    <a:bodyPr/>
+                    <a:lstStyle/>
+                    <a:p>
+                      <a:pPr algn="ctr" indent="0" marL="0">
+                        <a:buNone/>
+                      </a:pPr>
+                      <a:endParaRPr lang="en-US" sz="580" dirty="0">
+                        <a:latin typeface="Calibri" charset="0"/>
+                        <a:ea typeface="Calibri" charset="0"/>
+                        <a:cs typeface="Calibri" charset="0"/>
+                      </a:endParaRPr>
+                    </a:p>
+                  </a:txBody>
+                  <a:tcPr marL="91440" marR="91440" marT="45720" marB="45720">
+                    <a:lnL w="2540" cap="flat" cmpd="sng" algn="ctr">
+                      <a:solidFill>
+                        <a:srgbClr val="EEEEEE"/>
+                      </a:solidFill>
+                      <a:prstDash val="solid"/>
+                      <a:round/>
+                      <a:headEnd type="none" w="med" len="med"/>
+                      <a:tailEnd type="none" w="med" len="med"/>
+                    </a:lnL>
+                    <a:lnR w="2540" cap="flat" cmpd="sng" algn="ctr">
+                      <a:solidFill>
+                        <a:srgbClr val="EEEEEE"/>
+                      </a:solidFill>
+                      <a:prstDash val="solid"/>
+                      <a:round/>
+                      <a:headEnd type="none" w="med" len="med"/>
+                      <a:tailEnd type="none" w="med" len="med"/>
+                    </a:lnR>
+                    <a:lnT w="2540" cap="flat" cmpd="sng" algn="ctr">
+                      <a:solidFill>
+                        <a:srgbClr val="EEEEEE"/>
+                      </a:solidFill>
+                      <a:prstDash val="solid"/>
+                      <a:round/>
+                      <a:headEnd type="none" w="med" len="med"/>
+                      <a:tailEnd type="none" w="med" len="med"/>
+                    </a:lnT>
+                    <a:lnB w="2540" cap="flat" cmpd="sng" algn="ctr">
+                      <a:solidFill>
+                        <a:srgbClr val="EEEEEE"/>
+                      </a:solidFill>
+                      <a:prstDash val="solid"/>
+                      <a:round/>
+                      <a:headEnd type="none" w="med" len="med"/>
+                      <a:tailEnd type="none" w="med" len="med"/>
+                    </a:lnB>
+                  </a:tcPr>
+                </a:tc>
+              </a:tr>
+              <a:tr h="123444">
+                <a:tc>
+                  <a:txBody>
+                    <a:bodyPr/>
+                    <a:lstStyle/>
+                    <a:p>
+                      <a:pPr algn="l" indent="0" marL="0">
+                        <a:buNone/>
+                      </a:pPr>
+                      <a:r>
+                        <a:rPr lang="en-US" sz="580" b="1" dirty="0">
+                          <a:solidFill>
+                            <a:srgbClr val="000000"/>
+                          </a:solidFill>
+                          <a:latin typeface="Calibri" pitchFamily="34" charset="0"/>
+                          <a:ea typeface="Calibri" pitchFamily="34" charset="-122"/>
+                          <a:cs typeface="Calibri" pitchFamily="34" charset="-120"/>
+                        </a:rPr>
+                        <a:t>2025</a:t>
+                      </a:r>
+                      <a:endParaRPr lang="en-US" sz="580" dirty="0">
+                        <a:latin typeface="Calibri" charset="0"/>
+                        <a:ea typeface="Calibri" charset="0"/>
+                        <a:cs typeface="Calibri" charset="0"/>
+                      </a:endParaRPr>
+                    </a:p>
+                  </a:txBody>
+                  <a:tcPr marL="91440" marR="91440" marT="45720" marB="45720">
+                    <a:lnL w="2540" cap="flat" cmpd="sng" algn="ctr">
+                      <a:solidFill>
+                        <a:srgbClr val="EEEEEE"/>
+                      </a:solidFill>
+                      <a:prstDash val="solid"/>
+                      <a:round/>
+                      <a:headEnd type="none" w="med" len="med"/>
+                      <a:tailEnd type="none" w="med" len="med"/>
+                    </a:lnL>
+                    <a:lnR w="2540" cap="flat" cmpd="sng" algn="ctr">
+                      <a:solidFill>
+                        <a:srgbClr val="EEEEEE"/>
+                      </a:solidFill>
+                      <a:prstDash val="solid"/>
+                      <a:round/>
+                      <a:headEnd type="none" w="med" len="med"/>
+                      <a:tailEnd type="none" w="med" len="med"/>
+                    </a:lnR>
+                    <a:lnT w="2540" cap="flat" cmpd="sng" algn="ctr">
+                      <a:solidFill>
+                        <a:srgbClr val="EEEEEE"/>
+                      </a:solidFill>
+                      <a:prstDash val="solid"/>
+                      <a:round/>
+                      <a:headEnd type="none" w="med" len="med"/>
+                      <a:tailEnd type="none" w="med" len="med"/>
+                    </a:lnT>
+                    <a:lnB w="2540" cap="flat" cmpd="sng" algn="ctr">
+                      <a:solidFill>
+                        <a:srgbClr val="EEEEEE"/>
+                      </a:solidFill>
+                      <a:prstDash val="solid"/>
+                      <a:round/>
+                      <a:headEnd type="none" w="med" len="med"/>
+                      <a:tailEnd type="none" w="med" len="med"/>
+                    </a:lnB>
+                  </a:tcPr>
+                </a:tc>
+                <a:tc>
+                  <a:txBody>
+                    <a:bodyPr/>
+                    <a:lstStyle/>
+                    <a:p>
+                      <a:pPr algn="l" indent="0" marL="0">
+                        <a:buNone/>
+                      </a:pPr>
+                      <a:r>
+                        <a:rPr lang="en-US" sz="580" dirty="0">
+                          <a:solidFill>
+                            <a:srgbClr val="666666"/>
+                          </a:solidFill>
+                          <a:latin typeface="Calibri" pitchFamily="34" charset="0"/>
+                          <a:ea typeface="Calibri" pitchFamily="34" charset="-122"/>
+                          <a:cs typeface="Calibri" pitchFamily="34" charset="-120"/>
+                        </a:rPr>
+                        <a:t>ICP</a:t>
+                      </a:r>
+                      <a:endParaRPr lang="en-US" sz="580" dirty="0">
+                        <a:latin typeface="Calibri" charset="0"/>
+                        <a:ea typeface="Calibri" charset="0"/>
+                        <a:cs typeface="Calibri" charset="0"/>
+                      </a:endParaRPr>
+                    </a:p>
+                  </a:txBody>
+                  <a:tcPr marL="91440" marR="91440" marT="45720" marB="45720">
+                    <a:lnL w="2540" cap="flat" cmpd="sng" algn="ctr">
+                      <a:solidFill>
+                        <a:srgbClr val="EEEEEE"/>
+                      </a:solidFill>
+                      <a:prstDash val="solid"/>
+                      <a:round/>
+                      <a:headEnd type="none" w="med" len="med"/>
+                      <a:tailEnd type="none" w="med" len="med"/>
+                    </a:lnL>
+                    <a:lnR w="2540" cap="flat" cmpd="sng" algn="ctr">
+                      <a:solidFill>
+                        <a:srgbClr val="EEEEEE"/>
+                      </a:solidFill>
+                      <a:prstDash val="solid"/>
+                      <a:round/>
+                      <a:headEnd type="none" w="med" len="med"/>
+                      <a:tailEnd type="none" w="med" len="med"/>
+                    </a:lnR>
+                    <a:lnT w="2540" cap="flat" cmpd="sng" algn="ctr">
+                      <a:solidFill>
+                        <a:srgbClr val="EEEEEE"/>
+                      </a:solidFill>
+                      <a:prstDash val="solid"/>
+                      <a:round/>
+                      <a:headEnd type="none" w="med" len="med"/>
+                      <a:tailEnd type="none" w="med" len="med"/>
+                    </a:lnT>
+                    <a:lnB w="2540" cap="flat" cmpd="sng" algn="ctr">
+                      <a:solidFill>
+                        <a:srgbClr val="EEEEEE"/>
+                      </a:solidFill>
+                      <a:prstDash val="solid"/>
+                      <a:round/>
+                      <a:headEnd type="none" w="med" len="med"/>
+                      <a:tailEnd type="none" w="med" len="med"/>
+                    </a:lnB>
+                  </a:tcPr>
+                </a:tc>
+                <a:tc>
+                  <a:txBody>
+                    <a:bodyPr/>
+                    <a:lstStyle/>
+                    <a:p>
+                      <a:pPr algn="ctr" indent="0" marL="0">
+                        <a:buNone/>
+                      </a:pPr>
+                      <a:r>
+                        <a:rPr lang="en-US" sz="580" dirty="0">
+                          <a:solidFill>
+                            <a:srgbClr val="666666"/>
+                          </a:solidFill>
+                          <a:latin typeface="Calibri" pitchFamily="34" charset="0"/>
+                          <a:ea typeface="Calibri" pitchFamily="34" charset="-122"/>
+                          <a:cs typeface="Calibri" pitchFamily="34" charset="-120"/>
+                        </a:rPr>
+                        <a:t>0,00%</a:t>
+                      </a:r>
+                      <a:endParaRPr lang="en-US" sz="580" dirty="0">
+                        <a:latin typeface="Calibri" charset="0"/>
+                        <a:ea typeface="Calibri" charset="0"/>
+                        <a:cs typeface="Calibri" charset="0"/>
+                      </a:endParaRPr>
+                    </a:p>
+                  </a:txBody>
+                  <a:tcPr marL="91440" marR="91440" marT="45720" marB="45720">
+                    <a:lnL w="2540" cap="flat" cmpd="sng" algn="ctr">
+                      <a:solidFill>
+                        <a:srgbClr val="EEEEEE"/>
+                      </a:solidFill>
+                      <a:prstDash val="solid"/>
+                      <a:round/>
+                      <a:headEnd type="none" w="med" len="med"/>
+                      <a:tailEnd type="none" w="med" len="med"/>
+                    </a:lnL>
+                    <a:lnR w="2540" cap="flat" cmpd="sng" algn="ctr">
+                      <a:solidFill>
+                        <a:srgbClr val="EEEEEE"/>
+                      </a:solidFill>
+                      <a:prstDash val="solid"/>
+                      <a:round/>
+                      <a:headEnd type="none" w="med" len="med"/>
+                      <a:tailEnd type="none" w="med" len="med"/>
+                    </a:lnR>
+                    <a:lnT w="2540" cap="flat" cmpd="sng" algn="ctr">
+                      <a:solidFill>
+                        <a:srgbClr val="EEEEEE"/>
+                      </a:solidFill>
+                      <a:prstDash val="solid"/>
+                      <a:round/>
+                      <a:headEnd type="none" w="med" len="med"/>
+                      <a:tailEnd type="none" w="med" len="med"/>
+                    </a:lnT>
+                    <a:lnB w="2540" cap="flat" cmpd="sng" algn="ctr">
+                      <a:solidFill>
+                        <a:srgbClr val="EEEEEE"/>
+                      </a:solidFill>
+                      <a:prstDash val="solid"/>
+                      <a:round/>
+                      <a:headEnd type="none" w="med" len="med"/>
+                      <a:tailEnd type="none" w="med" len="med"/>
+                    </a:lnB>
+                  </a:tcPr>
+                </a:tc>
+                <a:tc>
+                  <a:txBody>
+                    <a:bodyPr/>
+                    <a:lstStyle/>
+                    <a:p>
+                      <a:pPr algn="ctr" indent="0" marL="0">
+                        <a:buNone/>
+                      </a:pPr>
+                      <a:r>
+                        <a:rPr lang="en-US" sz="580" dirty="0">
+                          <a:solidFill>
+                            <a:srgbClr val="666666"/>
+                          </a:solidFill>
+                          <a:latin typeface="Calibri" pitchFamily="34" charset="0"/>
+                          <a:ea typeface="Calibri" pitchFamily="34" charset="-122"/>
+                          <a:cs typeface="Calibri" pitchFamily="34" charset="-120"/>
+                        </a:rPr>
+                        <a:t>0,39%</a:t>
+                      </a:r>
+                      <a:endParaRPr lang="en-US" sz="580" dirty="0">
+                        <a:latin typeface="Calibri" charset="0"/>
+                        <a:ea typeface="Calibri" charset="0"/>
+                        <a:cs typeface="Calibri" charset="0"/>
+                      </a:endParaRPr>
+                    </a:p>
+                  </a:txBody>
+                  <a:tcPr marL="91440" marR="91440" marT="45720" marB="45720">
+                    <a:lnL w="2540" cap="flat" cmpd="sng" algn="ctr">
+                      <a:solidFill>
+                        <a:srgbClr val="EEEEEE"/>
+                      </a:solidFill>
+                      <a:prstDash val="solid"/>
+                      <a:round/>
+                      <a:headEnd type="none" w="med" len="med"/>
+                      <a:tailEnd type="none" w="med" len="med"/>
+                    </a:lnL>
+                    <a:lnR w="2540" cap="flat" cmpd="sng" algn="ctr">
+                      <a:solidFill>
+                        <a:srgbClr val="EEEEEE"/>
+                      </a:solidFill>
+                      <a:prstDash val="solid"/>
+                      <a:round/>
+                      <a:headEnd type="none" w="med" len="med"/>
+                      <a:tailEnd type="none" w="med" len="med"/>
+                    </a:lnR>
+                    <a:lnT w="2540" cap="flat" cmpd="sng" algn="ctr">
+                      <a:solidFill>
+                        <a:srgbClr val="EEEEEE"/>
+                      </a:solidFill>
+                      <a:prstDash val="solid"/>
+                      <a:round/>
+                      <a:headEnd type="none" w="med" len="med"/>
+                      <a:tailEnd type="none" w="med" len="med"/>
+                    </a:lnT>
+                    <a:lnB w="2540" cap="flat" cmpd="sng" algn="ctr">
+                      <a:solidFill>
+                        <a:srgbClr val="EEEEEE"/>
+                      </a:solidFill>
+                      <a:prstDash val="solid"/>
+                      <a:round/>
+                      <a:headEnd type="none" w="med" len="med"/>
+                      <a:tailEnd type="none" w="med" len="med"/>
+                    </a:lnB>
+                  </a:tcPr>
+                </a:tc>
+                <a:tc>
+                  <a:txBody>
+                    <a:bodyPr/>
+                    <a:lstStyle/>
+                    <a:p>
+                      <a:pPr algn="ctr" indent="0" marL="0">
+                        <a:buNone/>
+                      </a:pPr>
+                      <a:r>
+                        <a:rPr lang="en-US" sz="580" dirty="0">
+                          <a:solidFill>
+                            <a:srgbClr val="666666"/>
+                          </a:solidFill>
+                          <a:latin typeface="Calibri" pitchFamily="34" charset="0"/>
+                          <a:ea typeface="Calibri" pitchFamily="34" charset="-122"/>
+                          <a:cs typeface="Calibri" pitchFamily="34" charset="-120"/>
+                        </a:rPr>
+                        <a:t>0,43%</a:t>
+                      </a:r>
                       <a:endParaRPr lang="en-US" sz="580" dirty="0">
                         <a:latin typeface="Calibri" charset="0"/>
                         <a:ea typeface="Calibri" charset="0"/>
@@ -6079,7 +9404,2305 @@
                           <a:ea typeface="Calibri" pitchFamily="34" charset="-122"/>
                           <a:cs typeface="Calibri" pitchFamily="34" charset="-120"/>
                         </a:rPr>
+                        <a:t>0,42%</a:t>
+                      </a:r>
+                      <a:endParaRPr lang="en-US" sz="580" dirty="0">
+                        <a:latin typeface="Calibri" charset="0"/>
+                        <a:ea typeface="Calibri" charset="0"/>
+                        <a:cs typeface="Calibri" charset="0"/>
+                      </a:endParaRPr>
+                    </a:p>
+                  </a:txBody>
+                  <a:tcPr marL="91440" marR="91440" marT="45720" marB="45720">
+                    <a:lnL w="2540" cap="flat" cmpd="sng" algn="ctr">
+                      <a:solidFill>
+                        <a:srgbClr val="EEEEEE"/>
+                      </a:solidFill>
+                      <a:prstDash val="solid"/>
+                      <a:round/>
+                      <a:headEnd type="none" w="med" len="med"/>
+                      <a:tailEnd type="none" w="med" len="med"/>
+                    </a:lnL>
+                    <a:lnR w="2540" cap="flat" cmpd="sng" algn="ctr">
+                      <a:solidFill>
+                        <a:srgbClr val="EEEEEE"/>
+                      </a:solidFill>
+                      <a:prstDash val="solid"/>
+                      <a:round/>
+                      <a:headEnd type="none" w="med" len="med"/>
+                      <a:tailEnd type="none" w="med" len="med"/>
+                    </a:lnR>
+                    <a:lnT w="2540" cap="flat" cmpd="sng" algn="ctr">
+                      <a:solidFill>
+                        <a:srgbClr val="EEEEEE"/>
+                      </a:solidFill>
+                      <a:prstDash val="solid"/>
+                      <a:round/>
+                      <a:headEnd type="none" w="med" len="med"/>
+                      <a:tailEnd type="none" w="med" len="med"/>
+                    </a:lnT>
+                    <a:lnB w="2540" cap="flat" cmpd="sng" algn="ctr">
+                      <a:solidFill>
+                        <a:srgbClr val="EEEEEE"/>
+                      </a:solidFill>
+                      <a:prstDash val="solid"/>
+                      <a:round/>
+                      <a:headEnd type="none" w="med" len="med"/>
+                      <a:tailEnd type="none" w="med" len="med"/>
+                    </a:lnB>
+                  </a:tcPr>
+                </a:tc>
+                <a:tc>
+                  <a:txBody>
+                    <a:bodyPr/>
+                    <a:lstStyle/>
+                    <a:p>
+                      <a:pPr algn="ctr" indent="0" marL="0">
+                        <a:buNone/>
+                      </a:pPr>
+                      <a:r>
+                        <a:rPr lang="en-US" sz="580" dirty="0">
+                          <a:solidFill>
+                            <a:srgbClr val="666666"/>
+                          </a:solidFill>
+                          <a:latin typeface="Calibri" pitchFamily="34" charset="0"/>
+                          <a:ea typeface="Calibri" pitchFamily="34" charset="-122"/>
+                          <a:cs typeface="Calibri" pitchFamily="34" charset="-120"/>
+                        </a:rPr>
                         <a:t>0,43%</a:t>
+                      </a:r>
+                      <a:endParaRPr lang="en-US" sz="580" dirty="0">
+                        <a:latin typeface="Calibri" charset="0"/>
+                        <a:ea typeface="Calibri" charset="0"/>
+                        <a:cs typeface="Calibri" charset="0"/>
+                      </a:endParaRPr>
+                    </a:p>
+                  </a:txBody>
+                  <a:tcPr marL="91440" marR="91440" marT="45720" marB="45720">
+                    <a:lnL w="2540" cap="flat" cmpd="sng" algn="ctr">
+                      <a:solidFill>
+                        <a:srgbClr val="EEEEEE"/>
+                      </a:solidFill>
+                      <a:prstDash val="solid"/>
+                      <a:round/>
+                      <a:headEnd type="none" w="med" len="med"/>
+                      <a:tailEnd type="none" w="med" len="med"/>
+                    </a:lnL>
+                    <a:lnR w="2540" cap="flat" cmpd="sng" algn="ctr">
+                      <a:solidFill>
+                        <a:srgbClr val="EEEEEE"/>
+                      </a:solidFill>
+                      <a:prstDash val="solid"/>
+                      <a:round/>
+                      <a:headEnd type="none" w="med" len="med"/>
+                      <a:tailEnd type="none" w="med" len="med"/>
+                    </a:lnR>
+                    <a:lnT w="2540" cap="flat" cmpd="sng" algn="ctr">
+                      <a:solidFill>
+                        <a:srgbClr val="EEEEEE"/>
+                      </a:solidFill>
+                      <a:prstDash val="solid"/>
+                      <a:round/>
+                      <a:headEnd type="none" w="med" len="med"/>
+                      <a:tailEnd type="none" w="med" len="med"/>
+                    </a:lnT>
+                    <a:lnB w="2540" cap="flat" cmpd="sng" algn="ctr">
+                      <a:solidFill>
+                        <a:srgbClr val="EEEEEE"/>
+                      </a:solidFill>
+                      <a:prstDash val="solid"/>
+                      <a:round/>
+                      <a:headEnd type="none" w="med" len="med"/>
+                      <a:tailEnd type="none" w="med" len="med"/>
+                    </a:lnB>
+                  </a:tcPr>
+                </a:tc>
+                <a:tc>
+                  <a:txBody>
+                    <a:bodyPr/>
+                    <a:lstStyle/>
+                    <a:p>
+                      <a:pPr algn="ctr" indent="0" marL="0">
+                        <a:buNone/>
+                      </a:pPr>
+                      <a:r>
+                        <a:rPr lang="en-US" sz="580" dirty="0">
+                          <a:solidFill>
+                            <a:srgbClr val="666666"/>
+                          </a:solidFill>
+                          <a:latin typeface="Calibri" pitchFamily="34" charset="0"/>
+                          <a:ea typeface="Calibri" pitchFamily="34" charset="-122"/>
+                          <a:cs typeface="Calibri" pitchFamily="34" charset="-120"/>
+                        </a:rPr>
+                        <a:t>0,43%</a:t>
+                      </a:r>
+                      <a:endParaRPr lang="en-US" sz="580" dirty="0">
+                        <a:latin typeface="Calibri" charset="0"/>
+                        <a:ea typeface="Calibri" charset="0"/>
+                        <a:cs typeface="Calibri" charset="0"/>
+                      </a:endParaRPr>
+                    </a:p>
+                  </a:txBody>
+                  <a:tcPr marL="91440" marR="91440" marT="45720" marB="45720">
+                    <a:lnL w="2540" cap="flat" cmpd="sng" algn="ctr">
+                      <a:solidFill>
+                        <a:srgbClr val="EEEEEE"/>
+                      </a:solidFill>
+                      <a:prstDash val="solid"/>
+                      <a:round/>
+                      <a:headEnd type="none" w="med" len="med"/>
+                      <a:tailEnd type="none" w="med" len="med"/>
+                    </a:lnL>
+                    <a:lnR w="2540" cap="flat" cmpd="sng" algn="ctr">
+                      <a:solidFill>
+                        <a:srgbClr val="EEEEEE"/>
+                      </a:solidFill>
+                      <a:prstDash val="solid"/>
+                      <a:round/>
+                      <a:headEnd type="none" w="med" len="med"/>
+                      <a:tailEnd type="none" w="med" len="med"/>
+                    </a:lnR>
+                    <a:lnT w="2540" cap="flat" cmpd="sng" algn="ctr">
+                      <a:solidFill>
+                        <a:srgbClr val="EEEEEE"/>
+                      </a:solidFill>
+                      <a:prstDash val="solid"/>
+                      <a:round/>
+                      <a:headEnd type="none" w="med" len="med"/>
+                      <a:tailEnd type="none" w="med" len="med"/>
+                    </a:lnT>
+                    <a:lnB w="2540" cap="flat" cmpd="sng" algn="ctr">
+                      <a:solidFill>
+                        <a:srgbClr val="EEEEEE"/>
+                      </a:solidFill>
+                      <a:prstDash val="solid"/>
+                      <a:round/>
+                      <a:headEnd type="none" w="med" len="med"/>
+                      <a:tailEnd type="none" w="med" len="med"/>
+                    </a:lnB>
+                  </a:tcPr>
+                </a:tc>
+                <a:tc>
+                  <a:txBody>
+                    <a:bodyPr/>
+                    <a:lstStyle/>
+                    <a:p>
+                      <a:pPr algn="ctr" indent="0" marL="0">
+                        <a:buNone/>
+                      </a:pPr>
+                      <a:r>
+                        <a:rPr lang="en-US" sz="580" dirty="0">
+                          <a:solidFill>
+                            <a:srgbClr val="666666"/>
+                          </a:solidFill>
+                          <a:latin typeface="Calibri" pitchFamily="34" charset="0"/>
+                          <a:ea typeface="Calibri" pitchFamily="34" charset="-122"/>
+                          <a:cs typeface="Calibri" pitchFamily="34" charset="-120"/>
+                        </a:rPr>
+                        <a:t>0,38%</a:t>
+                      </a:r>
+                      <a:endParaRPr lang="en-US" sz="580" dirty="0">
+                        <a:latin typeface="Calibri" charset="0"/>
+                        <a:ea typeface="Calibri" charset="0"/>
+                        <a:cs typeface="Calibri" charset="0"/>
+                      </a:endParaRPr>
+                    </a:p>
+                  </a:txBody>
+                  <a:tcPr marL="91440" marR="91440" marT="45720" marB="45720">
+                    <a:lnL w="2540" cap="flat" cmpd="sng" algn="ctr">
+                      <a:solidFill>
+                        <a:srgbClr val="EEEEEE"/>
+                      </a:solidFill>
+                      <a:prstDash val="solid"/>
+                      <a:round/>
+                      <a:headEnd type="none" w="med" len="med"/>
+                      <a:tailEnd type="none" w="med" len="med"/>
+                    </a:lnL>
+                    <a:lnR w="2540" cap="flat" cmpd="sng" algn="ctr">
+                      <a:solidFill>
+                        <a:srgbClr val="EEEEEE"/>
+                      </a:solidFill>
+                      <a:prstDash val="solid"/>
+                      <a:round/>
+                      <a:headEnd type="none" w="med" len="med"/>
+                      <a:tailEnd type="none" w="med" len="med"/>
+                    </a:lnR>
+                    <a:lnT w="2540" cap="flat" cmpd="sng" algn="ctr">
+                      <a:solidFill>
+                        <a:srgbClr val="EEEEEE"/>
+                      </a:solidFill>
+                      <a:prstDash val="solid"/>
+                      <a:round/>
+                      <a:headEnd type="none" w="med" len="med"/>
+                      <a:tailEnd type="none" w="med" len="med"/>
+                    </a:lnT>
+                    <a:lnB w="2540" cap="flat" cmpd="sng" algn="ctr">
+                      <a:solidFill>
+                        <a:srgbClr val="EEEEEE"/>
+                      </a:solidFill>
+                      <a:prstDash val="solid"/>
+                      <a:round/>
+                      <a:headEnd type="none" w="med" len="med"/>
+                      <a:tailEnd type="none" w="med" len="med"/>
+                    </a:lnB>
+                  </a:tcPr>
+                </a:tc>
+                <a:tc>
+                  <a:txBody>
+                    <a:bodyPr/>
+                    <a:lstStyle/>
+                    <a:p>
+                      <a:pPr algn="ctr" indent="0" marL="0">
+                        <a:buNone/>
+                      </a:pPr>
+                      <a:r>
+                        <a:rPr lang="en-US" sz="580" dirty="0">
+                          <a:solidFill>
+                            <a:srgbClr val="666666"/>
+                          </a:solidFill>
+                          <a:latin typeface="Calibri" pitchFamily="34" charset="0"/>
+                          <a:ea typeface="Calibri" pitchFamily="34" charset="-122"/>
+                          <a:cs typeface="Calibri" pitchFamily="34" charset="-120"/>
+                        </a:rPr>
+                        <a:t>0,42%</a:t>
+                      </a:r>
+                      <a:endParaRPr lang="en-US" sz="580" dirty="0">
+                        <a:latin typeface="Calibri" charset="0"/>
+                        <a:ea typeface="Calibri" charset="0"/>
+                        <a:cs typeface="Calibri" charset="0"/>
+                      </a:endParaRPr>
+                    </a:p>
+                  </a:txBody>
+                  <a:tcPr marL="91440" marR="91440" marT="45720" marB="45720">
+                    <a:lnL w="2540" cap="flat" cmpd="sng" algn="ctr">
+                      <a:solidFill>
+                        <a:srgbClr val="EEEEEE"/>
+                      </a:solidFill>
+                      <a:prstDash val="solid"/>
+                      <a:round/>
+                      <a:headEnd type="none" w="med" len="med"/>
+                      <a:tailEnd type="none" w="med" len="med"/>
+                    </a:lnL>
+                    <a:lnR w="2540" cap="flat" cmpd="sng" algn="ctr">
+                      <a:solidFill>
+                        <a:srgbClr val="EEEEEE"/>
+                      </a:solidFill>
+                      <a:prstDash val="solid"/>
+                      <a:round/>
+                      <a:headEnd type="none" w="med" len="med"/>
+                      <a:tailEnd type="none" w="med" len="med"/>
+                    </a:lnR>
+                    <a:lnT w="2540" cap="flat" cmpd="sng" algn="ctr">
+                      <a:solidFill>
+                        <a:srgbClr val="EEEEEE"/>
+                      </a:solidFill>
+                      <a:prstDash val="solid"/>
+                      <a:round/>
+                      <a:headEnd type="none" w="med" len="med"/>
+                      <a:tailEnd type="none" w="med" len="med"/>
+                    </a:lnT>
+                    <a:lnB w="2540" cap="flat" cmpd="sng" algn="ctr">
+                      <a:solidFill>
+                        <a:srgbClr val="EEEEEE"/>
+                      </a:solidFill>
+                      <a:prstDash val="solid"/>
+                      <a:round/>
+                      <a:headEnd type="none" w="med" len="med"/>
+                      <a:tailEnd type="none" w="med" len="med"/>
+                    </a:lnB>
+                  </a:tcPr>
+                </a:tc>
+                <a:tc>
+                  <a:txBody>
+                    <a:bodyPr/>
+                    <a:lstStyle/>
+                    <a:p>
+                      <a:pPr algn="ctr" indent="0" marL="0">
+                        <a:buNone/>
+                      </a:pPr>
+                      <a:r>
+                        <a:rPr lang="en-US" sz="580" dirty="0">
+                          <a:solidFill>
+                            <a:srgbClr val="666666"/>
+                          </a:solidFill>
+                          <a:latin typeface="Calibri" pitchFamily="34" charset="0"/>
+                          <a:ea typeface="Calibri" pitchFamily="34" charset="-122"/>
+                          <a:cs typeface="Calibri" pitchFamily="34" charset="-120"/>
+                        </a:rPr>
+                        <a:t>0,40%</a:t>
+                      </a:r>
+                      <a:endParaRPr lang="en-US" sz="580" dirty="0">
+                        <a:latin typeface="Calibri" charset="0"/>
+                        <a:ea typeface="Calibri" charset="0"/>
+                        <a:cs typeface="Calibri" charset="0"/>
+                      </a:endParaRPr>
+                    </a:p>
+                  </a:txBody>
+                  <a:tcPr marL="91440" marR="91440" marT="45720" marB="45720">
+                    <a:lnL w="2540" cap="flat" cmpd="sng" algn="ctr">
+                      <a:solidFill>
+                        <a:srgbClr val="EEEEEE"/>
+                      </a:solidFill>
+                      <a:prstDash val="solid"/>
+                      <a:round/>
+                      <a:headEnd type="none" w="med" len="med"/>
+                      <a:tailEnd type="none" w="med" len="med"/>
+                    </a:lnL>
+                    <a:lnR w="2540" cap="flat" cmpd="sng" algn="ctr">
+                      <a:solidFill>
+                        <a:srgbClr val="EEEEEE"/>
+                      </a:solidFill>
+                      <a:prstDash val="solid"/>
+                      <a:round/>
+                      <a:headEnd type="none" w="med" len="med"/>
+                      <a:tailEnd type="none" w="med" len="med"/>
+                    </a:lnR>
+                    <a:lnT w="2540" cap="flat" cmpd="sng" algn="ctr">
+                      <a:solidFill>
+                        <a:srgbClr val="EEEEEE"/>
+                      </a:solidFill>
+                      <a:prstDash val="solid"/>
+                      <a:round/>
+                      <a:headEnd type="none" w="med" len="med"/>
+                      <a:tailEnd type="none" w="med" len="med"/>
+                    </a:lnT>
+                    <a:lnB w="2540" cap="flat" cmpd="sng" algn="ctr">
+                      <a:solidFill>
+                        <a:srgbClr val="EEEEEE"/>
+                      </a:solidFill>
+                      <a:prstDash val="solid"/>
+                      <a:round/>
+                      <a:headEnd type="none" w="med" len="med"/>
+                      <a:tailEnd type="none" w="med" len="med"/>
+                    </a:lnB>
+                  </a:tcPr>
+                </a:tc>
+                <a:tc>
+                  <a:txBody>
+                    <a:bodyPr/>
+                    <a:lstStyle/>
+                    <a:p>
+                      <a:pPr algn="ctr" indent="0" marL="0">
+                        <a:buNone/>
+                      </a:pPr>
+                      <a:r>
+                        <a:rPr lang="en-US" sz="580" dirty="0">
+                          <a:solidFill>
+                            <a:srgbClr val="666666"/>
+                          </a:solidFill>
+                          <a:latin typeface="Calibri" pitchFamily="34" charset="0"/>
+                          <a:ea typeface="Calibri" pitchFamily="34" charset="-122"/>
+                          <a:cs typeface="Calibri" pitchFamily="34" charset="-120"/>
+                        </a:rPr>
+                        <a:t>0,38%</a:t>
+                      </a:r>
+                      <a:endParaRPr lang="en-US" sz="580" dirty="0">
+                        <a:latin typeface="Calibri" charset="0"/>
+                        <a:ea typeface="Calibri" charset="0"/>
+                        <a:cs typeface="Calibri" charset="0"/>
+                      </a:endParaRPr>
+                    </a:p>
+                  </a:txBody>
+                  <a:tcPr marL="91440" marR="91440" marT="45720" marB="45720">
+                    <a:lnL w="2540" cap="flat" cmpd="sng" algn="ctr">
+                      <a:solidFill>
+                        <a:srgbClr val="EEEEEE"/>
+                      </a:solidFill>
+                      <a:prstDash val="solid"/>
+                      <a:round/>
+                      <a:headEnd type="none" w="med" len="med"/>
+                      <a:tailEnd type="none" w="med" len="med"/>
+                    </a:lnL>
+                    <a:lnR w="2540" cap="flat" cmpd="sng" algn="ctr">
+                      <a:solidFill>
+                        <a:srgbClr val="EEEEEE"/>
+                      </a:solidFill>
+                      <a:prstDash val="solid"/>
+                      <a:round/>
+                      <a:headEnd type="none" w="med" len="med"/>
+                      <a:tailEnd type="none" w="med" len="med"/>
+                    </a:lnR>
+                    <a:lnT w="2540" cap="flat" cmpd="sng" algn="ctr">
+                      <a:solidFill>
+                        <a:srgbClr val="EEEEEE"/>
+                      </a:solidFill>
+                      <a:prstDash val="solid"/>
+                      <a:round/>
+                      <a:headEnd type="none" w="med" len="med"/>
+                      <a:tailEnd type="none" w="med" len="med"/>
+                    </a:lnT>
+                    <a:lnB w="2540" cap="flat" cmpd="sng" algn="ctr">
+                      <a:solidFill>
+                        <a:srgbClr val="EEEEEE"/>
+                      </a:solidFill>
+                      <a:prstDash val="solid"/>
+                      <a:round/>
+                      <a:headEnd type="none" w="med" len="med"/>
+                      <a:tailEnd type="none" w="med" len="med"/>
+                    </a:lnB>
+                  </a:tcPr>
+                </a:tc>
+                <a:tc>
+                  <a:txBody>
+                    <a:bodyPr/>
+                    <a:lstStyle/>
+                    <a:p>
+                      <a:pPr algn="ctr" indent="0" marL="0">
+                        <a:buNone/>
+                      </a:pPr>
+                      <a:r>
+                        <a:rPr lang="en-US" sz="580" dirty="0">
+                          <a:solidFill>
+                            <a:srgbClr val="666666"/>
+                          </a:solidFill>
+                          <a:latin typeface="Calibri" pitchFamily="34" charset="0"/>
+                          <a:ea typeface="Calibri" pitchFamily="34" charset="-122"/>
+                          <a:cs typeface="Calibri" pitchFamily="34" charset="-120"/>
+                        </a:rPr>
+                        <a:t>0,80%</a:t>
+                      </a:r>
+                      <a:endParaRPr lang="en-US" sz="580" dirty="0">
+                        <a:latin typeface="Calibri" charset="0"/>
+                        <a:ea typeface="Calibri" charset="0"/>
+                        <a:cs typeface="Calibri" charset="0"/>
+                      </a:endParaRPr>
+                    </a:p>
+                  </a:txBody>
+                  <a:tcPr marL="91440" marR="91440" marT="45720" marB="45720">
+                    <a:lnL w="2540" cap="flat" cmpd="sng" algn="ctr">
+                      <a:solidFill>
+                        <a:srgbClr val="EEEEEE"/>
+                      </a:solidFill>
+                      <a:prstDash val="solid"/>
+                      <a:round/>
+                      <a:headEnd type="none" w="med" len="med"/>
+                      <a:tailEnd type="none" w="med" len="med"/>
+                    </a:lnL>
+                    <a:lnR w="2540" cap="flat" cmpd="sng" algn="ctr">
+                      <a:solidFill>
+                        <a:srgbClr val="EEEEEE"/>
+                      </a:solidFill>
+                      <a:prstDash val="solid"/>
+                      <a:round/>
+                      <a:headEnd type="none" w="med" len="med"/>
+                      <a:tailEnd type="none" w="med" len="med"/>
+                    </a:lnR>
+                    <a:lnT w="2540" cap="flat" cmpd="sng" algn="ctr">
+                      <a:solidFill>
+                        <a:srgbClr val="EEEEEE"/>
+                      </a:solidFill>
+                      <a:prstDash val="solid"/>
+                      <a:round/>
+                      <a:headEnd type="none" w="med" len="med"/>
+                      <a:tailEnd type="none" w="med" len="med"/>
+                    </a:lnT>
+                    <a:lnB w="2540" cap="flat" cmpd="sng" algn="ctr">
+                      <a:solidFill>
+                        <a:srgbClr val="EEEEEE"/>
+                      </a:solidFill>
+                      <a:prstDash val="solid"/>
+                      <a:round/>
+                      <a:headEnd type="none" w="med" len="med"/>
+                      <a:tailEnd type="none" w="med" len="med"/>
+                    </a:lnB>
+                  </a:tcPr>
+                </a:tc>
+                <a:tc>
+                  <a:txBody>
+                    <a:bodyPr/>
+                    <a:lstStyle/>
+                    <a:p>
+                      <a:pPr algn="ctr" indent="0" marL="0">
+                        <a:buNone/>
+                      </a:pPr>
+                      <a:r>
+                        <a:rPr lang="en-US" sz="580" dirty="0">
+                          <a:solidFill>
+                            <a:srgbClr val="666666"/>
+                          </a:solidFill>
+                          <a:latin typeface="Calibri" pitchFamily="34" charset="0"/>
+                          <a:ea typeface="Calibri" pitchFamily="34" charset="-122"/>
+                          <a:cs typeface="Calibri" pitchFamily="34" charset="-120"/>
+                        </a:rPr>
+                        <a:t>5,02%</a:t>
+                      </a:r>
+                      <a:endParaRPr lang="en-US" sz="580" dirty="0">
+                        <a:latin typeface="Calibri" charset="0"/>
+                        <a:ea typeface="Calibri" charset="0"/>
+                        <a:cs typeface="Calibri" charset="0"/>
+                      </a:endParaRPr>
+                    </a:p>
+                  </a:txBody>
+                  <a:tcPr marL="91440" marR="91440" marT="45720" marB="45720">
+                    <a:lnL w="2540" cap="flat" cmpd="sng" algn="ctr">
+                      <a:solidFill>
+                        <a:srgbClr val="EEEEEE"/>
+                      </a:solidFill>
+                      <a:prstDash val="solid"/>
+                      <a:round/>
+                      <a:headEnd type="none" w="med" len="med"/>
+                      <a:tailEnd type="none" w="med" len="med"/>
+                    </a:lnL>
+                    <a:lnR w="2540" cap="flat" cmpd="sng" algn="ctr">
+                      <a:solidFill>
+                        <a:srgbClr val="EEEEEE"/>
+                      </a:solidFill>
+                      <a:prstDash val="solid"/>
+                      <a:round/>
+                      <a:headEnd type="none" w="med" len="med"/>
+                      <a:tailEnd type="none" w="med" len="med"/>
+                    </a:lnR>
+                    <a:lnT w="2540" cap="flat" cmpd="sng" algn="ctr">
+                      <a:solidFill>
+                        <a:srgbClr val="EEEEEE"/>
+                      </a:solidFill>
+                      <a:prstDash val="solid"/>
+                      <a:round/>
+                      <a:headEnd type="none" w="med" len="med"/>
+                      <a:tailEnd type="none" w="med" len="med"/>
+                    </a:lnT>
+                    <a:lnB w="2540" cap="flat" cmpd="sng" algn="ctr">
+                      <a:solidFill>
+                        <a:srgbClr val="EEEEEE"/>
+                      </a:solidFill>
+                      <a:prstDash val="solid"/>
+                      <a:round/>
+                      <a:headEnd type="none" w="med" len="med"/>
+                      <a:tailEnd type="none" w="med" len="med"/>
+                    </a:lnB>
+                  </a:tcPr>
+                </a:tc>
+              </a:tr>
+              <a:tr h="123444">
+                <a:tc>
+                  <a:txBody>
+                    <a:bodyPr/>
+                    <a:lstStyle/>
+                    <a:p>
+                      <a:pPr algn="l" indent="0" marL="0">
+                        <a:buNone/>
+                      </a:pPr>
+                      <a:endParaRPr lang="en-US" sz="580" dirty="0">
+                        <a:latin typeface="Calibri" charset="0"/>
+                        <a:ea typeface="Calibri" charset="0"/>
+                        <a:cs typeface="Calibri" charset="0"/>
+                      </a:endParaRPr>
+                    </a:p>
+                  </a:txBody>
+                  <a:tcPr marL="91440" marR="91440" marT="45720" marB="45720">
+                    <a:lnL w="2540" cap="flat" cmpd="sng" algn="ctr">
+                      <a:solidFill>
+                        <a:srgbClr val="EEEEEE"/>
+                      </a:solidFill>
+                      <a:prstDash val="solid"/>
+                      <a:round/>
+                      <a:headEnd type="none" w="med" len="med"/>
+                      <a:tailEnd type="none" w="med" len="med"/>
+                    </a:lnL>
+                    <a:lnR w="2540" cap="flat" cmpd="sng" algn="ctr">
+                      <a:solidFill>
+                        <a:srgbClr val="EEEEEE"/>
+                      </a:solidFill>
+                      <a:prstDash val="solid"/>
+                      <a:round/>
+                      <a:headEnd type="none" w="med" len="med"/>
+                      <a:tailEnd type="none" w="med" len="med"/>
+                    </a:lnR>
+                    <a:lnT w="2540" cap="flat" cmpd="sng" algn="ctr">
+                      <a:solidFill>
+                        <a:srgbClr val="EEEEEE"/>
+                      </a:solidFill>
+                      <a:prstDash val="solid"/>
+                      <a:round/>
+                      <a:headEnd type="none" w="med" len="med"/>
+                      <a:tailEnd type="none" w="med" len="med"/>
+                    </a:lnT>
+                    <a:lnB w="2540" cap="flat" cmpd="sng" algn="ctr">
+                      <a:solidFill>
+                        <a:srgbClr val="EEEEEE"/>
+                      </a:solidFill>
+                      <a:prstDash val="solid"/>
+                      <a:round/>
+                      <a:headEnd type="none" w="med" len="med"/>
+                      <a:tailEnd type="none" w="med" len="med"/>
+                    </a:lnB>
+                  </a:tcPr>
+                </a:tc>
+                <a:tc>
+                  <a:txBody>
+                    <a:bodyPr/>
+                    <a:lstStyle/>
+                    <a:p>
+                      <a:pPr algn="l" indent="0" marL="0">
+                        <a:buNone/>
+                      </a:pPr>
+                      <a:r>
+                        <a:rPr lang="en-US" sz="580" dirty="0">
+                          <a:solidFill>
+                            <a:srgbClr val="666666"/>
+                          </a:solidFill>
+                          <a:latin typeface="Calibri" pitchFamily="34" charset="0"/>
+                          <a:ea typeface="Calibri" pitchFamily="34" charset="-122"/>
+                          <a:cs typeface="Calibri" pitchFamily="34" charset="-120"/>
+                        </a:rPr>
+                        <a:t>Competencia</a:t>
+                      </a:r>
+                      <a:endParaRPr lang="en-US" sz="580" dirty="0">
+                        <a:latin typeface="Calibri" charset="0"/>
+                        <a:ea typeface="Calibri" charset="0"/>
+                        <a:cs typeface="Calibri" charset="0"/>
+                      </a:endParaRPr>
+                    </a:p>
+                  </a:txBody>
+                  <a:tcPr marL="91440" marR="91440" marT="45720" marB="45720">
+                    <a:lnL w="2540" cap="flat" cmpd="sng" algn="ctr">
+                      <a:solidFill>
+                        <a:srgbClr val="EEEEEE"/>
+                      </a:solidFill>
+                      <a:prstDash val="solid"/>
+                      <a:round/>
+                      <a:headEnd type="none" w="med" len="med"/>
+                      <a:tailEnd type="none" w="med" len="med"/>
+                    </a:lnL>
+                    <a:lnR w="2540" cap="flat" cmpd="sng" algn="ctr">
+                      <a:solidFill>
+                        <a:srgbClr val="EEEEEE"/>
+                      </a:solidFill>
+                      <a:prstDash val="solid"/>
+                      <a:round/>
+                      <a:headEnd type="none" w="med" len="med"/>
+                      <a:tailEnd type="none" w="med" len="med"/>
+                    </a:lnR>
+                    <a:lnT w="2540" cap="flat" cmpd="sng" algn="ctr">
+                      <a:solidFill>
+                        <a:srgbClr val="EEEEEE"/>
+                      </a:solidFill>
+                      <a:prstDash val="solid"/>
+                      <a:round/>
+                      <a:headEnd type="none" w="med" len="med"/>
+                      <a:tailEnd type="none" w="med" len="med"/>
+                    </a:lnT>
+                    <a:lnB w="2540" cap="flat" cmpd="sng" algn="ctr">
+                      <a:solidFill>
+                        <a:srgbClr val="EEEEEE"/>
+                      </a:solidFill>
+                      <a:prstDash val="solid"/>
+                      <a:round/>
+                      <a:headEnd type="none" w="med" len="med"/>
+                      <a:tailEnd type="none" w="med" len="med"/>
+                    </a:lnB>
+                  </a:tcPr>
+                </a:tc>
+                <a:tc>
+                  <a:txBody>
+                    <a:bodyPr/>
+                    <a:lstStyle/>
+                    <a:p>
+                      <a:pPr algn="ctr" indent="0" marL="0">
+                        <a:buNone/>
+                      </a:pPr>
+                      <a:endParaRPr lang="en-US" sz="580" dirty="0">
+                        <a:latin typeface="Calibri" charset="0"/>
+                        <a:ea typeface="Calibri" charset="0"/>
+                        <a:cs typeface="Calibri" charset="0"/>
+                      </a:endParaRPr>
+                    </a:p>
+                  </a:txBody>
+                  <a:tcPr marL="91440" marR="91440" marT="45720" marB="45720">
+                    <a:lnL w="2540" cap="flat" cmpd="sng" algn="ctr">
+                      <a:solidFill>
+                        <a:srgbClr val="EEEEEE"/>
+                      </a:solidFill>
+                      <a:prstDash val="solid"/>
+                      <a:round/>
+                      <a:headEnd type="none" w="med" len="med"/>
+                      <a:tailEnd type="none" w="med" len="med"/>
+                    </a:lnL>
+                    <a:lnR w="2540" cap="flat" cmpd="sng" algn="ctr">
+                      <a:solidFill>
+                        <a:srgbClr val="EEEEEE"/>
+                      </a:solidFill>
+                      <a:prstDash val="solid"/>
+                      <a:round/>
+                      <a:headEnd type="none" w="med" len="med"/>
+                      <a:tailEnd type="none" w="med" len="med"/>
+                    </a:lnR>
+                    <a:lnT w="2540" cap="flat" cmpd="sng" algn="ctr">
+                      <a:solidFill>
+                        <a:srgbClr val="EEEEEE"/>
+                      </a:solidFill>
+                      <a:prstDash val="solid"/>
+                      <a:round/>
+                      <a:headEnd type="none" w="med" len="med"/>
+                      <a:tailEnd type="none" w="med" len="med"/>
+                    </a:lnT>
+                    <a:lnB w="2540" cap="flat" cmpd="sng" algn="ctr">
+                      <a:solidFill>
+                        <a:srgbClr val="EEEEEE"/>
+                      </a:solidFill>
+                      <a:prstDash val="solid"/>
+                      <a:round/>
+                      <a:headEnd type="none" w="med" len="med"/>
+                      <a:tailEnd type="none" w="med" len="med"/>
+                    </a:lnB>
+                  </a:tcPr>
+                </a:tc>
+                <a:tc>
+                  <a:txBody>
+                    <a:bodyPr/>
+                    <a:lstStyle/>
+                    <a:p>
+                      <a:pPr algn="ctr" indent="0" marL="0">
+                        <a:buNone/>
+                      </a:pPr>
+                      <a:endParaRPr lang="en-US" sz="580" dirty="0">
+                        <a:latin typeface="Calibri" charset="0"/>
+                        <a:ea typeface="Calibri" charset="0"/>
+                        <a:cs typeface="Calibri" charset="0"/>
+                      </a:endParaRPr>
+                    </a:p>
+                  </a:txBody>
+                  <a:tcPr marL="91440" marR="91440" marT="45720" marB="45720">
+                    <a:lnL w="2540" cap="flat" cmpd="sng" algn="ctr">
+                      <a:solidFill>
+                        <a:srgbClr val="EEEEEE"/>
+                      </a:solidFill>
+                      <a:prstDash val="solid"/>
+                      <a:round/>
+                      <a:headEnd type="none" w="med" len="med"/>
+                      <a:tailEnd type="none" w="med" len="med"/>
+                    </a:lnL>
+                    <a:lnR w="2540" cap="flat" cmpd="sng" algn="ctr">
+                      <a:solidFill>
+                        <a:srgbClr val="EEEEEE"/>
+                      </a:solidFill>
+                      <a:prstDash val="solid"/>
+                      <a:round/>
+                      <a:headEnd type="none" w="med" len="med"/>
+                      <a:tailEnd type="none" w="med" len="med"/>
+                    </a:lnR>
+                    <a:lnT w="2540" cap="flat" cmpd="sng" algn="ctr">
+                      <a:solidFill>
+                        <a:srgbClr val="EEEEEE"/>
+                      </a:solidFill>
+                      <a:prstDash val="solid"/>
+                      <a:round/>
+                      <a:headEnd type="none" w="med" len="med"/>
+                      <a:tailEnd type="none" w="med" len="med"/>
+                    </a:lnT>
+                    <a:lnB w="2540" cap="flat" cmpd="sng" algn="ctr">
+                      <a:solidFill>
+                        <a:srgbClr val="EEEEEE"/>
+                      </a:solidFill>
+                      <a:prstDash val="solid"/>
+                      <a:round/>
+                      <a:headEnd type="none" w="med" len="med"/>
+                      <a:tailEnd type="none" w="med" len="med"/>
+                    </a:lnB>
+                  </a:tcPr>
+                </a:tc>
+                <a:tc>
+                  <a:txBody>
+                    <a:bodyPr/>
+                    <a:lstStyle/>
+                    <a:p>
+                      <a:pPr algn="ctr" indent="0" marL="0">
+                        <a:buNone/>
+                      </a:pPr>
+                      <a:endParaRPr lang="en-US" sz="580" dirty="0">
+                        <a:latin typeface="Calibri" charset="0"/>
+                        <a:ea typeface="Calibri" charset="0"/>
+                        <a:cs typeface="Calibri" charset="0"/>
+                      </a:endParaRPr>
+                    </a:p>
+                  </a:txBody>
+                  <a:tcPr marL="91440" marR="91440" marT="45720" marB="45720">
+                    <a:lnL w="2540" cap="flat" cmpd="sng" algn="ctr">
+                      <a:solidFill>
+                        <a:srgbClr val="EEEEEE"/>
+                      </a:solidFill>
+                      <a:prstDash val="solid"/>
+                      <a:round/>
+                      <a:headEnd type="none" w="med" len="med"/>
+                      <a:tailEnd type="none" w="med" len="med"/>
+                    </a:lnL>
+                    <a:lnR w="2540" cap="flat" cmpd="sng" algn="ctr">
+                      <a:solidFill>
+                        <a:srgbClr val="EEEEEE"/>
+                      </a:solidFill>
+                      <a:prstDash val="solid"/>
+                      <a:round/>
+                      <a:headEnd type="none" w="med" len="med"/>
+                      <a:tailEnd type="none" w="med" len="med"/>
+                    </a:lnR>
+                    <a:lnT w="2540" cap="flat" cmpd="sng" algn="ctr">
+                      <a:solidFill>
+                        <a:srgbClr val="EEEEEE"/>
+                      </a:solidFill>
+                      <a:prstDash val="solid"/>
+                      <a:round/>
+                      <a:headEnd type="none" w="med" len="med"/>
+                      <a:tailEnd type="none" w="med" len="med"/>
+                    </a:lnT>
+                    <a:lnB w="2540" cap="flat" cmpd="sng" algn="ctr">
+                      <a:solidFill>
+                        <a:srgbClr val="EEEEEE"/>
+                      </a:solidFill>
+                      <a:prstDash val="solid"/>
+                      <a:round/>
+                      <a:headEnd type="none" w="med" len="med"/>
+                      <a:tailEnd type="none" w="med" len="med"/>
+                    </a:lnB>
+                  </a:tcPr>
+                </a:tc>
+                <a:tc>
+                  <a:txBody>
+                    <a:bodyPr/>
+                    <a:lstStyle/>
+                    <a:p>
+                      <a:pPr algn="ctr" indent="0" marL="0">
+                        <a:buNone/>
+                      </a:pPr>
+                      <a:endParaRPr lang="en-US" sz="580" dirty="0">
+                        <a:latin typeface="Calibri" charset="0"/>
+                        <a:ea typeface="Calibri" charset="0"/>
+                        <a:cs typeface="Calibri" charset="0"/>
+                      </a:endParaRPr>
+                    </a:p>
+                  </a:txBody>
+                  <a:tcPr marL="91440" marR="91440" marT="45720" marB="45720">
+                    <a:lnL w="2540" cap="flat" cmpd="sng" algn="ctr">
+                      <a:solidFill>
+                        <a:srgbClr val="EEEEEE"/>
+                      </a:solidFill>
+                      <a:prstDash val="solid"/>
+                      <a:round/>
+                      <a:headEnd type="none" w="med" len="med"/>
+                      <a:tailEnd type="none" w="med" len="med"/>
+                    </a:lnL>
+                    <a:lnR w="2540" cap="flat" cmpd="sng" algn="ctr">
+                      <a:solidFill>
+                        <a:srgbClr val="EEEEEE"/>
+                      </a:solidFill>
+                      <a:prstDash val="solid"/>
+                      <a:round/>
+                      <a:headEnd type="none" w="med" len="med"/>
+                      <a:tailEnd type="none" w="med" len="med"/>
+                    </a:lnR>
+                    <a:lnT w="2540" cap="flat" cmpd="sng" algn="ctr">
+                      <a:solidFill>
+                        <a:srgbClr val="EEEEEE"/>
+                      </a:solidFill>
+                      <a:prstDash val="solid"/>
+                      <a:round/>
+                      <a:headEnd type="none" w="med" len="med"/>
+                      <a:tailEnd type="none" w="med" len="med"/>
+                    </a:lnT>
+                    <a:lnB w="2540" cap="flat" cmpd="sng" algn="ctr">
+                      <a:solidFill>
+                        <a:srgbClr val="EEEEEE"/>
+                      </a:solidFill>
+                      <a:prstDash val="solid"/>
+                      <a:round/>
+                      <a:headEnd type="none" w="med" len="med"/>
+                      <a:tailEnd type="none" w="med" len="med"/>
+                    </a:lnB>
+                  </a:tcPr>
+                </a:tc>
+                <a:tc>
+                  <a:txBody>
+                    <a:bodyPr/>
+                    <a:lstStyle/>
+                    <a:p>
+                      <a:pPr algn="ctr" indent="0" marL="0">
+                        <a:buNone/>
+                      </a:pPr>
+                      <a:endParaRPr lang="en-US" sz="580" dirty="0">
+                        <a:latin typeface="Calibri" charset="0"/>
+                        <a:ea typeface="Calibri" charset="0"/>
+                        <a:cs typeface="Calibri" charset="0"/>
+                      </a:endParaRPr>
+                    </a:p>
+                  </a:txBody>
+                  <a:tcPr marL="91440" marR="91440" marT="45720" marB="45720">
+                    <a:lnL w="2540" cap="flat" cmpd="sng" algn="ctr">
+                      <a:solidFill>
+                        <a:srgbClr val="EEEEEE"/>
+                      </a:solidFill>
+                      <a:prstDash val="solid"/>
+                      <a:round/>
+                      <a:headEnd type="none" w="med" len="med"/>
+                      <a:tailEnd type="none" w="med" len="med"/>
+                    </a:lnL>
+                    <a:lnR w="2540" cap="flat" cmpd="sng" algn="ctr">
+                      <a:solidFill>
+                        <a:srgbClr val="EEEEEE"/>
+                      </a:solidFill>
+                      <a:prstDash val="solid"/>
+                      <a:round/>
+                      <a:headEnd type="none" w="med" len="med"/>
+                      <a:tailEnd type="none" w="med" len="med"/>
+                    </a:lnR>
+                    <a:lnT w="2540" cap="flat" cmpd="sng" algn="ctr">
+                      <a:solidFill>
+                        <a:srgbClr val="EEEEEE"/>
+                      </a:solidFill>
+                      <a:prstDash val="solid"/>
+                      <a:round/>
+                      <a:headEnd type="none" w="med" len="med"/>
+                      <a:tailEnd type="none" w="med" len="med"/>
+                    </a:lnT>
+                    <a:lnB w="2540" cap="flat" cmpd="sng" algn="ctr">
+                      <a:solidFill>
+                        <a:srgbClr val="EEEEEE"/>
+                      </a:solidFill>
+                      <a:prstDash val="solid"/>
+                      <a:round/>
+                      <a:headEnd type="none" w="med" len="med"/>
+                      <a:tailEnd type="none" w="med" len="med"/>
+                    </a:lnB>
+                  </a:tcPr>
+                </a:tc>
+                <a:tc>
+                  <a:txBody>
+                    <a:bodyPr/>
+                    <a:lstStyle/>
+                    <a:p>
+                      <a:pPr algn="ctr" indent="0" marL="0">
+                        <a:buNone/>
+                      </a:pPr>
+                      <a:endParaRPr lang="en-US" sz="580" dirty="0">
+                        <a:latin typeface="Calibri" charset="0"/>
+                        <a:ea typeface="Calibri" charset="0"/>
+                        <a:cs typeface="Calibri" charset="0"/>
+                      </a:endParaRPr>
+                    </a:p>
+                  </a:txBody>
+                  <a:tcPr marL="91440" marR="91440" marT="45720" marB="45720">
+                    <a:lnL w="2540" cap="flat" cmpd="sng" algn="ctr">
+                      <a:solidFill>
+                        <a:srgbClr val="EEEEEE"/>
+                      </a:solidFill>
+                      <a:prstDash val="solid"/>
+                      <a:round/>
+                      <a:headEnd type="none" w="med" len="med"/>
+                      <a:tailEnd type="none" w="med" len="med"/>
+                    </a:lnL>
+                    <a:lnR w="2540" cap="flat" cmpd="sng" algn="ctr">
+                      <a:solidFill>
+                        <a:srgbClr val="EEEEEE"/>
+                      </a:solidFill>
+                      <a:prstDash val="solid"/>
+                      <a:round/>
+                      <a:headEnd type="none" w="med" len="med"/>
+                      <a:tailEnd type="none" w="med" len="med"/>
+                    </a:lnR>
+                    <a:lnT w="2540" cap="flat" cmpd="sng" algn="ctr">
+                      <a:solidFill>
+                        <a:srgbClr val="EEEEEE"/>
+                      </a:solidFill>
+                      <a:prstDash val="solid"/>
+                      <a:round/>
+                      <a:headEnd type="none" w="med" len="med"/>
+                      <a:tailEnd type="none" w="med" len="med"/>
+                    </a:lnT>
+                    <a:lnB w="2540" cap="flat" cmpd="sng" algn="ctr">
+                      <a:solidFill>
+                        <a:srgbClr val="EEEEEE"/>
+                      </a:solidFill>
+                      <a:prstDash val="solid"/>
+                      <a:round/>
+                      <a:headEnd type="none" w="med" len="med"/>
+                      <a:tailEnd type="none" w="med" len="med"/>
+                    </a:lnB>
+                  </a:tcPr>
+                </a:tc>
+                <a:tc>
+                  <a:txBody>
+                    <a:bodyPr/>
+                    <a:lstStyle/>
+                    <a:p>
+                      <a:pPr algn="ctr" indent="0" marL="0">
+                        <a:buNone/>
+                      </a:pPr>
+                      <a:endParaRPr lang="en-US" sz="580" dirty="0">
+                        <a:latin typeface="Calibri" charset="0"/>
+                        <a:ea typeface="Calibri" charset="0"/>
+                        <a:cs typeface="Calibri" charset="0"/>
+                      </a:endParaRPr>
+                    </a:p>
+                  </a:txBody>
+                  <a:tcPr marL="91440" marR="91440" marT="45720" marB="45720">
+                    <a:lnL w="2540" cap="flat" cmpd="sng" algn="ctr">
+                      <a:solidFill>
+                        <a:srgbClr val="EEEEEE"/>
+                      </a:solidFill>
+                      <a:prstDash val="solid"/>
+                      <a:round/>
+                      <a:headEnd type="none" w="med" len="med"/>
+                      <a:tailEnd type="none" w="med" len="med"/>
+                    </a:lnL>
+                    <a:lnR w="2540" cap="flat" cmpd="sng" algn="ctr">
+                      <a:solidFill>
+                        <a:srgbClr val="EEEEEE"/>
+                      </a:solidFill>
+                      <a:prstDash val="solid"/>
+                      <a:round/>
+                      <a:headEnd type="none" w="med" len="med"/>
+                      <a:tailEnd type="none" w="med" len="med"/>
+                    </a:lnR>
+                    <a:lnT w="2540" cap="flat" cmpd="sng" algn="ctr">
+                      <a:solidFill>
+                        <a:srgbClr val="EEEEEE"/>
+                      </a:solidFill>
+                      <a:prstDash val="solid"/>
+                      <a:round/>
+                      <a:headEnd type="none" w="med" len="med"/>
+                      <a:tailEnd type="none" w="med" len="med"/>
+                    </a:lnT>
+                    <a:lnB w="2540" cap="flat" cmpd="sng" algn="ctr">
+                      <a:solidFill>
+                        <a:srgbClr val="EEEEEE"/>
+                      </a:solidFill>
+                      <a:prstDash val="solid"/>
+                      <a:round/>
+                      <a:headEnd type="none" w="med" len="med"/>
+                      <a:tailEnd type="none" w="med" len="med"/>
+                    </a:lnB>
+                  </a:tcPr>
+                </a:tc>
+                <a:tc>
+                  <a:txBody>
+                    <a:bodyPr/>
+                    <a:lstStyle/>
+                    <a:p>
+                      <a:pPr algn="ctr" indent="0" marL="0">
+                        <a:buNone/>
+                      </a:pPr>
+                      <a:endParaRPr lang="en-US" sz="580" dirty="0">
+                        <a:latin typeface="Calibri" charset="0"/>
+                        <a:ea typeface="Calibri" charset="0"/>
+                        <a:cs typeface="Calibri" charset="0"/>
+                      </a:endParaRPr>
+                    </a:p>
+                  </a:txBody>
+                  <a:tcPr marL="91440" marR="91440" marT="45720" marB="45720">
+                    <a:lnL w="2540" cap="flat" cmpd="sng" algn="ctr">
+                      <a:solidFill>
+                        <a:srgbClr val="EEEEEE"/>
+                      </a:solidFill>
+                      <a:prstDash val="solid"/>
+                      <a:round/>
+                      <a:headEnd type="none" w="med" len="med"/>
+                      <a:tailEnd type="none" w="med" len="med"/>
+                    </a:lnL>
+                    <a:lnR w="2540" cap="flat" cmpd="sng" algn="ctr">
+                      <a:solidFill>
+                        <a:srgbClr val="EEEEEE"/>
+                      </a:solidFill>
+                      <a:prstDash val="solid"/>
+                      <a:round/>
+                      <a:headEnd type="none" w="med" len="med"/>
+                      <a:tailEnd type="none" w="med" len="med"/>
+                    </a:lnR>
+                    <a:lnT w="2540" cap="flat" cmpd="sng" algn="ctr">
+                      <a:solidFill>
+                        <a:srgbClr val="EEEEEE"/>
+                      </a:solidFill>
+                      <a:prstDash val="solid"/>
+                      <a:round/>
+                      <a:headEnd type="none" w="med" len="med"/>
+                      <a:tailEnd type="none" w="med" len="med"/>
+                    </a:lnT>
+                    <a:lnB w="2540" cap="flat" cmpd="sng" algn="ctr">
+                      <a:solidFill>
+                        <a:srgbClr val="EEEEEE"/>
+                      </a:solidFill>
+                      <a:prstDash val="solid"/>
+                      <a:round/>
+                      <a:headEnd type="none" w="med" len="med"/>
+                      <a:tailEnd type="none" w="med" len="med"/>
+                    </a:lnB>
+                  </a:tcPr>
+                </a:tc>
+                <a:tc>
+                  <a:txBody>
+                    <a:bodyPr/>
+                    <a:lstStyle/>
+                    <a:p>
+                      <a:pPr algn="ctr" indent="0" marL="0">
+                        <a:buNone/>
+                      </a:pPr>
+                      <a:endParaRPr lang="en-US" sz="580" dirty="0">
+                        <a:latin typeface="Calibri" charset="0"/>
+                        <a:ea typeface="Calibri" charset="0"/>
+                        <a:cs typeface="Calibri" charset="0"/>
+                      </a:endParaRPr>
+                    </a:p>
+                  </a:txBody>
+                  <a:tcPr marL="91440" marR="91440" marT="45720" marB="45720">
+                    <a:lnL w="2540" cap="flat" cmpd="sng" algn="ctr">
+                      <a:solidFill>
+                        <a:srgbClr val="EEEEEE"/>
+                      </a:solidFill>
+                      <a:prstDash val="solid"/>
+                      <a:round/>
+                      <a:headEnd type="none" w="med" len="med"/>
+                      <a:tailEnd type="none" w="med" len="med"/>
+                    </a:lnL>
+                    <a:lnR w="2540" cap="flat" cmpd="sng" algn="ctr">
+                      <a:solidFill>
+                        <a:srgbClr val="EEEEEE"/>
+                      </a:solidFill>
+                      <a:prstDash val="solid"/>
+                      <a:round/>
+                      <a:headEnd type="none" w="med" len="med"/>
+                      <a:tailEnd type="none" w="med" len="med"/>
+                    </a:lnR>
+                    <a:lnT w="2540" cap="flat" cmpd="sng" algn="ctr">
+                      <a:solidFill>
+                        <a:srgbClr val="EEEEEE"/>
+                      </a:solidFill>
+                      <a:prstDash val="solid"/>
+                      <a:round/>
+                      <a:headEnd type="none" w="med" len="med"/>
+                      <a:tailEnd type="none" w="med" len="med"/>
+                    </a:lnT>
+                    <a:lnB w="2540" cap="flat" cmpd="sng" algn="ctr">
+                      <a:solidFill>
+                        <a:srgbClr val="EEEEEE"/>
+                      </a:solidFill>
+                      <a:prstDash val="solid"/>
+                      <a:round/>
+                      <a:headEnd type="none" w="med" len="med"/>
+                      <a:tailEnd type="none" w="med" len="med"/>
+                    </a:lnB>
+                  </a:tcPr>
+                </a:tc>
+                <a:tc>
+                  <a:txBody>
+                    <a:bodyPr/>
+                    <a:lstStyle/>
+                    <a:p>
+                      <a:pPr algn="ctr" indent="0" marL="0">
+                        <a:buNone/>
+                      </a:pPr>
+                      <a:endParaRPr lang="en-US" sz="580" dirty="0">
+                        <a:latin typeface="Calibri" charset="0"/>
+                        <a:ea typeface="Calibri" charset="0"/>
+                        <a:cs typeface="Calibri" charset="0"/>
+                      </a:endParaRPr>
+                    </a:p>
+                  </a:txBody>
+                  <a:tcPr marL="91440" marR="91440" marT="45720" marB="45720">
+                    <a:lnL w="2540" cap="flat" cmpd="sng" algn="ctr">
+                      <a:solidFill>
+                        <a:srgbClr val="EEEEEE"/>
+                      </a:solidFill>
+                      <a:prstDash val="solid"/>
+                      <a:round/>
+                      <a:headEnd type="none" w="med" len="med"/>
+                      <a:tailEnd type="none" w="med" len="med"/>
+                    </a:lnL>
+                    <a:lnR w="2540" cap="flat" cmpd="sng" algn="ctr">
+                      <a:solidFill>
+                        <a:srgbClr val="EEEEEE"/>
+                      </a:solidFill>
+                      <a:prstDash val="solid"/>
+                      <a:round/>
+                      <a:headEnd type="none" w="med" len="med"/>
+                      <a:tailEnd type="none" w="med" len="med"/>
+                    </a:lnR>
+                    <a:lnT w="2540" cap="flat" cmpd="sng" algn="ctr">
+                      <a:solidFill>
+                        <a:srgbClr val="EEEEEE"/>
+                      </a:solidFill>
+                      <a:prstDash val="solid"/>
+                      <a:round/>
+                      <a:headEnd type="none" w="med" len="med"/>
+                      <a:tailEnd type="none" w="med" len="med"/>
+                    </a:lnT>
+                    <a:lnB w="2540" cap="flat" cmpd="sng" algn="ctr">
+                      <a:solidFill>
+                        <a:srgbClr val="EEEEEE"/>
+                      </a:solidFill>
+                      <a:prstDash val="solid"/>
+                      <a:round/>
+                      <a:headEnd type="none" w="med" len="med"/>
+                      <a:tailEnd type="none" w="med" len="med"/>
+                    </a:lnB>
+                  </a:tcPr>
+                </a:tc>
+                <a:tc>
+                  <a:txBody>
+                    <a:bodyPr/>
+                    <a:lstStyle/>
+                    <a:p>
+                      <a:pPr algn="ctr" indent="0" marL="0">
+                        <a:buNone/>
+                      </a:pPr>
+                      <a:endParaRPr lang="en-US" sz="580" dirty="0">
+                        <a:latin typeface="Calibri" charset="0"/>
+                        <a:ea typeface="Calibri" charset="0"/>
+                        <a:cs typeface="Calibri" charset="0"/>
+                      </a:endParaRPr>
+                    </a:p>
+                  </a:txBody>
+                  <a:tcPr marL="91440" marR="91440" marT="45720" marB="45720">
+                    <a:lnL w="2540" cap="flat" cmpd="sng" algn="ctr">
+                      <a:solidFill>
+                        <a:srgbClr val="EEEEEE"/>
+                      </a:solidFill>
+                      <a:prstDash val="solid"/>
+                      <a:round/>
+                      <a:headEnd type="none" w="med" len="med"/>
+                      <a:tailEnd type="none" w="med" len="med"/>
+                    </a:lnL>
+                    <a:lnR w="2540" cap="flat" cmpd="sng" algn="ctr">
+                      <a:solidFill>
+                        <a:srgbClr val="EEEEEE"/>
+                      </a:solidFill>
+                      <a:prstDash val="solid"/>
+                      <a:round/>
+                      <a:headEnd type="none" w="med" len="med"/>
+                      <a:tailEnd type="none" w="med" len="med"/>
+                    </a:lnR>
+                    <a:lnT w="2540" cap="flat" cmpd="sng" algn="ctr">
+                      <a:solidFill>
+                        <a:srgbClr val="EEEEEE"/>
+                      </a:solidFill>
+                      <a:prstDash val="solid"/>
+                      <a:round/>
+                      <a:headEnd type="none" w="med" len="med"/>
+                      <a:tailEnd type="none" w="med" len="med"/>
+                    </a:lnT>
+                    <a:lnB w="2540" cap="flat" cmpd="sng" algn="ctr">
+                      <a:solidFill>
+                        <a:srgbClr val="EEEEEE"/>
+                      </a:solidFill>
+                      <a:prstDash val="solid"/>
+                      <a:round/>
+                      <a:headEnd type="none" w="med" len="med"/>
+                      <a:tailEnd type="none" w="med" len="med"/>
+                    </a:lnB>
+                  </a:tcPr>
+                </a:tc>
+                <a:tc>
+                  <a:txBody>
+                    <a:bodyPr/>
+                    <a:lstStyle/>
+                    <a:p>
+                      <a:pPr algn="ctr" indent="0" marL="0">
+                        <a:buNone/>
+                      </a:pPr>
+                      <a:endParaRPr lang="en-US" sz="580" dirty="0">
+                        <a:latin typeface="Calibri" charset="0"/>
+                        <a:ea typeface="Calibri" charset="0"/>
+                        <a:cs typeface="Calibri" charset="0"/>
+                      </a:endParaRPr>
+                    </a:p>
+                  </a:txBody>
+                  <a:tcPr marL="91440" marR="91440" marT="45720" marB="45720">
+                    <a:lnL w="2540" cap="flat" cmpd="sng" algn="ctr">
+                      <a:solidFill>
+                        <a:srgbClr val="EEEEEE"/>
+                      </a:solidFill>
+                      <a:prstDash val="solid"/>
+                      <a:round/>
+                      <a:headEnd type="none" w="med" len="med"/>
+                      <a:tailEnd type="none" w="med" len="med"/>
+                    </a:lnL>
+                    <a:lnR w="2540" cap="flat" cmpd="sng" algn="ctr">
+                      <a:solidFill>
+                        <a:srgbClr val="EEEEEE"/>
+                      </a:solidFill>
+                      <a:prstDash val="solid"/>
+                      <a:round/>
+                      <a:headEnd type="none" w="med" len="med"/>
+                      <a:tailEnd type="none" w="med" len="med"/>
+                    </a:lnR>
+                    <a:lnT w="2540" cap="flat" cmpd="sng" algn="ctr">
+                      <a:solidFill>
+                        <a:srgbClr val="EEEEEE"/>
+                      </a:solidFill>
+                      <a:prstDash val="solid"/>
+                      <a:round/>
+                      <a:headEnd type="none" w="med" len="med"/>
+                      <a:tailEnd type="none" w="med" len="med"/>
+                    </a:lnT>
+                    <a:lnB w="2540" cap="flat" cmpd="sng" algn="ctr">
+                      <a:solidFill>
+                        <a:srgbClr val="EEEEEE"/>
+                      </a:solidFill>
+                      <a:prstDash val="solid"/>
+                      <a:round/>
+                      <a:headEnd type="none" w="med" len="med"/>
+                      <a:tailEnd type="none" w="med" len="med"/>
+                    </a:lnB>
+                  </a:tcPr>
+                </a:tc>
+                <a:tc>
+                  <a:txBody>
+                    <a:bodyPr/>
+                    <a:lstStyle/>
+                    <a:p>
+                      <a:pPr algn="ctr" indent="0" marL="0">
+                        <a:buNone/>
+                      </a:pPr>
+                      <a:endParaRPr lang="en-US" sz="580" dirty="0">
+                        <a:latin typeface="Calibri" charset="0"/>
+                        <a:ea typeface="Calibri" charset="0"/>
+                        <a:cs typeface="Calibri" charset="0"/>
+                      </a:endParaRPr>
+                    </a:p>
+                  </a:txBody>
+                  <a:tcPr marL="91440" marR="91440" marT="45720" marB="45720">
+                    <a:lnL w="2540" cap="flat" cmpd="sng" algn="ctr">
+                      <a:solidFill>
+                        <a:srgbClr val="EEEEEE"/>
+                      </a:solidFill>
+                      <a:prstDash val="solid"/>
+                      <a:round/>
+                      <a:headEnd type="none" w="med" len="med"/>
+                      <a:tailEnd type="none" w="med" len="med"/>
+                    </a:lnL>
+                    <a:lnR w="2540" cap="flat" cmpd="sng" algn="ctr">
+                      <a:solidFill>
+                        <a:srgbClr val="EEEEEE"/>
+                      </a:solidFill>
+                      <a:prstDash val="solid"/>
+                      <a:round/>
+                      <a:headEnd type="none" w="med" len="med"/>
+                      <a:tailEnd type="none" w="med" len="med"/>
+                    </a:lnR>
+                    <a:lnT w="2540" cap="flat" cmpd="sng" algn="ctr">
+                      <a:solidFill>
+                        <a:srgbClr val="EEEEEE"/>
+                      </a:solidFill>
+                      <a:prstDash val="solid"/>
+                      <a:round/>
+                      <a:headEnd type="none" w="med" len="med"/>
+                      <a:tailEnd type="none" w="med" len="med"/>
+                    </a:lnT>
+                    <a:lnB w="2540" cap="flat" cmpd="sng" algn="ctr">
+                      <a:solidFill>
+                        <a:srgbClr val="EEEEEE"/>
+                      </a:solidFill>
+                      <a:prstDash val="solid"/>
+                      <a:round/>
+                      <a:headEnd type="none" w="med" len="med"/>
+                      <a:tailEnd type="none" w="med" len="med"/>
+                    </a:lnB>
+                  </a:tcPr>
+                </a:tc>
+              </a:tr>
+              <a:tr h="123444">
+                <a:tc>
+                  <a:txBody>
+                    <a:bodyPr/>
+                    <a:lstStyle/>
+                    <a:p>
+                      <a:pPr algn="l" indent="0" marL="0">
+                        <a:buNone/>
+                      </a:pPr>
+                      <a:endParaRPr lang="en-US" sz="580" dirty="0">
+                        <a:latin typeface="Calibri" charset="0"/>
+                        <a:ea typeface="Calibri" charset="0"/>
+                        <a:cs typeface="Calibri" charset="0"/>
+                      </a:endParaRPr>
+                    </a:p>
+                  </a:txBody>
+                  <a:tcPr marL="91440" marR="91440" marT="45720" marB="45720">
+                    <a:lnL w="2540" cap="flat" cmpd="sng" algn="ctr">
+                      <a:solidFill>
+                        <a:srgbClr val="EEEEEE"/>
+                      </a:solidFill>
+                      <a:prstDash val="solid"/>
+                      <a:round/>
+                      <a:headEnd type="none" w="med" len="med"/>
+                      <a:tailEnd type="none" w="med" len="med"/>
+                    </a:lnL>
+                    <a:lnR w="2540" cap="flat" cmpd="sng" algn="ctr">
+                      <a:solidFill>
+                        <a:srgbClr val="EEEEEE"/>
+                      </a:solidFill>
+                      <a:prstDash val="solid"/>
+                      <a:round/>
+                      <a:headEnd type="none" w="med" len="med"/>
+                      <a:tailEnd type="none" w="med" len="med"/>
+                    </a:lnR>
+                    <a:lnT w="2540" cap="flat" cmpd="sng" algn="ctr">
+                      <a:solidFill>
+                        <a:srgbClr val="EEEEEE"/>
+                      </a:solidFill>
+                      <a:prstDash val="solid"/>
+                      <a:round/>
+                      <a:headEnd type="none" w="med" len="med"/>
+                      <a:tailEnd type="none" w="med" len="med"/>
+                    </a:lnT>
+                    <a:lnB w="2540" cap="flat" cmpd="sng" algn="ctr">
+                      <a:solidFill>
+                        <a:srgbClr val="EEEEEE"/>
+                      </a:solidFill>
+                      <a:prstDash val="solid"/>
+                      <a:round/>
+                      <a:headEnd type="none" w="med" len="med"/>
+                      <a:tailEnd type="none" w="med" len="med"/>
+                    </a:lnB>
+                  </a:tcPr>
+                </a:tc>
+                <a:tc>
+                  <a:txBody>
+                    <a:bodyPr/>
+                    <a:lstStyle/>
+                    <a:p>
+                      <a:pPr algn="l" indent="0" marL="0">
+                        <a:buNone/>
+                      </a:pPr>
+                      <a:r>
+                        <a:rPr lang="en-US" sz="580" b="1" dirty="0">
+                          <a:solidFill>
+                            <a:srgbClr val="000000"/>
+                          </a:solidFill>
+                          <a:latin typeface="Calibri" pitchFamily="34" charset="0"/>
+                          <a:ea typeface="Calibri" pitchFamily="34" charset="-122"/>
+                          <a:cs typeface="Calibri" pitchFamily="34" charset="-120"/>
+                        </a:rPr>
+                        <a:t>FIP LIQUIDEZ TEMPORAL</a:t>
+                      </a:r>
+                      <a:endParaRPr lang="en-US" sz="580" dirty="0">
+                        <a:latin typeface="Calibri" charset="0"/>
+                        <a:ea typeface="Calibri" charset="0"/>
+                        <a:cs typeface="Calibri" charset="0"/>
+                      </a:endParaRPr>
+                    </a:p>
+                  </a:txBody>
+                  <a:tcPr marL="91440" marR="91440" marT="45720" marB="45720">
+                    <a:lnL w="2540" cap="flat" cmpd="sng" algn="ctr">
+                      <a:solidFill>
+                        <a:srgbClr val="EEEEEE"/>
+                      </a:solidFill>
+                      <a:prstDash val="solid"/>
+                      <a:round/>
+                      <a:headEnd type="none" w="med" len="med"/>
+                      <a:tailEnd type="none" w="med" len="med"/>
+                    </a:lnL>
+                    <a:lnR w="2540" cap="flat" cmpd="sng" algn="ctr">
+                      <a:solidFill>
+                        <a:srgbClr val="EEEEEE"/>
+                      </a:solidFill>
+                      <a:prstDash val="solid"/>
+                      <a:round/>
+                      <a:headEnd type="none" w="med" len="med"/>
+                      <a:tailEnd type="none" w="med" len="med"/>
+                    </a:lnR>
+                    <a:lnT w="2540" cap="flat" cmpd="sng" algn="ctr">
+                      <a:solidFill>
+                        <a:srgbClr val="EEEEEE"/>
+                      </a:solidFill>
+                      <a:prstDash val="solid"/>
+                      <a:round/>
+                      <a:headEnd type="none" w="med" len="med"/>
+                      <a:tailEnd type="none" w="med" len="med"/>
+                    </a:lnT>
+                    <a:lnB w="2540" cap="flat" cmpd="sng" algn="ctr">
+                      <a:solidFill>
+                        <a:srgbClr val="EEEEEE"/>
+                      </a:solidFill>
+                      <a:prstDash val="solid"/>
+                      <a:round/>
+                      <a:headEnd type="none" w="med" len="med"/>
+                      <a:tailEnd type="none" w="med" len="med"/>
+                    </a:lnB>
+                  </a:tcPr>
+                </a:tc>
+                <a:tc>
+                  <a:txBody>
+                    <a:bodyPr/>
+                    <a:lstStyle/>
+                    <a:p>
+                      <a:pPr algn="ctr" indent="0" marL="0">
+                        <a:buNone/>
+                      </a:pPr>
+                      <a:endParaRPr lang="en-US" sz="580" dirty="0">
+                        <a:latin typeface="Calibri" charset="0"/>
+                        <a:ea typeface="Calibri" charset="0"/>
+                        <a:cs typeface="Calibri" charset="0"/>
+                      </a:endParaRPr>
+                    </a:p>
+                  </a:txBody>
+                  <a:tcPr marL="91440" marR="91440" marT="45720" marB="45720">
+                    <a:lnL w="2540" cap="flat" cmpd="sng" algn="ctr">
+                      <a:solidFill>
+                        <a:srgbClr val="EEEEEE"/>
+                      </a:solidFill>
+                      <a:prstDash val="solid"/>
+                      <a:round/>
+                      <a:headEnd type="none" w="med" len="med"/>
+                      <a:tailEnd type="none" w="med" len="med"/>
+                    </a:lnL>
+                    <a:lnR w="2540" cap="flat" cmpd="sng" algn="ctr">
+                      <a:solidFill>
+                        <a:srgbClr val="EEEEEE"/>
+                      </a:solidFill>
+                      <a:prstDash val="solid"/>
+                      <a:round/>
+                      <a:headEnd type="none" w="med" len="med"/>
+                      <a:tailEnd type="none" w="med" len="med"/>
+                    </a:lnR>
+                    <a:lnT w="2540" cap="flat" cmpd="sng" algn="ctr">
+                      <a:solidFill>
+                        <a:srgbClr val="EEEEEE"/>
+                      </a:solidFill>
+                      <a:prstDash val="solid"/>
+                      <a:round/>
+                      <a:headEnd type="none" w="med" len="med"/>
+                      <a:tailEnd type="none" w="med" len="med"/>
+                    </a:lnT>
+                    <a:lnB w="2540" cap="flat" cmpd="sng" algn="ctr">
+                      <a:solidFill>
+                        <a:srgbClr val="EEEEEE"/>
+                      </a:solidFill>
+                      <a:prstDash val="solid"/>
+                      <a:round/>
+                      <a:headEnd type="none" w="med" len="med"/>
+                      <a:tailEnd type="none" w="med" len="med"/>
+                    </a:lnB>
+                  </a:tcPr>
+                </a:tc>
+                <a:tc>
+                  <a:txBody>
+                    <a:bodyPr/>
+                    <a:lstStyle/>
+                    <a:p>
+                      <a:pPr algn="ctr" indent="0" marL="0">
+                        <a:buNone/>
+                      </a:pPr>
+                      <a:endParaRPr lang="en-US" sz="580" dirty="0">
+                        <a:latin typeface="Calibri" charset="0"/>
+                        <a:ea typeface="Calibri" charset="0"/>
+                        <a:cs typeface="Calibri" charset="0"/>
+                      </a:endParaRPr>
+                    </a:p>
+                  </a:txBody>
+                  <a:tcPr marL="91440" marR="91440" marT="45720" marB="45720">
+                    <a:lnL w="2540" cap="flat" cmpd="sng" algn="ctr">
+                      <a:solidFill>
+                        <a:srgbClr val="EEEEEE"/>
+                      </a:solidFill>
+                      <a:prstDash val="solid"/>
+                      <a:round/>
+                      <a:headEnd type="none" w="med" len="med"/>
+                      <a:tailEnd type="none" w="med" len="med"/>
+                    </a:lnL>
+                    <a:lnR w="2540" cap="flat" cmpd="sng" algn="ctr">
+                      <a:solidFill>
+                        <a:srgbClr val="EEEEEE"/>
+                      </a:solidFill>
+                      <a:prstDash val="solid"/>
+                      <a:round/>
+                      <a:headEnd type="none" w="med" len="med"/>
+                      <a:tailEnd type="none" w="med" len="med"/>
+                    </a:lnR>
+                    <a:lnT w="2540" cap="flat" cmpd="sng" algn="ctr">
+                      <a:solidFill>
+                        <a:srgbClr val="EEEEEE"/>
+                      </a:solidFill>
+                      <a:prstDash val="solid"/>
+                      <a:round/>
+                      <a:headEnd type="none" w="med" len="med"/>
+                      <a:tailEnd type="none" w="med" len="med"/>
+                    </a:lnT>
+                    <a:lnB w="2540" cap="flat" cmpd="sng" algn="ctr">
+                      <a:solidFill>
+                        <a:srgbClr val="EEEEEE"/>
+                      </a:solidFill>
+                      <a:prstDash val="solid"/>
+                      <a:round/>
+                      <a:headEnd type="none" w="med" len="med"/>
+                      <a:tailEnd type="none" w="med" len="med"/>
+                    </a:lnB>
+                  </a:tcPr>
+                </a:tc>
+                <a:tc>
+                  <a:txBody>
+                    <a:bodyPr/>
+                    <a:lstStyle/>
+                    <a:p>
+                      <a:pPr algn="ctr" indent="0" marL="0">
+                        <a:buNone/>
+                      </a:pPr>
+                      <a:endParaRPr lang="en-US" sz="580" dirty="0">
+                        <a:latin typeface="Calibri" charset="0"/>
+                        <a:ea typeface="Calibri" charset="0"/>
+                        <a:cs typeface="Calibri" charset="0"/>
+                      </a:endParaRPr>
+                    </a:p>
+                  </a:txBody>
+                  <a:tcPr marL="91440" marR="91440" marT="45720" marB="45720">
+                    <a:lnL w="2540" cap="flat" cmpd="sng" algn="ctr">
+                      <a:solidFill>
+                        <a:srgbClr val="EEEEEE"/>
+                      </a:solidFill>
+                      <a:prstDash val="solid"/>
+                      <a:round/>
+                      <a:headEnd type="none" w="med" len="med"/>
+                      <a:tailEnd type="none" w="med" len="med"/>
+                    </a:lnL>
+                    <a:lnR w="2540" cap="flat" cmpd="sng" algn="ctr">
+                      <a:solidFill>
+                        <a:srgbClr val="EEEEEE"/>
+                      </a:solidFill>
+                      <a:prstDash val="solid"/>
+                      <a:round/>
+                      <a:headEnd type="none" w="med" len="med"/>
+                      <a:tailEnd type="none" w="med" len="med"/>
+                    </a:lnR>
+                    <a:lnT w="2540" cap="flat" cmpd="sng" algn="ctr">
+                      <a:solidFill>
+                        <a:srgbClr val="EEEEEE"/>
+                      </a:solidFill>
+                      <a:prstDash val="solid"/>
+                      <a:round/>
+                      <a:headEnd type="none" w="med" len="med"/>
+                      <a:tailEnd type="none" w="med" len="med"/>
+                    </a:lnT>
+                    <a:lnB w="2540" cap="flat" cmpd="sng" algn="ctr">
+                      <a:solidFill>
+                        <a:srgbClr val="EEEEEE"/>
+                      </a:solidFill>
+                      <a:prstDash val="solid"/>
+                      <a:round/>
+                      <a:headEnd type="none" w="med" len="med"/>
+                      <a:tailEnd type="none" w="med" len="med"/>
+                    </a:lnB>
+                  </a:tcPr>
+                </a:tc>
+                <a:tc>
+                  <a:txBody>
+                    <a:bodyPr/>
+                    <a:lstStyle/>
+                    <a:p>
+                      <a:pPr algn="ctr" indent="0" marL="0">
+                        <a:buNone/>
+                      </a:pPr>
+                      <a:endParaRPr lang="en-US" sz="580" dirty="0">
+                        <a:latin typeface="Calibri" charset="0"/>
+                        <a:ea typeface="Calibri" charset="0"/>
+                        <a:cs typeface="Calibri" charset="0"/>
+                      </a:endParaRPr>
+                    </a:p>
+                  </a:txBody>
+                  <a:tcPr marL="91440" marR="91440" marT="45720" marB="45720">
+                    <a:lnL w="2540" cap="flat" cmpd="sng" algn="ctr">
+                      <a:solidFill>
+                        <a:srgbClr val="EEEEEE"/>
+                      </a:solidFill>
+                      <a:prstDash val="solid"/>
+                      <a:round/>
+                      <a:headEnd type="none" w="med" len="med"/>
+                      <a:tailEnd type="none" w="med" len="med"/>
+                    </a:lnL>
+                    <a:lnR w="2540" cap="flat" cmpd="sng" algn="ctr">
+                      <a:solidFill>
+                        <a:srgbClr val="EEEEEE"/>
+                      </a:solidFill>
+                      <a:prstDash val="solid"/>
+                      <a:round/>
+                      <a:headEnd type="none" w="med" len="med"/>
+                      <a:tailEnd type="none" w="med" len="med"/>
+                    </a:lnR>
+                    <a:lnT w="2540" cap="flat" cmpd="sng" algn="ctr">
+                      <a:solidFill>
+                        <a:srgbClr val="EEEEEE"/>
+                      </a:solidFill>
+                      <a:prstDash val="solid"/>
+                      <a:round/>
+                      <a:headEnd type="none" w="med" len="med"/>
+                      <a:tailEnd type="none" w="med" len="med"/>
+                    </a:lnT>
+                    <a:lnB w="2540" cap="flat" cmpd="sng" algn="ctr">
+                      <a:solidFill>
+                        <a:srgbClr val="EEEEEE"/>
+                      </a:solidFill>
+                      <a:prstDash val="solid"/>
+                      <a:round/>
+                      <a:headEnd type="none" w="med" len="med"/>
+                      <a:tailEnd type="none" w="med" len="med"/>
+                    </a:lnB>
+                  </a:tcPr>
+                </a:tc>
+                <a:tc>
+                  <a:txBody>
+                    <a:bodyPr/>
+                    <a:lstStyle/>
+                    <a:p>
+                      <a:pPr algn="ctr" indent="0" marL="0">
+                        <a:buNone/>
+                      </a:pPr>
+                      <a:endParaRPr lang="en-US" sz="580" dirty="0">
+                        <a:latin typeface="Calibri" charset="0"/>
+                        <a:ea typeface="Calibri" charset="0"/>
+                        <a:cs typeface="Calibri" charset="0"/>
+                      </a:endParaRPr>
+                    </a:p>
+                  </a:txBody>
+                  <a:tcPr marL="91440" marR="91440" marT="45720" marB="45720">
+                    <a:lnL w="2540" cap="flat" cmpd="sng" algn="ctr">
+                      <a:solidFill>
+                        <a:srgbClr val="EEEEEE"/>
+                      </a:solidFill>
+                      <a:prstDash val="solid"/>
+                      <a:round/>
+                      <a:headEnd type="none" w="med" len="med"/>
+                      <a:tailEnd type="none" w="med" len="med"/>
+                    </a:lnL>
+                    <a:lnR w="2540" cap="flat" cmpd="sng" algn="ctr">
+                      <a:solidFill>
+                        <a:srgbClr val="EEEEEE"/>
+                      </a:solidFill>
+                      <a:prstDash val="solid"/>
+                      <a:round/>
+                      <a:headEnd type="none" w="med" len="med"/>
+                      <a:tailEnd type="none" w="med" len="med"/>
+                    </a:lnR>
+                    <a:lnT w="2540" cap="flat" cmpd="sng" algn="ctr">
+                      <a:solidFill>
+                        <a:srgbClr val="EEEEEE"/>
+                      </a:solidFill>
+                      <a:prstDash val="solid"/>
+                      <a:round/>
+                      <a:headEnd type="none" w="med" len="med"/>
+                      <a:tailEnd type="none" w="med" len="med"/>
+                    </a:lnT>
+                    <a:lnB w="2540" cap="flat" cmpd="sng" algn="ctr">
+                      <a:solidFill>
+                        <a:srgbClr val="EEEEEE"/>
+                      </a:solidFill>
+                      <a:prstDash val="solid"/>
+                      <a:round/>
+                      <a:headEnd type="none" w="med" len="med"/>
+                      <a:tailEnd type="none" w="med" len="med"/>
+                    </a:lnB>
+                  </a:tcPr>
+                </a:tc>
+                <a:tc>
+                  <a:txBody>
+                    <a:bodyPr/>
+                    <a:lstStyle/>
+                    <a:p>
+                      <a:pPr algn="ctr" indent="0" marL="0">
+                        <a:buNone/>
+                      </a:pPr>
+                      <a:endParaRPr lang="en-US" sz="580" dirty="0">
+                        <a:latin typeface="Calibri" charset="0"/>
+                        <a:ea typeface="Calibri" charset="0"/>
+                        <a:cs typeface="Calibri" charset="0"/>
+                      </a:endParaRPr>
+                    </a:p>
+                  </a:txBody>
+                  <a:tcPr marL="91440" marR="91440" marT="45720" marB="45720">
+                    <a:lnL w="2540" cap="flat" cmpd="sng" algn="ctr">
+                      <a:solidFill>
+                        <a:srgbClr val="EEEEEE"/>
+                      </a:solidFill>
+                      <a:prstDash val="solid"/>
+                      <a:round/>
+                      <a:headEnd type="none" w="med" len="med"/>
+                      <a:tailEnd type="none" w="med" len="med"/>
+                    </a:lnL>
+                    <a:lnR w="2540" cap="flat" cmpd="sng" algn="ctr">
+                      <a:solidFill>
+                        <a:srgbClr val="EEEEEE"/>
+                      </a:solidFill>
+                      <a:prstDash val="solid"/>
+                      <a:round/>
+                      <a:headEnd type="none" w="med" len="med"/>
+                      <a:tailEnd type="none" w="med" len="med"/>
+                    </a:lnR>
+                    <a:lnT w="2540" cap="flat" cmpd="sng" algn="ctr">
+                      <a:solidFill>
+                        <a:srgbClr val="EEEEEE"/>
+                      </a:solidFill>
+                      <a:prstDash val="solid"/>
+                      <a:round/>
+                      <a:headEnd type="none" w="med" len="med"/>
+                      <a:tailEnd type="none" w="med" len="med"/>
+                    </a:lnT>
+                    <a:lnB w="2540" cap="flat" cmpd="sng" algn="ctr">
+                      <a:solidFill>
+                        <a:srgbClr val="EEEEEE"/>
+                      </a:solidFill>
+                      <a:prstDash val="solid"/>
+                      <a:round/>
+                      <a:headEnd type="none" w="med" len="med"/>
+                      <a:tailEnd type="none" w="med" len="med"/>
+                    </a:lnB>
+                  </a:tcPr>
+                </a:tc>
+                <a:tc>
+                  <a:txBody>
+                    <a:bodyPr/>
+                    <a:lstStyle/>
+                    <a:p>
+                      <a:pPr algn="ctr" indent="0" marL="0">
+                        <a:buNone/>
+                      </a:pPr>
+                      <a:endParaRPr lang="en-US" sz="580" dirty="0">
+                        <a:latin typeface="Calibri" charset="0"/>
+                        <a:ea typeface="Calibri" charset="0"/>
+                        <a:cs typeface="Calibri" charset="0"/>
+                      </a:endParaRPr>
+                    </a:p>
+                  </a:txBody>
+                  <a:tcPr marL="91440" marR="91440" marT="45720" marB="45720">
+                    <a:lnL w="2540" cap="flat" cmpd="sng" algn="ctr">
+                      <a:solidFill>
+                        <a:srgbClr val="EEEEEE"/>
+                      </a:solidFill>
+                      <a:prstDash val="solid"/>
+                      <a:round/>
+                      <a:headEnd type="none" w="med" len="med"/>
+                      <a:tailEnd type="none" w="med" len="med"/>
+                    </a:lnL>
+                    <a:lnR w="2540" cap="flat" cmpd="sng" algn="ctr">
+                      <a:solidFill>
+                        <a:srgbClr val="EEEEEE"/>
+                      </a:solidFill>
+                      <a:prstDash val="solid"/>
+                      <a:round/>
+                      <a:headEnd type="none" w="med" len="med"/>
+                      <a:tailEnd type="none" w="med" len="med"/>
+                    </a:lnR>
+                    <a:lnT w="2540" cap="flat" cmpd="sng" algn="ctr">
+                      <a:solidFill>
+                        <a:srgbClr val="EEEEEE"/>
+                      </a:solidFill>
+                      <a:prstDash val="solid"/>
+                      <a:round/>
+                      <a:headEnd type="none" w="med" len="med"/>
+                      <a:tailEnd type="none" w="med" len="med"/>
+                    </a:lnT>
+                    <a:lnB w="2540" cap="flat" cmpd="sng" algn="ctr">
+                      <a:solidFill>
+                        <a:srgbClr val="EEEEEE"/>
+                      </a:solidFill>
+                      <a:prstDash val="solid"/>
+                      <a:round/>
+                      <a:headEnd type="none" w="med" len="med"/>
+                      <a:tailEnd type="none" w="med" len="med"/>
+                    </a:lnB>
+                  </a:tcPr>
+                </a:tc>
+                <a:tc>
+                  <a:txBody>
+                    <a:bodyPr/>
+                    <a:lstStyle/>
+                    <a:p>
+                      <a:pPr algn="ctr" indent="0" marL="0">
+                        <a:buNone/>
+                      </a:pPr>
+                      <a:endParaRPr lang="en-US" sz="580" dirty="0">
+                        <a:latin typeface="Calibri" charset="0"/>
+                        <a:ea typeface="Calibri" charset="0"/>
+                        <a:cs typeface="Calibri" charset="0"/>
+                      </a:endParaRPr>
+                    </a:p>
+                  </a:txBody>
+                  <a:tcPr marL="91440" marR="91440" marT="45720" marB="45720">
+                    <a:lnL w="2540" cap="flat" cmpd="sng" algn="ctr">
+                      <a:solidFill>
+                        <a:srgbClr val="EEEEEE"/>
+                      </a:solidFill>
+                      <a:prstDash val="solid"/>
+                      <a:round/>
+                      <a:headEnd type="none" w="med" len="med"/>
+                      <a:tailEnd type="none" w="med" len="med"/>
+                    </a:lnL>
+                    <a:lnR w="2540" cap="flat" cmpd="sng" algn="ctr">
+                      <a:solidFill>
+                        <a:srgbClr val="EEEEEE"/>
+                      </a:solidFill>
+                      <a:prstDash val="solid"/>
+                      <a:round/>
+                      <a:headEnd type="none" w="med" len="med"/>
+                      <a:tailEnd type="none" w="med" len="med"/>
+                    </a:lnR>
+                    <a:lnT w="2540" cap="flat" cmpd="sng" algn="ctr">
+                      <a:solidFill>
+                        <a:srgbClr val="EEEEEE"/>
+                      </a:solidFill>
+                      <a:prstDash val="solid"/>
+                      <a:round/>
+                      <a:headEnd type="none" w="med" len="med"/>
+                      <a:tailEnd type="none" w="med" len="med"/>
+                    </a:lnT>
+                    <a:lnB w="2540" cap="flat" cmpd="sng" algn="ctr">
+                      <a:solidFill>
+                        <a:srgbClr val="EEEEEE"/>
+                      </a:solidFill>
+                      <a:prstDash val="solid"/>
+                      <a:round/>
+                      <a:headEnd type="none" w="med" len="med"/>
+                      <a:tailEnd type="none" w="med" len="med"/>
+                    </a:lnB>
+                  </a:tcPr>
+                </a:tc>
+                <a:tc>
+                  <a:txBody>
+                    <a:bodyPr/>
+                    <a:lstStyle/>
+                    <a:p>
+                      <a:pPr algn="ctr" indent="0" marL="0">
+                        <a:buNone/>
+                      </a:pPr>
+                      <a:endParaRPr lang="en-US" sz="580" dirty="0">
+                        <a:latin typeface="Calibri" charset="0"/>
+                        <a:ea typeface="Calibri" charset="0"/>
+                        <a:cs typeface="Calibri" charset="0"/>
+                      </a:endParaRPr>
+                    </a:p>
+                  </a:txBody>
+                  <a:tcPr marL="91440" marR="91440" marT="45720" marB="45720">
+                    <a:lnL w="2540" cap="flat" cmpd="sng" algn="ctr">
+                      <a:solidFill>
+                        <a:srgbClr val="EEEEEE"/>
+                      </a:solidFill>
+                      <a:prstDash val="solid"/>
+                      <a:round/>
+                      <a:headEnd type="none" w="med" len="med"/>
+                      <a:tailEnd type="none" w="med" len="med"/>
+                    </a:lnL>
+                    <a:lnR w="2540" cap="flat" cmpd="sng" algn="ctr">
+                      <a:solidFill>
+                        <a:srgbClr val="EEEEEE"/>
+                      </a:solidFill>
+                      <a:prstDash val="solid"/>
+                      <a:round/>
+                      <a:headEnd type="none" w="med" len="med"/>
+                      <a:tailEnd type="none" w="med" len="med"/>
+                    </a:lnR>
+                    <a:lnT w="2540" cap="flat" cmpd="sng" algn="ctr">
+                      <a:solidFill>
+                        <a:srgbClr val="EEEEEE"/>
+                      </a:solidFill>
+                      <a:prstDash val="solid"/>
+                      <a:round/>
+                      <a:headEnd type="none" w="med" len="med"/>
+                      <a:tailEnd type="none" w="med" len="med"/>
+                    </a:lnT>
+                    <a:lnB w="2540" cap="flat" cmpd="sng" algn="ctr">
+                      <a:solidFill>
+                        <a:srgbClr val="EEEEEE"/>
+                      </a:solidFill>
+                      <a:prstDash val="solid"/>
+                      <a:round/>
+                      <a:headEnd type="none" w="med" len="med"/>
+                      <a:tailEnd type="none" w="med" len="med"/>
+                    </a:lnB>
+                  </a:tcPr>
+                </a:tc>
+                <a:tc>
+                  <a:txBody>
+                    <a:bodyPr/>
+                    <a:lstStyle/>
+                    <a:p>
+                      <a:pPr algn="ctr" indent="0" marL="0">
+                        <a:buNone/>
+                      </a:pPr>
+                      <a:endParaRPr lang="en-US" sz="580" dirty="0">
+                        <a:latin typeface="Calibri" charset="0"/>
+                        <a:ea typeface="Calibri" charset="0"/>
+                        <a:cs typeface="Calibri" charset="0"/>
+                      </a:endParaRPr>
+                    </a:p>
+                  </a:txBody>
+                  <a:tcPr marL="91440" marR="91440" marT="45720" marB="45720">
+                    <a:lnL w="2540" cap="flat" cmpd="sng" algn="ctr">
+                      <a:solidFill>
+                        <a:srgbClr val="EEEEEE"/>
+                      </a:solidFill>
+                      <a:prstDash val="solid"/>
+                      <a:round/>
+                      <a:headEnd type="none" w="med" len="med"/>
+                      <a:tailEnd type="none" w="med" len="med"/>
+                    </a:lnL>
+                    <a:lnR w="2540" cap="flat" cmpd="sng" algn="ctr">
+                      <a:solidFill>
+                        <a:srgbClr val="EEEEEE"/>
+                      </a:solidFill>
+                      <a:prstDash val="solid"/>
+                      <a:round/>
+                      <a:headEnd type="none" w="med" len="med"/>
+                      <a:tailEnd type="none" w="med" len="med"/>
+                    </a:lnR>
+                    <a:lnT w="2540" cap="flat" cmpd="sng" algn="ctr">
+                      <a:solidFill>
+                        <a:srgbClr val="EEEEEE"/>
+                      </a:solidFill>
+                      <a:prstDash val="solid"/>
+                      <a:round/>
+                      <a:headEnd type="none" w="med" len="med"/>
+                      <a:tailEnd type="none" w="med" len="med"/>
+                    </a:lnT>
+                    <a:lnB w="2540" cap="flat" cmpd="sng" algn="ctr">
+                      <a:solidFill>
+                        <a:srgbClr val="EEEEEE"/>
+                      </a:solidFill>
+                      <a:prstDash val="solid"/>
+                      <a:round/>
+                      <a:headEnd type="none" w="med" len="med"/>
+                      <a:tailEnd type="none" w="med" len="med"/>
+                    </a:lnB>
+                  </a:tcPr>
+                </a:tc>
+                <a:tc>
+                  <a:txBody>
+                    <a:bodyPr/>
+                    <a:lstStyle/>
+                    <a:p>
+                      <a:pPr algn="ctr" indent="0" marL="0">
+                        <a:buNone/>
+                      </a:pPr>
+                      <a:endParaRPr lang="en-US" sz="580" dirty="0">
+                        <a:latin typeface="Calibri" charset="0"/>
+                        <a:ea typeface="Calibri" charset="0"/>
+                        <a:cs typeface="Calibri" charset="0"/>
+                      </a:endParaRPr>
+                    </a:p>
+                  </a:txBody>
+                  <a:tcPr marL="91440" marR="91440" marT="45720" marB="45720">
+                    <a:lnL w="2540" cap="flat" cmpd="sng" algn="ctr">
+                      <a:solidFill>
+                        <a:srgbClr val="EEEEEE"/>
+                      </a:solidFill>
+                      <a:prstDash val="solid"/>
+                      <a:round/>
+                      <a:headEnd type="none" w="med" len="med"/>
+                      <a:tailEnd type="none" w="med" len="med"/>
+                    </a:lnL>
+                    <a:lnR w="2540" cap="flat" cmpd="sng" algn="ctr">
+                      <a:solidFill>
+                        <a:srgbClr val="EEEEEE"/>
+                      </a:solidFill>
+                      <a:prstDash val="solid"/>
+                      <a:round/>
+                      <a:headEnd type="none" w="med" len="med"/>
+                      <a:tailEnd type="none" w="med" len="med"/>
+                    </a:lnR>
+                    <a:lnT w="2540" cap="flat" cmpd="sng" algn="ctr">
+                      <a:solidFill>
+                        <a:srgbClr val="EEEEEE"/>
+                      </a:solidFill>
+                      <a:prstDash val="solid"/>
+                      <a:round/>
+                      <a:headEnd type="none" w="med" len="med"/>
+                      <a:tailEnd type="none" w="med" len="med"/>
+                    </a:lnT>
+                    <a:lnB w="2540" cap="flat" cmpd="sng" algn="ctr">
+                      <a:solidFill>
+                        <a:srgbClr val="EEEEEE"/>
+                      </a:solidFill>
+                      <a:prstDash val="solid"/>
+                      <a:round/>
+                      <a:headEnd type="none" w="med" len="med"/>
+                      <a:tailEnd type="none" w="med" len="med"/>
+                    </a:lnB>
+                  </a:tcPr>
+                </a:tc>
+                <a:tc>
+                  <a:txBody>
+                    <a:bodyPr/>
+                    <a:lstStyle/>
+                    <a:p>
+                      <a:pPr algn="ctr" indent="0" marL="0">
+                        <a:buNone/>
+                      </a:pPr>
+                      <a:endParaRPr lang="en-US" sz="580" dirty="0">
+                        <a:latin typeface="Calibri" charset="0"/>
+                        <a:ea typeface="Calibri" charset="0"/>
+                        <a:cs typeface="Calibri" charset="0"/>
+                      </a:endParaRPr>
+                    </a:p>
+                  </a:txBody>
+                  <a:tcPr marL="91440" marR="91440" marT="45720" marB="45720">
+                    <a:lnL w="2540" cap="flat" cmpd="sng" algn="ctr">
+                      <a:solidFill>
+                        <a:srgbClr val="EEEEEE"/>
+                      </a:solidFill>
+                      <a:prstDash val="solid"/>
+                      <a:round/>
+                      <a:headEnd type="none" w="med" len="med"/>
+                      <a:tailEnd type="none" w="med" len="med"/>
+                    </a:lnL>
+                    <a:lnR w="2540" cap="flat" cmpd="sng" algn="ctr">
+                      <a:solidFill>
+                        <a:srgbClr val="EEEEEE"/>
+                      </a:solidFill>
+                      <a:prstDash val="solid"/>
+                      <a:round/>
+                      <a:headEnd type="none" w="med" len="med"/>
+                      <a:tailEnd type="none" w="med" len="med"/>
+                    </a:lnR>
+                    <a:lnT w="2540" cap="flat" cmpd="sng" algn="ctr">
+                      <a:solidFill>
+                        <a:srgbClr val="EEEEEE"/>
+                      </a:solidFill>
+                      <a:prstDash val="solid"/>
+                      <a:round/>
+                      <a:headEnd type="none" w="med" len="med"/>
+                      <a:tailEnd type="none" w="med" len="med"/>
+                    </a:lnT>
+                    <a:lnB w="2540" cap="flat" cmpd="sng" algn="ctr">
+                      <a:solidFill>
+                        <a:srgbClr val="EEEEEE"/>
+                      </a:solidFill>
+                      <a:prstDash val="solid"/>
+                      <a:round/>
+                      <a:headEnd type="none" w="med" len="med"/>
+                      <a:tailEnd type="none" w="med" len="med"/>
+                    </a:lnB>
+                  </a:tcPr>
+                </a:tc>
+                <a:tc>
+                  <a:txBody>
+                    <a:bodyPr/>
+                    <a:lstStyle/>
+                    <a:p>
+                      <a:pPr algn="ctr" indent="0" marL="0">
+                        <a:buNone/>
+                      </a:pPr>
+                      <a:endParaRPr lang="en-US" sz="580" dirty="0">
+                        <a:latin typeface="Calibri" charset="0"/>
+                        <a:ea typeface="Calibri" charset="0"/>
+                        <a:cs typeface="Calibri" charset="0"/>
+                      </a:endParaRPr>
+                    </a:p>
+                  </a:txBody>
+                  <a:tcPr marL="91440" marR="91440" marT="45720" marB="45720">
+                    <a:lnL w="2540" cap="flat" cmpd="sng" algn="ctr">
+                      <a:solidFill>
+                        <a:srgbClr val="EEEEEE"/>
+                      </a:solidFill>
+                      <a:prstDash val="solid"/>
+                      <a:round/>
+                      <a:headEnd type="none" w="med" len="med"/>
+                      <a:tailEnd type="none" w="med" len="med"/>
+                    </a:lnL>
+                    <a:lnR w="2540" cap="flat" cmpd="sng" algn="ctr">
+                      <a:solidFill>
+                        <a:srgbClr val="EEEEEE"/>
+                      </a:solidFill>
+                      <a:prstDash val="solid"/>
+                      <a:round/>
+                      <a:headEnd type="none" w="med" len="med"/>
+                      <a:tailEnd type="none" w="med" len="med"/>
+                    </a:lnR>
+                    <a:lnT w="2540" cap="flat" cmpd="sng" algn="ctr">
+                      <a:solidFill>
+                        <a:srgbClr val="EEEEEE"/>
+                      </a:solidFill>
+                      <a:prstDash val="solid"/>
+                      <a:round/>
+                      <a:headEnd type="none" w="med" len="med"/>
+                      <a:tailEnd type="none" w="med" len="med"/>
+                    </a:lnT>
+                    <a:lnB w="2540" cap="flat" cmpd="sng" algn="ctr">
+                      <a:solidFill>
+                        <a:srgbClr val="EEEEEE"/>
+                      </a:solidFill>
+                      <a:prstDash val="solid"/>
+                      <a:round/>
+                      <a:headEnd type="none" w="med" len="med"/>
+                      <a:tailEnd type="none" w="med" len="med"/>
+                    </a:lnB>
+                  </a:tcPr>
+                </a:tc>
+              </a:tr>
+              <a:tr h="123444">
+                <a:tc>
+                  <a:txBody>
+                    <a:bodyPr/>
+                    <a:lstStyle/>
+                    <a:p>
+                      <a:pPr algn="l" indent="0" marL="0">
+                        <a:buNone/>
+                      </a:pPr>
+                      <a:r>
+                        <a:rPr lang="en-US" sz="580" b="1" dirty="0">
+                          <a:solidFill>
+                            <a:srgbClr val="000000"/>
+                          </a:solidFill>
+                          <a:latin typeface="Calibri" pitchFamily="34" charset="0"/>
+                          <a:ea typeface="Calibri" pitchFamily="34" charset="-122"/>
+                          <a:cs typeface="Calibri" pitchFamily="34" charset="-120"/>
+                        </a:rPr>
+                        <a:t>2026</a:t>
+                      </a:r>
+                      <a:endParaRPr lang="en-US" sz="580" dirty="0">
+                        <a:latin typeface="Calibri" charset="0"/>
+                        <a:ea typeface="Calibri" charset="0"/>
+                        <a:cs typeface="Calibri" charset="0"/>
+                      </a:endParaRPr>
+                    </a:p>
+                  </a:txBody>
+                  <a:tcPr marL="91440" marR="91440" marT="45720" marB="45720">
+                    <a:lnL w="2540" cap="flat" cmpd="sng" algn="ctr">
+                      <a:solidFill>
+                        <a:srgbClr val="EEEEEE"/>
+                      </a:solidFill>
+                      <a:prstDash val="solid"/>
+                      <a:round/>
+                      <a:headEnd type="none" w="med" len="med"/>
+                      <a:tailEnd type="none" w="med" len="med"/>
+                    </a:lnL>
+                    <a:lnR w="2540" cap="flat" cmpd="sng" algn="ctr">
+                      <a:solidFill>
+                        <a:srgbClr val="EEEEEE"/>
+                      </a:solidFill>
+                      <a:prstDash val="solid"/>
+                      <a:round/>
+                      <a:headEnd type="none" w="med" len="med"/>
+                      <a:tailEnd type="none" w="med" len="med"/>
+                    </a:lnR>
+                    <a:lnT w="2540" cap="flat" cmpd="sng" algn="ctr">
+                      <a:solidFill>
+                        <a:srgbClr val="EEEEEE"/>
+                      </a:solidFill>
+                      <a:prstDash val="solid"/>
+                      <a:round/>
+                      <a:headEnd type="none" w="med" len="med"/>
+                      <a:tailEnd type="none" w="med" len="med"/>
+                    </a:lnT>
+                    <a:lnB w="2540" cap="flat" cmpd="sng" algn="ctr">
+                      <a:solidFill>
+                        <a:srgbClr val="EEEEEE"/>
+                      </a:solidFill>
+                      <a:prstDash val="solid"/>
+                      <a:round/>
+                      <a:headEnd type="none" w="med" len="med"/>
+                      <a:tailEnd type="none" w="med" len="med"/>
+                    </a:lnB>
+                  </a:tcPr>
+                </a:tc>
+                <a:tc>
+                  <a:txBody>
+                    <a:bodyPr/>
+                    <a:lstStyle/>
+                    <a:p>
+                      <a:pPr algn="l" indent="0" marL="0">
+                        <a:buNone/>
+                      </a:pPr>
+                      <a:r>
+                        <a:rPr lang="en-US" sz="580" dirty="0">
+                          <a:solidFill>
+                            <a:srgbClr val="666666"/>
+                          </a:solidFill>
+                          <a:latin typeface="Calibri" pitchFamily="34" charset="0"/>
+                          <a:ea typeface="Calibri" pitchFamily="34" charset="-122"/>
+                          <a:cs typeface="Calibri" pitchFamily="34" charset="-120"/>
+                        </a:rPr>
+                        <a:t>ICP</a:t>
                       </a:r>
                       <a:endParaRPr lang="en-US" sz="580" dirty="0">
                         <a:latin typeface="Calibri" charset="0"/>
@@ -6209,72 +11832,7 @@
                           <a:ea typeface="Calibri" pitchFamily="34" charset="-122"/>
                           <a:cs typeface="Calibri" pitchFamily="34" charset="-120"/>
                         </a:rPr>
-                        <a:t>0,82%</a:t>
-                      </a:r>
-                      <a:endParaRPr lang="en-US" sz="580" dirty="0">
-                        <a:latin typeface="Calibri" charset="0"/>
-                        <a:ea typeface="Calibri" charset="0"/>
-                        <a:cs typeface="Calibri" charset="0"/>
-                      </a:endParaRPr>
-                    </a:p>
-                  </a:txBody>
-                  <a:tcPr marL="91440" marR="91440" marT="45720" marB="45720">
-                    <a:lnL w="2540" cap="flat" cmpd="sng" algn="ctr">
-                      <a:solidFill>
-                        <a:srgbClr val="EEEEEE"/>
-                      </a:solidFill>
-                      <a:prstDash val="solid"/>
-                      <a:round/>
-                      <a:headEnd type="none" w="med" len="med"/>
-                      <a:tailEnd type="none" w="med" len="med"/>
-                    </a:lnL>
-                    <a:lnR w="2540" cap="flat" cmpd="sng" algn="ctr">
-                      <a:solidFill>
-                        <a:srgbClr val="EEEEEE"/>
-                      </a:solidFill>
-                      <a:prstDash val="solid"/>
-                      <a:round/>
-                      <a:headEnd type="none" w="med" len="med"/>
-                      <a:tailEnd type="none" w="med" len="med"/>
-                    </a:lnR>
-                    <a:lnT w="2540" cap="flat" cmpd="sng" algn="ctr">
-                      <a:solidFill>
-                        <a:srgbClr val="EEEEEE"/>
-                      </a:solidFill>
-                      <a:prstDash val="solid"/>
-                      <a:round/>
-                      <a:headEnd type="none" w="med" len="med"/>
-                      <a:tailEnd type="none" w="med" len="med"/>
-                    </a:lnT>
-                    <a:lnB w="2540" cap="flat" cmpd="sng" algn="ctr">
-                      <a:solidFill>
-                        <a:srgbClr val="EEEEEE"/>
-                      </a:solidFill>
-                      <a:prstDash val="solid"/>
-                      <a:round/>
-                      <a:headEnd type="none" w="med" len="med"/>
-                      <a:tailEnd type="none" w="med" len="med"/>
-                    </a:lnB>
-                  </a:tcPr>
-                </a:tc>
-                <a:tc>
-                  <a:txBody>
-                    <a:bodyPr/>
-                    <a:lstStyle/>
-                    <a:p>
-                      <a:pPr algn="ctr" indent="0" marL="0">
-                        <a:buNone/>
-                      </a:pPr>
-                      <a:r>
-                        <a:rPr lang="en-US" sz="580" dirty="0">
-                          <a:solidFill>
-                            <a:srgbClr val="666666"/>
-                          </a:solidFill>
-                          <a:latin typeface="Calibri" pitchFamily="34" charset="0"/>
-                          <a:ea typeface="Calibri" pitchFamily="34" charset="-122"/>
-                          <a:cs typeface="Calibri" pitchFamily="34" charset="-120"/>
-                        </a:rPr>
-                        <a:t>0,42%</a:t>
+                        <a:t>0,35%</a:t>
                       </a:r>
                       <a:endParaRPr lang="en-US" sz="580" dirty="0">
                         <a:latin typeface="Calibri" charset="0"/>
@@ -6460,6 +12018,438 @@
                       <a:pPr algn="ctr" indent="0" marL="0">
                         <a:buNone/>
                       </a:pPr>
+                      <a:endParaRPr lang="en-US" sz="580" dirty="0">
+                        <a:latin typeface="Calibri" charset="0"/>
+                        <a:ea typeface="Calibri" charset="0"/>
+                        <a:cs typeface="Calibri" charset="0"/>
+                      </a:endParaRPr>
+                    </a:p>
+                  </a:txBody>
+                  <a:tcPr marL="91440" marR="91440" marT="45720" marB="45720">
+                    <a:lnL w="2540" cap="flat" cmpd="sng" algn="ctr">
+                      <a:solidFill>
+                        <a:srgbClr val="EEEEEE"/>
+                      </a:solidFill>
+                      <a:prstDash val="solid"/>
+                      <a:round/>
+                      <a:headEnd type="none" w="med" len="med"/>
+                      <a:tailEnd type="none" w="med" len="med"/>
+                    </a:lnL>
+                    <a:lnR w="2540" cap="flat" cmpd="sng" algn="ctr">
+                      <a:solidFill>
+                        <a:srgbClr val="EEEEEE"/>
+                      </a:solidFill>
+                      <a:prstDash val="solid"/>
+                      <a:round/>
+                      <a:headEnd type="none" w="med" len="med"/>
+                      <a:tailEnd type="none" w="med" len="med"/>
+                    </a:lnR>
+                    <a:lnT w="2540" cap="flat" cmpd="sng" algn="ctr">
+                      <a:solidFill>
+                        <a:srgbClr val="EEEEEE"/>
+                      </a:solidFill>
+                      <a:prstDash val="solid"/>
+                      <a:round/>
+                      <a:headEnd type="none" w="med" len="med"/>
+                      <a:tailEnd type="none" w="med" len="med"/>
+                    </a:lnT>
+                    <a:lnB w="2540" cap="flat" cmpd="sng" algn="ctr">
+                      <a:solidFill>
+                        <a:srgbClr val="EEEEEE"/>
+                      </a:solidFill>
+                      <a:prstDash val="solid"/>
+                      <a:round/>
+                      <a:headEnd type="none" w="med" len="med"/>
+                      <a:tailEnd type="none" w="med" len="med"/>
+                    </a:lnB>
+                  </a:tcPr>
+                </a:tc>
+                <a:tc>
+                  <a:txBody>
+                    <a:bodyPr/>
+                    <a:lstStyle/>
+                    <a:p>
+                      <a:pPr algn="ctr" indent="0" marL="0">
+                        <a:buNone/>
+                      </a:pPr>
+                      <a:endParaRPr lang="en-US" sz="580" dirty="0">
+                        <a:latin typeface="Calibri" charset="0"/>
+                        <a:ea typeface="Calibri" charset="0"/>
+                        <a:cs typeface="Calibri" charset="0"/>
+                      </a:endParaRPr>
+                    </a:p>
+                  </a:txBody>
+                  <a:tcPr marL="91440" marR="91440" marT="45720" marB="45720">
+                    <a:lnL w="2540" cap="flat" cmpd="sng" algn="ctr">
+                      <a:solidFill>
+                        <a:srgbClr val="EEEEEE"/>
+                      </a:solidFill>
+                      <a:prstDash val="solid"/>
+                      <a:round/>
+                      <a:headEnd type="none" w="med" len="med"/>
+                      <a:tailEnd type="none" w="med" len="med"/>
+                    </a:lnL>
+                    <a:lnR w="2540" cap="flat" cmpd="sng" algn="ctr">
+                      <a:solidFill>
+                        <a:srgbClr val="EEEEEE"/>
+                      </a:solidFill>
+                      <a:prstDash val="solid"/>
+                      <a:round/>
+                      <a:headEnd type="none" w="med" len="med"/>
+                      <a:tailEnd type="none" w="med" len="med"/>
+                    </a:lnR>
+                    <a:lnT w="2540" cap="flat" cmpd="sng" algn="ctr">
+                      <a:solidFill>
+                        <a:srgbClr val="EEEEEE"/>
+                      </a:solidFill>
+                      <a:prstDash val="solid"/>
+                      <a:round/>
+                      <a:headEnd type="none" w="med" len="med"/>
+                      <a:tailEnd type="none" w="med" len="med"/>
+                    </a:lnT>
+                    <a:lnB w="2540" cap="flat" cmpd="sng" algn="ctr">
+                      <a:solidFill>
+                        <a:srgbClr val="EEEEEE"/>
+                      </a:solidFill>
+                      <a:prstDash val="solid"/>
+                      <a:round/>
+                      <a:headEnd type="none" w="med" len="med"/>
+                      <a:tailEnd type="none" w="med" len="med"/>
+                    </a:lnB>
+                  </a:tcPr>
+                </a:tc>
+                <a:tc>
+                  <a:txBody>
+                    <a:bodyPr/>
+                    <a:lstStyle/>
+                    <a:p>
+                      <a:pPr algn="ctr" indent="0" marL="0">
+                        <a:buNone/>
+                      </a:pPr>
+                      <a:endParaRPr lang="en-US" sz="580" dirty="0">
+                        <a:latin typeface="Calibri" charset="0"/>
+                        <a:ea typeface="Calibri" charset="0"/>
+                        <a:cs typeface="Calibri" charset="0"/>
+                      </a:endParaRPr>
+                    </a:p>
+                  </a:txBody>
+                  <a:tcPr marL="91440" marR="91440" marT="45720" marB="45720">
+                    <a:lnL w="2540" cap="flat" cmpd="sng" algn="ctr">
+                      <a:solidFill>
+                        <a:srgbClr val="EEEEEE"/>
+                      </a:solidFill>
+                      <a:prstDash val="solid"/>
+                      <a:round/>
+                      <a:headEnd type="none" w="med" len="med"/>
+                      <a:tailEnd type="none" w="med" len="med"/>
+                    </a:lnL>
+                    <a:lnR w="2540" cap="flat" cmpd="sng" algn="ctr">
+                      <a:solidFill>
+                        <a:srgbClr val="EEEEEE"/>
+                      </a:solidFill>
+                      <a:prstDash val="solid"/>
+                      <a:round/>
+                      <a:headEnd type="none" w="med" len="med"/>
+                      <a:tailEnd type="none" w="med" len="med"/>
+                    </a:lnR>
+                    <a:lnT w="2540" cap="flat" cmpd="sng" algn="ctr">
+                      <a:solidFill>
+                        <a:srgbClr val="EEEEEE"/>
+                      </a:solidFill>
+                      <a:prstDash val="solid"/>
+                      <a:round/>
+                      <a:headEnd type="none" w="med" len="med"/>
+                      <a:tailEnd type="none" w="med" len="med"/>
+                    </a:lnT>
+                    <a:lnB w="2540" cap="flat" cmpd="sng" algn="ctr">
+                      <a:solidFill>
+                        <a:srgbClr val="EEEEEE"/>
+                      </a:solidFill>
+                      <a:prstDash val="solid"/>
+                      <a:round/>
+                      <a:headEnd type="none" w="med" len="med"/>
+                      <a:tailEnd type="none" w="med" len="med"/>
+                    </a:lnB>
+                  </a:tcPr>
+                </a:tc>
+                <a:tc>
+                  <a:txBody>
+                    <a:bodyPr/>
+                    <a:lstStyle/>
+                    <a:p>
+                      <a:pPr algn="ctr" indent="0" marL="0">
+                        <a:buNone/>
+                      </a:pPr>
+                      <a:endParaRPr lang="en-US" sz="580" dirty="0">
+                        <a:latin typeface="Calibri" charset="0"/>
+                        <a:ea typeface="Calibri" charset="0"/>
+                        <a:cs typeface="Calibri" charset="0"/>
+                      </a:endParaRPr>
+                    </a:p>
+                  </a:txBody>
+                  <a:tcPr marL="91440" marR="91440" marT="45720" marB="45720">
+                    <a:lnL w="2540" cap="flat" cmpd="sng" algn="ctr">
+                      <a:solidFill>
+                        <a:srgbClr val="EEEEEE"/>
+                      </a:solidFill>
+                      <a:prstDash val="solid"/>
+                      <a:round/>
+                      <a:headEnd type="none" w="med" len="med"/>
+                      <a:tailEnd type="none" w="med" len="med"/>
+                    </a:lnL>
+                    <a:lnR w="2540" cap="flat" cmpd="sng" algn="ctr">
+                      <a:solidFill>
+                        <a:srgbClr val="EEEEEE"/>
+                      </a:solidFill>
+                      <a:prstDash val="solid"/>
+                      <a:round/>
+                      <a:headEnd type="none" w="med" len="med"/>
+                      <a:tailEnd type="none" w="med" len="med"/>
+                    </a:lnR>
+                    <a:lnT w="2540" cap="flat" cmpd="sng" algn="ctr">
+                      <a:solidFill>
+                        <a:srgbClr val="EEEEEE"/>
+                      </a:solidFill>
+                      <a:prstDash val="solid"/>
+                      <a:round/>
+                      <a:headEnd type="none" w="med" len="med"/>
+                      <a:tailEnd type="none" w="med" len="med"/>
+                    </a:lnT>
+                    <a:lnB w="2540" cap="flat" cmpd="sng" algn="ctr">
+                      <a:solidFill>
+                        <a:srgbClr val="EEEEEE"/>
+                      </a:solidFill>
+                      <a:prstDash val="solid"/>
+                      <a:round/>
+                      <a:headEnd type="none" w="med" len="med"/>
+                      <a:tailEnd type="none" w="med" len="med"/>
+                    </a:lnB>
+                  </a:tcPr>
+                </a:tc>
+                <a:tc>
+                  <a:txBody>
+                    <a:bodyPr/>
+                    <a:lstStyle/>
+                    <a:p>
+                      <a:pPr algn="ctr" indent="0" marL="0">
+                        <a:buNone/>
+                      </a:pPr>
+                      <a:endParaRPr lang="en-US" sz="580" dirty="0">
+                        <a:latin typeface="Calibri" charset="0"/>
+                        <a:ea typeface="Calibri" charset="0"/>
+                        <a:cs typeface="Calibri" charset="0"/>
+                      </a:endParaRPr>
+                    </a:p>
+                  </a:txBody>
+                  <a:tcPr marL="91440" marR="91440" marT="45720" marB="45720">
+                    <a:lnL w="2540" cap="flat" cmpd="sng" algn="ctr">
+                      <a:solidFill>
+                        <a:srgbClr val="EEEEEE"/>
+                      </a:solidFill>
+                      <a:prstDash val="solid"/>
+                      <a:round/>
+                      <a:headEnd type="none" w="med" len="med"/>
+                      <a:tailEnd type="none" w="med" len="med"/>
+                    </a:lnL>
+                    <a:lnR w="2540" cap="flat" cmpd="sng" algn="ctr">
+                      <a:solidFill>
+                        <a:srgbClr val="EEEEEE"/>
+                      </a:solidFill>
+                      <a:prstDash val="solid"/>
+                      <a:round/>
+                      <a:headEnd type="none" w="med" len="med"/>
+                      <a:tailEnd type="none" w="med" len="med"/>
+                    </a:lnR>
+                    <a:lnT w="2540" cap="flat" cmpd="sng" algn="ctr">
+                      <a:solidFill>
+                        <a:srgbClr val="EEEEEE"/>
+                      </a:solidFill>
+                      <a:prstDash val="solid"/>
+                      <a:round/>
+                      <a:headEnd type="none" w="med" len="med"/>
+                      <a:tailEnd type="none" w="med" len="med"/>
+                    </a:lnT>
+                    <a:lnB w="2540" cap="flat" cmpd="sng" algn="ctr">
+                      <a:solidFill>
+                        <a:srgbClr val="EEEEEE"/>
+                      </a:solidFill>
+                      <a:prstDash val="solid"/>
+                      <a:round/>
+                      <a:headEnd type="none" w="med" len="med"/>
+                      <a:tailEnd type="none" w="med" len="med"/>
+                    </a:lnB>
+                  </a:tcPr>
+                </a:tc>
+                <a:tc>
+                  <a:txBody>
+                    <a:bodyPr/>
+                    <a:lstStyle/>
+                    <a:p>
+                      <a:pPr algn="ctr" indent="0" marL="0">
+                        <a:buNone/>
+                      </a:pPr>
+                      <a:endParaRPr lang="en-US" sz="580" dirty="0">
+                        <a:latin typeface="Calibri" charset="0"/>
+                        <a:ea typeface="Calibri" charset="0"/>
+                        <a:cs typeface="Calibri" charset="0"/>
+                      </a:endParaRPr>
+                    </a:p>
+                  </a:txBody>
+                  <a:tcPr marL="91440" marR="91440" marT="45720" marB="45720">
+                    <a:lnL w="2540" cap="flat" cmpd="sng" algn="ctr">
+                      <a:solidFill>
+                        <a:srgbClr val="EEEEEE"/>
+                      </a:solidFill>
+                      <a:prstDash val="solid"/>
+                      <a:round/>
+                      <a:headEnd type="none" w="med" len="med"/>
+                      <a:tailEnd type="none" w="med" len="med"/>
+                    </a:lnL>
+                    <a:lnR w="2540" cap="flat" cmpd="sng" algn="ctr">
+                      <a:solidFill>
+                        <a:srgbClr val="EEEEEE"/>
+                      </a:solidFill>
+                      <a:prstDash val="solid"/>
+                      <a:round/>
+                      <a:headEnd type="none" w="med" len="med"/>
+                      <a:tailEnd type="none" w="med" len="med"/>
+                    </a:lnR>
+                    <a:lnT w="2540" cap="flat" cmpd="sng" algn="ctr">
+                      <a:solidFill>
+                        <a:srgbClr val="EEEEEE"/>
+                      </a:solidFill>
+                      <a:prstDash val="solid"/>
+                      <a:round/>
+                      <a:headEnd type="none" w="med" len="med"/>
+                      <a:tailEnd type="none" w="med" len="med"/>
+                    </a:lnT>
+                    <a:lnB w="2540" cap="flat" cmpd="sng" algn="ctr">
+                      <a:solidFill>
+                        <a:srgbClr val="EEEEEE"/>
+                      </a:solidFill>
+                      <a:prstDash val="solid"/>
+                      <a:round/>
+                      <a:headEnd type="none" w="med" len="med"/>
+                      <a:tailEnd type="none" w="med" len="med"/>
+                    </a:lnB>
+                  </a:tcPr>
+                </a:tc>
+                <a:tc>
+                  <a:txBody>
+                    <a:bodyPr/>
+                    <a:lstStyle/>
+                    <a:p>
+                      <a:pPr algn="ctr" indent="0" marL="0">
+                        <a:buNone/>
+                      </a:pPr>
+                      <a:endParaRPr lang="en-US" sz="580" dirty="0">
+                        <a:latin typeface="Calibri" charset="0"/>
+                        <a:ea typeface="Calibri" charset="0"/>
+                        <a:cs typeface="Calibri" charset="0"/>
+                      </a:endParaRPr>
+                    </a:p>
+                  </a:txBody>
+                  <a:tcPr marL="91440" marR="91440" marT="45720" marB="45720">
+                    <a:lnL w="2540" cap="flat" cmpd="sng" algn="ctr">
+                      <a:solidFill>
+                        <a:srgbClr val="EEEEEE"/>
+                      </a:solidFill>
+                      <a:prstDash val="solid"/>
+                      <a:round/>
+                      <a:headEnd type="none" w="med" len="med"/>
+                      <a:tailEnd type="none" w="med" len="med"/>
+                    </a:lnL>
+                    <a:lnR w="2540" cap="flat" cmpd="sng" algn="ctr">
+                      <a:solidFill>
+                        <a:srgbClr val="EEEEEE"/>
+                      </a:solidFill>
+                      <a:prstDash val="solid"/>
+                      <a:round/>
+                      <a:headEnd type="none" w="med" len="med"/>
+                      <a:tailEnd type="none" w="med" len="med"/>
+                    </a:lnR>
+                    <a:lnT w="2540" cap="flat" cmpd="sng" algn="ctr">
+                      <a:solidFill>
+                        <a:srgbClr val="EEEEEE"/>
+                      </a:solidFill>
+                      <a:prstDash val="solid"/>
+                      <a:round/>
+                      <a:headEnd type="none" w="med" len="med"/>
+                      <a:tailEnd type="none" w="med" len="med"/>
+                    </a:lnT>
+                    <a:lnB w="2540" cap="flat" cmpd="sng" algn="ctr">
+                      <a:solidFill>
+                        <a:srgbClr val="EEEEEE"/>
+                      </a:solidFill>
+                      <a:prstDash val="solid"/>
+                      <a:round/>
+                      <a:headEnd type="none" w="med" len="med"/>
+                      <a:tailEnd type="none" w="med" len="med"/>
+                    </a:lnB>
+                  </a:tcPr>
+                </a:tc>
+                <a:tc>
+                  <a:txBody>
+                    <a:bodyPr/>
+                    <a:lstStyle/>
+                    <a:p>
+                      <a:pPr algn="ctr" indent="0" marL="0">
+                        <a:buNone/>
+                      </a:pPr>
+                      <a:endParaRPr lang="en-US" sz="580" dirty="0">
+                        <a:latin typeface="Calibri" charset="0"/>
+                        <a:ea typeface="Calibri" charset="0"/>
+                        <a:cs typeface="Calibri" charset="0"/>
+                      </a:endParaRPr>
+                    </a:p>
+                  </a:txBody>
+                  <a:tcPr marL="91440" marR="91440" marT="45720" marB="45720">
+                    <a:lnL w="2540" cap="flat" cmpd="sng" algn="ctr">
+                      <a:solidFill>
+                        <a:srgbClr val="EEEEEE"/>
+                      </a:solidFill>
+                      <a:prstDash val="solid"/>
+                      <a:round/>
+                      <a:headEnd type="none" w="med" len="med"/>
+                      <a:tailEnd type="none" w="med" len="med"/>
+                    </a:lnL>
+                    <a:lnR w="2540" cap="flat" cmpd="sng" algn="ctr">
+                      <a:solidFill>
+                        <a:srgbClr val="EEEEEE"/>
+                      </a:solidFill>
+                      <a:prstDash val="solid"/>
+                      <a:round/>
+                      <a:headEnd type="none" w="med" len="med"/>
+                      <a:tailEnd type="none" w="med" len="med"/>
+                    </a:lnR>
+                    <a:lnT w="2540" cap="flat" cmpd="sng" algn="ctr">
+                      <a:solidFill>
+                        <a:srgbClr val="EEEEEE"/>
+                      </a:solidFill>
+                      <a:prstDash val="solid"/>
+                      <a:round/>
+                      <a:headEnd type="none" w="med" len="med"/>
+                      <a:tailEnd type="none" w="med" len="med"/>
+                    </a:lnT>
+                    <a:lnB w="2540" cap="flat" cmpd="sng" algn="ctr">
+                      <a:solidFill>
+                        <a:srgbClr val="EEEEEE"/>
+                      </a:solidFill>
+                      <a:prstDash val="solid"/>
+                      <a:round/>
+                      <a:headEnd type="none" w="med" len="med"/>
+                      <a:tailEnd type="none" w="med" len="med"/>
+                    </a:lnB>
+                  </a:tcPr>
+                </a:tc>
+                <a:tc>
+                  <a:txBody>
+                    <a:bodyPr/>
+                    <a:lstStyle/>
+                    <a:p>
+                      <a:pPr algn="ctr" indent="0" marL="0">
+                        <a:buNone/>
+                      </a:pPr>
                       <a:r>
                         <a:rPr lang="en-US" sz="580" dirty="0">
                           <a:solidFill>
@@ -6469,62 +12459,8 @@
                           <a:ea typeface="Calibri" pitchFamily="34" charset="-122"/>
                           <a:cs typeface="Calibri" pitchFamily="34" charset="-120"/>
                         </a:rPr>
-                        <a:t>0,00%</a:t>
+                        <a:t>1,13%</a:t>
                       </a:r>
-                      <a:endParaRPr lang="en-US" sz="580" dirty="0">
-                        <a:latin typeface="Calibri" charset="0"/>
-                        <a:ea typeface="Calibri" charset="0"/>
-                        <a:cs typeface="Calibri" charset="0"/>
-                      </a:endParaRPr>
-                    </a:p>
-                  </a:txBody>
-                  <a:tcPr marL="91440" marR="91440" marT="45720" marB="45720">
-                    <a:lnL w="2540" cap="flat" cmpd="sng" algn="ctr">
-                      <a:solidFill>
-                        <a:srgbClr val="EEEEEE"/>
-                      </a:solidFill>
-                      <a:prstDash val="solid"/>
-                      <a:round/>
-                      <a:headEnd type="none" w="med" len="med"/>
-                      <a:tailEnd type="none" w="med" len="med"/>
-                    </a:lnL>
-                    <a:lnR w="2540" cap="flat" cmpd="sng" algn="ctr">
-                      <a:solidFill>
-                        <a:srgbClr val="EEEEEE"/>
-                      </a:solidFill>
-                      <a:prstDash val="solid"/>
-                      <a:round/>
-                      <a:headEnd type="none" w="med" len="med"/>
-                      <a:tailEnd type="none" w="med" len="med"/>
-                    </a:lnR>
-                    <a:lnT w="2540" cap="flat" cmpd="sng" algn="ctr">
-                      <a:solidFill>
-                        <a:srgbClr val="EEEEEE"/>
-                      </a:solidFill>
-                      <a:prstDash val="solid"/>
-                      <a:round/>
-                      <a:headEnd type="none" w="med" len="med"/>
-                      <a:tailEnd type="none" w="med" len="med"/>
-                    </a:lnT>
-                    <a:lnB w="2540" cap="flat" cmpd="sng" algn="ctr">
-                      <a:solidFill>
-                        <a:srgbClr val="EEEEEE"/>
-                      </a:solidFill>
-                      <a:prstDash val="solid"/>
-                      <a:round/>
-                      <a:headEnd type="none" w="med" len="med"/>
-                      <a:tailEnd type="none" w="med" len="med"/>
-                    </a:lnB>
-                  </a:tcPr>
-                </a:tc>
-                <a:tc>
-                  <a:txBody>
-                    <a:bodyPr/>
-                    <a:lstStyle/>
-                    <a:p>
-                      <a:pPr algn="ctr" indent="0" marL="0">
-                        <a:buNone/>
-                      </a:pPr>
                       <a:endParaRPr lang="en-US" sz="580" dirty="0">
                         <a:latin typeface="Calibri" charset="0"/>
                         <a:ea typeface="Calibri" charset="0"/>
@@ -7631,2530 +13567,6 @@
                       <a:pPr algn="ctr" indent="0" marL="0">
                         <a:buNone/>
                       </a:pPr>
-                      <a:endParaRPr lang="en-US" sz="580" dirty="0">
-                        <a:latin typeface="Calibri" charset="0"/>
-                        <a:ea typeface="Calibri" charset="0"/>
-                        <a:cs typeface="Calibri" charset="0"/>
-                      </a:endParaRPr>
-                    </a:p>
-                  </a:txBody>
-                  <a:tcPr marL="91440" marR="91440" marT="45720" marB="45720">
-                    <a:lnL w="2540" cap="flat" cmpd="sng" algn="ctr">
-                      <a:solidFill>
-                        <a:srgbClr val="EEEEEE"/>
-                      </a:solidFill>
-                      <a:prstDash val="solid"/>
-                      <a:round/>
-                      <a:headEnd type="none" w="med" len="med"/>
-                      <a:tailEnd type="none" w="med" len="med"/>
-                    </a:lnL>
-                    <a:lnR w="2540" cap="flat" cmpd="sng" algn="ctr">
-                      <a:solidFill>
-                        <a:srgbClr val="EEEEEE"/>
-                      </a:solidFill>
-                      <a:prstDash val="solid"/>
-                      <a:round/>
-                      <a:headEnd type="none" w="med" len="med"/>
-                      <a:tailEnd type="none" w="med" len="med"/>
-                    </a:lnR>
-                    <a:lnT w="2540" cap="flat" cmpd="sng" algn="ctr">
-                      <a:solidFill>
-                        <a:srgbClr val="EEEEEE"/>
-                      </a:solidFill>
-                      <a:prstDash val="solid"/>
-                      <a:round/>
-                      <a:headEnd type="none" w="med" len="med"/>
-                      <a:tailEnd type="none" w="med" len="med"/>
-                    </a:lnT>
-                    <a:lnB w="2540" cap="flat" cmpd="sng" algn="ctr">
-                      <a:solidFill>
-                        <a:srgbClr val="EEEEEE"/>
-                      </a:solidFill>
-                      <a:prstDash val="solid"/>
-                      <a:round/>
-                      <a:headEnd type="none" w="med" len="med"/>
-                      <a:tailEnd type="none" w="med" len="med"/>
-                    </a:lnB>
-                  </a:tcPr>
-                </a:tc>
-                <a:tc>
-                  <a:txBody>
-                    <a:bodyPr/>
-                    <a:lstStyle/>
-                    <a:p>
-                      <a:pPr algn="ctr" indent="0" marL="0">
-                        <a:buNone/>
-                      </a:pPr>
-                      <a:endParaRPr lang="en-US" sz="580" dirty="0">
-                        <a:latin typeface="Calibri" charset="0"/>
-                        <a:ea typeface="Calibri" charset="0"/>
-                        <a:cs typeface="Calibri" charset="0"/>
-                      </a:endParaRPr>
-                    </a:p>
-                  </a:txBody>
-                  <a:tcPr marL="91440" marR="91440" marT="45720" marB="45720">
-                    <a:lnL w="2540" cap="flat" cmpd="sng" algn="ctr">
-                      <a:solidFill>
-                        <a:srgbClr val="EEEEEE"/>
-                      </a:solidFill>
-                      <a:prstDash val="solid"/>
-                      <a:round/>
-                      <a:headEnd type="none" w="med" len="med"/>
-                      <a:tailEnd type="none" w="med" len="med"/>
-                    </a:lnL>
-                    <a:lnR w="2540" cap="flat" cmpd="sng" algn="ctr">
-                      <a:solidFill>
-                        <a:srgbClr val="EEEEEE"/>
-                      </a:solidFill>
-                      <a:prstDash val="solid"/>
-                      <a:round/>
-                      <a:headEnd type="none" w="med" len="med"/>
-                      <a:tailEnd type="none" w="med" len="med"/>
-                    </a:lnR>
-                    <a:lnT w="2540" cap="flat" cmpd="sng" algn="ctr">
-                      <a:solidFill>
-                        <a:srgbClr val="EEEEEE"/>
-                      </a:solidFill>
-                      <a:prstDash val="solid"/>
-                      <a:round/>
-                      <a:headEnd type="none" w="med" len="med"/>
-                      <a:tailEnd type="none" w="med" len="med"/>
-                    </a:lnT>
-                    <a:lnB w="2540" cap="flat" cmpd="sng" algn="ctr">
-                      <a:solidFill>
-                        <a:srgbClr val="EEEEEE"/>
-                      </a:solidFill>
-                      <a:prstDash val="solid"/>
-                      <a:round/>
-                      <a:headEnd type="none" w="med" len="med"/>
-                      <a:tailEnd type="none" w="med" len="med"/>
-                    </a:lnB>
-                  </a:tcPr>
-                </a:tc>
-                <a:tc>
-                  <a:txBody>
-                    <a:bodyPr/>
-                    <a:lstStyle/>
-                    <a:p>
-                      <a:pPr algn="ctr" indent="0" marL="0">
-                        <a:buNone/>
-                      </a:pPr>
-                      <a:endParaRPr lang="en-US" sz="580" dirty="0">
-                        <a:latin typeface="Calibri" charset="0"/>
-                        <a:ea typeface="Calibri" charset="0"/>
-                        <a:cs typeface="Calibri" charset="0"/>
-                      </a:endParaRPr>
-                    </a:p>
-                  </a:txBody>
-                  <a:tcPr marL="91440" marR="91440" marT="45720" marB="45720">
-                    <a:lnL w="2540" cap="flat" cmpd="sng" algn="ctr">
-                      <a:solidFill>
-                        <a:srgbClr val="EEEEEE"/>
-                      </a:solidFill>
-                      <a:prstDash val="solid"/>
-                      <a:round/>
-                      <a:headEnd type="none" w="med" len="med"/>
-                      <a:tailEnd type="none" w="med" len="med"/>
-                    </a:lnL>
-                    <a:lnR w="2540" cap="flat" cmpd="sng" algn="ctr">
-                      <a:solidFill>
-                        <a:srgbClr val="EEEEEE"/>
-                      </a:solidFill>
-                      <a:prstDash val="solid"/>
-                      <a:round/>
-                      <a:headEnd type="none" w="med" len="med"/>
-                      <a:tailEnd type="none" w="med" len="med"/>
-                    </a:lnR>
-                    <a:lnT w="2540" cap="flat" cmpd="sng" algn="ctr">
-                      <a:solidFill>
-                        <a:srgbClr val="EEEEEE"/>
-                      </a:solidFill>
-                      <a:prstDash val="solid"/>
-                      <a:round/>
-                      <a:headEnd type="none" w="med" len="med"/>
-                      <a:tailEnd type="none" w="med" len="med"/>
-                    </a:lnT>
-                    <a:lnB w="2540" cap="flat" cmpd="sng" algn="ctr">
-                      <a:solidFill>
-                        <a:srgbClr val="EEEEEE"/>
-                      </a:solidFill>
-                      <a:prstDash val="solid"/>
-                      <a:round/>
-                      <a:headEnd type="none" w="med" len="med"/>
-                      <a:tailEnd type="none" w="med" len="med"/>
-                    </a:lnB>
-                  </a:tcPr>
-                </a:tc>
-                <a:tc>
-                  <a:txBody>
-                    <a:bodyPr/>
-                    <a:lstStyle/>
-                    <a:p>
-                      <a:pPr algn="ctr" indent="0" marL="0">
-                        <a:buNone/>
-                      </a:pPr>
-                      <a:endParaRPr lang="en-US" sz="580" dirty="0">
-                        <a:latin typeface="Calibri" charset="0"/>
-                        <a:ea typeface="Calibri" charset="0"/>
-                        <a:cs typeface="Calibri" charset="0"/>
-                      </a:endParaRPr>
-                    </a:p>
-                  </a:txBody>
-                  <a:tcPr marL="91440" marR="91440" marT="45720" marB="45720">
-                    <a:lnL w="2540" cap="flat" cmpd="sng" algn="ctr">
-                      <a:solidFill>
-                        <a:srgbClr val="EEEEEE"/>
-                      </a:solidFill>
-                      <a:prstDash val="solid"/>
-                      <a:round/>
-                      <a:headEnd type="none" w="med" len="med"/>
-                      <a:tailEnd type="none" w="med" len="med"/>
-                    </a:lnL>
-                    <a:lnR w="2540" cap="flat" cmpd="sng" algn="ctr">
-                      <a:solidFill>
-                        <a:srgbClr val="EEEEEE"/>
-                      </a:solidFill>
-                      <a:prstDash val="solid"/>
-                      <a:round/>
-                      <a:headEnd type="none" w="med" len="med"/>
-                      <a:tailEnd type="none" w="med" len="med"/>
-                    </a:lnR>
-                    <a:lnT w="2540" cap="flat" cmpd="sng" algn="ctr">
-                      <a:solidFill>
-                        <a:srgbClr val="EEEEEE"/>
-                      </a:solidFill>
-                      <a:prstDash val="solid"/>
-                      <a:round/>
-                      <a:headEnd type="none" w="med" len="med"/>
-                      <a:tailEnd type="none" w="med" len="med"/>
-                    </a:lnT>
-                    <a:lnB w="2540" cap="flat" cmpd="sng" algn="ctr">
-                      <a:solidFill>
-                        <a:srgbClr val="EEEEEE"/>
-                      </a:solidFill>
-                      <a:prstDash val="solid"/>
-                      <a:round/>
-                      <a:headEnd type="none" w="med" len="med"/>
-                      <a:tailEnd type="none" w="med" len="med"/>
-                    </a:lnB>
-                  </a:tcPr>
-                </a:tc>
-                <a:tc>
-                  <a:txBody>
-                    <a:bodyPr/>
-                    <a:lstStyle/>
-                    <a:p>
-                      <a:pPr algn="ctr" indent="0" marL="0">
-                        <a:buNone/>
-                      </a:pPr>
-                      <a:endParaRPr lang="en-US" sz="580" dirty="0">
-                        <a:latin typeface="Calibri" charset="0"/>
-                        <a:ea typeface="Calibri" charset="0"/>
-                        <a:cs typeface="Calibri" charset="0"/>
-                      </a:endParaRPr>
-                    </a:p>
-                  </a:txBody>
-                  <a:tcPr marL="91440" marR="91440" marT="45720" marB="45720">
-                    <a:lnL w="2540" cap="flat" cmpd="sng" algn="ctr">
-                      <a:solidFill>
-                        <a:srgbClr val="EEEEEE"/>
-                      </a:solidFill>
-                      <a:prstDash val="solid"/>
-                      <a:round/>
-                      <a:headEnd type="none" w="med" len="med"/>
-                      <a:tailEnd type="none" w="med" len="med"/>
-                    </a:lnL>
-                    <a:lnR w="2540" cap="flat" cmpd="sng" algn="ctr">
-                      <a:solidFill>
-                        <a:srgbClr val="EEEEEE"/>
-                      </a:solidFill>
-                      <a:prstDash val="solid"/>
-                      <a:round/>
-                      <a:headEnd type="none" w="med" len="med"/>
-                      <a:tailEnd type="none" w="med" len="med"/>
-                    </a:lnR>
-                    <a:lnT w="2540" cap="flat" cmpd="sng" algn="ctr">
-                      <a:solidFill>
-                        <a:srgbClr val="EEEEEE"/>
-                      </a:solidFill>
-                      <a:prstDash val="solid"/>
-                      <a:round/>
-                      <a:headEnd type="none" w="med" len="med"/>
-                      <a:tailEnd type="none" w="med" len="med"/>
-                    </a:lnT>
-                    <a:lnB w="2540" cap="flat" cmpd="sng" algn="ctr">
-                      <a:solidFill>
-                        <a:srgbClr val="EEEEEE"/>
-                      </a:solidFill>
-                      <a:prstDash val="solid"/>
-                      <a:round/>
-                      <a:headEnd type="none" w="med" len="med"/>
-                      <a:tailEnd type="none" w="med" len="med"/>
-                    </a:lnB>
-                  </a:tcPr>
-                </a:tc>
-                <a:tc>
-                  <a:txBody>
-                    <a:bodyPr/>
-                    <a:lstStyle/>
-                    <a:p>
-                      <a:pPr algn="ctr" indent="0" marL="0">
-                        <a:buNone/>
-                      </a:pPr>
-                      <a:endParaRPr lang="en-US" sz="580" dirty="0">
-                        <a:latin typeface="Calibri" charset="0"/>
-                        <a:ea typeface="Calibri" charset="0"/>
-                        <a:cs typeface="Calibri" charset="0"/>
-                      </a:endParaRPr>
-                    </a:p>
-                  </a:txBody>
-                  <a:tcPr marL="91440" marR="91440" marT="45720" marB="45720">
-                    <a:lnL w="2540" cap="flat" cmpd="sng" algn="ctr">
-                      <a:solidFill>
-                        <a:srgbClr val="EEEEEE"/>
-                      </a:solidFill>
-                      <a:prstDash val="solid"/>
-                      <a:round/>
-                      <a:headEnd type="none" w="med" len="med"/>
-                      <a:tailEnd type="none" w="med" len="med"/>
-                    </a:lnL>
-                    <a:lnR w="2540" cap="flat" cmpd="sng" algn="ctr">
-                      <a:solidFill>
-                        <a:srgbClr val="EEEEEE"/>
-                      </a:solidFill>
-                      <a:prstDash val="solid"/>
-                      <a:round/>
-                      <a:headEnd type="none" w="med" len="med"/>
-                      <a:tailEnd type="none" w="med" len="med"/>
-                    </a:lnR>
-                    <a:lnT w="2540" cap="flat" cmpd="sng" algn="ctr">
-                      <a:solidFill>
-                        <a:srgbClr val="EEEEEE"/>
-                      </a:solidFill>
-                      <a:prstDash val="solid"/>
-                      <a:round/>
-                      <a:headEnd type="none" w="med" len="med"/>
-                      <a:tailEnd type="none" w="med" len="med"/>
-                    </a:lnT>
-                    <a:lnB w="2540" cap="flat" cmpd="sng" algn="ctr">
-                      <a:solidFill>
-                        <a:srgbClr val="EEEEEE"/>
-                      </a:solidFill>
-                      <a:prstDash val="solid"/>
-                      <a:round/>
-                      <a:headEnd type="none" w="med" len="med"/>
-                      <a:tailEnd type="none" w="med" len="med"/>
-                    </a:lnB>
-                  </a:tcPr>
-                </a:tc>
-                <a:tc>
-                  <a:txBody>
-                    <a:bodyPr/>
-                    <a:lstStyle/>
-                    <a:p>
-                      <a:pPr algn="ctr" indent="0" marL="0">
-                        <a:buNone/>
-                      </a:pPr>
-                      <a:endParaRPr lang="en-US" sz="580" dirty="0">
-                        <a:latin typeface="Calibri" charset="0"/>
-                        <a:ea typeface="Calibri" charset="0"/>
-                        <a:cs typeface="Calibri" charset="0"/>
-                      </a:endParaRPr>
-                    </a:p>
-                  </a:txBody>
-                  <a:tcPr marL="91440" marR="91440" marT="45720" marB="45720">
-                    <a:lnL w="2540" cap="flat" cmpd="sng" algn="ctr">
-                      <a:solidFill>
-                        <a:srgbClr val="EEEEEE"/>
-                      </a:solidFill>
-                      <a:prstDash val="solid"/>
-                      <a:round/>
-                      <a:headEnd type="none" w="med" len="med"/>
-                      <a:tailEnd type="none" w="med" len="med"/>
-                    </a:lnL>
-                    <a:lnR w="2540" cap="flat" cmpd="sng" algn="ctr">
-                      <a:solidFill>
-                        <a:srgbClr val="EEEEEE"/>
-                      </a:solidFill>
-                      <a:prstDash val="solid"/>
-                      <a:round/>
-                      <a:headEnd type="none" w="med" len="med"/>
-                      <a:tailEnd type="none" w="med" len="med"/>
-                    </a:lnR>
-                    <a:lnT w="2540" cap="flat" cmpd="sng" algn="ctr">
-                      <a:solidFill>
-                        <a:srgbClr val="EEEEEE"/>
-                      </a:solidFill>
-                      <a:prstDash val="solid"/>
-                      <a:round/>
-                      <a:headEnd type="none" w="med" len="med"/>
-                      <a:tailEnd type="none" w="med" len="med"/>
-                    </a:lnT>
-                    <a:lnB w="2540" cap="flat" cmpd="sng" algn="ctr">
-                      <a:solidFill>
-                        <a:srgbClr val="EEEEEE"/>
-                      </a:solidFill>
-                      <a:prstDash val="solid"/>
-                      <a:round/>
-                      <a:headEnd type="none" w="med" len="med"/>
-                      <a:tailEnd type="none" w="med" len="med"/>
-                    </a:lnB>
-                  </a:tcPr>
-                </a:tc>
-                <a:tc>
-                  <a:txBody>
-                    <a:bodyPr/>
-                    <a:lstStyle/>
-                    <a:p>
-                      <a:pPr algn="ctr" indent="0" marL="0">
-                        <a:buNone/>
-                      </a:pPr>
-                      <a:endParaRPr lang="en-US" sz="580" dirty="0">
-                        <a:latin typeface="Calibri" charset="0"/>
-                        <a:ea typeface="Calibri" charset="0"/>
-                        <a:cs typeface="Calibri" charset="0"/>
-                      </a:endParaRPr>
-                    </a:p>
-                  </a:txBody>
-                  <a:tcPr marL="91440" marR="91440" marT="45720" marB="45720">
-                    <a:lnL w="2540" cap="flat" cmpd="sng" algn="ctr">
-                      <a:solidFill>
-                        <a:srgbClr val="EEEEEE"/>
-                      </a:solidFill>
-                      <a:prstDash val="solid"/>
-                      <a:round/>
-                      <a:headEnd type="none" w="med" len="med"/>
-                      <a:tailEnd type="none" w="med" len="med"/>
-                    </a:lnL>
-                    <a:lnR w="2540" cap="flat" cmpd="sng" algn="ctr">
-                      <a:solidFill>
-                        <a:srgbClr val="EEEEEE"/>
-                      </a:solidFill>
-                      <a:prstDash val="solid"/>
-                      <a:round/>
-                      <a:headEnd type="none" w="med" len="med"/>
-                      <a:tailEnd type="none" w="med" len="med"/>
-                    </a:lnR>
-                    <a:lnT w="2540" cap="flat" cmpd="sng" algn="ctr">
-                      <a:solidFill>
-                        <a:srgbClr val="EEEEEE"/>
-                      </a:solidFill>
-                      <a:prstDash val="solid"/>
-                      <a:round/>
-                      <a:headEnd type="none" w="med" len="med"/>
-                      <a:tailEnd type="none" w="med" len="med"/>
-                    </a:lnT>
-                    <a:lnB w="2540" cap="flat" cmpd="sng" algn="ctr">
-                      <a:solidFill>
-                        <a:srgbClr val="EEEEEE"/>
-                      </a:solidFill>
-                      <a:prstDash val="solid"/>
-                      <a:round/>
-                      <a:headEnd type="none" w="med" len="med"/>
-                      <a:tailEnd type="none" w="med" len="med"/>
-                    </a:lnB>
-                  </a:tcPr>
-                </a:tc>
-                <a:tc>
-                  <a:txBody>
-                    <a:bodyPr/>
-                    <a:lstStyle/>
-                    <a:p>
-                      <a:pPr algn="ctr" indent="0" marL="0">
-                        <a:buNone/>
-                      </a:pPr>
-                      <a:endParaRPr lang="en-US" sz="580" dirty="0">
-                        <a:latin typeface="Calibri" charset="0"/>
-                        <a:ea typeface="Calibri" charset="0"/>
-                        <a:cs typeface="Calibri" charset="0"/>
-                      </a:endParaRPr>
-                    </a:p>
-                  </a:txBody>
-                  <a:tcPr marL="91440" marR="91440" marT="45720" marB="45720">
-                    <a:lnL w="2540" cap="flat" cmpd="sng" algn="ctr">
-                      <a:solidFill>
-                        <a:srgbClr val="EEEEEE"/>
-                      </a:solidFill>
-                      <a:prstDash val="solid"/>
-                      <a:round/>
-                      <a:headEnd type="none" w="med" len="med"/>
-                      <a:tailEnd type="none" w="med" len="med"/>
-                    </a:lnL>
-                    <a:lnR w="2540" cap="flat" cmpd="sng" algn="ctr">
-                      <a:solidFill>
-                        <a:srgbClr val="EEEEEE"/>
-                      </a:solidFill>
-                      <a:prstDash val="solid"/>
-                      <a:round/>
-                      <a:headEnd type="none" w="med" len="med"/>
-                      <a:tailEnd type="none" w="med" len="med"/>
-                    </a:lnR>
-                    <a:lnT w="2540" cap="flat" cmpd="sng" algn="ctr">
-                      <a:solidFill>
-                        <a:srgbClr val="EEEEEE"/>
-                      </a:solidFill>
-                      <a:prstDash val="solid"/>
-                      <a:round/>
-                      <a:headEnd type="none" w="med" len="med"/>
-                      <a:tailEnd type="none" w="med" len="med"/>
-                    </a:lnT>
-                    <a:lnB w="2540" cap="flat" cmpd="sng" algn="ctr">
-                      <a:solidFill>
-                        <a:srgbClr val="EEEEEE"/>
-                      </a:solidFill>
-                      <a:prstDash val="solid"/>
-                      <a:round/>
-                      <a:headEnd type="none" w="med" len="med"/>
-                      <a:tailEnd type="none" w="med" len="med"/>
-                    </a:lnB>
-                  </a:tcPr>
-                </a:tc>
-                <a:tc>
-                  <a:txBody>
-                    <a:bodyPr/>
-                    <a:lstStyle/>
-                    <a:p>
-                      <a:pPr algn="ctr" indent="0" marL="0">
-                        <a:buNone/>
-                      </a:pPr>
-                      <a:endParaRPr lang="en-US" sz="580" dirty="0">
-                        <a:latin typeface="Calibri" charset="0"/>
-                        <a:ea typeface="Calibri" charset="0"/>
-                        <a:cs typeface="Calibri" charset="0"/>
-                      </a:endParaRPr>
-                    </a:p>
-                  </a:txBody>
-                  <a:tcPr marL="91440" marR="91440" marT="45720" marB="45720">
-                    <a:lnL w="2540" cap="flat" cmpd="sng" algn="ctr">
-                      <a:solidFill>
-                        <a:srgbClr val="EEEEEE"/>
-                      </a:solidFill>
-                      <a:prstDash val="solid"/>
-                      <a:round/>
-                      <a:headEnd type="none" w="med" len="med"/>
-                      <a:tailEnd type="none" w="med" len="med"/>
-                    </a:lnL>
-                    <a:lnR w="2540" cap="flat" cmpd="sng" algn="ctr">
-                      <a:solidFill>
-                        <a:srgbClr val="EEEEEE"/>
-                      </a:solidFill>
-                      <a:prstDash val="solid"/>
-                      <a:round/>
-                      <a:headEnd type="none" w="med" len="med"/>
-                      <a:tailEnd type="none" w="med" len="med"/>
-                    </a:lnR>
-                    <a:lnT w="2540" cap="flat" cmpd="sng" algn="ctr">
-                      <a:solidFill>
-                        <a:srgbClr val="EEEEEE"/>
-                      </a:solidFill>
-                      <a:prstDash val="solid"/>
-                      <a:round/>
-                      <a:headEnd type="none" w="med" len="med"/>
-                      <a:tailEnd type="none" w="med" len="med"/>
-                    </a:lnT>
-                    <a:lnB w="2540" cap="flat" cmpd="sng" algn="ctr">
-                      <a:solidFill>
-                        <a:srgbClr val="EEEEEE"/>
-                      </a:solidFill>
-                      <a:prstDash val="solid"/>
-                      <a:round/>
-                      <a:headEnd type="none" w="med" len="med"/>
-                      <a:tailEnd type="none" w="med" len="med"/>
-                    </a:lnB>
-                  </a:tcPr>
-                </a:tc>
-                <a:tc>
-                  <a:txBody>
-                    <a:bodyPr/>
-                    <a:lstStyle/>
-                    <a:p>
-                      <a:pPr algn="ctr" indent="0" marL="0">
-                        <a:buNone/>
-                      </a:pPr>
-                      <a:endParaRPr lang="en-US" sz="580" dirty="0">
-                        <a:latin typeface="Calibri" charset="0"/>
-                        <a:ea typeface="Calibri" charset="0"/>
-                        <a:cs typeface="Calibri" charset="0"/>
-                      </a:endParaRPr>
-                    </a:p>
-                  </a:txBody>
-                  <a:tcPr marL="91440" marR="91440" marT="45720" marB="45720">
-                    <a:lnL w="2540" cap="flat" cmpd="sng" algn="ctr">
-                      <a:solidFill>
-                        <a:srgbClr val="EEEEEE"/>
-                      </a:solidFill>
-                      <a:prstDash val="solid"/>
-                      <a:round/>
-                      <a:headEnd type="none" w="med" len="med"/>
-                      <a:tailEnd type="none" w="med" len="med"/>
-                    </a:lnL>
-                    <a:lnR w="2540" cap="flat" cmpd="sng" algn="ctr">
-                      <a:solidFill>
-                        <a:srgbClr val="EEEEEE"/>
-                      </a:solidFill>
-                      <a:prstDash val="solid"/>
-                      <a:round/>
-                      <a:headEnd type="none" w="med" len="med"/>
-                      <a:tailEnd type="none" w="med" len="med"/>
-                    </a:lnR>
-                    <a:lnT w="2540" cap="flat" cmpd="sng" algn="ctr">
-                      <a:solidFill>
-                        <a:srgbClr val="EEEEEE"/>
-                      </a:solidFill>
-                      <a:prstDash val="solid"/>
-                      <a:round/>
-                      <a:headEnd type="none" w="med" len="med"/>
-                      <a:tailEnd type="none" w="med" len="med"/>
-                    </a:lnT>
-                    <a:lnB w="2540" cap="flat" cmpd="sng" algn="ctr">
-                      <a:solidFill>
-                        <a:srgbClr val="EEEEEE"/>
-                      </a:solidFill>
-                      <a:prstDash val="solid"/>
-                      <a:round/>
-                      <a:headEnd type="none" w="med" len="med"/>
-                      <a:tailEnd type="none" w="med" len="med"/>
-                    </a:lnB>
-                  </a:tcPr>
-                </a:tc>
-              </a:tr>
-              <a:tr h="123444">
-                <a:tc>
-                  <a:txBody>
-                    <a:bodyPr/>
-                    <a:lstStyle/>
-                    <a:p>
-                      <a:pPr algn="l" indent="0" marL="0">
-                        <a:buNone/>
-                      </a:pPr>
-                      <a:r>
-                        <a:rPr lang="en-US" sz="580" b="1" dirty="0">
-                          <a:solidFill>
-                            <a:srgbClr val="000000"/>
-                          </a:solidFill>
-                          <a:latin typeface="Calibri" pitchFamily="34" charset="0"/>
-                          <a:ea typeface="Calibri" pitchFamily="34" charset="-122"/>
-                          <a:cs typeface="Calibri" pitchFamily="34" charset="-120"/>
-                        </a:rPr>
-                        <a:t>2026</a:t>
-                      </a:r>
-                      <a:endParaRPr lang="en-US" sz="580" dirty="0">
-                        <a:latin typeface="Calibri" charset="0"/>
-                        <a:ea typeface="Calibri" charset="0"/>
-                        <a:cs typeface="Calibri" charset="0"/>
-                      </a:endParaRPr>
-                    </a:p>
-                  </a:txBody>
-                  <a:tcPr marL="91440" marR="91440" marT="45720" marB="45720">
-                    <a:lnL w="2540" cap="flat" cmpd="sng" algn="ctr">
-                      <a:solidFill>
-                        <a:srgbClr val="EEEEEE"/>
-                      </a:solidFill>
-                      <a:prstDash val="solid"/>
-                      <a:round/>
-                      <a:headEnd type="none" w="med" len="med"/>
-                      <a:tailEnd type="none" w="med" len="med"/>
-                    </a:lnL>
-                    <a:lnR w="2540" cap="flat" cmpd="sng" algn="ctr">
-                      <a:solidFill>
-                        <a:srgbClr val="EEEEEE"/>
-                      </a:solidFill>
-                      <a:prstDash val="solid"/>
-                      <a:round/>
-                      <a:headEnd type="none" w="med" len="med"/>
-                      <a:tailEnd type="none" w="med" len="med"/>
-                    </a:lnR>
-                    <a:lnT w="2540" cap="flat" cmpd="sng" algn="ctr">
-                      <a:solidFill>
-                        <a:srgbClr val="EEEEEE"/>
-                      </a:solidFill>
-                      <a:prstDash val="solid"/>
-                      <a:round/>
-                      <a:headEnd type="none" w="med" len="med"/>
-                      <a:tailEnd type="none" w="med" len="med"/>
-                    </a:lnT>
-                    <a:lnB w="2540" cap="flat" cmpd="sng" algn="ctr">
-                      <a:solidFill>
-                        <a:srgbClr val="EEEEEE"/>
-                      </a:solidFill>
-                      <a:prstDash val="solid"/>
-                      <a:round/>
-                      <a:headEnd type="none" w="med" len="med"/>
-                      <a:tailEnd type="none" w="med" len="med"/>
-                    </a:lnB>
-                  </a:tcPr>
-                </a:tc>
-                <a:tc>
-                  <a:txBody>
-                    <a:bodyPr/>
-                    <a:lstStyle/>
-                    <a:p>
-                      <a:pPr algn="l" indent="0" marL="0">
-                        <a:buNone/>
-                      </a:pPr>
-                      <a:r>
-                        <a:rPr lang="en-US" sz="580" dirty="0">
-                          <a:solidFill>
-                            <a:srgbClr val="666666"/>
-                          </a:solidFill>
-                          <a:latin typeface="Calibri" pitchFamily="34" charset="0"/>
-                          <a:ea typeface="Calibri" pitchFamily="34" charset="-122"/>
-                          <a:cs typeface="Calibri" pitchFamily="34" charset="-120"/>
-                        </a:rPr>
-                        <a:t>ICP</a:t>
-                      </a:r>
-                      <a:endParaRPr lang="en-US" sz="580" dirty="0">
-                        <a:latin typeface="Calibri" charset="0"/>
-                        <a:ea typeface="Calibri" charset="0"/>
-                        <a:cs typeface="Calibri" charset="0"/>
-                      </a:endParaRPr>
-                    </a:p>
-                  </a:txBody>
-                  <a:tcPr marL="91440" marR="91440" marT="45720" marB="45720">
-                    <a:lnL w="2540" cap="flat" cmpd="sng" algn="ctr">
-                      <a:solidFill>
-                        <a:srgbClr val="EEEEEE"/>
-                      </a:solidFill>
-                      <a:prstDash val="solid"/>
-                      <a:round/>
-                      <a:headEnd type="none" w="med" len="med"/>
-                      <a:tailEnd type="none" w="med" len="med"/>
-                    </a:lnL>
-                    <a:lnR w="2540" cap="flat" cmpd="sng" algn="ctr">
-                      <a:solidFill>
-                        <a:srgbClr val="EEEEEE"/>
-                      </a:solidFill>
-                      <a:prstDash val="solid"/>
-                      <a:round/>
-                      <a:headEnd type="none" w="med" len="med"/>
-                      <a:tailEnd type="none" w="med" len="med"/>
-                    </a:lnR>
-                    <a:lnT w="2540" cap="flat" cmpd="sng" algn="ctr">
-                      <a:solidFill>
-                        <a:srgbClr val="EEEEEE"/>
-                      </a:solidFill>
-                      <a:prstDash val="solid"/>
-                      <a:round/>
-                      <a:headEnd type="none" w="med" len="med"/>
-                      <a:tailEnd type="none" w="med" len="med"/>
-                    </a:lnT>
-                    <a:lnB w="2540" cap="flat" cmpd="sng" algn="ctr">
-                      <a:solidFill>
-                        <a:srgbClr val="EEEEEE"/>
-                      </a:solidFill>
-                      <a:prstDash val="solid"/>
-                      <a:round/>
-                      <a:headEnd type="none" w="med" len="med"/>
-                      <a:tailEnd type="none" w="med" len="med"/>
-                    </a:lnB>
-                  </a:tcPr>
-                </a:tc>
-                <a:tc>
-                  <a:txBody>
-                    <a:bodyPr/>
-                    <a:lstStyle/>
-                    <a:p>
-                      <a:pPr algn="ctr" indent="0" marL="0">
-                        <a:buNone/>
-                      </a:pPr>
-                      <a:r>
-                        <a:rPr lang="en-US" sz="580" dirty="0">
-                          <a:solidFill>
-                            <a:srgbClr val="666666"/>
-                          </a:solidFill>
-                          <a:latin typeface="Calibri" pitchFamily="34" charset="0"/>
-                          <a:ea typeface="Calibri" pitchFamily="34" charset="-122"/>
-                          <a:cs typeface="Calibri" pitchFamily="34" charset="-120"/>
-                        </a:rPr>
-                        <a:t>0,80%</a:t>
-                      </a:r>
-                      <a:endParaRPr lang="en-US" sz="580" dirty="0">
-                        <a:latin typeface="Calibri" charset="0"/>
-                        <a:ea typeface="Calibri" charset="0"/>
-                        <a:cs typeface="Calibri" charset="0"/>
-                      </a:endParaRPr>
-                    </a:p>
-                  </a:txBody>
-                  <a:tcPr marL="91440" marR="91440" marT="45720" marB="45720">
-                    <a:lnL w="2540" cap="flat" cmpd="sng" algn="ctr">
-                      <a:solidFill>
-                        <a:srgbClr val="EEEEEE"/>
-                      </a:solidFill>
-                      <a:prstDash val="solid"/>
-                      <a:round/>
-                      <a:headEnd type="none" w="med" len="med"/>
-                      <a:tailEnd type="none" w="med" len="med"/>
-                    </a:lnL>
-                    <a:lnR w="2540" cap="flat" cmpd="sng" algn="ctr">
-                      <a:solidFill>
-                        <a:srgbClr val="EEEEEE"/>
-                      </a:solidFill>
-                      <a:prstDash val="solid"/>
-                      <a:round/>
-                      <a:headEnd type="none" w="med" len="med"/>
-                      <a:tailEnd type="none" w="med" len="med"/>
-                    </a:lnR>
-                    <a:lnT w="2540" cap="flat" cmpd="sng" algn="ctr">
-                      <a:solidFill>
-                        <a:srgbClr val="EEEEEE"/>
-                      </a:solidFill>
-                      <a:prstDash val="solid"/>
-                      <a:round/>
-                      <a:headEnd type="none" w="med" len="med"/>
-                      <a:tailEnd type="none" w="med" len="med"/>
-                    </a:lnT>
-                    <a:lnB w="2540" cap="flat" cmpd="sng" algn="ctr">
-                      <a:solidFill>
-                        <a:srgbClr val="EEEEEE"/>
-                      </a:solidFill>
-                      <a:prstDash val="solid"/>
-                      <a:round/>
-                      <a:headEnd type="none" w="med" len="med"/>
-                      <a:tailEnd type="none" w="med" len="med"/>
-                    </a:lnB>
-                  </a:tcPr>
-                </a:tc>
-                <a:tc>
-                  <a:txBody>
-                    <a:bodyPr/>
-                    <a:lstStyle/>
-                    <a:p>
-                      <a:pPr algn="ctr" indent="0" marL="0">
-                        <a:buNone/>
-                      </a:pPr>
-                      <a:r>
-                        <a:rPr lang="en-US" sz="580" dirty="0">
-                          <a:solidFill>
-                            <a:srgbClr val="666666"/>
-                          </a:solidFill>
-                          <a:latin typeface="Calibri" pitchFamily="34" charset="0"/>
-                          <a:ea typeface="Calibri" pitchFamily="34" charset="-122"/>
-                          <a:cs typeface="Calibri" pitchFamily="34" charset="-120"/>
-                        </a:rPr>
-                        <a:t>0,73%</a:t>
-                      </a:r>
-                      <a:endParaRPr lang="en-US" sz="580" dirty="0">
-                        <a:latin typeface="Calibri" charset="0"/>
-                        <a:ea typeface="Calibri" charset="0"/>
-                        <a:cs typeface="Calibri" charset="0"/>
-                      </a:endParaRPr>
-                    </a:p>
-                  </a:txBody>
-                  <a:tcPr marL="91440" marR="91440" marT="45720" marB="45720">
-                    <a:lnL w="2540" cap="flat" cmpd="sng" algn="ctr">
-                      <a:solidFill>
-                        <a:srgbClr val="EEEEEE"/>
-                      </a:solidFill>
-                      <a:prstDash val="solid"/>
-                      <a:round/>
-                      <a:headEnd type="none" w="med" len="med"/>
-                      <a:tailEnd type="none" w="med" len="med"/>
-                    </a:lnL>
-                    <a:lnR w="2540" cap="flat" cmpd="sng" algn="ctr">
-                      <a:solidFill>
-                        <a:srgbClr val="EEEEEE"/>
-                      </a:solidFill>
-                      <a:prstDash val="solid"/>
-                      <a:round/>
-                      <a:headEnd type="none" w="med" len="med"/>
-                      <a:tailEnd type="none" w="med" len="med"/>
-                    </a:lnR>
-                    <a:lnT w="2540" cap="flat" cmpd="sng" algn="ctr">
-                      <a:solidFill>
-                        <a:srgbClr val="EEEEEE"/>
-                      </a:solidFill>
-                      <a:prstDash val="solid"/>
-                      <a:round/>
-                      <a:headEnd type="none" w="med" len="med"/>
-                      <a:tailEnd type="none" w="med" len="med"/>
-                    </a:lnT>
-                    <a:lnB w="2540" cap="flat" cmpd="sng" algn="ctr">
-                      <a:solidFill>
-                        <a:srgbClr val="EEEEEE"/>
-                      </a:solidFill>
-                      <a:prstDash val="solid"/>
-                      <a:round/>
-                      <a:headEnd type="none" w="med" len="med"/>
-                      <a:tailEnd type="none" w="med" len="med"/>
-                    </a:lnB>
-                  </a:tcPr>
-                </a:tc>
-                <a:tc>
-                  <a:txBody>
-                    <a:bodyPr/>
-                    <a:lstStyle/>
-                    <a:p>
-                      <a:pPr algn="ctr" indent="0" marL="0">
-                        <a:buNone/>
-                      </a:pPr>
-                      <a:r>
-                        <a:rPr lang="en-US" sz="580" dirty="0">
-                          <a:solidFill>
-                            <a:srgbClr val="666666"/>
-                          </a:solidFill>
-                          <a:latin typeface="Calibri" pitchFamily="34" charset="0"/>
-                          <a:ea typeface="Calibri" pitchFamily="34" charset="-122"/>
-                          <a:cs typeface="Calibri" pitchFamily="34" charset="-120"/>
-                        </a:rPr>
-                        <a:t>0,00%</a:t>
-                      </a:r>
-                      <a:endParaRPr lang="en-US" sz="580" dirty="0">
-                        <a:latin typeface="Calibri" charset="0"/>
-                        <a:ea typeface="Calibri" charset="0"/>
-                        <a:cs typeface="Calibri" charset="0"/>
-                      </a:endParaRPr>
-                    </a:p>
-                  </a:txBody>
-                  <a:tcPr marL="91440" marR="91440" marT="45720" marB="45720">
-                    <a:lnL w="2540" cap="flat" cmpd="sng" algn="ctr">
-                      <a:solidFill>
-                        <a:srgbClr val="EEEEEE"/>
-                      </a:solidFill>
-                      <a:prstDash val="solid"/>
-                      <a:round/>
-                      <a:headEnd type="none" w="med" len="med"/>
-                      <a:tailEnd type="none" w="med" len="med"/>
-                    </a:lnL>
-                    <a:lnR w="2540" cap="flat" cmpd="sng" algn="ctr">
-                      <a:solidFill>
-                        <a:srgbClr val="EEEEEE"/>
-                      </a:solidFill>
-                      <a:prstDash val="solid"/>
-                      <a:round/>
-                      <a:headEnd type="none" w="med" len="med"/>
-                      <a:tailEnd type="none" w="med" len="med"/>
-                    </a:lnR>
-                    <a:lnT w="2540" cap="flat" cmpd="sng" algn="ctr">
-                      <a:solidFill>
-                        <a:srgbClr val="EEEEEE"/>
-                      </a:solidFill>
-                      <a:prstDash val="solid"/>
-                      <a:round/>
-                      <a:headEnd type="none" w="med" len="med"/>
-                      <a:tailEnd type="none" w="med" len="med"/>
-                    </a:lnT>
-                    <a:lnB w="2540" cap="flat" cmpd="sng" algn="ctr">
-                      <a:solidFill>
-                        <a:srgbClr val="EEEEEE"/>
-                      </a:solidFill>
-                      <a:prstDash val="solid"/>
-                      <a:round/>
-                      <a:headEnd type="none" w="med" len="med"/>
-                      <a:tailEnd type="none" w="med" len="med"/>
-                    </a:lnB>
-                  </a:tcPr>
-                </a:tc>
-                <a:tc>
-                  <a:txBody>
-                    <a:bodyPr/>
-                    <a:lstStyle/>
-                    <a:p>
-                      <a:pPr algn="ctr" indent="0" marL="0">
-                        <a:buNone/>
-                      </a:pPr>
-                      <a:r>
-                        <a:rPr lang="en-US" sz="580" dirty="0">
-                          <a:solidFill>
-                            <a:srgbClr val="666666"/>
-                          </a:solidFill>
-                          <a:latin typeface="Calibri" pitchFamily="34" charset="0"/>
-                          <a:ea typeface="Calibri" pitchFamily="34" charset="-122"/>
-                          <a:cs typeface="Calibri" pitchFamily="34" charset="-120"/>
-                        </a:rPr>
-                        <a:t>0,78%</a:t>
-                      </a:r>
-                      <a:endParaRPr lang="en-US" sz="580" dirty="0">
-                        <a:latin typeface="Calibri" charset="0"/>
-                        <a:ea typeface="Calibri" charset="0"/>
-                        <a:cs typeface="Calibri" charset="0"/>
-                      </a:endParaRPr>
-                    </a:p>
-                  </a:txBody>
-                  <a:tcPr marL="91440" marR="91440" marT="45720" marB="45720">
-                    <a:lnL w="2540" cap="flat" cmpd="sng" algn="ctr">
-                      <a:solidFill>
-                        <a:srgbClr val="EEEEEE"/>
-                      </a:solidFill>
-                      <a:prstDash val="solid"/>
-                      <a:round/>
-                      <a:headEnd type="none" w="med" len="med"/>
-                      <a:tailEnd type="none" w="med" len="med"/>
-                    </a:lnL>
-                    <a:lnR w="2540" cap="flat" cmpd="sng" algn="ctr">
-                      <a:solidFill>
-                        <a:srgbClr val="EEEEEE"/>
-                      </a:solidFill>
-                      <a:prstDash val="solid"/>
-                      <a:round/>
-                      <a:headEnd type="none" w="med" len="med"/>
-                      <a:tailEnd type="none" w="med" len="med"/>
-                    </a:lnR>
-                    <a:lnT w="2540" cap="flat" cmpd="sng" algn="ctr">
-                      <a:solidFill>
-                        <a:srgbClr val="EEEEEE"/>
-                      </a:solidFill>
-                      <a:prstDash val="solid"/>
-                      <a:round/>
-                      <a:headEnd type="none" w="med" len="med"/>
-                      <a:tailEnd type="none" w="med" len="med"/>
-                    </a:lnT>
-                    <a:lnB w="2540" cap="flat" cmpd="sng" algn="ctr">
-                      <a:solidFill>
-                        <a:srgbClr val="EEEEEE"/>
-                      </a:solidFill>
-                      <a:prstDash val="solid"/>
-                      <a:round/>
-                      <a:headEnd type="none" w="med" len="med"/>
-                      <a:tailEnd type="none" w="med" len="med"/>
-                    </a:lnB>
-                  </a:tcPr>
-                </a:tc>
-                <a:tc>
-                  <a:txBody>
-                    <a:bodyPr/>
-                    <a:lstStyle/>
-                    <a:p>
-                      <a:pPr algn="ctr" indent="0" marL="0">
-                        <a:buNone/>
-                      </a:pPr>
-                      <a:endParaRPr lang="en-US" sz="580" dirty="0">
-                        <a:latin typeface="Calibri" charset="0"/>
-                        <a:ea typeface="Calibri" charset="0"/>
-                        <a:cs typeface="Calibri" charset="0"/>
-                      </a:endParaRPr>
-                    </a:p>
-                  </a:txBody>
-                  <a:tcPr marL="91440" marR="91440" marT="45720" marB="45720">
-                    <a:lnL w="2540" cap="flat" cmpd="sng" algn="ctr">
-                      <a:solidFill>
-                        <a:srgbClr val="EEEEEE"/>
-                      </a:solidFill>
-                      <a:prstDash val="solid"/>
-                      <a:round/>
-                      <a:headEnd type="none" w="med" len="med"/>
-                      <a:tailEnd type="none" w="med" len="med"/>
-                    </a:lnL>
-                    <a:lnR w="2540" cap="flat" cmpd="sng" algn="ctr">
-                      <a:solidFill>
-                        <a:srgbClr val="EEEEEE"/>
-                      </a:solidFill>
-                      <a:prstDash val="solid"/>
-                      <a:round/>
-                      <a:headEnd type="none" w="med" len="med"/>
-                      <a:tailEnd type="none" w="med" len="med"/>
-                    </a:lnR>
-                    <a:lnT w="2540" cap="flat" cmpd="sng" algn="ctr">
-                      <a:solidFill>
-                        <a:srgbClr val="EEEEEE"/>
-                      </a:solidFill>
-                      <a:prstDash val="solid"/>
-                      <a:round/>
-                      <a:headEnd type="none" w="med" len="med"/>
-                      <a:tailEnd type="none" w="med" len="med"/>
-                    </a:lnT>
-                    <a:lnB w="2540" cap="flat" cmpd="sng" algn="ctr">
-                      <a:solidFill>
-                        <a:srgbClr val="EEEEEE"/>
-                      </a:solidFill>
-                      <a:prstDash val="solid"/>
-                      <a:round/>
-                      <a:headEnd type="none" w="med" len="med"/>
-                      <a:tailEnd type="none" w="med" len="med"/>
-                    </a:lnB>
-                  </a:tcPr>
-                </a:tc>
-                <a:tc>
-                  <a:txBody>
-                    <a:bodyPr/>
-                    <a:lstStyle/>
-                    <a:p>
-                      <a:pPr algn="ctr" indent="0" marL="0">
-                        <a:buNone/>
-                      </a:pPr>
-                      <a:endParaRPr lang="en-US" sz="580" dirty="0">
-                        <a:latin typeface="Calibri" charset="0"/>
-                        <a:ea typeface="Calibri" charset="0"/>
-                        <a:cs typeface="Calibri" charset="0"/>
-                      </a:endParaRPr>
-                    </a:p>
-                  </a:txBody>
-                  <a:tcPr marL="91440" marR="91440" marT="45720" marB="45720">
-                    <a:lnL w="2540" cap="flat" cmpd="sng" algn="ctr">
-                      <a:solidFill>
-                        <a:srgbClr val="EEEEEE"/>
-                      </a:solidFill>
-                      <a:prstDash val="solid"/>
-                      <a:round/>
-                      <a:headEnd type="none" w="med" len="med"/>
-                      <a:tailEnd type="none" w="med" len="med"/>
-                    </a:lnL>
-                    <a:lnR w="2540" cap="flat" cmpd="sng" algn="ctr">
-                      <a:solidFill>
-                        <a:srgbClr val="EEEEEE"/>
-                      </a:solidFill>
-                      <a:prstDash val="solid"/>
-                      <a:round/>
-                      <a:headEnd type="none" w="med" len="med"/>
-                      <a:tailEnd type="none" w="med" len="med"/>
-                    </a:lnR>
-                    <a:lnT w="2540" cap="flat" cmpd="sng" algn="ctr">
-                      <a:solidFill>
-                        <a:srgbClr val="EEEEEE"/>
-                      </a:solidFill>
-                      <a:prstDash val="solid"/>
-                      <a:round/>
-                      <a:headEnd type="none" w="med" len="med"/>
-                      <a:tailEnd type="none" w="med" len="med"/>
-                    </a:lnT>
-                    <a:lnB w="2540" cap="flat" cmpd="sng" algn="ctr">
-                      <a:solidFill>
-                        <a:srgbClr val="EEEEEE"/>
-                      </a:solidFill>
-                      <a:prstDash val="solid"/>
-                      <a:round/>
-                      <a:headEnd type="none" w="med" len="med"/>
-                      <a:tailEnd type="none" w="med" len="med"/>
-                    </a:lnB>
-                  </a:tcPr>
-                </a:tc>
-                <a:tc>
-                  <a:txBody>
-                    <a:bodyPr/>
-                    <a:lstStyle/>
-                    <a:p>
-                      <a:pPr algn="ctr" indent="0" marL="0">
-                        <a:buNone/>
-                      </a:pPr>
-                      <a:endParaRPr lang="en-US" sz="580" dirty="0">
-                        <a:latin typeface="Calibri" charset="0"/>
-                        <a:ea typeface="Calibri" charset="0"/>
-                        <a:cs typeface="Calibri" charset="0"/>
-                      </a:endParaRPr>
-                    </a:p>
-                  </a:txBody>
-                  <a:tcPr marL="91440" marR="91440" marT="45720" marB="45720">
-                    <a:lnL w="2540" cap="flat" cmpd="sng" algn="ctr">
-                      <a:solidFill>
-                        <a:srgbClr val="EEEEEE"/>
-                      </a:solidFill>
-                      <a:prstDash val="solid"/>
-                      <a:round/>
-                      <a:headEnd type="none" w="med" len="med"/>
-                      <a:tailEnd type="none" w="med" len="med"/>
-                    </a:lnL>
-                    <a:lnR w="2540" cap="flat" cmpd="sng" algn="ctr">
-                      <a:solidFill>
-                        <a:srgbClr val="EEEEEE"/>
-                      </a:solidFill>
-                      <a:prstDash val="solid"/>
-                      <a:round/>
-                      <a:headEnd type="none" w="med" len="med"/>
-                      <a:tailEnd type="none" w="med" len="med"/>
-                    </a:lnR>
-                    <a:lnT w="2540" cap="flat" cmpd="sng" algn="ctr">
-                      <a:solidFill>
-                        <a:srgbClr val="EEEEEE"/>
-                      </a:solidFill>
-                      <a:prstDash val="solid"/>
-                      <a:round/>
-                      <a:headEnd type="none" w="med" len="med"/>
-                      <a:tailEnd type="none" w="med" len="med"/>
-                    </a:lnT>
-                    <a:lnB w="2540" cap="flat" cmpd="sng" algn="ctr">
-                      <a:solidFill>
-                        <a:srgbClr val="EEEEEE"/>
-                      </a:solidFill>
-                      <a:prstDash val="solid"/>
-                      <a:round/>
-                      <a:headEnd type="none" w="med" len="med"/>
-                      <a:tailEnd type="none" w="med" len="med"/>
-                    </a:lnB>
-                  </a:tcPr>
-                </a:tc>
-                <a:tc>
-                  <a:txBody>
-                    <a:bodyPr/>
-                    <a:lstStyle/>
-                    <a:p>
-                      <a:pPr algn="ctr" indent="0" marL="0">
-                        <a:buNone/>
-                      </a:pPr>
-                      <a:endParaRPr lang="en-US" sz="580" dirty="0">
-                        <a:latin typeface="Calibri" charset="0"/>
-                        <a:ea typeface="Calibri" charset="0"/>
-                        <a:cs typeface="Calibri" charset="0"/>
-                      </a:endParaRPr>
-                    </a:p>
-                  </a:txBody>
-                  <a:tcPr marL="91440" marR="91440" marT="45720" marB="45720">
-                    <a:lnL w="2540" cap="flat" cmpd="sng" algn="ctr">
-                      <a:solidFill>
-                        <a:srgbClr val="EEEEEE"/>
-                      </a:solidFill>
-                      <a:prstDash val="solid"/>
-                      <a:round/>
-                      <a:headEnd type="none" w="med" len="med"/>
-                      <a:tailEnd type="none" w="med" len="med"/>
-                    </a:lnL>
-                    <a:lnR w="2540" cap="flat" cmpd="sng" algn="ctr">
-                      <a:solidFill>
-                        <a:srgbClr val="EEEEEE"/>
-                      </a:solidFill>
-                      <a:prstDash val="solid"/>
-                      <a:round/>
-                      <a:headEnd type="none" w="med" len="med"/>
-                      <a:tailEnd type="none" w="med" len="med"/>
-                    </a:lnR>
-                    <a:lnT w="2540" cap="flat" cmpd="sng" algn="ctr">
-                      <a:solidFill>
-                        <a:srgbClr val="EEEEEE"/>
-                      </a:solidFill>
-                      <a:prstDash val="solid"/>
-                      <a:round/>
-                      <a:headEnd type="none" w="med" len="med"/>
-                      <a:tailEnd type="none" w="med" len="med"/>
-                    </a:lnT>
-                    <a:lnB w="2540" cap="flat" cmpd="sng" algn="ctr">
-                      <a:solidFill>
-                        <a:srgbClr val="EEEEEE"/>
-                      </a:solidFill>
-                      <a:prstDash val="solid"/>
-                      <a:round/>
-                      <a:headEnd type="none" w="med" len="med"/>
-                      <a:tailEnd type="none" w="med" len="med"/>
-                    </a:lnB>
-                  </a:tcPr>
-                </a:tc>
-                <a:tc>
-                  <a:txBody>
-                    <a:bodyPr/>
-                    <a:lstStyle/>
-                    <a:p>
-                      <a:pPr algn="ctr" indent="0" marL="0">
-                        <a:buNone/>
-                      </a:pPr>
-                      <a:endParaRPr lang="en-US" sz="580" dirty="0">
-                        <a:latin typeface="Calibri" charset="0"/>
-                        <a:ea typeface="Calibri" charset="0"/>
-                        <a:cs typeface="Calibri" charset="0"/>
-                      </a:endParaRPr>
-                    </a:p>
-                  </a:txBody>
-                  <a:tcPr marL="91440" marR="91440" marT="45720" marB="45720">
-                    <a:lnL w="2540" cap="flat" cmpd="sng" algn="ctr">
-                      <a:solidFill>
-                        <a:srgbClr val="EEEEEE"/>
-                      </a:solidFill>
-                      <a:prstDash val="solid"/>
-                      <a:round/>
-                      <a:headEnd type="none" w="med" len="med"/>
-                      <a:tailEnd type="none" w="med" len="med"/>
-                    </a:lnL>
-                    <a:lnR w="2540" cap="flat" cmpd="sng" algn="ctr">
-                      <a:solidFill>
-                        <a:srgbClr val="EEEEEE"/>
-                      </a:solidFill>
-                      <a:prstDash val="solid"/>
-                      <a:round/>
-                      <a:headEnd type="none" w="med" len="med"/>
-                      <a:tailEnd type="none" w="med" len="med"/>
-                    </a:lnR>
-                    <a:lnT w="2540" cap="flat" cmpd="sng" algn="ctr">
-                      <a:solidFill>
-                        <a:srgbClr val="EEEEEE"/>
-                      </a:solidFill>
-                      <a:prstDash val="solid"/>
-                      <a:round/>
-                      <a:headEnd type="none" w="med" len="med"/>
-                      <a:tailEnd type="none" w="med" len="med"/>
-                    </a:lnT>
-                    <a:lnB w="2540" cap="flat" cmpd="sng" algn="ctr">
-                      <a:solidFill>
-                        <a:srgbClr val="EEEEEE"/>
-                      </a:solidFill>
-                      <a:prstDash val="solid"/>
-                      <a:round/>
-                      <a:headEnd type="none" w="med" len="med"/>
-                      <a:tailEnd type="none" w="med" len="med"/>
-                    </a:lnB>
-                  </a:tcPr>
-                </a:tc>
-                <a:tc>
-                  <a:txBody>
-                    <a:bodyPr/>
-                    <a:lstStyle/>
-                    <a:p>
-                      <a:pPr algn="ctr" indent="0" marL="0">
-                        <a:buNone/>
-                      </a:pPr>
-                      <a:endParaRPr lang="en-US" sz="580" dirty="0">
-                        <a:latin typeface="Calibri" charset="0"/>
-                        <a:ea typeface="Calibri" charset="0"/>
-                        <a:cs typeface="Calibri" charset="0"/>
-                      </a:endParaRPr>
-                    </a:p>
-                  </a:txBody>
-                  <a:tcPr marL="91440" marR="91440" marT="45720" marB="45720">
-                    <a:lnL w="2540" cap="flat" cmpd="sng" algn="ctr">
-                      <a:solidFill>
-                        <a:srgbClr val="EEEEEE"/>
-                      </a:solidFill>
-                      <a:prstDash val="solid"/>
-                      <a:round/>
-                      <a:headEnd type="none" w="med" len="med"/>
-                      <a:tailEnd type="none" w="med" len="med"/>
-                    </a:lnL>
-                    <a:lnR w="2540" cap="flat" cmpd="sng" algn="ctr">
-                      <a:solidFill>
-                        <a:srgbClr val="EEEEEE"/>
-                      </a:solidFill>
-                      <a:prstDash val="solid"/>
-                      <a:round/>
-                      <a:headEnd type="none" w="med" len="med"/>
-                      <a:tailEnd type="none" w="med" len="med"/>
-                    </a:lnR>
-                    <a:lnT w="2540" cap="flat" cmpd="sng" algn="ctr">
-                      <a:solidFill>
-                        <a:srgbClr val="EEEEEE"/>
-                      </a:solidFill>
-                      <a:prstDash val="solid"/>
-                      <a:round/>
-                      <a:headEnd type="none" w="med" len="med"/>
-                      <a:tailEnd type="none" w="med" len="med"/>
-                    </a:lnT>
-                    <a:lnB w="2540" cap="flat" cmpd="sng" algn="ctr">
-                      <a:solidFill>
-                        <a:srgbClr val="EEEEEE"/>
-                      </a:solidFill>
-                      <a:prstDash val="solid"/>
-                      <a:round/>
-                      <a:headEnd type="none" w="med" len="med"/>
-                      <a:tailEnd type="none" w="med" len="med"/>
-                    </a:lnB>
-                  </a:tcPr>
-                </a:tc>
-                <a:tc>
-                  <a:txBody>
-                    <a:bodyPr/>
-                    <a:lstStyle/>
-                    <a:p>
-                      <a:pPr algn="ctr" indent="0" marL="0">
-                        <a:buNone/>
-                      </a:pPr>
-                      <a:endParaRPr lang="en-US" sz="580" dirty="0">
-                        <a:latin typeface="Calibri" charset="0"/>
-                        <a:ea typeface="Calibri" charset="0"/>
-                        <a:cs typeface="Calibri" charset="0"/>
-                      </a:endParaRPr>
-                    </a:p>
-                  </a:txBody>
-                  <a:tcPr marL="91440" marR="91440" marT="45720" marB="45720">
-                    <a:lnL w="2540" cap="flat" cmpd="sng" algn="ctr">
-                      <a:solidFill>
-                        <a:srgbClr val="EEEEEE"/>
-                      </a:solidFill>
-                      <a:prstDash val="solid"/>
-                      <a:round/>
-                      <a:headEnd type="none" w="med" len="med"/>
-                      <a:tailEnd type="none" w="med" len="med"/>
-                    </a:lnL>
-                    <a:lnR w="2540" cap="flat" cmpd="sng" algn="ctr">
-                      <a:solidFill>
-                        <a:srgbClr val="EEEEEE"/>
-                      </a:solidFill>
-                      <a:prstDash val="solid"/>
-                      <a:round/>
-                      <a:headEnd type="none" w="med" len="med"/>
-                      <a:tailEnd type="none" w="med" len="med"/>
-                    </a:lnR>
-                    <a:lnT w="2540" cap="flat" cmpd="sng" algn="ctr">
-                      <a:solidFill>
-                        <a:srgbClr val="EEEEEE"/>
-                      </a:solidFill>
-                      <a:prstDash val="solid"/>
-                      <a:round/>
-                      <a:headEnd type="none" w="med" len="med"/>
-                      <a:tailEnd type="none" w="med" len="med"/>
-                    </a:lnT>
-                    <a:lnB w="2540" cap="flat" cmpd="sng" algn="ctr">
-                      <a:solidFill>
-                        <a:srgbClr val="EEEEEE"/>
-                      </a:solidFill>
-                      <a:prstDash val="solid"/>
-                      <a:round/>
-                      <a:headEnd type="none" w="med" len="med"/>
-                      <a:tailEnd type="none" w="med" len="med"/>
-                    </a:lnB>
-                  </a:tcPr>
-                </a:tc>
-                <a:tc>
-                  <a:txBody>
-                    <a:bodyPr/>
-                    <a:lstStyle/>
-                    <a:p>
-                      <a:pPr algn="ctr" indent="0" marL="0">
-                        <a:buNone/>
-                      </a:pPr>
-                      <a:endParaRPr lang="en-US" sz="580" dirty="0">
-                        <a:latin typeface="Calibri" charset="0"/>
-                        <a:ea typeface="Calibri" charset="0"/>
-                        <a:cs typeface="Calibri" charset="0"/>
-                      </a:endParaRPr>
-                    </a:p>
-                  </a:txBody>
-                  <a:tcPr marL="91440" marR="91440" marT="45720" marB="45720">
-                    <a:lnL w="2540" cap="flat" cmpd="sng" algn="ctr">
-                      <a:solidFill>
-                        <a:srgbClr val="EEEEEE"/>
-                      </a:solidFill>
-                      <a:prstDash val="solid"/>
-                      <a:round/>
-                      <a:headEnd type="none" w="med" len="med"/>
-                      <a:tailEnd type="none" w="med" len="med"/>
-                    </a:lnL>
-                    <a:lnR w="2540" cap="flat" cmpd="sng" algn="ctr">
-                      <a:solidFill>
-                        <a:srgbClr val="EEEEEE"/>
-                      </a:solidFill>
-                      <a:prstDash val="solid"/>
-                      <a:round/>
-                      <a:headEnd type="none" w="med" len="med"/>
-                      <a:tailEnd type="none" w="med" len="med"/>
-                    </a:lnR>
-                    <a:lnT w="2540" cap="flat" cmpd="sng" algn="ctr">
-                      <a:solidFill>
-                        <a:srgbClr val="EEEEEE"/>
-                      </a:solidFill>
-                      <a:prstDash val="solid"/>
-                      <a:round/>
-                      <a:headEnd type="none" w="med" len="med"/>
-                      <a:tailEnd type="none" w="med" len="med"/>
-                    </a:lnT>
-                    <a:lnB w="2540" cap="flat" cmpd="sng" algn="ctr">
-                      <a:solidFill>
-                        <a:srgbClr val="EEEEEE"/>
-                      </a:solidFill>
-                      <a:prstDash val="solid"/>
-                      <a:round/>
-                      <a:headEnd type="none" w="med" len="med"/>
-                      <a:tailEnd type="none" w="med" len="med"/>
-                    </a:lnB>
-                  </a:tcPr>
-                </a:tc>
-                <a:tc>
-                  <a:txBody>
-                    <a:bodyPr/>
-                    <a:lstStyle/>
-                    <a:p>
-                      <a:pPr algn="ctr" indent="0" marL="0">
-                        <a:buNone/>
-                      </a:pPr>
-                      <a:endParaRPr lang="en-US" sz="580" dirty="0">
-                        <a:latin typeface="Calibri" charset="0"/>
-                        <a:ea typeface="Calibri" charset="0"/>
-                        <a:cs typeface="Calibri" charset="0"/>
-                      </a:endParaRPr>
-                    </a:p>
-                  </a:txBody>
-                  <a:tcPr marL="91440" marR="91440" marT="45720" marB="45720">
-                    <a:lnL w="2540" cap="flat" cmpd="sng" algn="ctr">
-                      <a:solidFill>
-                        <a:srgbClr val="EEEEEE"/>
-                      </a:solidFill>
-                      <a:prstDash val="solid"/>
-                      <a:round/>
-                      <a:headEnd type="none" w="med" len="med"/>
-                      <a:tailEnd type="none" w="med" len="med"/>
-                    </a:lnL>
-                    <a:lnR w="2540" cap="flat" cmpd="sng" algn="ctr">
-                      <a:solidFill>
-                        <a:srgbClr val="EEEEEE"/>
-                      </a:solidFill>
-                      <a:prstDash val="solid"/>
-                      <a:round/>
-                      <a:headEnd type="none" w="med" len="med"/>
-                      <a:tailEnd type="none" w="med" len="med"/>
-                    </a:lnR>
-                    <a:lnT w="2540" cap="flat" cmpd="sng" algn="ctr">
-                      <a:solidFill>
-                        <a:srgbClr val="EEEEEE"/>
-                      </a:solidFill>
-                      <a:prstDash val="solid"/>
-                      <a:round/>
-                      <a:headEnd type="none" w="med" len="med"/>
-                      <a:tailEnd type="none" w="med" len="med"/>
-                    </a:lnT>
-                    <a:lnB w="2540" cap="flat" cmpd="sng" algn="ctr">
-                      <a:solidFill>
-                        <a:srgbClr val="EEEEEE"/>
-                      </a:solidFill>
-                      <a:prstDash val="solid"/>
-                      <a:round/>
-                      <a:headEnd type="none" w="med" len="med"/>
-                      <a:tailEnd type="none" w="med" len="med"/>
-                    </a:lnB>
-                  </a:tcPr>
-                </a:tc>
-              </a:tr>
-              <a:tr h="123444">
-                <a:tc>
-                  <a:txBody>
-                    <a:bodyPr/>
-                    <a:lstStyle/>
-                    <a:p>
-                      <a:pPr algn="l" indent="0" marL="0">
-                        <a:buNone/>
-                      </a:pPr>
-                      <a:endParaRPr lang="en-US" sz="580" dirty="0">
-                        <a:latin typeface="Calibri" charset="0"/>
-                        <a:ea typeface="Calibri" charset="0"/>
-                        <a:cs typeface="Calibri" charset="0"/>
-                      </a:endParaRPr>
-                    </a:p>
-                  </a:txBody>
-                  <a:tcPr marL="91440" marR="91440" marT="45720" marB="45720">
-                    <a:lnL w="2540" cap="flat" cmpd="sng" algn="ctr">
-                      <a:solidFill>
-                        <a:srgbClr val="EEEEEE"/>
-                      </a:solidFill>
-                      <a:prstDash val="solid"/>
-                      <a:round/>
-                      <a:headEnd type="none" w="med" len="med"/>
-                      <a:tailEnd type="none" w="med" len="med"/>
-                    </a:lnL>
-                    <a:lnR w="2540" cap="flat" cmpd="sng" algn="ctr">
-                      <a:solidFill>
-                        <a:srgbClr val="EEEEEE"/>
-                      </a:solidFill>
-                      <a:prstDash val="solid"/>
-                      <a:round/>
-                      <a:headEnd type="none" w="med" len="med"/>
-                      <a:tailEnd type="none" w="med" len="med"/>
-                    </a:lnR>
-                    <a:lnT w="2540" cap="flat" cmpd="sng" algn="ctr">
-                      <a:solidFill>
-                        <a:srgbClr val="EEEEEE"/>
-                      </a:solidFill>
-                      <a:prstDash val="solid"/>
-                      <a:round/>
-                      <a:headEnd type="none" w="med" len="med"/>
-                      <a:tailEnd type="none" w="med" len="med"/>
-                    </a:lnT>
-                    <a:lnB w="2540" cap="flat" cmpd="sng" algn="ctr">
-                      <a:solidFill>
-                        <a:srgbClr val="EEEEEE"/>
-                      </a:solidFill>
-                      <a:prstDash val="solid"/>
-                      <a:round/>
-                      <a:headEnd type="none" w="med" len="med"/>
-                      <a:tailEnd type="none" w="med" len="med"/>
-                    </a:lnB>
-                  </a:tcPr>
-                </a:tc>
-                <a:tc>
-                  <a:txBody>
-                    <a:bodyPr/>
-                    <a:lstStyle/>
-                    <a:p>
-                      <a:pPr algn="l" indent="0" marL="0">
-                        <a:buNone/>
-                      </a:pPr>
-                      <a:r>
-                        <a:rPr lang="en-US" sz="580" dirty="0">
-                          <a:solidFill>
-                            <a:srgbClr val="666666"/>
-                          </a:solidFill>
-                          <a:latin typeface="Calibri" pitchFamily="34" charset="0"/>
-                          <a:ea typeface="Calibri" pitchFamily="34" charset="-122"/>
-                          <a:cs typeface="Calibri" pitchFamily="34" charset="-120"/>
-                        </a:rPr>
-                        <a:t>Competencia</a:t>
-                      </a:r>
-                      <a:endParaRPr lang="en-US" sz="580" dirty="0">
-                        <a:latin typeface="Calibri" charset="0"/>
-                        <a:ea typeface="Calibri" charset="0"/>
-                        <a:cs typeface="Calibri" charset="0"/>
-                      </a:endParaRPr>
-                    </a:p>
-                  </a:txBody>
-                  <a:tcPr marL="91440" marR="91440" marT="45720" marB="45720">
-                    <a:lnL w="2540" cap="flat" cmpd="sng" algn="ctr">
-                      <a:solidFill>
-                        <a:srgbClr val="EEEEEE"/>
-                      </a:solidFill>
-                      <a:prstDash val="solid"/>
-                      <a:round/>
-                      <a:headEnd type="none" w="med" len="med"/>
-                      <a:tailEnd type="none" w="med" len="med"/>
-                    </a:lnL>
-                    <a:lnR w="2540" cap="flat" cmpd="sng" algn="ctr">
-                      <a:solidFill>
-                        <a:srgbClr val="EEEEEE"/>
-                      </a:solidFill>
-                      <a:prstDash val="solid"/>
-                      <a:round/>
-                      <a:headEnd type="none" w="med" len="med"/>
-                      <a:tailEnd type="none" w="med" len="med"/>
-                    </a:lnR>
-                    <a:lnT w="2540" cap="flat" cmpd="sng" algn="ctr">
-                      <a:solidFill>
-                        <a:srgbClr val="EEEEEE"/>
-                      </a:solidFill>
-                      <a:prstDash val="solid"/>
-                      <a:round/>
-                      <a:headEnd type="none" w="med" len="med"/>
-                      <a:tailEnd type="none" w="med" len="med"/>
-                    </a:lnT>
-                    <a:lnB w="2540" cap="flat" cmpd="sng" algn="ctr">
-                      <a:solidFill>
-                        <a:srgbClr val="EEEEEE"/>
-                      </a:solidFill>
-                      <a:prstDash val="solid"/>
-                      <a:round/>
-                      <a:headEnd type="none" w="med" len="med"/>
-                      <a:tailEnd type="none" w="med" len="med"/>
-                    </a:lnB>
-                  </a:tcPr>
-                </a:tc>
-                <a:tc>
-                  <a:txBody>
-                    <a:bodyPr/>
-                    <a:lstStyle/>
-                    <a:p>
-                      <a:pPr algn="ctr" indent="0" marL="0">
-                        <a:buNone/>
-                      </a:pPr>
-                      <a:endParaRPr lang="en-US" sz="580" dirty="0">
-                        <a:latin typeface="Calibri" charset="0"/>
-                        <a:ea typeface="Calibri" charset="0"/>
-                        <a:cs typeface="Calibri" charset="0"/>
-                      </a:endParaRPr>
-                    </a:p>
-                  </a:txBody>
-                  <a:tcPr marL="91440" marR="91440" marT="45720" marB="45720">
-                    <a:lnL w="2540" cap="flat" cmpd="sng" algn="ctr">
-                      <a:solidFill>
-                        <a:srgbClr val="EEEEEE"/>
-                      </a:solidFill>
-                      <a:prstDash val="solid"/>
-                      <a:round/>
-                      <a:headEnd type="none" w="med" len="med"/>
-                      <a:tailEnd type="none" w="med" len="med"/>
-                    </a:lnL>
-                    <a:lnR w="2540" cap="flat" cmpd="sng" algn="ctr">
-                      <a:solidFill>
-                        <a:srgbClr val="EEEEEE"/>
-                      </a:solidFill>
-                      <a:prstDash val="solid"/>
-                      <a:round/>
-                      <a:headEnd type="none" w="med" len="med"/>
-                      <a:tailEnd type="none" w="med" len="med"/>
-                    </a:lnR>
-                    <a:lnT w="2540" cap="flat" cmpd="sng" algn="ctr">
-                      <a:solidFill>
-                        <a:srgbClr val="EEEEEE"/>
-                      </a:solidFill>
-                      <a:prstDash val="solid"/>
-                      <a:round/>
-                      <a:headEnd type="none" w="med" len="med"/>
-                      <a:tailEnd type="none" w="med" len="med"/>
-                    </a:lnT>
-                    <a:lnB w="2540" cap="flat" cmpd="sng" algn="ctr">
-                      <a:solidFill>
-                        <a:srgbClr val="EEEEEE"/>
-                      </a:solidFill>
-                      <a:prstDash val="solid"/>
-                      <a:round/>
-                      <a:headEnd type="none" w="med" len="med"/>
-                      <a:tailEnd type="none" w="med" len="med"/>
-                    </a:lnB>
-                  </a:tcPr>
-                </a:tc>
-                <a:tc>
-                  <a:txBody>
-                    <a:bodyPr/>
-                    <a:lstStyle/>
-                    <a:p>
-                      <a:pPr algn="ctr" indent="0" marL="0">
-                        <a:buNone/>
-                      </a:pPr>
-                      <a:endParaRPr lang="en-US" sz="580" dirty="0">
-                        <a:latin typeface="Calibri" charset="0"/>
-                        <a:ea typeface="Calibri" charset="0"/>
-                        <a:cs typeface="Calibri" charset="0"/>
-                      </a:endParaRPr>
-                    </a:p>
-                  </a:txBody>
-                  <a:tcPr marL="91440" marR="91440" marT="45720" marB="45720">
-                    <a:lnL w="2540" cap="flat" cmpd="sng" algn="ctr">
-                      <a:solidFill>
-                        <a:srgbClr val="EEEEEE"/>
-                      </a:solidFill>
-                      <a:prstDash val="solid"/>
-                      <a:round/>
-                      <a:headEnd type="none" w="med" len="med"/>
-                      <a:tailEnd type="none" w="med" len="med"/>
-                    </a:lnL>
-                    <a:lnR w="2540" cap="flat" cmpd="sng" algn="ctr">
-                      <a:solidFill>
-                        <a:srgbClr val="EEEEEE"/>
-                      </a:solidFill>
-                      <a:prstDash val="solid"/>
-                      <a:round/>
-                      <a:headEnd type="none" w="med" len="med"/>
-                      <a:tailEnd type="none" w="med" len="med"/>
-                    </a:lnR>
-                    <a:lnT w="2540" cap="flat" cmpd="sng" algn="ctr">
-                      <a:solidFill>
-                        <a:srgbClr val="EEEEEE"/>
-                      </a:solidFill>
-                      <a:prstDash val="solid"/>
-                      <a:round/>
-                      <a:headEnd type="none" w="med" len="med"/>
-                      <a:tailEnd type="none" w="med" len="med"/>
-                    </a:lnT>
-                    <a:lnB w="2540" cap="flat" cmpd="sng" algn="ctr">
-                      <a:solidFill>
-                        <a:srgbClr val="EEEEEE"/>
-                      </a:solidFill>
-                      <a:prstDash val="solid"/>
-                      <a:round/>
-                      <a:headEnd type="none" w="med" len="med"/>
-                      <a:tailEnd type="none" w="med" len="med"/>
-                    </a:lnB>
-                  </a:tcPr>
-                </a:tc>
-                <a:tc>
-                  <a:txBody>
-                    <a:bodyPr/>
-                    <a:lstStyle/>
-                    <a:p>
-                      <a:pPr algn="ctr" indent="0" marL="0">
-                        <a:buNone/>
-                      </a:pPr>
-                      <a:endParaRPr lang="en-US" sz="580" dirty="0">
-                        <a:latin typeface="Calibri" charset="0"/>
-                        <a:ea typeface="Calibri" charset="0"/>
-                        <a:cs typeface="Calibri" charset="0"/>
-                      </a:endParaRPr>
-                    </a:p>
-                  </a:txBody>
-                  <a:tcPr marL="91440" marR="91440" marT="45720" marB="45720">
-                    <a:lnL w="2540" cap="flat" cmpd="sng" algn="ctr">
-                      <a:solidFill>
-                        <a:srgbClr val="EEEEEE"/>
-                      </a:solidFill>
-                      <a:prstDash val="solid"/>
-                      <a:round/>
-                      <a:headEnd type="none" w="med" len="med"/>
-                      <a:tailEnd type="none" w="med" len="med"/>
-                    </a:lnL>
-                    <a:lnR w="2540" cap="flat" cmpd="sng" algn="ctr">
-                      <a:solidFill>
-                        <a:srgbClr val="EEEEEE"/>
-                      </a:solidFill>
-                      <a:prstDash val="solid"/>
-                      <a:round/>
-                      <a:headEnd type="none" w="med" len="med"/>
-                      <a:tailEnd type="none" w="med" len="med"/>
-                    </a:lnR>
-                    <a:lnT w="2540" cap="flat" cmpd="sng" algn="ctr">
-                      <a:solidFill>
-                        <a:srgbClr val="EEEEEE"/>
-                      </a:solidFill>
-                      <a:prstDash val="solid"/>
-                      <a:round/>
-                      <a:headEnd type="none" w="med" len="med"/>
-                      <a:tailEnd type="none" w="med" len="med"/>
-                    </a:lnT>
-                    <a:lnB w="2540" cap="flat" cmpd="sng" algn="ctr">
-                      <a:solidFill>
-                        <a:srgbClr val="EEEEEE"/>
-                      </a:solidFill>
-                      <a:prstDash val="solid"/>
-                      <a:round/>
-                      <a:headEnd type="none" w="med" len="med"/>
-                      <a:tailEnd type="none" w="med" len="med"/>
-                    </a:lnB>
-                  </a:tcPr>
-                </a:tc>
-                <a:tc>
-                  <a:txBody>
-                    <a:bodyPr/>
-                    <a:lstStyle/>
-                    <a:p>
-                      <a:pPr algn="ctr" indent="0" marL="0">
-                        <a:buNone/>
-                      </a:pPr>
-                      <a:endParaRPr lang="en-US" sz="580" dirty="0">
-                        <a:latin typeface="Calibri" charset="0"/>
-                        <a:ea typeface="Calibri" charset="0"/>
-                        <a:cs typeface="Calibri" charset="0"/>
-                      </a:endParaRPr>
-                    </a:p>
-                  </a:txBody>
-                  <a:tcPr marL="91440" marR="91440" marT="45720" marB="45720">
-                    <a:lnL w="2540" cap="flat" cmpd="sng" algn="ctr">
-                      <a:solidFill>
-                        <a:srgbClr val="EEEEEE"/>
-                      </a:solidFill>
-                      <a:prstDash val="solid"/>
-                      <a:round/>
-                      <a:headEnd type="none" w="med" len="med"/>
-                      <a:tailEnd type="none" w="med" len="med"/>
-                    </a:lnL>
-                    <a:lnR w="2540" cap="flat" cmpd="sng" algn="ctr">
-                      <a:solidFill>
-                        <a:srgbClr val="EEEEEE"/>
-                      </a:solidFill>
-                      <a:prstDash val="solid"/>
-                      <a:round/>
-                      <a:headEnd type="none" w="med" len="med"/>
-                      <a:tailEnd type="none" w="med" len="med"/>
-                    </a:lnR>
-                    <a:lnT w="2540" cap="flat" cmpd="sng" algn="ctr">
-                      <a:solidFill>
-                        <a:srgbClr val="EEEEEE"/>
-                      </a:solidFill>
-                      <a:prstDash val="solid"/>
-                      <a:round/>
-                      <a:headEnd type="none" w="med" len="med"/>
-                      <a:tailEnd type="none" w="med" len="med"/>
-                    </a:lnT>
-                    <a:lnB w="2540" cap="flat" cmpd="sng" algn="ctr">
-                      <a:solidFill>
-                        <a:srgbClr val="EEEEEE"/>
-                      </a:solidFill>
-                      <a:prstDash val="solid"/>
-                      <a:round/>
-                      <a:headEnd type="none" w="med" len="med"/>
-                      <a:tailEnd type="none" w="med" len="med"/>
-                    </a:lnB>
-                  </a:tcPr>
-                </a:tc>
-                <a:tc>
-                  <a:txBody>
-                    <a:bodyPr/>
-                    <a:lstStyle/>
-                    <a:p>
-                      <a:pPr algn="ctr" indent="0" marL="0">
-                        <a:buNone/>
-                      </a:pPr>
-                      <a:endParaRPr lang="en-US" sz="580" dirty="0">
-                        <a:latin typeface="Calibri" charset="0"/>
-                        <a:ea typeface="Calibri" charset="0"/>
-                        <a:cs typeface="Calibri" charset="0"/>
-                      </a:endParaRPr>
-                    </a:p>
-                  </a:txBody>
-                  <a:tcPr marL="91440" marR="91440" marT="45720" marB="45720">
-                    <a:lnL w="2540" cap="flat" cmpd="sng" algn="ctr">
-                      <a:solidFill>
-                        <a:srgbClr val="EEEEEE"/>
-                      </a:solidFill>
-                      <a:prstDash val="solid"/>
-                      <a:round/>
-                      <a:headEnd type="none" w="med" len="med"/>
-                      <a:tailEnd type="none" w="med" len="med"/>
-                    </a:lnL>
-                    <a:lnR w="2540" cap="flat" cmpd="sng" algn="ctr">
-                      <a:solidFill>
-                        <a:srgbClr val="EEEEEE"/>
-                      </a:solidFill>
-                      <a:prstDash val="solid"/>
-                      <a:round/>
-                      <a:headEnd type="none" w="med" len="med"/>
-                      <a:tailEnd type="none" w="med" len="med"/>
-                    </a:lnR>
-                    <a:lnT w="2540" cap="flat" cmpd="sng" algn="ctr">
-                      <a:solidFill>
-                        <a:srgbClr val="EEEEEE"/>
-                      </a:solidFill>
-                      <a:prstDash val="solid"/>
-                      <a:round/>
-                      <a:headEnd type="none" w="med" len="med"/>
-                      <a:tailEnd type="none" w="med" len="med"/>
-                    </a:lnT>
-                    <a:lnB w="2540" cap="flat" cmpd="sng" algn="ctr">
-                      <a:solidFill>
-                        <a:srgbClr val="EEEEEE"/>
-                      </a:solidFill>
-                      <a:prstDash val="solid"/>
-                      <a:round/>
-                      <a:headEnd type="none" w="med" len="med"/>
-                      <a:tailEnd type="none" w="med" len="med"/>
-                    </a:lnB>
-                  </a:tcPr>
-                </a:tc>
-                <a:tc>
-                  <a:txBody>
-                    <a:bodyPr/>
-                    <a:lstStyle/>
-                    <a:p>
-                      <a:pPr algn="ctr" indent="0" marL="0">
-                        <a:buNone/>
-                      </a:pPr>
-                      <a:endParaRPr lang="en-US" sz="580" dirty="0">
-                        <a:latin typeface="Calibri" charset="0"/>
-                        <a:ea typeface="Calibri" charset="0"/>
-                        <a:cs typeface="Calibri" charset="0"/>
-                      </a:endParaRPr>
-                    </a:p>
-                  </a:txBody>
-                  <a:tcPr marL="91440" marR="91440" marT="45720" marB="45720">
-                    <a:lnL w="2540" cap="flat" cmpd="sng" algn="ctr">
-                      <a:solidFill>
-                        <a:srgbClr val="EEEEEE"/>
-                      </a:solidFill>
-                      <a:prstDash val="solid"/>
-                      <a:round/>
-                      <a:headEnd type="none" w="med" len="med"/>
-                      <a:tailEnd type="none" w="med" len="med"/>
-                    </a:lnL>
-                    <a:lnR w="2540" cap="flat" cmpd="sng" algn="ctr">
-                      <a:solidFill>
-                        <a:srgbClr val="EEEEEE"/>
-                      </a:solidFill>
-                      <a:prstDash val="solid"/>
-                      <a:round/>
-                      <a:headEnd type="none" w="med" len="med"/>
-                      <a:tailEnd type="none" w="med" len="med"/>
-                    </a:lnR>
-                    <a:lnT w="2540" cap="flat" cmpd="sng" algn="ctr">
-                      <a:solidFill>
-                        <a:srgbClr val="EEEEEE"/>
-                      </a:solidFill>
-                      <a:prstDash val="solid"/>
-                      <a:round/>
-                      <a:headEnd type="none" w="med" len="med"/>
-                      <a:tailEnd type="none" w="med" len="med"/>
-                    </a:lnT>
-                    <a:lnB w="2540" cap="flat" cmpd="sng" algn="ctr">
-                      <a:solidFill>
-                        <a:srgbClr val="EEEEEE"/>
-                      </a:solidFill>
-                      <a:prstDash val="solid"/>
-                      <a:round/>
-                      <a:headEnd type="none" w="med" len="med"/>
-                      <a:tailEnd type="none" w="med" len="med"/>
-                    </a:lnB>
-                  </a:tcPr>
-                </a:tc>
-                <a:tc>
-                  <a:txBody>
-                    <a:bodyPr/>
-                    <a:lstStyle/>
-                    <a:p>
-                      <a:pPr algn="ctr" indent="0" marL="0">
-                        <a:buNone/>
-                      </a:pPr>
-                      <a:endParaRPr lang="en-US" sz="580" dirty="0">
-                        <a:latin typeface="Calibri" charset="0"/>
-                        <a:ea typeface="Calibri" charset="0"/>
-                        <a:cs typeface="Calibri" charset="0"/>
-                      </a:endParaRPr>
-                    </a:p>
-                  </a:txBody>
-                  <a:tcPr marL="91440" marR="91440" marT="45720" marB="45720">
-                    <a:lnL w="2540" cap="flat" cmpd="sng" algn="ctr">
-                      <a:solidFill>
-                        <a:srgbClr val="EEEEEE"/>
-                      </a:solidFill>
-                      <a:prstDash val="solid"/>
-                      <a:round/>
-                      <a:headEnd type="none" w="med" len="med"/>
-                      <a:tailEnd type="none" w="med" len="med"/>
-                    </a:lnL>
-                    <a:lnR w="2540" cap="flat" cmpd="sng" algn="ctr">
-                      <a:solidFill>
-                        <a:srgbClr val="EEEEEE"/>
-                      </a:solidFill>
-                      <a:prstDash val="solid"/>
-                      <a:round/>
-                      <a:headEnd type="none" w="med" len="med"/>
-                      <a:tailEnd type="none" w="med" len="med"/>
-                    </a:lnR>
-                    <a:lnT w="2540" cap="flat" cmpd="sng" algn="ctr">
-                      <a:solidFill>
-                        <a:srgbClr val="EEEEEE"/>
-                      </a:solidFill>
-                      <a:prstDash val="solid"/>
-                      <a:round/>
-                      <a:headEnd type="none" w="med" len="med"/>
-                      <a:tailEnd type="none" w="med" len="med"/>
-                    </a:lnT>
-                    <a:lnB w="2540" cap="flat" cmpd="sng" algn="ctr">
-                      <a:solidFill>
-                        <a:srgbClr val="EEEEEE"/>
-                      </a:solidFill>
-                      <a:prstDash val="solid"/>
-                      <a:round/>
-                      <a:headEnd type="none" w="med" len="med"/>
-                      <a:tailEnd type="none" w="med" len="med"/>
-                    </a:lnB>
-                  </a:tcPr>
-                </a:tc>
-                <a:tc>
-                  <a:txBody>
-                    <a:bodyPr/>
-                    <a:lstStyle/>
-                    <a:p>
-                      <a:pPr algn="ctr" indent="0" marL="0">
-                        <a:buNone/>
-                      </a:pPr>
-                      <a:endParaRPr lang="en-US" sz="580" dirty="0">
-                        <a:latin typeface="Calibri" charset="0"/>
-                        <a:ea typeface="Calibri" charset="0"/>
-                        <a:cs typeface="Calibri" charset="0"/>
-                      </a:endParaRPr>
-                    </a:p>
-                  </a:txBody>
-                  <a:tcPr marL="91440" marR="91440" marT="45720" marB="45720">
-                    <a:lnL w="2540" cap="flat" cmpd="sng" algn="ctr">
-                      <a:solidFill>
-                        <a:srgbClr val="EEEEEE"/>
-                      </a:solidFill>
-                      <a:prstDash val="solid"/>
-                      <a:round/>
-                      <a:headEnd type="none" w="med" len="med"/>
-                      <a:tailEnd type="none" w="med" len="med"/>
-                    </a:lnL>
-                    <a:lnR w="2540" cap="flat" cmpd="sng" algn="ctr">
-                      <a:solidFill>
-                        <a:srgbClr val="EEEEEE"/>
-                      </a:solidFill>
-                      <a:prstDash val="solid"/>
-                      <a:round/>
-                      <a:headEnd type="none" w="med" len="med"/>
-                      <a:tailEnd type="none" w="med" len="med"/>
-                    </a:lnR>
-                    <a:lnT w="2540" cap="flat" cmpd="sng" algn="ctr">
-                      <a:solidFill>
-                        <a:srgbClr val="EEEEEE"/>
-                      </a:solidFill>
-                      <a:prstDash val="solid"/>
-                      <a:round/>
-                      <a:headEnd type="none" w="med" len="med"/>
-                      <a:tailEnd type="none" w="med" len="med"/>
-                    </a:lnT>
-                    <a:lnB w="2540" cap="flat" cmpd="sng" algn="ctr">
-                      <a:solidFill>
-                        <a:srgbClr val="EEEEEE"/>
-                      </a:solidFill>
-                      <a:prstDash val="solid"/>
-                      <a:round/>
-                      <a:headEnd type="none" w="med" len="med"/>
-                      <a:tailEnd type="none" w="med" len="med"/>
-                    </a:lnB>
-                  </a:tcPr>
-                </a:tc>
-                <a:tc>
-                  <a:txBody>
-                    <a:bodyPr/>
-                    <a:lstStyle/>
-                    <a:p>
-                      <a:pPr algn="ctr" indent="0" marL="0">
-                        <a:buNone/>
-                      </a:pPr>
-                      <a:endParaRPr lang="en-US" sz="580" dirty="0">
-                        <a:latin typeface="Calibri" charset="0"/>
-                        <a:ea typeface="Calibri" charset="0"/>
-                        <a:cs typeface="Calibri" charset="0"/>
-                      </a:endParaRPr>
-                    </a:p>
-                  </a:txBody>
-                  <a:tcPr marL="91440" marR="91440" marT="45720" marB="45720">
-                    <a:lnL w="2540" cap="flat" cmpd="sng" algn="ctr">
-                      <a:solidFill>
-                        <a:srgbClr val="EEEEEE"/>
-                      </a:solidFill>
-                      <a:prstDash val="solid"/>
-                      <a:round/>
-                      <a:headEnd type="none" w="med" len="med"/>
-                      <a:tailEnd type="none" w="med" len="med"/>
-                    </a:lnL>
-                    <a:lnR w="2540" cap="flat" cmpd="sng" algn="ctr">
-                      <a:solidFill>
-                        <a:srgbClr val="EEEEEE"/>
-                      </a:solidFill>
-                      <a:prstDash val="solid"/>
-                      <a:round/>
-                      <a:headEnd type="none" w="med" len="med"/>
-                      <a:tailEnd type="none" w="med" len="med"/>
-                    </a:lnR>
-                    <a:lnT w="2540" cap="flat" cmpd="sng" algn="ctr">
-                      <a:solidFill>
-                        <a:srgbClr val="EEEEEE"/>
-                      </a:solidFill>
-                      <a:prstDash val="solid"/>
-                      <a:round/>
-                      <a:headEnd type="none" w="med" len="med"/>
-                      <a:tailEnd type="none" w="med" len="med"/>
-                    </a:lnT>
-                    <a:lnB w="2540" cap="flat" cmpd="sng" algn="ctr">
-                      <a:solidFill>
-                        <a:srgbClr val="EEEEEE"/>
-                      </a:solidFill>
-                      <a:prstDash val="solid"/>
-                      <a:round/>
-                      <a:headEnd type="none" w="med" len="med"/>
-                      <a:tailEnd type="none" w="med" len="med"/>
-                    </a:lnB>
-                  </a:tcPr>
-                </a:tc>
-                <a:tc>
-                  <a:txBody>
-                    <a:bodyPr/>
-                    <a:lstStyle/>
-                    <a:p>
-                      <a:pPr algn="ctr" indent="0" marL="0">
-                        <a:buNone/>
-                      </a:pPr>
-                      <a:endParaRPr lang="en-US" sz="580" dirty="0">
-                        <a:latin typeface="Calibri" charset="0"/>
-                        <a:ea typeface="Calibri" charset="0"/>
-                        <a:cs typeface="Calibri" charset="0"/>
-                      </a:endParaRPr>
-                    </a:p>
-                  </a:txBody>
-                  <a:tcPr marL="91440" marR="91440" marT="45720" marB="45720">
-                    <a:lnL w="2540" cap="flat" cmpd="sng" algn="ctr">
-                      <a:solidFill>
-                        <a:srgbClr val="EEEEEE"/>
-                      </a:solidFill>
-                      <a:prstDash val="solid"/>
-                      <a:round/>
-                      <a:headEnd type="none" w="med" len="med"/>
-                      <a:tailEnd type="none" w="med" len="med"/>
-                    </a:lnL>
-                    <a:lnR w="2540" cap="flat" cmpd="sng" algn="ctr">
-                      <a:solidFill>
-                        <a:srgbClr val="EEEEEE"/>
-                      </a:solidFill>
-                      <a:prstDash val="solid"/>
-                      <a:round/>
-                      <a:headEnd type="none" w="med" len="med"/>
-                      <a:tailEnd type="none" w="med" len="med"/>
-                    </a:lnR>
-                    <a:lnT w="2540" cap="flat" cmpd="sng" algn="ctr">
-                      <a:solidFill>
-                        <a:srgbClr val="EEEEEE"/>
-                      </a:solidFill>
-                      <a:prstDash val="solid"/>
-                      <a:round/>
-                      <a:headEnd type="none" w="med" len="med"/>
-                      <a:tailEnd type="none" w="med" len="med"/>
-                    </a:lnT>
-                    <a:lnB w="2540" cap="flat" cmpd="sng" algn="ctr">
-                      <a:solidFill>
-                        <a:srgbClr val="EEEEEE"/>
-                      </a:solidFill>
-                      <a:prstDash val="solid"/>
-                      <a:round/>
-                      <a:headEnd type="none" w="med" len="med"/>
-                      <a:tailEnd type="none" w="med" len="med"/>
-                    </a:lnB>
-                  </a:tcPr>
-                </a:tc>
-                <a:tc>
-                  <a:txBody>
-                    <a:bodyPr/>
-                    <a:lstStyle/>
-                    <a:p>
-                      <a:pPr algn="ctr" indent="0" marL="0">
-                        <a:buNone/>
-                      </a:pPr>
-                      <a:endParaRPr lang="en-US" sz="580" dirty="0">
-                        <a:latin typeface="Calibri" charset="0"/>
-                        <a:ea typeface="Calibri" charset="0"/>
-                        <a:cs typeface="Calibri" charset="0"/>
-                      </a:endParaRPr>
-                    </a:p>
-                  </a:txBody>
-                  <a:tcPr marL="91440" marR="91440" marT="45720" marB="45720">
-                    <a:lnL w="2540" cap="flat" cmpd="sng" algn="ctr">
-                      <a:solidFill>
-                        <a:srgbClr val="EEEEEE"/>
-                      </a:solidFill>
-                      <a:prstDash val="solid"/>
-                      <a:round/>
-                      <a:headEnd type="none" w="med" len="med"/>
-                      <a:tailEnd type="none" w="med" len="med"/>
-                    </a:lnL>
-                    <a:lnR w="2540" cap="flat" cmpd="sng" algn="ctr">
-                      <a:solidFill>
-                        <a:srgbClr val="EEEEEE"/>
-                      </a:solidFill>
-                      <a:prstDash val="solid"/>
-                      <a:round/>
-                      <a:headEnd type="none" w="med" len="med"/>
-                      <a:tailEnd type="none" w="med" len="med"/>
-                    </a:lnR>
-                    <a:lnT w="2540" cap="flat" cmpd="sng" algn="ctr">
-                      <a:solidFill>
-                        <a:srgbClr val="EEEEEE"/>
-                      </a:solidFill>
-                      <a:prstDash val="solid"/>
-                      <a:round/>
-                      <a:headEnd type="none" w="med" len="med"/>
-                      <a:tailEnd type="none" w="med" len="med"/>
-                    </a:lnT>
-                    <a:lnB w="2540" cap="flat" cmpd="sng" algn="ctr">
-                      <a:solidFill>
-                        <a:srgbClr val="EEEEEE"/>
-                      </a:solidFill>
-                      <a:prstDash val="solid"/>
-                      <a:round/>
-                      <a:headEnd type="none" w="med" len="med"/>
-                      <a:tailEnd type="none" w="med" len="med"/>
-                    </a:lnB>
-                  </a:tcPr>
-                </a:tc>
-                <a:tc>
-                  <a:txBody>
-                    <a:bodyPr/>
-                    <a:lstStyle/>
-                    <a:p>
-                      <a:pPr algn="ctr" indent="0" marL="0">
-                        <a:buNone/>
-                      </a:pPr>
-                      <a:endParaRPr lang="en-US" sz="580" dirty="0">
-                        <a:latin typeface="Calibri" charset="0"/>
-                        <a:ea typeface="Calibri" charset="0"/>
-                        <a:cs typeface="Calibri" charset="0"/>
-                      </a:endParaRPr>
-                    </a:p>
-                  </a:txBody>
-                  <a:tcPr marL="91440" marR="91440" marT="45720" marB="45720">
-                    <a:lnL w="2540" cap="flat" cmpd="sng" algn="ctr">
-                      <a:solidFill>
-                        <a:srgbClr val="EEEEEE"/>
-                      </a:solidFill>
-                      <a:prstDash val="solid"/>
-                      <a:round/>
-                      <a:headEnd type="none" w="med" len="med"/>
-                      <a:tailEnd type="none" w="med" len="med"/>
-                    </a:lnL>
-                    <a:lnR w="2540" cap="flat" cmpd="sng" algn="ctr">
-                      <a:solidFill>
-                        <a:srgbClr val="EEEEEE"/>
-                      </a:solidFill>
-                      <a:prstDash val="solid"/>
-                      <a:round/>
-                      <a:headEnd type="none" w="med" len="med"/>
-                      <a:tailEnd type="none" w="med" len="med"/>
-                    </a:lnR>
-                    <a:lnT w="2540" cap="flat" cmpd="sng" algn="ctr">
-                      <a:solidFill>
-                        <a:srgbClr val="EEEEEE"/>
-                      </a:solidFill>
-                      <a:prstDash val="solid"/>
-                      <a:round/>
-                      <a:headEnd type="none" w="med" len="med"/>
-                      <a:tailEnd type="none" w="med" len="med"/>
-                    </a:lnT>
-                    <a:lnB w="2540" cap="flat" cmpd="sng" algn="ctr">
-                      <a:solidFill>
-                        <a:srgbClr val="EEEEEE"/>
-                      </a:solidFill>
-                      <a:prstDash val="solid"/>
-                      <a:round/>
-                      <a:headEnd type="none" w="med" len="med"/>
-                      <a:tailEnd type="none" w="med" len="med"/>
-                    </a:lnB>
-                  </a:tcPr>
-                </a:tc>
-                <a:tc>
-                  <a:txBody>
-                    <a:bodyPr/>
-                    <a:lstStyle/>
-                    <a:p>
-                      <a:pPr algn="ctr" indent="0" marL="0">
-                        <a:buNone/>
-                      </a:pPr>
-                      <a:endParaRPr lang="en-US" sz="580" dirty="0">
-                        <a:latin typeface="Calibri" charset="0"/>
-                        <a:ea typeface="Calibri" charset="0"/>
-                        <a:cs typeface="Calibri" charset="0"/>
-                      </a:endParaRPr>
-                    </a:p>
-                  </a:txBody>
-                  <a:tcPr marL="91440" marR="91440" marT="45720" marB="45720">
-                    <a:lnL w="2540" cap="flat" cmpd="sng" algn="ctr">
-                      <a:solidFill>
-                        <a:srgbClr val="EEEEEE"/>
-                      </a:solidFill>
-                      <a:prstDash val="solid"/>
-                      <a:round/>
-                      <a:headEnd type="none" w="med" len="med"/>
-                      <a:tailEnd type="none" w="med" len="med"/>
-                    </a:lnL>
-                    <a:lnR w="2540" cap="flat" cmpd="sng" algn="ctr">
-                      <a:solidFill>
-                        <a:srgbClr val="EEEEEE"/>
-                      </a:solidFill>
-                      <a:prstDash val="solid"/>
-                      <a:round/>
-                      <a:headEnd type="none" w="med" len="med"/>
-                      <a:tailEnd type="none" w="med" len="med"/>
-                    </a:lnR>
-                    <a:lnT w="2540" cap="flat" cmpd="sng" algn="ctr">
-                      <a:solidFill>
-                        <a:srgbClr val="EEEEEE"/>
-                      </a:solidFill>
-                      <a:prstDash val="solid"/>
-                      <a:round/>
-                      <a:headEnd type="none" w="med" len="med"/>
-                      <a:tailEnd type="none" w="med" len="med"/>
-                    </a:lnT>
-                    <a:lnB w="2540" cap="flat" cmpd="sng" algn="ctr">
-                      <a:solidFill>
-                        <a:srgbClr val="EEEEEE"/>
-                      </a:solidFill>
-                      <a:prstDash val="solid"/>
-                      <a:round/>
-                      <a:headEnd type="none" w="med" len="med"/>
-                      <a:tailEnd type="none" w="med" len="med"/>
-                    </a:lnB>
-                  </a:tcPr>
-                </a:tc>
-              </a:tr>
-              <a:tr h="123444">
-                <a:tc>
-                  <a:txBody>
-                    <a:bodyPr/>
-                    <a:lstStyle/>
-                    <a:p>
-                      <a:pPr algn="l" indent="0" marL="0">
-                        <a:buNone/>
-                      </a:pPr>
-                      <a:endParaRPr lang="en-US" sz="580" dirty="0">
-                        <a:latin typeface="Calibri" charset="0"/>
-                        <a:ea typeface="Calibri" charset="0"/>
-                        <a:cs typeface="Calibri" charset="0"/>
-                      </a:endParaRPr>
-                    </a:p>
-                  </a:txBody>
-                  <a:tcPr marL="91440" marR="91440" marT="45720" marB="45720">
-                    <a:lnL w="2540" cap="flat" cmpd="sng" algn="ctr">
-                      <a:solidFill>
-                        <a:srgbClr val="EEEEEE"/>
-                      </a:solidFill>
-                      <a:prstDash val="solid"/>
-                      <a:round/>
-                      <a:headEnd type="none" w="med" len="med"/>
-                      <a:tailEnd type="none" w="med" len="med"/>
-                    </a:lnL>
-                    <a:lnR w="2540" cap="flat" cmpd="sng" algn="ctr">
-                      <a:solidFill>
-                        <a:srgbClr val="EEEEEE"/>
-                      </a:solidFill>
-                      <a:prstDash val="solid"/>
-                      <a:round/>
-                      <a:headEnd type="none" w="med" len="med"/>
-                      <a:tailEnd type="none" w="med" len="med"/>
-                    </a:lnR>
-                    <a:lnT w="2540" cap="flat" cmpd="sng" algn="ctr">
-                      <a:solidFill>
-                        <a:srgbClr val="EEEEEE"/>
-                      </a:solidFill>
-                      <a:prstDash val="solid"/>
-                      <a:round/>
-                      <a:headEnd type="none" w="med" len="med"/>
-                      <a:tailEnd type="none" w="med" len="med"/>
-                    </a:lnT>
-                    <a:lnB w="2540" cap="flat" cmpd="sng" algn="ctr">
-                      <a:solidFill>
-                        <a:srgbClr val="EEEEEE"/>
-                      </a:solidFill>
-                      <a:prstDash val="solid"/>
-                      <a:round/>
-                      <a:headEnd type="none" w="med" len="med"/>
-                      <a:tailEnd type="none" w="med" len="med"/>
-                    </a:lnB>
-                  </a:tcPr>
-                </a:tc>
-                <a:tc>
-                  <a:txBody>
-                    <a:bodyPr/>
-                    <a:lstStyle/>
-                    <a:p>
-                      <a:pPr algn="l" indent="0" marL="0">
-                        <a:buNone/>
-                      </a:pPr>
-                      <a:r>
-                        <a:rPr lang="en-US" sz="580" b="1" dirty="0">
-                          <a:solidFill>
-                            <a:srgbClr val="000000"/>
-                          </a:solidFill>
-                          <a:latin typeface="Calibri" pitchFamily="34" charset="0"/>
-                          <a:ea typeface="Calibri" pitchFamily="34" charset="-122"/>
-                          <a:cs typeface="Calibri" pitchFamily="34" charset="-120"/>
-                        </a:rPr>
-                        <a:t>FIP LIQUIDEZ TEMPORAL</a:t>
-                      </a:r>
-                      <a:endParaRPr lang="en-US" sz="580" dirty="0">
-                        <a:latin typeface="Calibri" charset="0"/>
-                        <a:ea typeface="Calibri" charset="0"/>
-                        <a:cs typeface="Calibri" charset="0"/>
-                      </a:endParaRPr>
-                    </a:p>
-                  </a:txBody>
-                  <a:tcPr marL="91440" marR="91440" marT="45720" marB="45720">
-                    <a:lnL w="2540" cap="flat" cmpd="sng" algn="ctr">
-                      <a:solidFill>
-                        <a:srgbClr val="EEEEEE"/>
-                      </a:solidFill>
-                      <a:prstDash val="solid"/>
-                      <a:round/>
-                      <a:headEnd type="none" w="med" len="med"/>
-                      <a:tailEnd type="none" w="med" len="med"/>
-                    </a:lnL>
-                    <a:lnR w="2540" cap="flat" cmpd="sng" algn="ctr">
-                      <a:solidFill>
-                        <a:srgbClr val="EEEEEE"/>
-                      </a:solidFill>
-                      <a:prstDash val="solid"/>
-                      <a:round/>
-                      <a:headEnd type="none" w="med" len="med"/>
-                      <a:tailEnd type="none" w="med" len="med"/>
-                    </a:lnR>
-                    <a:lnT w="2540" cap="flat" cmpd="sng" algn="ctr">
-                      <a:solidFill>
-                        <a:srgbClr val="EEEEEE"/>
-                      </a:solidFill>
-                      <a:prstDash val="solid"/>
-                      <a:round/>
-                      <a:headEnd type="none" w="med" len="med"/>
-                      <a:tailEnd type="none" w="med" len="med"/>
-                    </a:lnT>
-                    <a:lnB w="2540" cap="flat" cmpd="sng" algn="ctr">
-                      <a:solidFill>
-                        <a:srgbClr val="EEEEEE"/>
-                      </a:solidFill>
-                      <a:prstDash val="solid"/>
-                      <a:round/>
-                      <a:headEnd type="none" w="med" len="med"/>
-                      <a:tailEnd type="none" w="med" len="med"/>
-                    </a:lnB>
-                  </a:tcPr>
-                </a:tc>
-                <a:tc>
-                  <a:txBody>
-                    <a:bodyPr/>
-                    <a:lstStyle/>
-                    <a:p>
-                      <a:pPr algn="ctr" indent="0" marL="0">
-                        <a:buNone/>
-                      </a:pPr>
-                      <a:endParaRPr lang="en-US" sz="580" dirty="0">
-                        <a:latin typeface="Calibri" charset="0"/>
-                        <a:ea typeface="Calibri" charset="0"/>
-                        <a:cs typeface="Calibri" charset="0"/>
-                      </a:endParaRPr>
-                    </a:p>
-                  </a:txBody>
-                  <a:tcPr marL="91440" marR="91440" marT="45720" marB="45720">
-                    <a:lnL w="2540" cap="flat" cmpd="sng" algn="ctr">
-                      <a:solidFill>
-                        <a:srgbClr val="EEEEEE"/>
-                      </a:solidFill>
-                      <a:prstDash val="solid"/>
-                      <a:round/>
-                      <a:headEnd type="none" w="med" len="med"/>
-                      <a:tailEnd type="none" w="med" len="med"/>
-                    </a:lnL>
-                    <a:lnR w="2540" cap="flat" cmpd="sng" algn="ctr">
-                      <a:solidFill>
-                        <a:srgbClr val="EEEEEE"/>
-                      </a:solidFill>
-                      <a:prstDash val="solid"/>
-                      <a:round/>
-                      <a:headEnd type="none" w="med" len="med"/>
-                      <a:tailEnd type="none" w="med" len="med"/>
-                    </a:lnR>
-                    <a:lnT w="2540" cap="flat" cmpd="sng" algn="ctr">
-                      <a:solidFill>
-                        <a:srgbClr val="EEEEEE"/>
-                      </a:solidFill>
-                      <a:prstDash val="solid"/>
-                      <a:round/>
-                      <a:headEnd type="none" w="med" len="med"/>
-                      <a:tailEnd type="none" w="med" len="med"/>
-                    </a:lnT>
-                    <a:lnB w="2540" cap="flat" cmpd="sng" algn="ctr">
-                      <a:solidFill>
-                        <a:srgbClr val="EEEEEE"/>
-                      </a:solidFill>
-                      <a:prstDash val="solid"/>
-                      <a:round/>
-                      <a:headEnd type="none" w="med" len="med"/>
-                      <a:tailEnd type="none" w="med" len="med"/>
-                    </a:lnB>
-                  </a:tcPr>
-                </a:tc>
-                <a:tc>
-                  <a:txBody>
-                    <a:bodyPr/>
-                    <a:lstStyle/>
-                    <a:p>
-                      <a:pPr algn="ctr" indent="0" marL="0">
-                        <a:buNone/>
-                      </a:pPr>
-                      <a:endParaRPr lang="en-US" sz="580" dirty="0">
-                        <a:latin typeface="Calibri" charset="0"/>
-                        <a:ea typeface="Calibri" charset="0"/>
-                        <a:cs typeface="Calibri" charset="0"/>
-                      </a:endParaRPr>
-                    </a:p>
-                  </a:txBody>
-                  <a:tcPr marL="91440" marR="91440" marT="45720" marB="45720">
-                    <a:lnL w="2540" cap="flat" cmpd="sng" algn="ctr">
-                      <a:solidFill>
-                        <a:srgbClr val="EEEEEE"/>
-                      </a:solidFill>
-                      <a:prstDash val="solid"/>
-                      <a:round/>
-                      <a:headEnd type="none" w="med" len="med"/>
-                      <a:tailEnd type="none" w="med" len="med"/>
-                    </a:lnL>
-                    <a:lnR w="2540" cap="flat" cmpd="sng" algn="ctr">
-                      <a:solidFill>
-                        <a:srgbClr val="EEEEEE"/>
-                      </a:solidFill>
-                      <a:prstDash val="solid"/>
-                      <a:round/>
-                      <a:headEnd type="none" w="med" len="med"/>
-                      <a:tailEnd type="none" w="med" len="med"/>
-                    </a:lnR>
-                    <a:lnT w="2540" cap="flat" cmpd="sng" algn="ctr">
-                      <a:solidFill>
-                        <a:srgbClr val="EEEEEE"/>
-                      </a:solidFill>
-                      <a:prstDash val="solid"/>
-                      <a:round/>
-                      <a:headEnd type="none" w="med" len="med"/>
-                      <a:tailEnd type="none" w="med" len="med"/>
-                    </a:lnT>
-                    <a:lnB w="2540" cap="flat" cmpd="sng" algn="ctr">
-                      <a:solidFill>
-                        <a:srgbClr val="EEEEEE"/>
-                      </a:solidFill>
-                      <a:prstDash val="solid"/>
-                      <a:round/>
-                      <a:headEnd type="none" w="med" len="med"/>
-                      <a:tailEnd type="none" w="med" len="med"/>
-                    </a:lnB>
-                  </a:tcPr>
-                </a:tc>
-                <a:tc>
-                  <a:txBody>
-                    <a:bodyPr/>
-                    <a:lstStyle/>
-                    <a:p>
-                      <a:pPr algn="ctr" indent="0" marL="0">
-                        <a:buNone/>
-                      </a:pPr>
                       <a:r>
                         <a:rPr lang="en-US" sz="580" dirty="0">
                           <a:solidFill>
@@ -10164,7 +13576,7 @@
                           <a:ea typeface="Calibri" pitchFamily="34" charset="-122"/>
                           <a:cs typeface="Calibri" pitchFamily="34" charset="-120"/>
                         </a:rPr>
-                        <a:t>0,00%</a:t>
+                        <a:t>0,58%</a:t>
                       </a:r>
                       <a:endParaRPr lang="en-US" sz="580" dirty="0">
                         <a:latin typeface="Calibri" charset="0"/>
@@ -10229,7 +13641,7 @@
                           <a:ea typeface="Calibri" pitchFamily="34" charset="-122"/>
                           <a:cs typeface="Calibri" pitchFamily="34" charset="-120"/>
                         </a:rPr>
-                        <a:t>1,10%</a:t>
+                        <a:t>0,51%</a:t>
                       </a:r>
                       <a:endParaRPr lang="en-US" sz="580" dirty="0">
                         <a:latin typeface="Calibri" charset="0"/>
@@ -10717,6 +14129,17 @@
                       <a:pPr algn="ctr" indent="0" marL="0">
                         <a:buNone/>
                       </a:pPr>
+                      <a:r>
+                        <a:rPr lang="en-US" sz="580" dirty="0">
+                          <a:solidFill>
+                            <a:srgbClr val="000000"/>
+                          </a:solidFill>
+                          <a:latin typeface="Calibri" pitchFamily="34" charset="0"/>
+                          <a:ea typeface="Calibri" pitchFamily="34" charset="-122"/>
+                          <a:cs typeface="Calibri" pitchFamily="34" charset="-120"/>
+                        </a:rPr>
+                        <a:t>1,09%</a:t>
+                      </a:r>
                       <a:endParaRPr lang="en-US" sz="580" dirty="0">
                         <a:latin typeface="Calibri" charset="0"/>
                         <a:ea typeface="Calibri" charset="0"/>
@@ -10985,91 +14408,13 @@
       </p:sp>
       <p:sp>
         <p:nvSpPr>
-          <p:cNvPr id="8" name="Text 6"/>
+          <p:cNvPr id="8" name="Shape 6"/>
           <p:cNvSpPr/>
           <p:nvPr/>
         </p:nvSpPr>
         <p:spPr>
           <a:xfrm>
-            <a:off x="228600" y="1755648"/>
-            <a:ext cx="1280160" cy="182880"/>
-          </a:xfrm>
-          <a:prstGeom prst="rect">
-            <a:avLst/>
-          </a:prstGeom>
-          <a:noFill/>
-          <a:ln/>
-        </p:spPr>
-        <p:txBody>
-          <a:bodyPr wrap="square" lIns="0" tIns="0" rIns="0" bIns="0" rtlCol="0" anchor="ctr"/>
-          <a:lstStyle/>
-          <a:p>
-            <a:pPr indent="0" marL="0">
-              <a:buNone/>
-            </a:pPr>
-            <a:r>
-              <a:rPr lang="en-US" sz="800" dirty="0">
-                <a:solidFill>
-                  <a:srgbClr val="000000"/>
-                </a:solidFill>
-                <a:latin typeface="Calibri" pitchFamily="34" charset="0"/>
-                <a:ea typeface="Calibri" pitchFamily="34" charset="-122"/>
-                <a:cs typeface="Calibri" pitchFamily="34" charset="-120"/>
-              </a:rPr>
-              <a:t>CLP</a:t>
-            </a:r>
-            <a:endParaRPr lang="en-US" sz="800" dirty="0"/>
-          </a:p>
-        </p:txBody>
-      </p:sp>
-      <p:sp>
-        <p:nvSpPr>
-          <p:cNvPr id="9" name="Text 7"/>
-          <p:cNvSpPr/>
-          <p:nvPr/>
-        </p:nvSpPr>
-        <p:spPr>
-          <a:xfrm>
-            <a:off x="1508760" y="1755648"/>
-            <a:ext cx="960120" cy="182880"/>
-          </a:xfrm>
-          <a:prstGeom prst="rect">
-            <a:avLst/>
-          </a:prstGeom>
-          <a:noFill/>
-          <a:ln/>
-        </p:spPr>
-        <p:txBody>
-          <a:bodyPr wrap="square" lIns="0" tIns="0" rIns="0" bIns="0" rtlCol="0" anchor="ctr"/>
-          <a:lstStyle/>
-          <a:p>
-            <a:pPr algn="r" indent="0" marL="0">
-              <a:buNone/>
-            </a:pPr>
-            <a:r>
-              <a:rPr lang="en-US" sz="800" b="1" dirty="0">
-                <a:solidFill>
-                  <a:srgbClr val="000000"/>
-                </a:solidFill>
-                <a:latin typeface="Calibri" pitchFamily="34" charset="0"/>
-                <a:ea typeface="Calibri" pitchFamily="34" charset="-122"/>
-                <a:cs typeface="Calibri" pitchFamily="34" charset="-120"/>
-              </a:rPr>
-              <a:t>2,92%</a:t>
-            </a:r>
-            <a:endParaRPr lang="en-US" sz="800" dirty="0"/>
-          </a:p>
-        </p:txBody>
-      </p:sp>
-      <p:sp>
-        <p:nvSpPr>
-          <p:cNvPr id="10" name="Shape 8"/>
-          <p:cNvSpPr/>
-          <p:nvPr/>
-        </p:nvSpPr>
-        <p:spPr>
-          <a:xfrm>
-            <a:off x="228600" y="2066544"/>
+            <a:off x="228600" y="1865376"/>
             <a:ext cx="2240280" cy="0"/>
           </a:xfrm>
           <a:prstGeom prst="line">
@@ -11086,13 +14431,13 @@
       </p:sp>
       <p:sp>
         <p:nvSpPr>
-          <p:cNvPr id="11" name="Text 9"/>
+          <p:cNvPr id="9" name="Text 7"/>
           <p:cNvSpPr/>
           <p:nvPr/>
         </p:nvSpPr>
         <p:spPr>
           <a:xfrm>
-            <a:off x="228600" y="2157984"/>
+            <a:off x="228600" y="1956816"/>
             <a:ext cx="2240280" cy="173736"/>
           </a:xfrm>
           <a:prstGeom prst="rect">
@@ -11123,6 +14468,84 @@
           </a:p>
         </p:txBody>
       </p:sp>
+      <p:sp>
+        <p:nvSpPr>
+          <p:cNvPr id="10" name="Text 8"/>
+          <p:cNvSpPr/>
+          <p:nvPr/>
+        </p:nvSpPr>
+        <p:spPr>
+          <a:xfrm>
+            <a:off x="228600" y="2157984"/>
+            <a:ext cx="1417320" cy="164592"/>
+          </a:xfrm>
+          <a:prstGeom prst="rect">
+            <a:avLst/>
+          </a:prstGeom>
+          <a:noFill/>
+          <a:ln/>
+        </p:spPr>
+        <p:txBody>
+          <a:bodyPr wrap="square" lIns="0" tIns="0" rIns="0" bIns="0" rtlCol="0" anchor="ctr"/>
+          <a:lstStyle/>
+          <a:p>
+            <a:pPr indent="0" marL="0">
+              <a:buNone/>
+            </a:pPr>
+            <a:r>
+              <a:rPr lang="en-US" sz="750" dirty="0">
+                <a:solidFill>
+                  <a:srgbClr val="000000"/>
+                </a:solidFill>
+                <a:latin typeface="Calibri" pitchFamily="34" charset="0"/>
+                <a:ea typeface="Calibri" pitchFamily="34" charset="-122"/>
+                <a:cs typeface="Calibri" pitchFamily="34" charset="-120"/>
+              </a:rPr>
+              <a:t>FMX</a:t>
+            </a:r>
+            <a:endParaRPr lang="en-US" sz="750" dirty="0"/>
+          </a:p>
+        </p:txBody>
+      </p:sp>
+      <p:sp>
+        <p:nvSpPr>
+          <p:cNvPr id="11" name="Text 9"/>
+          <p:cNvSpPr/>
+          <p:nvPr/>
+        </p:nvSpPr>
+        <p:spPr>
+          <a:xfrm>
+            <a:off x="1645920" y="2157984"/>
+            <a:ext cx="822960" cy="164592"/>
+          </a:xfrm>
+          <a:prstGeom prst="rect">
+            <a:avLst/>
+          </a:prstGeom>
+          <a:noFill/>
+          <a:ln/>
+        </p:spPr>
+        <p:txBody>
+          <a:bodyPr wrap="square" lIns="0" tIns="0" rIns="0" bIns="0" rtlCol="0" anchor="ctr"/>
+          <a:lstStyle/>
+          <a:p>
+            <a:pPr algn="r" indent="0" marL="0">
+              <a:buNone/>
+            </a:pPr>
+            <a:r>
+              <a:rPr lang="en-US" sz="750" dirty="0">
+                <a:solidFill>
+                  <a:srgbClr val="000000"/>
+                </a:solidFill>
+                <a:latin typeface="Calibri" pitchFamily="34" charset="0"/>
+                <a:ea typeface="Calibri" pitchFamily="34" charset="-122"/>
+                <a:cs typeface="Calibri" pitchFamily="34" charset="-120"/>
+              </a:rPr>
+              <a:t>100,00%</a:t>
+            </a:r>
+            <a:endParaRPr lang="en-US" sz="750" dirty="0"/>
+          </a:p>
+        </p:txBody>
+      </p:sp>
       <p:graphicFrame>
         <p:nvGraphicFramePr>
           <p:cNvPr id="3" name="Table 0"/>
@@ -11138,7 +14561,7 @@
           </p:nvPr>
         </p:nvGraphicFramePr>
         <p:xfrm>
-          <a:off x="228600" y="2359152"/>
+          <a:off x="228600" y="2386584"/>
           <a:ext cx="2240280" cy="914400"/>
         </p:xfrm>
         <a:graphic>
@@ -12864,7 +16287,7 @@
         </p:nvSpPr>
         <p:spPr>
           <a:xfrm>
-            <a:off x="228600" y="4123944"/>
+            <a:off x="228600" y="4151376"/>
             <a:ext cx="2240280" cy="0"/>
           </a:xfrm>
           <a:prstGeom prst="line">
@@ -12887,7 +16310,7 @@
         </p:nvSpPr>
         <p:spPr>
           <a:xfrm>
-            <a:off x="228600" y="4215384"/>
+            <a:off x="228600" y="4242816"/>
             <a:ext cx="2240280" cy="173736"/>
           </a:xfrm>
           <a:prstGeom prst="rect">
@@ -12926,7 +16349,7 @@
         </p:nvSpPr>
         <p:spPr>
           <a:xfrm>
-            <a:off x="228600" y="4443984"/>
+            <a:off x="228600" y="4471416"/>
             <a:ext cx="1417320" cy="201168"/>
           </a:xfrm>
           <a:prstGeom prst="rect">
@@ -12951,7 +16374,7 @@
                 <a:ea typeface="Calibri" pitchFamily="34" charset="-122"/>
                 <a:cs typeface="Calibri" pitchFamily="34" charset="-120"/>
               </a:rPr>
-              <a:t>Menos de 1 mes</a:t>
+              <a:t>Hasta 30 días</a:t>
             </a:r>
             <a:endParaRPr lang="en-US" sz="800" dirty="0"/>
           </a:p>
@@ -12965,7 +16388,7 @@
         </p:nvSpPr>
         <p:spPr>
           <a:xfrm>
-            <a:off x="1645920" y="4443984"/>
+            <a:off x="1645920" y="4471416"/>
             <a:ext cx="822960" cy="201168"/>
           </a:xfrm>
           <a:prstGeom prst="rect">
@@ -12990,7 +16413,7 @@
                 <a:ea typeface="Calibri" pitchFamily="34" charset="-122"/>
                 <a:cs typeface="Calibri" pitchFamily="34" charset="-120"/>
               </a:rPr>
-              <a:t>0,00%</a:t>
+              <a:t>63,16%</a:t>
             </a:r>
             <a:endParaRPr lang="en-US" sz="800" dirty="0"/>
           </a:p>
@@ -13004,7 +16427,7 @@
         </p:nvSpPr>
         <p:spPr>
           <a:xfrm>
-            <a:off x="228600" y="4663440"/>
+            <a:off x="228600" y="4690872"/>
             <a:ext cx="1417320" cy="201168"/>
           </a:xfrm>
           <a:prstGeom prst="rect">
@@ -13029,7 +16452,7 @@
                 <a:ea typeface="Calibri" pitchFamily="34" charset="-122"/>
                 <a:cs typeface="Calibri" pitchFamily="34" charset="-120"/>
               </a:rPr>
-              <a:t>1-3 meses</a:t>
+              <a:t>Entre 31 y 90 días</a:t>
             </a:r>
             <a:endParaRPr lang="en-US" sz="800" dirty="0"/>
           </a:p>
@@ -13043,7 +16466,7 @@
         </p:nvSpPr>
         <p:spPr>
           <a:xfrm>
-            <a:off x="1645920" y="4663440"/>
+            <a:off x="1645920" y="4690872"/>
             <a:ext cx="822960" cy="201168"/>
           </a:xfrm>
           <a:prstGeom prst="rect">
@@ -13068,7 +16491,7 @@
                 <a:ea typeface="Calibri" pitchFamily="34" charset="-122"/>
                 <a:cs typeface="Calibri" pitchFamily="34" charset="-120"/>
               </a:rPr>
-              <a:t>0,00%</a:t>
+              <a:t>28,00%</a:t>
             </a:r>
             <a:endParaRPr lang="en-US" sz="800" dirty="0"/>
           </a:p>
@@ -13082,7 +16505,7 @@
         </p:nvSpPr>
         <p:spPr>
           <a:xfrm>
-            <a:off x="228600" y="4882896"/>
+            <a:off x="228600" y="4910328"/>
             <a:ext cx="1417320" cy="201168"/>
           </a:xfrm>
           <a:prstGeom prst="rect">
@@ -13107,7 +16530,7 @@
                 <a:ea typeface="Calibri" pitchFamily="34" charset="-122"/>
                 <a:cs typeface="Calibri" pitchFamily="34" charset="-120"/>
               </a:rPr>
-              <a:t>3-4 meses</a:t>
+              <a:t>Entre 91 y 120 días</a:t>
             </a:r>
             <a:endParaRPr lang="en-US" sz="800" dirty="0"/>
           </a:p>
@@ -13121,7 +16544,7 @@
         </p:nvSpPr>
         <p:spPr>
           <a:xfrm>
-            <a:off x="1645920" y="4882896"/>
+            <a:off x="1645920" y="4910328"/>
             <a:ext cx="822960" cy="201168"/>
           </a:xfrm>
           <a:prstGeom prst="rect">
@@ -13146,7 +16569,7 @@
                 <a:ea typeface="Calibri" pitchFamily="34" charset="-122"/>
                 <a:cs typeface="Calibri" pitchFamily="34" charset="-120"/>
               </a:rPr>
-              <a:t>0,00%</a:t>
+              <a:t>8,84%</a:t>
             </a:r>
             <a:endParaRPr lang="en-US" sz="800" dirty="0"/>
           </a:p>
@@ -13160,7 +16583,7 @@
         </p:nvSpPr>
         <p:spPr>
           <a:xfrm>
-            <a:off x="228600" y="5102352"/>
+            <a:off x="228600" y="5129784"/>
             <a:ext cx="1417320" cy="201168"/>
           </a:xfrm>
           <a:prstGeom prst="rect">
@@ -13185,7 +16608,7 @@
                 <a:ea typeface="Calibri" pitchFamily="34" charset="-122"/>
                 <a:cs typeface="Calibri" pitchFamily="34" charset="-120"/>
               </a:rPr>
-              <a:t>Más de 4 meses</a:t>
+              <a:t>Entre 1 y 2 años</a:t>
             </a:r>
             <a:endParaRPr lang="en-US" sz="800" dirty="0"/>
           </a:p>
@@ -13199,7 +16622,7 @@
         </p:nvSpPr>
         <p:spPr>
           <a:xfrm>
-            <a:off x="1645920" y="5102352"/>
+            <a:off x="1645920" y="5129784"/>
             <a:ext cx="822960" cy="201168"/>
           </a:xfrm>
           <a:prstGeom prst="rect">

--- a/folletos/2026-04/pptx/FIP_VANTRUST_LIQUIDEZ_TEMPORAL.pptx
+++ b/folletos/2026-04/pptx/FIP_VANTRUST_LIQUIDEZ_TEMPORAL.pptx
@@ -3578,7 +3578,7 @@
                 <a:ea typeface="Calibri" pitchFamily="34" charset="-122"/>
                 <a:cs typeface="Calibri" pitchFamily="34" charset="-120"/>
               </a:rPr>
-              <a:t>prueba CLP</a:t>
+              <a:t>prueba 3 CLP</a:t>
             </a:r>
             <a:endParaRPr lang="en-US" sz="800" dirty="0"/>
           </a:p>

--- a/folletos/2026-04/pptx/FIP_VANTRUST_LIQUIDEZ_TEMPORAL.pptx
+++ b/folletos/2026-04/pptx/FIP_VANTRUST_LIQUIDEZ_TEMPORAL.pptx
@@ -3929,7 +3929,7 @@
                 <a:ea typeface="Calibri" pitchFamily="34" charset="-122"/>
                 <a:cs typeface="Calibri" pitchFamily="34" charset="-120"/>
               </a:rPr>
-              <a:t>prueba CLP</a:t>
+              <a:t>prueba 4 CLP</a:t>
             </a:r>
             <a:endParaRPr lang="en-US" sz="800" dirty="0"/>
           </a:p>

--- a/folletos/2026-04/pptx/FIP_VANTRUST_LIQUIDEZ_TEMPORAL.pptx
+++ b/folletos/2026-04/pptx/FIP_VANTRUST_LIQUIDEZ_TEMPORAL.pptx
@@ -3979,7 +3979,7 @@
                 <a:ea typeface="Calibri" pitchFamily="34" charset="-122"/>
                 <a:cs typeface="Calibri" pitchFamily="34" charset="-120"/>
               </a:rPr>
-              <a:t>prueba CLP</a:t>
+              <a:t>prueba 6 CLP</a:t>
             </a:r>
             <a:endParaRPr lang="en-US" sz="800" dirty="0"/>
           </a:p>

--- a/folletos/2026-04/pptx/FIP_VANTRUST_LIQUIDEZ_TEMPORAL.pptx
+++ b/folletos/2026-04/pptx/FIP_VANTRUST_LIQUIDEZ_TEMPORAL.pptx
@@ -3979,7 +3979,7 @@
                 <a:ea typeface="Calibri" pitchFamily="34" charset="-122"/>
                 <a:cs typeface="Calibri" pitchFamily="34" charset="-120"/>
               </a:rPr>
-              <a:t>prueba 6 CLP</a:t>
+              <a:t>prueba CLP</a:t>
             </a:r>
             <a:endParaRPr lang="en-US" sz="800" dirty="0"/>
           </a:p>
@@ -30870,13 +30870,91 @@
       </p:sp>
       <p:sp>
         <p:nvSpPr>
-          <p:cNvPr id="8" name="Shape 6"/>
+          <p:cNvPr id="8" name="Text 6"/>
           <p:cNvSpPr/>
           <p:nvPr/>
         </p:nvSpPr>
         <p:spPr>
           <a:xfrm>
-            <a:off x="118872" y="1810512"/>
+            <a:off x="118872" y="1719072"/>
+            <a:ext cx="1188720" cy="173736"/>
+          </a:xfrm>
+          <a:prstGeom prst="rect">
+            <a:avLst/>
+          </a:prstGeom>
+          <a:noFill/>
+          <a:ln/>
+        </p:spPr>
+        <p:txBody>
+          <a:bodyPr wrap="square" lIns="0" tIns="0" rIns="0" bIns="0" rtlCol="0" anchor="ctr"/>
+          <a:lstStyle/>
+          <a:p>
+            <a:pPr indent="0" marL="0">
+              <a:buNone/>
+            </a:pPr>
+            <a:r>
+              <a:rPr lang="en-US" sz="750" dirty="0">
+                <a:solidFill>
+                  <a:srgbClr val="000000"/>
+                </a:solidFill>
+                <a:latin typeface="Calibri" pitchFamily="34" charset="0"/>
+                <a:ea typeface="Calibri" pitchFamily="34" charset="-122"/>
+                <a:cs typeface="Calibri" pitchFamily="34" charset="-120"/>
+              </a:rPr>
+              <a:t>CLP</a:t>
+            </a:r>
+            <a:endParaRPr lang="en-US" sz="750" dirty="0"/>
+          </a:p>
+        </p:txBody>
+      </p:sp>
+      <p:sp>
+        <p:nvSpPr>
+          <p:cNvPr id="9" name="Text 7"/>
+          <p:cNvSpPr/>
+          <p:nvPr/>
+        </p:nvSpPr>
+        <p:spPr>
+          <a:xfrm>
+            <a:off x="1307592" y="1719072"/>
+            <a:ext cx="1024128" cy="173736"/>
+          </a:xfrm>
+          <a:prstGeom prst="rect">
+            <a:avLst/>
+          </a:prstGeom>
+          <a:noFill/>
+          <a:ln/>
+        </p:spPr>
+        <p:txBody>
+          <a:bodyPr wrap="square" lIns="0" tIns="0" rIns="0" bIns="0" rtlCol="0" anchor="ctr"/>
+          <a:lstStyle/>
+          <a:p>
+            <a:pPr algn="r" indent="0" marL="0">
+              <a:buNone/>
+            </a:pPr>
+            <a:r>
+              <a:rPr lang="en-US" sz="750" b="1" dirty="0">
+                <a:solidFill>
+                  <a:srgbClr val="000000"/>
+                </a:solidFill>
+                <a:latin typeface="Calibri" pitchFamily="34" charset="0"/>
+                <a:ea typeface="Calibri" pitchFamily="34" charset="-122"/>
+                <a:cs typeface="Calibri" pitchFamily="34" charset="-120"/>
+              </a:rPr>
+              <a:t>100,00%</a:t>
+            </a:r>
+            <a:endParaRPr lang="en-US" sz="750" dirty="0"/>
+          </a:p>
+        </p:txBody>
+      </p:sp>
+      <p:sp>
+        <p:nvSpPr>
+          <p:cNvPr id="10" name="Shape 8"/>
+          <p:cNvSpPr/>
+          <p:nvPr/>
+        </p:nvSpPr>
+        <p:spPr>
+          <a:xfrm>
+            <a:off x="118872" y="2002536"/>
             <a:ext cx="2212848" cy="0"/>
           </a:xfrm>
           <a:prstGeom prst="line">
@@ -30893,13 +30971,13 @@
       </p:sp>
       <p:sp>
         <p:nvSpPr>
-          <p:cNvPr id="9" name="Text 7"/>
+          <p:cNvPr id="11" name="Text 9"/>
           <p:cNvSpPr/>
           <p:nvPr/>
         </p:nvSpPr>
         <p:spPr>
           <a:xfrm>
-            <a:off x="118872" y="1901952"/>
+            <a:off x="118872" y="2093976"/>
             <a:ext cx="2212848" cy="164592"/>
           </a:xfrm>
           <a:prstGeom prst="rect">
@@ -30932,13 +31010,13 @@
       </p:sp>
       <p:sp>
         <p:nvSpPr>
-          <p:cNvPr id="10" name="Shape 8"/>
+          <p:cNvPr id="12" name="Shape 10"/>
           <p:cNvSpPr/>
           <p:nvPr/>
         </p:nvSpPr>
         <p:spPr>
           <a:xfrm>
-            <a:off x="118872" y="2084832"/>
+            <a:off x="118872" y="2276856"/>
             <a:ext cx="2212848" cy="0"/>
           </a:xfrm>
           <a:prstGeom prst="line">
@@ -30955,13 +31033,13 @@
       </p:sp>
       <p:sp>
         <p:nvSpPr>
-          <p:cNvPr id="11" name="Text 9"/>
+          <p:cNvPr id="13" name="Text 11"/>
           <p:cNvSpPr/>
           <p:nvPr/>
         </p:nvSpPr>
         <p:spPr>
           <a:xfrm>
-            <a:off x="118872" y="2157984"/>
+            <a:off x="118872" y="2350008"/>
             <a:ext cx="1371600" cy="164592"/>
           </a:xfrm>
           <a:prstGeom prst="rect">
@@ -30994,13 +31072,13 @@
       </p:sp>
       <p:sp>
         <p:nvSpPr>
-          <p:cNvPr id="12" name="Text 10"/>
+          <p:cNvPr id="14" name="Text 12"/>
           <p:cNvSpPr/>
           <p:nvPr/>
         </p:nvSpPr>
         <p:spPr>
           <a:xfrm>
-            <a:off x="1490472" y="2157984"/>
+            <a:off x="1490472" y="2350008"/>
             <a:ext cx="841248" cy="164592"/>
           </a:xfrm>
           <a:prstGeom prst="rect">
@@ -31033,13 +31111,13 @@
       </p:sp>
       <p:sp>
         <p:nvSpPr>
-          <p:cNvPr id="13" name="Shape 11"/>
+          <p:cNvPr id="15" name="Shape 13"/>
           <p:cNvSpPr/>
           <p:nvPr/>
         </p:nvSpPr>
         <p:spPr>
           <a:xfrm>
-            <a:off x="118872" y="2423160"/>
+            <a:off x="118872" y="2615184"/>
             <a:ext cx="2212848" cy="0"/>
           </a:xfrm>
           <a:prstGeom prst="line">
@@ -31056,13 +31134,13 @@
       </p:sp>
       <p:sp>
         <p:nvSpPr>
-          <p:cNvPr id="14" name="Text 12"/>
+          <p:cNvPr id="16" name="Text 14"/>
           <p:cNvSpPr/>
           <p:nvPr/>
         </p:nvSpPr>
         <p:spPr>
           <a:xfrm>
-            <a:off x="118872" y="2514600"/>
+            <a:off x="118872" y="2706624"/>
             <a:ext cx="2212848" cy="164592"/>
           </a:xfrm>
           <a:prstGeom prst="rect">
@@ -31095,13 +31173,13 @@
       </p:sp>
       <p:sp>
         <p:nvSpPr>
-          <p:cNvPr id="15" name="Shape 13"/>
+          <p:cNvPr id="17" name="Shape 15"/>
           <p:cNvSpPr/>
           <p:nvPr/>
         </p:nvSpPr>
         <p:spPr>
           <a:xfrm>
-            <a:off x="118872" y="2697480"/>
+            <a:off x="118872" y="2889504"/>
             <a:ext cx="2212848" cy="0"/>
           </a:xfrm>
           <a:prstGeom prst="line">
@@ -31118,13 +31196,13 @@
       </p:sp>
       <p:sp>
         <p:nvSpPr>
-          <p:cNvPr id="16" name="Text 14"/>
+          <p:cNvPr id="18" name="Text 16"/>
           <p:cNvSpPr/>
           <p:nvPr/>
         </p:nvSpPr>
         <p:spPr>
           <a:xfrm>
-            <a:off x="118872" y="2770632"/>
+            <a:off x="118872" y="2962656"/>
             <a:ext cx="1371600" cy="182880"/>
           </a:xfrm>
           <a:prstGeom prst="rect">
@@ -31157,13 +31235,13 @@
       </p:sp>
       <p:sp>
         <p:nvSpPr>
-          <p:cNvPr id="17" name="Text 15"/>
+          <p:cNvPr id="19" name="Text 17"/>
           <p:cNvSpPr/>
           <p:nvPr/>
         </p:nvSpPr>
         <p:spPr>
           <a:xfrm>
-            <a:off x="1490472" y="2770632"/>
+            <a:off x="1490472" y="2962656"/>
             <a:ext cx="841248" cy="182880"/>
           </a:xfrm>
           <a:prstGeom prst="rect">
@@ -31188,7 +31266,7 @@
                 <a:ea typeface="Calibri" pitchFamily="34" charset="-122"/>
                 <a:cs typeface="Calibri" pitchFamily="34" charset="-120"/>
               </a:rPr>
-              <a:t>63,16%</a:t>
+              <a:t>50,78%</a:t>
             </a:r>
             <a:endParaRPr lang="en-US" sz="750" dirty="0"/>
           </a:p>
@@ -31196,13 +31274,13 @@
       </p:sp>
       <p:sp>
         <p:nvSpPr>
-          <p:cNvPr id="18" name="Text 16"/>
+          <p:cNvPr id="20" name="Text 18"/>
           <p:cNvSpPr/>
           <p:nvPr/>
         </p:nvSpPr>
         <p:spPr>
           <a:xfrm>
-            <a:off x="118872" y="2971800"/>
+            <a:off x="118872" y="3163824"/>
             <a:ext cx="1371600" cy="182880"/>
           </a:xfrm>
           <a:prstGeom prst="rect">
@@ -31235,13 +31313,13 @@
       </p:sp>
       <p:sp>
         <p:nvSpPr>
-          <p:cNvPr id="19" name="Text 17"/>
+          <p:cNvPr id="21" name="Text 19"/>
           <p:cNvSpPr/>
           <p:nvPr/>
         </p:nvSpPr>
         <p:spPr>
           <a:xfrm>
-            <a:off x="1490472" y="2971800"/>
+            <a:off x="1490472" y="3163824"/>
             <a:ext cx="841248" cy="182880"/>
           </a:xfrm>
           <a:prstGeom prst="rect">
@@ -31266,7 +31344,7 @@
                 <a:ea typeface="Calibri" pitchFamily="34" charset="-122"/>
                 <a:cs typeface="Calibri" pitchFamily="34" charset="-120"/>
               </a:rPr>
-              <a:t>28,00%</a:t>
+              <a:t>49,22%</a:t>
             </a:r>
             <a:endParaRPr lang="en-US" sz="750" dirty="0"/>
           </a:p>
@@ -31274,13 +31352,13 @@
       </p:sp>
       <p:sp>
         <p:nvSpPr>
-          <p:cNvPr id="20" name="Text 18"/>
+          <p:cNvPr id="22" name="Text 20"/>
           <p:cNvSpPr/>
           <p:nvPr/>
         </p:nvSpPr>
         <p:spPr>
           <a:xfrm>
-            <a:off x="118872" y="3172968"/>
+            <a:off x="118872" y="3364992"/>
             <a:ext cx="1371600" cy="182880"/>
           </a:xfrm>
           <a:prstGeom prst="rect">
@@ -31313,91 +31391,13 @@
       </p:sp>
       <p:sp>
         <p:nvSpPr>
-          <p:cNvPr id="21" name="Text 19"/>
-          <p:cNvSpPr/>
-          <p:nvPr/>
-        </p:nvSpPr>
-        <p:spPr>
-          <a:xfrm>
-            <a:off x="1490472" y="3172968"/>
-            <a:ext cx="841248" cy="182880"/>
-          </a:xfrm>
-          <a:prstGeom prst="rect">
-            <a:avLst/>
-          </a:prstGeom>
-          <a:noFill/>
-          <a:ln/>
-        </p:spPr>
-        <p:txBody>
-          <a:bodyPr wrap="square" lIns="0" tIns="0" rIns="0" bIns="0" rtlCol="0" anchor="ctr"/>
-          <a:lstStyle/>
-          <a:p>
-            <a:pPr algn="r" indent="0" marL="0">
-              <a:buNone/>
-            </a:pPr>
-            <a:r>
-              <a:rPr lang="en-US" sz="750" b="1" dirty="0">
-                <a:solidFill>
-                  <a:srgbClr val="000000"/>
-                </a:solidFill>
-                <a:latin typeface="Calibri" pitchFamily="34" charset="0"/>
-                <a:ea typeface="Calibri" pitchFamily="34" charset="-122"/>
-                <a:cs typeface="Calibri" pitchFamily="34" charset="-120"/>
-              </a:rPr>
-              <a:t>8,84%</a:t>
-            </a:r>
-            <a:endParaRPr lang="en-US" sz="750" dirty="0"/>
-          </a:p>
-        </p:txBody>
-      </p:sp>
-      <p:sp>
-        <p:nvSpPr>
-          <p:cNvPr id="22" name="Text 20"/>
-          <p:cNvSpPr/>
-          <p:nvPr/>
-        </p:nvSpPr>
-        <p:spPr>
-          <a:xfrm>
-            <a:off x="118872" y="3374136"/>
-            <a:ext cx="1371600" cy="182880"/>
-          </a:xfrm>
-          <a:prstGeom prst="rect">
-            <a:avLst/>
-          </a:prstGeom>
-          <a:noFill/>
-          <a:ln/>
-        </p:spPr>
-        <p:txBody>
-          <a:bodyPr wrap="square" lIns="0" tIns="0" rIns="0" bIns="0" rtlCol="0" anchor="ctr"/>
-          <a:lstStyle/>
-          <a:p>
-            <a:pPr indent="0" marL="0">
-              <a:buNone/>
-            </a:pPr>
-            <a:r>
-              <a:rPr lang="en-US" sz="750" dirty="0">
-                <a:solidFill>
-                  <a:srgbClr val="000000"/>
-                </a:solidFill>
-                <a:latin typeface="Calibri" pitchFamily="34" charset="0"/>
-                <a:ea typeface="Calibri" pitchFamily="34" charset="-122"/>
-                <a:cs typeface="Calibri" pitchFamily="34" charset="-120"/>
-              </a:rPr>
-              <a:t>Entre 1 y 2 años</a:t>
-            </a:r>
-            <a:endParaRPr lang="en-US" sz="750" dirty="0"/>
-          </a:p>
-        </p:txBody>
-      </p:sp>
-      <p:sp>
-        <p:nvSpPr>
           <p:cNvPr id="23" name="Text 21"/>
           <p:cNvSpPr/>
           <p:nvPr/>
         </p:nvSpPr>
         <p:spPr>
           <a:xfrm>
-            <a:off x="1490472" y="3374136"/>
+            <a:off x="1490472" y="3364992"/>
             <a:ext cx="841248" cy="182880"/>
           </a:xfrm>
           <a:prstGeom prst="rect">
@@ -31436,6 +31436,84 @@
         </p:nvSpPr>
         <p:spPr>
           <a:xfrm>
+            <a:off x="118872" y="3566160"/>
+            <a:ext cx="1371600" cy="182880"/>
+          </a:xfrm>
+          <a:prstGeom prst="rect">
+            <a:avLst/>
+          </a:prstGeom>
+          <a:noFill/>
+          <a:ln/>
+        </p:spPr>
+        <p:txBody>
+          <a:bodyPr wrap="square" lIns="0" tIns="0" rIns="0" bIns="0" rtlCol="0" anchor="ctr"/>
+          <a:lstStyle/>
+          <a:p>
+            <a:pPr indent="0" marL="0">
+              <a:buNone/>
+            </a:pPr>
+            <a:r>
+              <a:rPr lang="en-US" sz="750" dirty="0">
+                <a:solidFill>
+                  <a:srgbClr val="000000"/>
+                </a:solidFill>
+                <a:latin typeface="Calibri" pitchFamily="34" charset="0"/>
+                <a:ea typeface="Calibri" pitchFamily="34" charset="-122"/>
+                <a:cs typeface="Calibri" pitchFamily="34" charset="-120"/>
+              </a:rPr>
+              <a:t>Entre 1 y 2 años</a:t>
+            </a:r>
+            <a:endParaRPr lang="en-US" sz="750" dirty="0"/>
+          </a:p>
+        </p:txBody>
+      </p:sp>
+      <p:sp>
+        <p:nvSpPr>
+          <p:cNvPr id="25" name="Text 23"/>
+          <p:cNvSpPr/>
+          <p:nvPr/>
+        </p:nvSpPr>
+        <p:spPr>
+          <a:xfrm>
+            <a:off x="1490472" y="3566160"/>
+            <a:ext cx="841248" cy="182880"/>
+          </a:xfrm>
+          <a:prstGeom prst="rect">
+            <a:avLst/>
+          </a:prstGeom>
+          <a:noFill/>
+          <a:ln/>
+        </p:spPr>
+        <p:txBody>
+          <a:bodyPr wrap="square" lIns="0" tIns="0" rIns="0" bIns="0" rtlCol="0" anchor="ctr"/>
+          <a:lstStyle/>
+          <a:p>
+            <a:pPr algn="r" indent="0" marL="0">
+              <a:buNone/>
+            </a:pPr>
+            <a:r>
+              <a:rPr lang="en-US" sz="750" b="1" dirty="0">
+                <a:solidFill>
+                  <a:srgbClr val="000000"/>
+                </a:solidFill>
+                <a:latin typeface="Calibri" pitchFamily="34" charset="0"/>
+                <a:ea typeface="Calibri" pitchFamily="34" charset="-122"/>
+                <a:cs typeface="Calibri" pitchFamily="34" charset="-120"/>
+              </a:rPr>
+              <a:t>0,00%</a:t>
+            </a:r>
+            <a:endParaRPr lang="en-US" sz="750" dirty="0"/>
+          </a:p>
+        </p:txBody>
+      </p:sp>
+      <p:sp>
+        <p:nvSpPr>
+          <p:cNvPr id="26" name="Text 24"/>
+          <p:cNvSpPr/>
+          <p:nvPr/>
+        </p:nvSpPr>
+        <p:spPr>
+          <a:xfrm>
             <a:off x="2606040" y="137160"/>
             <a:ext cx="4818888" cy="246888"/>
           </a:xfrm>
@@ -31469,7 +31547,7 @@
       </p:sp>
       <p:sp>
         <p:nvSpPr>
-          <p:cNvPr id="25" name="Shape 23"/>
+          <p:cNvPr id="27" name="Shape 25"/>
           <p:cNvSpPr/>
           <p:nvPr/>
         </p:nvSpPr>
@@ -31492,7 +31570,7 @@
       </p:sp>
       <p:sp>
         <p:nvSpPr>
-          <p:cNvPr id="26" name="Text 24"/>
+          <p:cNvPr id="28" name="Text 26"/>
           <p:cNvSpPr/>
           <p:nvPr/>
         </p:nvSpPr>
@@ -31548,7 +31626,7 @@
       </p:sp>
       <p:sp>
         <p:nvSpPr>
-          <p:cNvPr id="27" name="Text 25"/>
+          <p:cNvPr id="29" name="Text 27"/>
           <p:cNvSpPr/>
           <p:nvPr/>
         </p:nvSpPr>
@@ -31604,7 +31682,7 @@
       </p:sp>
       <p:sp>
         <p:nvSpPr>
-          <p:cNvPr id="28" name="Text 26"/>
+          <p:cNvPr id="30" name="Text 28"/>
           <p:cNvSpPr/>
           <p:nvPr/>
         </p:nvSpPr>
@@ -31660,7 +31738,7 @@
       </p:sp>
       <p:sp>
         <p:nvSpPr>
-          <p:cNvPr id="29" name="Text 27"/>
+          <p:cNvPr id="31" name="Text 29"/>
           <p:cNvSpPr/>
           <p:nvPr/>
         </p:nvSpPr>
@@ -31716,7 +31794,7 @@
       </p:sp>
       <p:sp>
         <p:nvSpPr>
-          <p:cNvPr id="30" name="Text 28"/>
+          <p:cNvPr id="32" name="Text 30"/>
           <p:cNvSpPr/>
           <p:nvPr/>
         </p:nvSpPr>
@@ -31772,7 +31850,7 @@
       </p:sp>
       <p:sp>
         <p:nvSpPr>
-          <p:cNvPr id="31" name="Text 29"/>
+          <p:cNvPr id="33" name="Text 31"/>
           <p:cNvSpPr/>
           <p:nvPr/>
         </p:nvSpPr>
@@ -31828,7 +31906,7 @@
       </p:sp>
       <p:sp>
         <p:nvSpPr>
-          <p:cNvPr id="32" name="Text 30"/>
+          <p:cNvPr id="34" name="Text 32"/>
           <p:cNvSpPr/>
           <p:nvPr/>
         </p:nvSpPr>
@@ -31884,7 +31962,7 @@
       </p:sp>
       <p:sp>
         <p:nvSpPr>
-          <p:cNvPr id="33" name="Text 31"/>
+          <p:cNvPr id="35" name="Text 33"/>
           <p:cNvSpPr/>
           <p:nvPr/>
         </p:nvSpPr>
@@ -31940,7 +32018,7 @@
       </p:sp>
       <p:sp>
         <p:nvSpPr>
-          <p:cNvPr id="34" name="Text 32"/>
+          <p:cNvPr id="36" name="Text 34"/>
           <p:cNvSpPr/>
           <p:nvPr/>
         </p:nvSpPr>
@@ -31996,7 +32074,7 @@
       </p:sp>
       <p:sp>
         <p:nvSpPr>
-          <p:cNvPr id="35" name="Shape 33"/>
+          <p:cNvPr id="37" name="Shape 35"/>
           <p:cNvSpPr/>
           <p:nvPr/>
         </p:nvSpPr>
@@ -32019,7 +32097,7 @@
       </p:sp>
       <p:sp>
         <p:nvSpPr>
-          <p:cNvPr id="36" name="Text 34"/>
+          <p:cNvPr id="38" name="Text 36"/>
           <p:cNvSpPr/>
           <p:nvPr/>
         </p:nvSpPr>
@@ -32058,7 +32136,7 @@
       </p:sp>
       <p:sp>
         <p:nvSpPr>
-          <p:cNvPr id="37" name="Shape 35"/>
+          <p:cNvPr id="39" name="Shape 37"/>
           <p:cNvSpPr/>
           <p:nvPr/>
         </p:nvSpPr>
@@ -32081,7 +32159,7 @@
       </p:sp>
       <p:sp>
         <p:nvSpPr>
-          <p:cNvPr id="38" name="Text 36"/>
+          <p:cNvPr id="40" name="Text 38"/>
           <p:cNvSpPr/>
           <p:nvPr/>
         </p:nvSpPr>

--- a/folletos/2026-04/pptx/FIP_VANTRUST_LIQUIDEZ_TEMPORAL.pptx
+++ b/folletos/2026-04/pptx/FIP_VANTRUST_LIQUIDEZ_TEMPORAL.pptx
@@ -3979,7 +3979,7 @@
                 <a:ea typeface="Calibri" pitchFamily="34" charset="-122"/>
                 <a:cs typeface="Calibri" pitchFamily="34" charset="-120"/>
               </a:rPr>
-              <a:t>prueba CLP</a:t>
+              <a:t>prueba 8 CLP</a:t>
             </a:r>
             <a:endParaRPr lang="en-US" sz="800" dirty="0"/>
           </a:p>

--- a/folletos/2026-04/pptx/FIP_VANTRUST_LIQUIDEZ_TEMPORAL.pptx
+++ b/folletos/2026-04/pptx/FIP_VANTRUST_LIQUIDEZ_TEMPORAL.pptx
@@ -2988,7 +2988,7 @@
                 <a:ea typeface="Calibri" pitchFamily="34" charset="-122"/>
                 <a:cs typeface="Calibri" pitchFamily="34" charset="-120"/>
               </a:rPr>
-              <a:t>prueba CLP</a:t>
+              <a:t>prueba 10 CLP</a:t>
             </a:r>
             <a:endParaRPr lang="en-US" sz="800" dirty="0"/>
           </a:p>

--- a/folletos/2026-04/pptx/FIP_VANTRUST_LIQUIDEZ_TEMPORAL.pptx
+++ b/folletos/2026-04/pptx/FIP_VANTRUST_LIQUIDEZ_TEMPORAL.pptx
@@ -2988,7 +2988,7 @@
                 <a:ea typeface="Calibri" pitchFamily="34" charset="-122"/>
                 <a:cs typeface="Calibri" pitchFamily="34" charset="-120"/>
               </a:rPr>
-              <a:t>prueba 10 CLP</a:t>
+              <a:t>prueba 11 CLP</a:t>
             </a:r>
             <a:endParaRPr lang="en-US" sz="800" dirty="0"/>
           </a:p>

--- a/folletos/2026-04/pptx/FIP_VANTRUST_LIQUIDEZ_TEMPORAL.pptx
+++ b/folletos/2026-04/pptx/FIP_VANTRUST_LIQUIDEZ_TEMPORAL.pptx
@@ -3005,7 +3005,7 @@
                 <a:ea typeface="Calibri" pitchFamily="34" charset="-122"/>
                 <a:cs typeface="Calibri" pitchFamily="34" charset="-120"/>
               </a:rPr>
-              <a:t>prueba CLP</a:t>
+              <a:t>prueba 11 CLP</a:t>
             </a:r>
             <a:endParaRPr lang="en-US" sz="800" dirty="0"/>
           </a:p>

--- a/folletos/2026-04/pptx/FIP_VANTRUST_LIQUIDEZ_TEMPORAL.pptx
+++ b/folletos/2026-04/pptx/FIP_VANTRUST_LIQUIDEZ_TEMPORAL.pptx
@@ -3005,7 +3005,7 @@
                 <a:ea typeface="Calibri" pitchFamily="34" charset="-122"/>
                 <a:cs typeface="Calibri" pitchFamily="34" charset="-120"/>
               </a:rPr>
-              <a:t>prueba 11 CLP</a:t>
+              <a:t>prueba 12 CLP</a:t>
             </a:r>
             <a:endParaRPr lang="en-US" sz="800" dirty="0"/>
           </a:p>

--- a/folletos/2026-04/pptx/FIP_VANTRUST_LIQUIDEZ_TEMPORAL.pptx
+++ b/folletos/2026-04/pptx/FIP_VANTRUST_LIQUIDEZ_TEMPORAL.pptx
@@ -2987,7 +2987,7 @@
                 <a:ea typeface="Calibri" pitchFamily="34" charset="-122"/>
                 <a:cs typeface="Calibri" pitchFamily="34" charset="-120"/>
               </a:rPr>
-              <a:t>prueba CLP</a:t>
+              <a:t>prueba 12 CLP</a:t>
             </a:r>
             <a:endParaRPr lang="en-US" sz="800" dirty="0"/>
           </a:p>

--- a/folletos/2026-04/pptx/FIP_VANTRUST_LIQUIDEZ_TEMPORAL.pptx
+++ b/folletos/2026-04/pptx/FIP_VANTRUST_LIQUIDEZ_TEMPORAL.pptx
@@ -2987,7 +2987,7 @@
                 <a:ea typeface="Calibri" pitchFamily="34" charset="-122"/>
                 <a:cs typeface="Calibri" pitchFamily="34" charset="-120"/>
               </a:rPr>
-              <a:t>prueba 12 CLP</a:t>
+              <a:t>prueba CLP</a:t>
             </a:r>
             <a:endParaRPr lang="en-US" sz="800" dirty="0"/>
           </a:p>
@@ -7213,7 +7213,7 @@
                           <a:ea typeface="Calibri" pitchFamily="34" charset="-122"/>
                           <a:cs typeface="Calibri" pitchFamily="34" charset="-120"/>
                         </a:rPr>
-                        <a:t>0.00%</a:t>
+                        <a:t>0.46%</a:t>
                       </a:r>
                       <a:endParaRPr lang="en-US" sz="500" dirty="0">
                         <a:latin typeface="Calibri" charset="0"/>
@@ -7278,7 +7278,7 @@
                           <a:ea typeface="Calibri" pitchFamily="34" charset="-122"/>
                           <a:cs typeface="Calibri" pitchFamily="34" charset="-120"/>
                         </a:rPr>
-                        <a:t>0.00%</a:t>
+                        <a:t>0.50%</a:t>
                       </a:r>
                       <a:endParaRPr lang="en-US" sz="500" dirty="0">
                         <a:latin typeface="Calibri" charset="0"/>
@@ -7343,7 +7343,7 @@
                           <a:ea typeface="Calibri" pitchFamily="34" charset="-122"/>
                           <a:cs typeface="Calibri" pitchFamily="34" charset="-120"/>
                         </a:rPr>
-                        <a:t>0.00%</a:t>
+                        <a:t>0.48%</a:t>
                       </a:r>
                       <a:endParaRPr lang="en-US" sz="500" dirty="0">
                         <a:latin typeface="Calibri" charset="0"/>
@@ -7408,7 +7408,7 @@
                           <a:ea typeface="Calibri" pitchFamily="34" charset="-122"/>
                           <a:cs typeface="Calibri" pitchFamily="34" charset="-120"/>
                         </a:rPr>
-                        <a:t>0.01%</a:t>
+                        <a:t>0.61%</a:t>
                       </a:r>
                       <a:endParaRPr lang="en-US" sz="500" dirty="0">
                         <a:latin typeface="Calibri" charset="0"/>
@@ -7473,7 +7473,7 @@
                           <a:ea typeface="Calibri" pitchFamily="34" charset="-122"/>
                           <a:cs typeface="Calibri" pitchFamily="34" charset="-120"/>
                         </a:rPr>
-                        <a:t>0.01%</a:t>
+                        <a:t>0.68%</a:t>
                       </a:r>
                       <a:endParaRPr lang="en-US" sz="500" dirty="0">
                         <a:latin typeface="Calibri" charset="0"/>
@@ -7538,7 +7538,7 @@
                           <a:ea typeface="Calibri" pitchFamily="34" charset="-122"/>
                           <a:cs typeface="Calibri" pitchFamily="34" charset="-120"/>
                         </a:rPr>
-                        <a:t>0.01%</a:t>
+                        <a:t>0.73%</a:t>
                       </a:r>
                       <a:endParaRPr lang="en-US" sz="500" dirty="0">
                         <a:latin typeface="Calibri" charset="0"/>
@@ -7603,7 +7603,7 @@
                           <a:ea typeface="Calibri" pitchFamily="34" charset="-122"/>
                           <a:cs typeface="Calibri" pitchFamily="34" charset="-120"/>
                         </a:rPr>
-                        <a:t>0.01%</a:t>
+                        <a:t>0.79%</a:t>
                       </a:r>
                       <a:endParaRPr lang="en-US" sz="500" dirty="0">
                         <a:latin typeface="Calibri" charset="0"/>
@@ -7668,7 +7668,7 @@
                           <a:ea typeface="Calibri" pitchFamily="34" charset="-122"/>
                           <a:cs typeface="Calibri" pitchFamily="34" charset="-120"/>
                         </a:rPr>
-                        <a:t>0.01%</a:t>
+                        <a:t>0.96%</a:t>
                       </a:r>
                       <a:endParaRPr lang="en-US" sz="500" dirty="0">
                         <a:latin typeface="Calibri" charset="0"/>
@@ -7733,7 +7733,7 @@
                           <a:ea typeface="Calibri" pitchFamily="34" charset="-122"/>
                           <a:cs typeface="Calibri" pitchFamily="34" charset="-120"/>
                         </a:rPr>
-                        <a:t>0.05%</a:t>
+                        <a:t>5.32%</a:t>
                       </a:r>
                       <a:endParaRPr lang="en-US" sz="500" dirty="0">
                         <a:latin typeface="Calibri" charset="0"/>
@@ -8135,7 +8135,7 @@
                           <a:ea typeface="Calibri" pitchFamily="34" charset="-122"/>
                           <a:cs typeface="Calibri" pitchFamily="34" charset="-120"/>
                         </a:rPr>
-                        <a:t>0.01%</a:t>
+                        <a:t>0.58%</a:t>
                       </a:r>
                       <a:endParaRPr lang="en-US" sz="500" dirty="0">
                         <a:latin typeface="Calibri" charset="0"/>
@@ -8200,7 +8200,7 @@
                           <a:ea typeface="Calibri" pitchFamily="34" charset="-122"/>
                           <a:cs typeface="Calibri" pitchFamily="34" charset="-120"/>
                         </a:rPr>
-                        <a:t>0.01%</a:t>
+                        <a:t>0.60%</a:t>
                       </a:r>
                       <a:endParaRPr lang="en-US" sz="500" dirty="0">
                         <a:latin typeface="Calibri" charset="0"/>
@@ -8265,7 +8265,7 @@
                           <a:ea typeface="Calibri" pitchFamily="34" charset="-122"/>
                           <a:cs typeface="Calibri" pitchFamily="34" charset="-120"/>
                         </a:rPr>
-                        <a:t>0.01%</a:t>
+                        <a:t>0.58%</a:t>
                       </a:r>
                       <a:endParaRPr lang="en-US" sz="500" dirty="0">
                         <a:latin typeface="Calibri" charset="0"/>
@@ -8330,7 +8330,7 @@
                           <a:ea typeface="Calibri" pitchFamily="34" charset="-122"/>
                           <a:cs typeface="Calibri" pitchFamily="34" charset="-120"/>
                         </a:rPr>
-                        <a:t>0.01%</a:t>
+                        <a:t>0.58%</a:t>
                       </a:r>
                       <a:endParaRPr lang="en-US" sz="500" dirty="0">
                         <a:latin typeface="Calibri" charset="0"/>
@@ -8395,7 +8395,7 @@
                           <a:ea typeface="Calibri" pitchFamily="34" charset="-122"/>
                           <a:cs typeface="Calibri" pitchFamily="34" charset="-120"/>
                         </a:rPr>
-                        <a:t>0.01%</a:t>
+                        <a:t>0.60%</a:t>
                       </a:r>
                       <a:endParaRPr lang="en-US" sz="500" dirty="0">
                         <a:latin typeface="Calibri" charset="0"/>
@@ -8460,7 +8460,7 @@
                           <a:ea typeface="Calibri" pitchFamily="34" charset="-122"/>
                           <a:cs typeface="Calibri" pitchFamily="34" charset="-120"/>
                         </a:rPr>
-                        <a:t>0.01%</a:t>
+                        <a:t>0.58%</a:t>
                       </a:r>
                       <a:endParaRPr lang="en-US" sz="500" dirty="0">
                         <a:latin typeface="Calibri" charset="0"/>
@@ -8525,7 +8525,7 @@
                           <a:ea typeface="Calibri" pitchFamily="34" charset="-122"/>
                           <a:cs typeface="Calibri" pitchFamily="34" charset="-120"/>
                         </a:rPr>
-                        <a:t>0.01%</a:t>
+                        <a:t>0.84%</a:t>
                       </a:r>
                       <a:endParaRPr lang="en-US" sz="500" dirty="0">
                         <a:latin typeface="Calibri" charset="0"/>
@@ -8590,7 +8590,7 @@
                           <a:ea typeface="Calibri" pitchFamily="34" charset="-122"/>
                           <a:cs typeface="Calibri" pitchFamily="34" charset="-120"/>
                         </a:rPr>
-                        <a:t>0.01%</a:t>
+                        <a:t>0.85%</a:t>
                       </a:r>
                       <a:endParaRPr lang="en-US" sz="500" dirty="0">
                         <a:latin typeface="Calibri" charset="0"/>
@@ -8655,7 +8655,7 @@
                           <a:ea typeface="Calibri" pitchFamily="34" charset="-122"/>
                           <a:cs typeface="Calibri" pitchFamily="34" charset="-120"/>
                         </a:rPr>
-                        <a:t>0.05%</a:t>
+                        <a:t>5.32%</a:t>
                       </a:r>
                       <a:endParaRPr lang="en-US" sz="500" dirty="0">
                         <a:latin typeface="Calibri" charset="0"/>
@@ -9818,7 +9818,7 @@
                           <a:ea typeface="Calibri" pitchFamily="34" charset="-122"/>
                           <a:cs typeface="Calibri" pitchFamily="34" charset="-120"/>
                         </a:rPr>
-                        <a:t>0.01%</a:t>
+                        <a:t>1.10%</a:t>
                       </a:r>
                       <a:endParaRPr lang="en-US" sz="500" dirty="0">
                         <a:latin typeface="Calibri" charset="0"/>
@@ -9883,7 +9883,7 @@
                           <a:ea typeface="Calibri" pitchFamily="34" charset="-122"/>
                           <a:cs typeface="Calibri" pitchFamily="34" charset="-120"/>
                         </a:rPr>
-                        <a:t>0.01%</a:t>
+                        <a:t>1.06%</a:t>
                       </a:r>
                       <a:endParaRPr lang="en-US" sz="500" dirty="0">
                         <a:latin typeface="Calibri" charset="0"/>
@@ -9948,7 +9948,7 @@
                           <a:ea typeface="Calibri" pitchFamily="34" charset="-122"/>
                           <a:cs typeface="Calibri" pitchFamily="34" charset="-120"/>
                         </a:rPr>
-                        <a:t>0.01%</a:t>
+                        <a:t>1.09%</a:t>
                       </a:r>
                       <a:endParaRPr lang="en-US" sz="500" dirty="0">
                         <a:latin typeface="Calibri" charset="0"/>
@@ -10013,7 +10013,7 @@
                           <a:ea typeface="Calibri" pitchFamily="34" charset="-122"/>
                           <a:cs typeface="Calibri" pitchFamily="34" charset="-120"/>
                         </a:rPr>
-                        <a:t>0.01%</a:t>
+                        <a:t>1.23%</a:t>
                       </a:r>
                       <a:endParaRPr lang="en-US" sz="500" dirty="0">
                         <a:latin typeface="Calibri" charset="0"/>
@@ -10078,7 +10078,7 @@
                           <a:ea typeface="Calibri" pitchFamily="34" charset="-122"/>
                           <a:cs typeface="Calibri" pitchFamily="34" charset="-120"/>
                         </a:rPr>
-                        <a:t>0.01%</a:t>
+                        <a:t>1.36%</a:t>
                       </a:r>
                       <a:endParaRPr lang="en-US" sz="500" dirty="0">
                         <a:latin typeface="Calibri" charset="0"/>
@@ -10143,7 +10143,7 @@
                           <a:ea typeface="Calibri" pitchFamily="34" charset="-122"/>
                           <a:cs typeface="Calibri" pitchFamily="34" charset="-120"/>
                         </a:rPr>
-                        <a:t>0.01%</a:t>
+                        <a:t>1.50%</a:t>
                       </a:r>
                       <a:endParaRPr lang="en-US" sz="500" dirty="0">
                         <a:latin typeface="Calibri" charset="0"/>
@@ -10208,7 +10208,7 @@
                           <a:ea typeface="Calibri" pitchFamily="34" charset="-122"/>
                           <a:cs typeface="Calibri" pitchFamily="34" charset="-120"/>
                         </a:rPr>
-                        <a:t>0.02%</a:t>
+                        <a:t>1.60%</a:t>
                       </a:r>
                       <a:endParaRPr lang="en-US" sz="500" dirty="0">
                         <a:latin typeface="Calibri" charset="0"/>
@@ -10273,7 +10273,7 @@
                           <a:ea typeface="Calibri" pitchFamily="34" charset="-122"/>
                           <a:cs typeface="Calibri" pitchFamily="34" charset="-120"/>
                         </a:rPr>
-                        <a:t>0.02%</a:t>
+                        <a:t>1.58%</a:t>
                       </a:r>
                       <a:endParaRPr lang="en-US" sz="500" dirty="0">
                         <a:latin typeface="Calibri" charset="0"/>
@@ -10338,7 +10338,7 @@
                           <a:ea typeface="Calibri" pitchFamily="34" charset="-122"/>
                           <a:cs typeface="Calibri" pitchFamily="34" charset="-120"/>
                         </a:rPr>
-                        <a:t>0.02%</a:t>
+                        <a:t>1.67%</a:t>
                       </a:r>
                       <a:endParaRPr lang="en-US" sz="500" dirty="0">
                         <a:latin typeface="Calibri" charset="0"/>
@@ -10403,7 +10403,7 @@
                           <a:ea typeface="Calibri" pitchFamily="34" charset="-122"/>
                           <a:cs typeface="Calibri" pitchFamily="34" charset="-120"/>
                         </a:rPr>
-                        <a:t>0.02%</a:t>
+                        <a:t>1.70%</a:t>
                       </a:r>
                       <a:endParaRPr lang="en-US" sz="500" dirty="0">
                         <a:latin typeface="Calibri" charset="0"/>
@@ -10468,7 +10468,7 @@
                           <a:ea typeface="Calibri" pitchFamily="34" charset="-122"/>
                           <a:cs typeface="Calibri" pitchFamily="34" charset="-120"/>
                         </a:rPr>
-                        <a:t>0.02%</a:t>
+                        <a:t>1.52%</a:t>
                       </a:r>
                       <a:endParaRPr lang="en-US" sz="500" dirty="0">
                         <a:latin typeface="Calibri" charset="0"/>
@@ -10598,7 +10598,7 @@
                           <a:ea typeface="Calibri" pitchFamily="34" charset="-122"/>
                           <a:cs typeface="Calibri" pitchFamily="34" charset="-120"/>
                         </a:rPr>
-                        <a:t>3.26%</a:t>
+                        <a:t>20.13%</a:t>
                       </a:r>
                       <a:endParaRPr lang="en-US" sz="500" dirty="0">
                         <a:latin typeface="Calibri" charset="0"/>
@@ -10784,7 +10784,7 @@
                           <a:ea typeface="Calibri" pitchFamily="34" charset="-122"/>
                           <a:cs typeface="Calibri" pitchFamily="34" charset="-120"/>
                         </a:rPr>
-                        <a:t>0.01%</a:t>
+                        <a:t>0.69%</a:t>
                       </a:r>
                       <a:endParaRPr lang="en-US" sz="500" dirty="0">
                         <a:latin typeface="Calibri" charset="0"/>
@@ -10849,7 +10849,7 @@
                           <a:ea typeface="Calibri" pitchFamily="34" charset="-122"/>
                           <a:cs typeface="Calibri" pitchFamily="34" charset="-120"/>
                         </a:rPr>
-                        <a:t>0.01%</a:t>
+                        <a:t>0.77%</a:t>
                       </a:r>
                       <a:endParaRPr lang="en-US" sz="500" dirty="0">
                         <a:latin typeface="Calibri" charset="0"/>
@@ -10914,7 +10914,7 @@
                           <a:ea typeface="Calibri" pitchFamily="34" charset="-122"/>
                           <a:cs typeface="Calibri" pitchFamily="34" charset="-120"/>
                         </a:rPr>
-                        <a:t>0.01%</a:t>
+                        <a:t>0.69%</a:t>
                       </a:r>
                       <a:endParaRPr lang="en-US" sz="500" dirty="0">
                         <a:latin typeface="Calibri" charset="0"/>
@@ -10979,7 +10979,7 @@
                           <a:ea typeface="Calibri" pitchFamily="34" charset="-122"/>
                           <a:cs typeface="Calibri" pitchFamily="34" charset="-120"/>
                         </a:rPr>
-                        <a:t>0.01%</a:t>
+                        <a:t>0.72%</a:t>
                       </a:r>
                       <a:endParaRPr lang="en-US" sz="500" dirty="0">
                         <a:latin typeface="Calibri" charset="0"/>
@@ -11044,7 +11044,7 @@
                           <a:ea typeface="Calibri" pitchFamily="34" charset="-122"/>
                           <a:cs typeface="Calibri" pitchFamily="34" charset="-120"/>
                         </a:rPr>
-                        <a:t>0.01%</a:t>
+                        <a:t>0.69%</a:t>
                       </a:r>
                       <a:endParaRPr lang="en-US" sz="500" dirty="0">
                         <a:latin typeface="Calibri" charset="0"/>
@@ -11109,7 +11109,7 @@
                           <a:ea typeface="Calibri" pitchFamily="34" charset="-122"/>
                           <a:cs typeface="Calibri" pitchFamily="34" charset="-120"/>
                         </a:rPr>
-                        <a:t>0.01%</a:t>
+                        <a:t>0.71%</a:t>
                       </a:r>
                       <a:endParaRPr lang="en-US" sz="500" dirty="0">
                         <a:latin typeface="Calibri" charset="0"/>
@@ -11174,7 +11174,7 @@
                           <a:ea typeface="Calibri" pitchFamily="34" charset="-122"/>
                           <a:cs typeface="Calibri" pitchFamily="34" charset="-120"/>
                         </a:rPr>
-                        <a:t>0.01%</a:t>
+                        <a:t>0.92%</a:t>
                       </a:r>
                       <a:endParaRPr lang="en-US" sz="500" dirty="0">
                         <a:latin typeface="Calibri" charset="0"/>
@@ -11239,7 +11239,7 @@
                           <a:ea typeface="Calibri" pitchFamily="34" charset="-122"/>
                           <a:cs typeface="Calibri" pitchFamily="34" charset="-120"/>
                         </a:rPr>
-                        <a:t>0.01%</a:t>
+                        <a:t>0.69%</a:t>
                       </a:r>
                       <a:endParaRPr lang="en-US" sz="500" dirty="0">
                         <a:latin typeface="Calibri" charset="0"/>
@@ -11304,7 +11304,7 @@
                           <a:ea typeface="Calibri" pitchFamily="34" charset="-122"/>
                           <a:cs typeface="Calibri" pitchFamily="34" charset="-120"/>
                         </a:rPr>
-                        <a:t>0.03%</a:t>
+                        <a:t>3.21%</a:t>
                       </a:r>
                       <a:endParaRPr lang="en-US" sz="500" dirty="0">
                         <a:latin typeface="Calibri" charset="0"/>
@@ -11369,7 +11369,7 @@
                           <a:ea typeface="Calibri" pitchFamily="34" charset="-122"/>
                           <a:cs typeface="Calibri" pitchFamily="34" charset="-120"/>
                         </a:rPr>
-                        <a:t>0.04%</a:t>
+                        <a:t>3.67%</a:t>
                       </a:r>
                       <a:endParaRPr lang="en-US" sz="500" dirty="0">
                         <a:latin typeface="Calibri" charset="0"/>
@@ -11434,7 +11434,7 @@
                           <a:ea typeface="Calibri" pitchFamily="34" charset="-122"/>
                           <a:cs typeface="Calibri" pitchFamily="34" charset="-120"/>
                         </a:rPr>
-                        <a:t>0.04%</a:t>
+                        <a:t>3.66%</a:t>
                       </a:r>
                       <a:endParaRPr lang="en-US" sz="500" dirty="0">
                         <a:latin typeface="Calibri" charset="0"/>
@@ -11499,7 +11499,7 @@
                           <a:ea typeface="Calibri" pitchFamily="34" charset="-122"/>
                           <a:cs typeface="Calibri" pitchFamily="34" charset="-120"/>
                         </a:rPr>
-                        <a:t>0.04%</a:t>
+                        <a:t>3.65%</a:t>
                       </a:r>
                       <a:endParaRPr lang="en-US" sz="500" dirty="0">
                         <a:latin typeface="Calibri" charset="0"/>
@@ -11564,7 +11564,7 @@
                           <a:ea typeface="Calibri" pitchFamily="34" charset="-122"/>
                           <a:cs typeface="Calibri" pitchFamily="34" charset="-120"/>
                         </a:rPr>
-                        <a:t>0.20%</a:t>
+                        <a:t>21.91%</a:t>
                       </a:r>
                       <a:endParaRPr lang="en-US" sz="500" dirty="0">
                         <a:latin typeface="Calibri" charset="0"/>
@@ -12792,7 +12792,7 @@
                           <a:ea typeface="Calibri" pitchFamily="34" charset="-122"/>
                           <a:cs typeface="Calibri" pitchFamily="34" charset="-120"/>
                         </a:rPr>
-                        <a:t>0.02%</a:t>
+                        <a:t>1.93%</a:t>
                       </a:r>
                       <a:endParaRPr lang="en-US" sz="500" dirty="0">
                         <a:latin typeface="Calibri" charset="0"/>
@@ -12857,7 +12857,7 @@
                           <a:ea typeface="Calibri" pitchFamily="34" charset="-122"/>
                           <a:cs typeface="Calibri" pitchFamily="34" charset="-120"/>
                         </a:rPr>
-                        <a:t>0.02%</a:t>
+                        <a:t>1.97%</a:t>
                       </a:r>
                       <a:endParaRPr lang="en-US" sz="500" dirty="0">
                         <a:latin typeface="Calibri" charset="0"/>
@@ -12922,7 +12922,7 @@
                           <a:ea typeface="Calibri" pitchFamily="34" charset="-122"/>
                           <a:cs typeface="Calibri" pitchFamily="34" charset="-120"/>
                         </a:rPr>
-                        <a:t>0.02%</a:t>
+                        <a:t>1.98%</a:t>
                       </a:r>
                       <a:endParaRPr lang="en-US" sz="500" dirty="0">
                         <a:latin typeface="Calibri" charset="0"/>
@@ -12987,7 +12987,7 @@
                           <a:ea typeface="Calibri" pitchFamily="34" charset="-122"/>
                           <a:cs typeface="Calibri" pitchFamily="34" charset="-120"/>
                         </a:rPr>
-                        <a:t>0.02%</a:t>
+                        <a:t>1.91%</a:t>
                       </a:r>
                       <a:endParaRPr lang="en-US" sz="500" dirty="0">
                         <a:latin typeface="Calibri" charset="0"/>
@@ -13052,7 +13052,7 @@
                           <a:ea typeface="Calibri" pitchFamily="34" charset="-122"/>
                           <a:cs typeface="Calibri" pitchFamily="34" charset="-120"/>
                         </a:rPr>
-                        <a:t>0.02%</a:t>
+                        <a:t>1.90%</a:t>
                       </a:r>
                       <a:endParaRPr lang="en-US" sz="500" dirty="0">
                         <a:latin typeface="Calibri" charset="0"/>
@@ -13117,7 +13117,7 @@
                           <a:ea typeface="Calibri" pitchFamily="34" charset="-122"/>
                           <a:cs typeface="Calibri" pitchFamily="34" charset="-120"/>
                         </a:rPr>
-                        <a:t>0.02%</a:t>
+                        <a:t>1.81%</a:t>
                       </a:r>
                       <a:endParaRPr lang="en-US" sz="500" dirty="0">
                         <a:latin typeface="Calibri" charset="0"/>
@@ -13182,7 +13182,7 @@
                           <a:ea typeface="Calibri" pitchFamily="34" charset="-122"/>
                           <a:cs typeface="Calibri" pitchFamily="34" charset="-120"/>
                         </a:rPr>
-                        <a:t>0.02%</a:t>
+                        <a:t>1.76%</a:t>
                       </a:r>
                       <a:endParaRPr lang="en-US" sz="500" dirty="0">
                         <a:latin typeface="Calibri" charset="0"/>
@@ -13247,7 +13247,7 @@
                           <a:ea typeface="Calibri" pitchFamily="34" charset="-122"/>
                           <a:cs typeface="Calibri" pitchFamily="34" charset="-120"/>
                         </a:rPr>
-                        <a:t>0.02%</a:t>
+                        <a:t>1.72%</a:t>
                       </a:r>
                       <a:endParaRPr lang="en-US" sz="500" dirty="0">
                         <a:latin typeface="Calibri" charset="0"/>
@@ -13312,7 +13312,7 @@
                           <a:ea typeface="Calibri" pitchFamily="34" charset="-122"/>
                           <a:cs typeface="Calibri" pitchFamily="34" charset="-120"/>
                         </a:rPr>
-                        <a:t>0.02%</a:t>
+                        <a:t>1.69%</a:t>
                       </a:r>
                       <a:endParaRPr lang="en-US" sz="500" dirty="0">
                         <a:latin typeface="Calibri" charset="0"/>
@@ -13377,7 +13377,7 @@
                           <a:ea typeface="Calibri" pitchFamily="34" charset="-122"/>
                           <a:cs typeface="Calibri" pitchFamily="34" charset="-120"/>
                         </a:rPr>
-                        <a:t>0.02%</a:t>
+                        <a:t>1.69%</a:t>
                       </a:r>
                       <a:endParaRPr lang="en-US" sz="500" dirty="0">
                         <a:latin typeface="Calibri" charset="0"/>
@@ -13507,7 +13507,7 @@
                           <a:ea typeface="Calibri" pitchFamily="34" charset="-122"/>
                           <a:cs typeface="Calibri" pitchFamily="34" charset="-120"/>
                         </a:rPr>
-                        <a:t>3.10%</a:t>
+                        <a:t>23.45%</a:t>
                       </a:r>
                       <a:endParaRPr lang="en-US" sz="500" dirty="0">
                         <a:latin typeface="Calibri" charset="0"/>
@@ -13693,7 +13693,7 @@
                           <a:ea typeface="Calibri" pitchFamily="34" charset="-122"/>
                           <a:cs typeface="Calibri" pitchFamily="34" charset="-120"/>
                         </a:rPr>
-                        <a:t>0.03%</a:t>
+                        <a:t>3.41%</a:t>
                       </a:r>
                       <a:endParaRPr lang="en-US" sz="500" dirty="0">
                         <a:latin typeface="Calibri" charset="0"/>
@@ -13758,7 +13758,7 @@
                           <a:ea typeface="Calibri" pitchFamily="34" charset="-122"/>
                           <a:cs typeface="Calibri" pitchFamily="34" charset="-120"/>
                         </a:rPr>
-                        <a:t>0.03%</a:t>
+                        <a:t>3.01%</a:t>
                       </a:r>
                       <a:endParaRPr lang="en-US" sz="500" dirty="0">
                         <a:latin typeface="Calibri" charset="0"/>
@@ -13823,7 +13823,7 @@
                           <a:ea typeface="Calibri" pitchFamily="34" charset="-122"/>
                           <a:cs typeface="Calibri" pitchFamily="34" charset="-120"/>
                         </a:rPr>
-                        <a:t>0.03%</a:t>
+                        <a:t>3.39%</a:t>
                       </a:r>
                       <a:endParaRPr lang="en-US" sz="500" dirty="0">
                         <a:latin typeface="Calibri" charset="0"/>
@@ -13888,7 +13888,7 @@
                           <a:ea typeface="Calibri" pitchFamily="34" charset="-122"/>
                           <a:cs typeface="Calibri" pitchFamily="34" charset="-120"/>
                         </a:rPr>
-                        <a:t>0.03%</a:t>
+                        <a:t>3.50%</a:t>
                       </a:r>
                       <a:endParaRPr lang="en-US" sz="500" dirty="0">
                         <a:latin typeface="Calibri" charset="0"/>
@@ -13953,7 +13953,7 @@
                           <a:ea typeface="Calibri" pitchFamily="34" charset="-122"/>
                           <a:cs typeface="Calibri" pitchFamily="34" charset="-120"/>
                         </a:rPr>
-                        <a:t>0.04%</a:t>
+                        <a:t>3.71%</a:t>
                       </a:r>
                       <a:endParaRPr lang="en-US" sz="500" dirty="0">
                         <a:latin typeface="Calibri" charset="0"/>
@@ -14018,7 +14018,7 @@
                           <a:ea typeface="Calibri" pitchFamily="34" charset="-122"/>
                           <a:cs typeface="Calibri" pitchFamily="34" charset="-120"/>
                         </a:rPr>
-                        <a:t>0.03%</a:t>
+                        <a:t>3.36%</a:t>
                       </a:r>
                       <a:endParaRPr lang="en-US" sz="500" dirty="0">
                         <a:latin typeface="Calibri" charset="0"/>
@@ -14083,7 +14083,7 @@
                           <a:ea typeface="Calibri" pitchFamily="34" charset="-122"/>
                           <a:cs typeface="Calibri" pitchFamily="34" charset="-120"/>
                         </a:rPr>
-                        <a:t>0.03%</a:t>
+                        <a:t>3.24%</a:t>
                       </a:r>
                       <a:endParaRPr lang="en-US" sz="500" dirty="0">
                         <a:latin typeface="Calibri" charset="0"/>
@@ -14148,7 +14148,7 @@
                           <a:ea typeface="Calibri" pitchFamily="34" charset="-122"/>
                           <a:cs typeface="Calibri" pitchFamily="34" charset="-120"/>
                         </a:rPr>
-                        <a:t>0.03%</a:t>
+                        <a:t>3.45%</a:t>
                       </a:r>
                       <a:endParaRPr lang="en-US" sz="500" dirty="0">
                         <a:latin typeface="Calibri" charset="0"/>
@@ -14213,7 +14213,7 @@
                           <a:ea typeface="Calibri" pitchFamily="34" charset="-122"/>
                           <a:cs typeface="Calibri" pitchFamily="34" charset="-120"/>
                         </a:rPr>
-                        <a:t>0.03%</a:t>
+                        <a:t>3.44%</a:t>
                       </a:r>
                       <a:endParaRPr lang="en-US" sz="500" dirty="0">
                         <a:latin typeface="Calibri" charset="0"/>
@@ -14278,7 +14278,7 @@
                           <a:ea typeface="Calibri" pitchFamily="34" charset="-122"/>
                           <a:cs typeface="Calibri" pitchFamily="34" charset="-120"/>
                         </a:rPr>
-                        <a:t>0.03%</a:t>
+                        <a:t>2.99%</a:t>
                       </a:r>
                       <a:endParaRPr lang="en-US" sz="500" dirty="0">
                         <a:latin typeface="Calibri" charset="0"/>
@@ -14343,7 +14343,7 @@
                           <a:ea typeface="Calibri" pitchFamily="34" charset="-122"/>
                           <a:cs typeface="Calibri" pitchFamily="34" charset="-120"/>
                         </a:rPr>
-                        <a:t>0.03%</a:t>
+                        <a:t>2.85%</a:t>
                       </a:r>
                       <a:endParaRPr lang="en-US" sz="500" dirty="0">
                         <a:latin typeface="Calibri" charset="0"/>
@@ -14408,7 +14408,7 @@
                           <a:ea typeface="Calibri" pitchFamily="34" charset="-122"/>
                           <a:cs typeface="Calibri" pitchFamily="34" charset="-120"/>
                         </a:rPr>
-                        <a:t>0.02%</a:t>
+                        <a:t>2.43%</a:t>
                       </a:r>
                       <a:endParaRPr lang="en-US" sz="500" dirty="0">
                         <a:latin typeface="Calibri" charset="0"/>
@@ -14473,7 +14473,7 @@
                           <a:ea typeface="Calibri" pitchFamily="34" charset="-122"/>
                           <a:cs typeface="Calibri" pitchFamily="34" charset="-120"/>
                         </a:rPr>
-                        <a:t>0.39%</a:t>
+                        <a:t>46.47%</a:t>
                       </a:r>
                       <a:endParaRPr lang="en-US" sz="500" dirty="0">
                         <a:latin typeface="Calibri" charset="0"/>
@@ -15701,6 +15701,526 @@
                           <a:ea typeface="Calibri" pitchFamily="34" charset="-122"/>
                           <a:cs typeface="Calibri" pitchFamily="34" charset="-120"/>
                         </a:rPr>
+                        <a:t>1.46%</a:t>
+                      </a:r>
+                      <a:endParaRPr lang="en-US" sz="500" dirty="0">
+                        <a:latin typeface="Calibri" charset="0"/>
+                        <a:ea typeface="Calibri" charset="0"/>
+                        <a:cs typeface="Calibri" charset="0"/>
+                      </a:endParaRPr>
+                    </a:p>
+                  </a:txBody>
+                  <a:tcPr marL="91440" marR="91440" marT="45720" marB="45720">
+                    <a:lnL w="2540" cap="flat" cmpd="sng" algn="ctr">
+                      <a:solidFill>
+                        <a:srgbClr val="EEEEEE"/>
+                      </a:solidFill>
+                      <a:prstDash val="solid"/>
+                      <a:round/>
+                      <a:headEnd type="none" w="med" len="med"/>
+                      <a:tailEnd type="none" w="med" len="med"/>
+                    </a:lnL>
+                    <a:lnR w="2540" cap="flat" cmpd="sng" algn="ctr">
+                      <a:solidFill>
+                        <a:srgbClr val="EEEEEE"/>
+                      </a:solidFill>
+                      <a:prstDash val="solid"/>
+                      <a:round/>
+                      <a:headEnd type="none" w="med" len="med"/>
+                      <a:tailEnd type="none" w="med" len="med"/>
+                    </a:lnR>
+                    <a:lnT w="2540" cap="flat" cmpd="sng" algn="ctr">
+                      <a:solidFill>
+                        <a:srgbClr val="EEEEEE"/>
+                      </a:solidFill>
+                      <a:prstDash val="solid"/>
+                      <a:round/>
+                      <a:headEnd type="none" w="med" len="med"/>
+                      <a:tailEnd type="none" w="med" len="med"/>
+                    </a:lnT>
+                    <a:lnB w="2540" cap="flat" cmpd="sng" algn="ctr">
+                      <a:solidFill>
+                        <a:srgbClr val="EEEEEE"/>
+                      </a:solidFill>
+                      <a:prstDash val="solid"/>
+                      <a:round/>
+                      <a:headEnd type="none" w="med" len="med"/>
+                      <a:tailEnd type="none" w="med" len="med"/>
+                    </a:lnB>
+                  </a:tcPr>
+                </a:tc>
+                <a:tc>
+                  <a:txBody>
+                    <a:bodyPr/>
+                    <a:lstStyle/>
+                    <a:p>
+                      <a:pPr algn="ctr" indent="0" marL="0">
+                        <a:buNone/>
+                      </a:pPr>
+                      <a:r>
+                        <a:rPr lang="en-US" sz="500" dirty="0">
+                          <a:solidFill>
+                            <a:srgbClr val="999999"/>
+                          </a:solidFill>
+                          <a:latin typeface="Calibri" pitchFamily="34" charset="0"/>
+                          <a:ea typeface="Calibri" pitchFamily="34" charset="-122"/>
+                          <a:cs typeface="Calibri" pitchFamily="34" charset="-120"/>
+                        </a:rPr>
+                        <a:t>1.31%</a:t>
+                      </a:r>
+                      <a:endParaRPr lang="en-US" sz="500" dirty="0">
+                        <a:latin typeface="Calibri" charset="0"/>
+                        <a:ea typeface="Calibri" charset="0"/>
+                        <a:cs typeface="Calibri" charset="0"/>
+                      </a:endParaRPr>
+                    </a:p>
+                  </a:txBody>
+                  <a:tcPr marL="91440" marR="91440" marT="45720" marB="45720">
+                    <a:lnL w="2540" cap="flat" cmpd="sng" algn="ctr">
+                      <a:solidFill>
+                        <a:srgbClr val="EEEEEE"/>
+                      </a:solidFill>
+                      <a:prstDash val="solid"/>
+                      <a:round/>
+                      <a:headEnd type="none" w="med" len="med"/>
+                      <a:tailEnd type="none" w="med" len="med"/>
+                    </a:lnL>
+                    <a:lnR w="2540" cap="flat" cmpd="sng" algn="ctr">
+                      <a:solidFill>
+                        <a:srgbClr val="EEEEEE"/>
+                      </a:solidFill>
+                      <a:prstDash val="solid"/>
+                      <a:round/>
+                      <a:headEnd type="none" w="med" len="med"/>
+                      <a:tailEnd type="none" w="med" len="med"/>
+                    </a:lnR>
+                    <a:lnT w="2540" cap="flat" cmpd="sng" algn="ctr">
+                      <a:solidFill>
+                        <a:srgbClr val="EEEEEE"/>
+                      </a:solidFill>
+                      <a:prstDash val="solid"/>
+                      <a:round/>
+                      <a:headEnd type="none" w="med" len="med"/>
+                      <a:tailEnd type="none" w="med" len="med"/>
+                    </a:lnT>
+                    <a:lnB w="2540" cap="flat" cmpd="sng" algn="ctr">
+                      <a:solidFill>
+                        <a:srgbClr val="EEEEEE"/>
+                      </a:solidFill>
+                      <a:prstDash val="solid"/>
+                      <a:round/>
+                      <a:headEnd type="none" w="med" len="med"/>
+                      <a:tailEnd type="none" w="med" len="med"/>
+                    </a:lnB>
+                  </a:tcPr>
+                </a:tc>
+                <a:tc>
+                  <a:txBody>
+                    <a:bodyPr/>
+                    <a:lstStyle/>
+                    <a:p>
+                      <a:pPr algn="ctr" indent="0" marL="0">
+                        <a:buNone/>
+                      </a:pPr>
+                      <a:r>
+                        <a:rPr lang="en-US" sz="500" dirty="0">
+                          <a:solidFill>
+                            <a:srgbClr val="999999"/>
+                          </a:solidFill>
+                          <a:latin typeface="Calibri" pitchFamily="34" charset="0"/>
+                          <a:ea typeface="Calibri" pitchFamily="34" charset="-122"/>
+                          <a:cs typeface="Calibri" pitchFamily="34" charset="-120"/>
+                        </a:rPr>
+                        <a:t>1.15%</a:t>
+                      </a:r>
+                      <a:endParaRPr lang="en-US" sz="500" dirty="0">
+                        <a:latin typeface="Calibri" charset="0"/>
+                        <a:ea typeface="Calibri" charset="0"/>
+                        <a:cs typeface="Calibri" charset="0"/>
+                      </a:endParaRPr>
+                    </a:p>
+                  </a:txBody>
+                  <a:tcPr marL="91440" marR="91440" marT="45720" marB="45720">
+                    <a:lnL w="2540" cap="flat" cmpd="sng" algn="ctr">
+                      <a:solidFill>
+                        <a:srgbClr val="EEEEEE"/>
+                      </a:solidFill>
+                      <a:prstDash val="solid"/>
+                      <a:round/>
+                      <a:headEnd type="none" w="med" len="med"/>
+                      <a:tailEnd type="none" w="med" len="med"/>
+                    </a:lnL>
+                    <a:lnR w="2540" cap="flat" cmpd="sng" algn="ctr">
+                      <a:solidFill>
+                        <a:srgbClr val="EEEEEE"/>
+                      </a:solidFill>
+                      <a:prstDash val="solid"/>
+                      <a:round/>
+                      <a:headEnd type="none" w="med" len="med"/>
+                      <a:tailEnd type="none" w="med" len="med"/>
+                    </a:lnR>
+                    <a:lnT w="2540" cap="flat" cmpd="sng" algn="ctr">
+                      <a:solidFill>
+                        <a:srgbClr val="EEEEEE"/>
+                      </a:solidFill>
+                      <a:prstDash val="solid"/>
+                      <a:round/>
+                      <a:headEnd type="none" w="med" len="med"/>
+                      <a:tailEnd type="none" w="med" len="med"/>
+                    </a:lnT>
+                    <a:lnB w="2540" cap="flat" cmpd="sng" algn="ctr">
+                      <a:solidFill>
+                        <a:srgbClr val="EEEEEE"/>
+                      </a:solidFill>
+                      <a:prstDash val="solid"/>
+                      <a:round/>
+                      <a:headEnd type="none" w="med" len="med"/>
+                      <a:tailEnd type="none" w="med" len="med"/>
+                    </a:lnB>
+                  </a:tcPr>
+                </a:tc>
+                <a:tc>
+                  <a:txBody>
+                    <a:bodyPr/>
+                    <a:lstStyle/>
+                    <a:p>
+                      <a:pPr algn="ctr" indent="0" marL="0">
+                        <a:buNone/>
+                      </a:pPr>
+                      <a:r>
+                        <a:rPr lang="en-US" sz="500" dirty="0">
+                          <a:solidFill>
+                            <a:srgbClr val="999999"/>
+                          </a:solidFill>
+                          <a:latin typeface="Calibri" pitchFamily="34" charset="0"/>
+                          <a:ea typeface="Calibri" pitchFamily="34" charset="-122"/>
+                          <a:cs typeface="Calibri" pitchFamily="34" charset="-120"/>
+                        </a:rPr>
+                        <a:t>1.19%</a:t>
+                      </a:r>
+                      <a:endParaRPr lang="en-US" sz="500" dirty="0">
+                        <a:latin typeface="Calibri" charset="0"/>
+                        <a:ea typeface="Calibri" charset="0"/>
+                        <a:cs typeface="Calibri" charset="0"/>
+                      </a:endParaRPr>
+                    </a:p>
+                  </a:txBody>
+                  <a:tcPr marL="91440" marR="91440" marT="45720" marB="45720">
+                    <a:lnL w="2540" cap="flat" cmpd="sng" algn="ctr">
+                      <a:solidFill>
+                        <a:srgbClr val="EEEEEE"/>
+                      </a:solidFill>
+                      <a:prstDash val="solid"/>
+                      <a:round/>
+                      <a:headEnd type="none" w="med" len="med"/>
+                      <a:tailEnd type="none" w="med" len="med"/>
+                    </a:lnL>
+                    <a:lnR w="2540" cap="flat" cmpd="sng" algn="ctr">
+                      <a:solidFill>
+                        <a:srgbClr val="EEEEEE"/>
+                      </a:solidFill>
+                      <a:prstDash val="solid"/>
+                      <a:round/>
+                      <a:headEnd type="none" w="med" len="med"/>
+                      <a:tailEnd type="none" w="med" len="med"/>
+                    </a:lnR>
+                    <a:lnT w="2540" cap="flat" cmpd="sng" algn="ctr">
+                      <a:solidFill>
+                        <a:srgbClr val="EEEEEE"/>
+                      </a:solidFill>
+                      <a:prstDash val="solid"/>
+                      <a:round/>
+                      <a:headEnd type="none" w="med" len="med"/>
+                      <a:tailEnd type="none" w="med" len="med"/>
+                    </a:lnT>
+                    <a:lnB w="2540" cap="flat" cmpd="sng" algn="ctr">
+                      <a:solidFill>
+                        <a:srgbClr val="EEEEEE"/>
+                      </a:solidFill>
+                      <a:prstDash val="solid"/>
+                      <a:round/>
+                      <a:headEnd type="none" w="med" len="med"/>
+                      <a:tailEnd type="none" w="med" len="med"/>
+                    </a:lnB>
+                  </a:tcPr>
+                </a:tc>
+                <a:tc>
+                  <a:txBody>
+                    <a:bodyPr/>
+                    <a:lstStyle/>
+                    <a:p>
+                      <a:pPr algn="ctr" indent="0" marL="0">
+                        <a:buNone/>
+                      </a:pPr>
+                      <a:r>
+                        <a:rPr lang="en-US" sz="500" dirty="0">
+                          <a:solidFill>
+                            <a:srgbClr val="999999"/>
+                          </a:solidFill>
+                          <a:latin typeface="Calibri" pitchFamily="34" charset="0"/>
+                          <a:ea typeface="Calibri" pitchFamily="34" charset="-122"/>
+                          <a:cs typeface="Calibri" pitchFamily="34" charset="-120"/>
+                        </a:rPr>
+                        <a:t>0.13%</a:t>
+                      </a:r>
+                      <a:endParaRPr lang="en-US" sz="500" dirty="0">
+                        <a:latin typeface="Calibri" charset="0"/>
+                        <a:ea typeface="Calibri" charset="0"/>
+                        <a:cs typeface="Calibri" charset="0"/>
+                      </a:endParaRPr>
+                    </a:p>
+                  </a:txBody>
+                  <a:tcPr marL="91440" marR="91440" marT="45720" marB="45720">
+                    <a:lnL w="2540" cap="flat" cmpd="sng" algn="ctr">
+                      <a:solidFill>
+                        <a:srgbClr val="EEEEEE"/>
+                      </a:solidFill>
+                      <a:prstDash val="solid"/>
+                      <a:round/>
+                      <a:headEnd type="none" w="med" len="med"/>
+                      <a:tailEnd type="none" w="med" len="med"/>
+                    </a:lnL>
+                    <a:lnR w="2540" cap="flat" cmpd="sng" algn="ctr">
+                      <a:solidFill>
+                        <a:srgbClr val="EEEEEE"/>
+                      </a:solidFill>
+                      <a:prstDash val="solid"/>
+                      <a:round/>
+                      <a:headEnd type="none" w="med" len="med"/>
+                      <a:tailEnd type="none" w="med" len="med"/>
+                    </a:lnR>
+                    <a:lnT w="2540" cap="flat" cmpd="sng" algn="ctr">
+                      <a:solidFill>
+                        <a:srgbClr val="EEEEEE"/>
+                      </a:solidFill>
+                      <a:prstDash val="solid"/>
+                      <a:round/>
+                      <a:headEnd type="none" w="med" len="med"/>
+                      <a:tailEnd type="none" w="med" len="med"/>
+                    </a:lnT>
+                    <a:lnB w="2540" cap="flat" cmpd="sng" algn="ctr">
+                      <a:solidFill>
+                        <a:srgbClr val="EEEEEE"/>
+                      </a:solidFill>
+                      <a:prstDash val="solid"/>
+                      <a:round/>
+                      <a:headEnd type="none" w="med" len="med"/>
+                      <a:tailEnd type="none" w="med" len="med"/>
+                    </a:lnB>
+                  </a:tcPr>
+                </a:tc>
+                <a:tc>
+                  <a:txBody>
+                    <a:bodyPr/>
+                    <a:lstStyle/>
+                    <a:p>
+                      <a:pPr algn="ctr" indent="0" marL="0">
+                        <a:buNone/>
+                      </a:pPr>
+                      <a:r>
+                        <a:rPr lang="en-US" sz="500" dirty="0">
+                          <a:solidFill>
+                            <a:srgbClr val="999999"/>
+                          </a:solidFill>
+                          <a:latin typeface="Calibri" pitchFamily="34" charset="0"/>
+                          <a:ea typeface="Calibri" pitchFamily="34" charset="-122"/>
+                          <a:cs typeface="Calibri" pitchFamily="34" charset="-120"/>
+                        </a:rPr>
+                        <a:t>0.02%</a:t>
+                      </a:r>
+                      <a:endParaRPr lang="en-US" sz="500" dirty="0">
+                        <a:latin typeface="Calibri" charset="0"/>
+                        <a:ea typeface="Calibri" charset="0"/>
+                        <a:cs typeface="Calibri" charset="0"/>
+                      </a:endParaRPr>
+                    </a:p>
+                  </a:txBody>
+                  <a:tcPr marL="91440" marR="91440" marT="45720" marB="45720">
+                    <a:lnL w="2540" cap="flat" cmpd="sng" algn="ctr">
+                      <a:solidFill>
+                        <a:srgbClr val="EEEEEE"/>
+                      </a:solidFill>
+                      <a:prstDash val="solid"/>
+                      <a:round/>
+                      <a:headEnd type="none" w="med" len="med"/>
+                      <a:tailEnd type="none" w="med" len="med"/>
+                    </a:lnL>
+                    <a:lnR w="2540" cap="flat" cmpd="sng" algn="ctr">
+                      <a:solidFill>
+                        <a:srgbClr val="EEEEEE"/>
+                      </a:solidFill>
+                      <a:prstDash val="solid"/>
+                      <a:round/>
+                      <a:headEnd type="none" w="med" len="med"/>
+                      <a:tailEnd type="none" w="med" len="med"/>
+                    </a:lnR>
+                    <a:lnT w="2540" cap="flat" cmpd="sng" algn="ctr">
+                      <a:solidFill>
+                        <a:srgbClr val="EEEEEE"/>
+                      </a:solidFill>
+                      <a:prstDash val="solid"/>
+                      <a:round/>
+                      <a:headEnd type="none" w="med" len="med"/>
+                      <a:tailEnd type="none" w="med" len="med"/>
+                    </a:lnT>
+                    <a:lnB w="2540" cap="flat" cmpd="sng" algn="ctr">
+                      <a:solidFill>
+                        <a:srgbClr val="EEEEEE"/>
+                      </a:solidFill>
+                      <a:prstDash val="solid"/>
+                      <a:round/>
+                      <a:headEnd type="none" w="med" len="med"/>
+                      <a:tailEnd type="none" w="med" len="med"/>
+                    </a:lnB>
+                  </a:tcPr>
+                </a:tc>
+                <a:tc>
+                  <a:txBody>
+                    <a:bodyPr/>
+                    <a:lstStyle/>
+                    <a:p>
+                      <a:pPr algn="ctr" indent="0" marL="0">
+                        <a:buNone/>
+                      </a:pPr>
+                      <a:r>
+                        <a:rPr lang="en-US" sz="500" dirty="0">
+                          <a:solidFill>
+                            <a:srgbClr val="999999"/>
+                          </a:solidFill>
+                          <a:latin typeface="Calibri" pitchFamily="34" charset="0"/>
+                          <a:ea typeface="Calibri" pitchFamily="34" charset="-122"/>
+                          <a:cs typeface="Calibri" pitchFamily="34" charset="-120"/>
+                        </a:rPr>
+                        <a:t>0.02%</a:t>
+                      </a:r>
+                      <a:endParaRPr lang="en-US" sz="500" dirty="0">
+                        <a:latin typeface="Calibri" charset="0"/>
+                        <a:ea typeface="Calibri" charset="0"/>
+                        <a:cs typeface="Calibri" charset="0"/>
+                      </a:endParaRPr>
+                    </a:p>
+                  </a:txBody>
+                  <a:tcPr marL="91440" marR="91440" marT="45720" marB="45720">
+                    <a:lnL w="2540" cap="flat" cmpd="sng" algn="ctr">
+                      <a:solidFill>
+                        <a:srgbClr val="EEEEEE"/>
+                      </a:solidFill>
+                      <a:prstDash val="solid"/>
+                      <a:round/>
+                      <a:headEnd type="none" w="med" len="med"/>
+                      <a:tailEnd type="none" w="med" len="med"/>
+                    </a:lnL>
+                    <a:lnR w="2540" cap="flat" cmpd="sng" algn="ctr">
+                      <a:solidFill>
+                        <a:srgbClr val="EEEEEE"/>
+                      </a:solidFill>
+                      <a:prstDash val="solid"/>
+                      <a:round/>
+                      <a:headEnd type="none" w="med" len="med"/>
+                      <a:tailEnd type="none" w="med" len="med"/>
+                    </a:lnR>
+                    <a:lnT w="2540" cap="flat" cmpd="sng" algn="ctr">
+                      <a:solidFill>
+                        <a:srgbClr val="EEEEEE"/>
+                      </a:solidFill>
+                      <a:prstDash val="solid"/>
+                      <a:round/>
+                      <a:headEnd type="none" w="med" len="med"/>
+                      <a:tailEnd type="none" w="med" len="med"/>
+                    </a:lnT>
+                    <a:lnB w="2540" cap="flat" cmpd="sng" algn="ctr">
+                      <a:solidFill>
+                        <a:srgbClr val="EEEEEE"/>
+                      </a:solidFill>
+                      <a:prstDash val="solid"/>
+                      <a:round/>
+                      <a:headEnd type="none" w="med" len="med"/>
+                      <a:tailEnd type="none" w="med" len="med"/>
+                    </a:lnB>
+                  </a:tcPr>
+                </a:tc>
+                <a:tc>
+                  <a:txBody>
+                    <a:bodyPr/>
+                    <a:lstStyle/>
+                    <a:p>
+                      <a:pPr algn="ctr" indent="0" marL="0">
+                        <a:buNone/>
+                      </a:pPr>
+                      <a:r>
+                        <a:rPr lang="en-US" sz="500" dirty="0">
+                          <a:solidFill>
+                            <a:srgbClr val="999999"/>
+                          </a:solidFill>
+                          <a:latin typeface="Calibri" pitchFamily="34" charset="0"/>
+                          <a:ea typeface="Calibri" pitchFamily="34" charset="-122"/>
+                          <a:cs typeface="Calibri" pitchFamily="34" charset="-120"/>
+                        </a:rPr>
+                        <a:t>0.02%</a:t>
+                      </a:r>
+                      <a:endParaRPr lang="en-US" sz="500" dirty="0">
+                        <a:latin typeface="Calibri" charset="0"/>
+                        <a:ea typeface="Calibri" charset="0"/>
+                        <a:cs typeface="Calibri" charset="0"/>
+                      </a:endParaRPr>
+                    </a:p>
+                  </a:txBody>
+                  <a:tcPr marL="91440" marR="91440" marT="45720" marB="45720">
+                    <a:lnL w="2540" cap="flat" cmpd="sng" algn="ctr">
+                      <a:solidFill>
+                        <a:srgbClr val="EEEEEE"/>
+                      </a:solidFill>
+                      <a:prstDash val="solid"/>
+                      <a:round/>
+                      <a:headEnd type="none" w="med" len="med"/>
+                      <a:tailEnd type="none" w="med" len="med"/>
+                    </a:lnL>
+                    <a:lnR w="2540" cap="flat" cmpd="sng" algn="ctr">
+                      <a:solidFill>
+                        <a:srgbClr val="EEEEEE"/>
+                      </a:solidFill>
+                      <a:prstDash val="solid"/>
+                      <a:round/>
+                      <a:headEnd type="none" w="med" len="med"/>
+                      <a:tailEnd type="none" w="med" len="med"/>
+                    </a:lnR>
+                    <a:lnT w="2540" cap="flat" cmpd="sng" algn="ctr">
+                      <a:solidFill>
+                        <a:srgbClr val="EEEEEE"/>
+                      </a:solidFill>
+                      <a:prstDash val="solid"/>
+                      <a:round/>
+                      <a:headEnd type="none" w="med" len="med"/>
+                      <a:tailEnd type="none" w="med" len="med"/>
+                    </a:lnT>
+                    <a:lnB w="2540" cap="flat" cmpd="sng" algn="ctr">
+                      <a:solidFill>
+                        <a:srgbClr val="EEEEEE"/>
+                      </a:solidFill>
+                      <a:prstDash val="solid"/>
+                      <a:round/>
+                      <a:headEnd type="none" w="med" len="med"/>
+                      <a:tailEnd type="none" w="med" len="med"/>
+                    </a:lnB>
+                  </a:tcPr>
+                </a:tc>
+                <a:tc>
+                  <a:txBody>
+                    <a:bodyPr/>
+                    <a:lstStyle/>
+                    <a:p>
+                      <a:pPr algn="ctr" indent="0" marL="0">
+                        <a:buNone/>
+                      </a:pPr>
+                      <a:r>
+                        <a:rPr lang="en-US" sz="500" dirty="0">
+                          <a:solidFill>
+                            <a:srgbClr val="999999"/>
+                          </a:solidFill>
+                          <a:latin typeface="Calibri" pitchFamily="34" charset="0"/>
+                          <a:ea typeface="Calibri" pitchFamily="34" charset="-122"/>
+                          <a:cs typeface="Calibri" pitchFamily="34" charset="-120"/>
+                        </a:rPr>
                         <a:t>0.01%</a:t>
                       </a:r>
                       <a:endParaRPr lang="en-US" sz="500" dirty="0">
@@ -15766,7 +16286,7 @@
                           <a:ea typeface="Calibri" pitchFamily="34" charset="-122"/>
                           <a:cs typeface="Calibri" pitchFamily="34" charset="-120"/>
                         </a:rPr>
-                        <a:t>0.01%</a:t>
+                        <a:t>0.05%</a:t>
                       </a:r>
                       <a:endParaRPr lang="en-US" sz="500" dirty="0">
                         <a:latin typeface="Calibri" charset="0"/>
@@ -15831,64 +16351,64 @@
                           <a:ea typeface="Calibri" pitchFamily="34" charset="-122"/>
                           <a:cs typeface="Calibri" pitchFamily="34" charset="-120"/>
                         </a:rPr>
-                        <a:t>0.01%</a:t>
-                      </a:r>
-                      <a:endParaRPr lang="en-US" sz="500" dirty="0">
-                        <a:latin typeface="Calibri" charset="0"/>
-                        <a:ea typeface="Calibri" charset="0"/>
-                        <a:cs typeface="Calibri" charset="0"/>
-                      </a:endParaRPr>
-                    </a:p>
-                  </a:txBody>
-                  <a:tcPr marL="91440" marR="91440" marT="45720" marB="45720">
-                    <a:lnL w="2540" cap="flat" cmpd="sng" algn="ctr">
-                      <a:solidFill>
-                        <a:srgbClr val="EEEEEE"/>
-                      </a:solidFill>
-                      <a:prstDash val="solid"/>
-                      <a:round/>
-                      <a:headEnd type="none" w="med" len="med"/>
-                      <a:tailEnd type="none" w="med" len="med"/>
-                    </a:lnL>
-                    <a:lnR w="2540" cap="flat" cmpd="sng" algn="ctr">
-                      <a:solidFill>
-                        <a:srgbClr val="EEEEEE"/>
-                      </a:solidFill>
-                      <a:prstDash val="solid"/>
-                      <a:round/>
-                      <a:headEnd type="none" w="med" len="med"/>
-                      <a:tailEnd type="none" w="med" len="med"/>
-                    </a:lnR>
-                    <a:lnT w="2540" cap="flat" cmpd="sng" algn="ctr">
-                      <a:solidFill>
-                        <a:srgbClr val="EEEEEE"/>
-                      </a:solidFill>
-                      <a:prstDash val="solid"/>
-                      <a:round/>
-                      <a:headEnd type="none" w="med" len="med"/>
-                      <a:tailEnd type="none" w="med" len="med"/>
-                    </a:lnT>
-                    <a:lnB w="2540" cap="flat" cmpd="sng" algn="ctr">
-                      <a:solidFill>
-                        <a:srgbClr val="EEEEEE"/>
-                      </a:solidFill>
-                      <a:prstDash val="solid"/>
-                      <a:round/>
-                      <a:headEnd type="none" w="med" len="med"/>
-                      <a:tailEnd type="none" w="med" len="med"/>
-                    </a:lnB>
-                  </a:tcPr>
-                </a:tc>
-                <a:tc>
-                  <a:txBody>
-                    <a:bodyPr/>
-                    <a:lstStyle/>
-                    <a:p>
-                      <a:pPr algn="ctr" indent="0" marL="0">
-                        <a:buNone/>
-                      </a:pPr>
-                      <a:r>
-                        <a:rPr lang="en-US" sz="500" dirty="0">
+                        <a:t>0.89%</a:t>
+                      </a:r>
+                      <a:endParaRPr lang="en-US" sz="500" dirty="0">
+                        <a:latin typeface="Calibri" charset="0"/>
+                        <a:ea typeface="Calibri" charset="0"/>
+                        <a:cs typeface="Calibri" charset="0"/>
+                      </a:endParaRPr>
+                    </a:p>
+                  </a:txBody>
+                  <a:tcPr marL="91440" marR="91440" marT="45720" marB="45720">
+                    <a:lnL w="2540" cap="flat" cmpd="sng" algn="ctr">
+                      <a:solidFill>
+                        <a:srgbClr val="EEEEEE"/>
+                      </a:solidFill>
+                      <a:prstDash val="solid"/>
+                      <a:round/>
+                      <a:headEnd type="none" w="med" len="med"/>
+                      <a:tailEnd type="none" w="med" len="med"/>
+                    </a:lnL>
+                    <a:lnR w="2540" cap="flat" cmpd="sng" algn="ctr">
+                      <a:solidFill>
+                        <a:srgbClr val="EEEEEE"/>
+                      </a:solidFill>
+                      <a:prstDash val="solid"/>
+                      <a:round/>
+                      <a:headEnd type="none" w="med" len="med"/>
+                      <a:tailEnd type="none" w="med" len="med"/>
+                    </a:lnR>
+                    <a:lnT w="2540" cap="flat" cmpd="sng" algn="ctr">
+                      <a:solidFill>
+                        <a:srgbClr val="EEEEEE"/>
+                      </a:solidFill>
+                      <a:prstDash val="solid"/>
+                      <a:round/>
+                      <a:headEnd type="none" w="med" len="med"/>
+                      <a:tailEnd type="none" w="med" len="med"/>
+                    </a:lnT>
+                    <a:lnB w="2540" cap="flat" cmpd="sng" algn="ctr">
+                      <a:solidFill>
+                        <a:srgbClr val="EEEEEE"/>
+                      </a:solidFill>
+                      <a:prstDash val="solid"/>
+                      <a:round/>
+                      <a:headEnd type="none" w="med" len="med"/>
+                      <a:tailEnd type="none" w="med" len="med"/>
+                    </a:lnB>
+                  </a:tcPr>
+                </a:tc>
+                <a:tc>
+                  <a:txBody>
+                    <a:bodyPr/>
+                    <a:lstStyle/>
+                    <a:p>
+                      <a:pPr algn="ctr" indent="0" marL="0">
+                        <a:buNone/>
+                      </a:pPr>
+                      <a:r>
+                        <a:rPr lang="en-US" sz="500" b="1" dirty="0">
                           <a:solidFill>
                             <a:srgbClr val="999999"/>
                           </a:solidFill>
@@ -15896,527 +16416,7 @@
                           <a:ea typeface="Calibri" pitchFamily="34" charset="-122"/>
                           <a:cs typeface="Calibri" pitchFamily="34" charset="-120"/>
                         </a:rPr>
-                        <a:t>0.01%</a:t>
-                      </a:r>
-                      <a:endParaRPr lang="en-US" sz="500" dirty="0">
-                        <a:latin typeface="Calibri" charset="0"/>
-                        <a:ea typeface="Calibri" charset="0"/>
-                        <a:cs typeface="Calibri" charset="0"/>
-                      </a:endParaRPr>
-                    </a:p>
-                  </a:txBody>
-                  <a:tcPr marL="91440" marR="91440" marT="45720" marB="45720">
-                    <a:lnL w="2540" cap="flat" cmpd="sng" algn="ctr">
-                      <a:solidFill>
-                        <a:srgbClr val="EEEEEE"/>
-                      </a:solidFill>
-                      <a:prstDash val="solid"/>
-                      <a:round/>
-                      <a:headEnd type="none" w="med" len="med"/>
-                      <a:tailEnd type="none" w="med" len="med"/>
-                    </a:lnL>
-                    <a:lnR w="2540" cap="flat" cmpd="sng" algn="ctr">
-                      <a:solidFill>
-                        <a:srgbClr val="EEEEEE"/>
-                      </a:solidFill>
-                      <a:prstDash val="solid"/>
-                      <a:round/>
-                      <a:headEnd type="none" w="med" len="med"/>
-                      <a:tailEnd type="none" w="med" len="med"/>
-                    </a:lnR>
-                    <a:lnT w="2540" cap="flat" cmpd="sng" algn="ctr">
-                      <a:solidFill>
-                        <a:srgbClr val="EEEEEE"/>
-                      </a:solidFill>
-                      <a:prstDash val="solid"/>
-                      <a:round/>
-                      <a:headEnd type="none" w="med" len="med"/>
-                      <a:tailEnd type="none" w="med" len="med"/>
-                    </a:lnT>
-                    <a:lnB w="2540" cap="flat" cmpd="sng" algn="ctr">
-                      <a:solidFill>
-                        <a:srgbClr val="EEEEEE"/>
-                      </a:solidFill>
-                      <a:prstDash val="solid"/>
-                      <a:round/>
-                      <a:headEnd type="none" w="med" len="med"/>
-                      <a:tailEnd type="none" w="med" len="med"/>
-                    </a:lnB>
-                  </a:tcPr>
-                </a:tc>
-                <a:tc>
-                  <a:txBody>
-                    <a:bodyPr/>
-                    <a:lstStyle/>
-                    <a:p>
-                      <a:pPr algn="ctr" indent="0" marL="0">
-                        <a:buNone/>
-                      </a:pPr>
-                      <a:r>
-                        <a:rPr lang="en-US" sz="500" dirty="0">
-                          <a:solidFill>
-                            <a:srgbClr val="999999"/>
-                          </a:solidFill>
-                          <a:latin typeface="Calibri" pitchFamily="34" charset="0"/>
-                          <a:ea typeface="Calibri" pitchFamily="34" charset="-122"/>
-                          <a:cs typeface="Calibri" pitchFamily="34" charset="-120"/>
-                        </a:rPr>
-                        <a:t>0.00%</a:t>
-                      </a:r>
-                      <a:endParaRPr lang="en-US" sz="500" dirty="0">
-                        <a:latin typeface="Calibri" charset="0"/>
-                        <a:ea typeface="Calibri" charset="0"/>
-                        <a:cs typeface="Calibri" charset="0"/>
-                      </a:endParaRPr>
-                    </a:p>
-                  </a:txBody>
-                  <a:tcPr marL="91440" marR="91440" marT="45720" marB="45720">
-                    <a:lnL w="2540" cap="flat" cmpd="sng" algn="ctr">
-                      <a:solidFill>
-                        <a:srgbClr val="EEEEEE"/>
-                      </a:solidFill>
-                      <a:prstDash val="solid"/>
-                      <a:round/>
-                      <a:headEnd type="none" w="med" len="med"/>
-                      <a:tailEnd type="none" w="med" len="med"/>
-                    </a:lnL>
-                    <a:lnR w="2540" cap="flat" cmpd="sng" algn="ctr">
-                      <a:solidFill>
-                        <a:srgbClr val="EEEEEE"/>
-                      </a:solidFill>
-                      <a:prstDash val="solid"/>
-                      <a:round/>
-                      <a:headEnd type="none" w="med" len="med"/>
-                      <a:tailEnd type="none" w="med" len="med"/>
-                    </a:lnR>
-                    <a:lnT w="2540" cap="flat" cmpd="sng" algn="ctr">
-                      <a:solidFill>
-                        <a:srgbClr val="EEEEEE"/>
-                      </a:solidFill>
-                      <a:prstDash val="solid"/>
-                      <a:round/>
-                      <a:headEnd type="none" w="med" len="med"/>
-                      <a:tailEnd type="none" w="med" len="med"/>
-                    </a:lnT>
-                    <a:lnB w="2540" cap="flat" cmpd="sng" algn="ctr">
-                      <a:solidFill>
-                        <a:srgbClr val="EEEEEE"/>
-                      </a:solidFill>
-                      <a:prstDash val="solid"/>
-                      <a:round/>
-                      <a:headEnd type="none" w="med" len="med"/>
-                      <a:tailEnd type="none" w="med" len="med"/>
-                    </a:lnB>
-                  </a:tcPr>
-                </a:tc>
-                <a:tc>
-                  <a:txBody>
-                    <a:bodyPr/>
-                    <a:lstStyle/>
-                    <a:p>
-                      <a:pPr algn="ctr" indent="0" marL="0">
-                        <a:buNone/>
-                      </a:pPr>
-                      <a:r>
-                        <a:rPr lang="en-US" sz="500" dirty="0">
-                          <a:solidFill>
-                            <a:srgbClr val="999999"/>
-                          </a:solidFill>
-                          <a:latin typeface="Calibri" pitchFamily="34" charset="0"/>
-                          <a:ea typeface="Calibri" pitchFamily="34" charset="-122"/>
-                          <a:cs typeface="Calibri" pitchFamily="34" charset="-120"/>
-                        </a:rPr>
-                        <a:t>0.00%</a:t>
-                      </a:r>
-                      <a:endParaRPr lang="en-US" sz="500" dirty="0">
-                        <a:latin typeface="Calibri" charset="0"/>
-                        <a:ea typeface="Calibri" charset="0"/>
-                        <a:cs typeface="Calibri" charset="0"/>
-                      </a:endParaRPr>
-                    </a:p>
-                  </a:txBody>
-                  <a:tcPr marL="91440" marR="91440" marT="45720" marB="45720">
-                    <a:lnL w="2540" cap="flat" cmpd="sng" algn="ctr">
-                      <a:solidFill>
-                        <a:srgbClr val="EEEEEE"/>
-                      </a:solidFill>
-                      <a:prstDash val="solid"/>
-                      <a:round/>
-                      <a:headEnd type="none" w="med" len="med"/>
-                      <a:tailEnd type="none" w="med" len="med"/>
-                    </a:lnL>
-                    <a:lnR w="2540" cap="flat" cmpd="sng" algn="ctr">
-                      <a:solidFill>
-                        <a:srgbClr val="EEEEEE"/>
-                      </a:solidFill>
-                      <a:prstDash val="solid"/>
-                      <a:round/>
-                      <a:headEnd type="none" w="med" len="med"/>
-                      <a:tailEnd type="none" w="med" len="med"/>
-                    </a:lnR>
-                    <a:lnT w="2540" cap="flat" cmpd="sng" algn="ctr">
-                      <a:solidFill>
-                        <a:srgbClr val="EEEEEE"/>
-                      </a:solidFill>
-                      <a:prstDash val="solid"/>
-                      <a:round/>
-                      <a:headEnd type="none" w="med" len="med"/>
-                      <a:tailEnd type="none" w="med" len="med"/>
-                    </a:lnT>
-                    <a:lnB w="2540" cap="flat" cmpd="sng" algn="ctr">
-                      <a:solidFill>
-                        <a:srgbClr val="EEEEEE"/>
-                      </a:solidFill>
-                      <a:prstDash val="solid"/>
-                      <a:round/>
-                      <a:headEnd type="none" w="med" len="med"/>
-                      <a:tailEnd type="none" w="med" len="med"/>
-                    </a:lnB>
-                  </a:tcPr>
-                </a:tc>
-                <a:tc>
-                  <a:txBody>
-                    <a:bodyPr/>
-                    <a:lstStyle/>
-                    <a:p>
-                      <a:pPr algn="ctr" indent="0" marL="0">
-                        <a:buNone/>
-                      </a:pPr>
-                      <a:r>
-                        <a:rPr lang="en-US" sz="500" dirty="0">
-                          <a:solidFill>
-                            <a:srgbClr val="999999"/>
-                          </a:solidFill>
-                          <a:latin typeface="Calibri" pitchFamily="34" charset="0"/>
-                          <a:ea typeface="Calibri" pitchFamily="34" charset="-122"/>
-                          <a:cs typeface="Calibri" pitchFamily="34" charset="-120"/>
-                        </a:rPr>
-                        <a:t>0.00%</a:t>
-                      </a:r>
-                      <a:endParaRPr lang="en-US" sz="500" dirty="0">
-                        <a:latin typeface="Calibri" charset="0"/>
-                        <a:ea typeface="Calibri" charset="0"/>
-                        <a:cs typeface="Calibri" charset="0"/>
-                      </a:endParaRPr>
-                    </a:p>
-                  </a:txBody>
-                  <a:tcPr marL="91440" marR="91440" marT="45720" marB="45720">
-                    <a:lnL w="2540" cap="flat" cmpd="sng" algn="ctr">
-                      <a:solidFill>
-                        <a:srgbClr val="EEEEEE"/>
-                      </a:solidFill>
-                      <a:prstDash val="solid"/>
-                      <a:round/>
-                      <a:headEnd type="none" w="med" len="med"/>
-                      <a:tailEnd type="none" w="med" len="med"/>
-                    </a:lnL>
-                    <a:lnR w="2540" cap="flat" cmpd="sng" algn="ctr">
-                      <a:solidFill>
-                        <a:srgbClr val="EEEEEE"/>
-                      </a:solidFill>
-                      <a:prstDash val="solid"/>
-                      <a:round/>
-                      <a:headEnd type="none" w="med" len="med"/>
-                      <a:tailEnd type="none" w="med" len="med"/>
-                    </a:lnR>
-                    <a:lnT w="2540" cap="flat" cmpd="sng" algn="ctr">
-                      <a:solidFill>
-                        <a:srgbClr val="EEEEEE"/>
-                      </a:solidFill>
-                      <a:prstDash val="solid"/>
-                      <a:round/>
-                      <a:headEnd type="none" w="med" len="med"/>
-                      <a:tailEnd type="none" w="med" len="med"/>
-                    </a:lnT>
-                    <a:lnB w="2540" cap="flat" cmpd="sng" algn="ctr">
-                      <a:solidFill>
-                        <a:srgbClr val="EEEEEE"/>
-                      </a:solidFill>
-                      <a:prstDash val="solid"/>
-                      <a:round/>
-                      <a:headEnd type="none" w="med" len="med"/>
-                      <a:tailEnd type="none" w="med" len="med"/>
-                    </a:lnB>
-                  </a:tcPr>
-                </a:tc>
-                <a:tc>
-                  <a:txBody>
-                    <a:bodyPr/>
-                    <a:lstStyle/>
-                    <a:p>
-                      <a:pPr algn="ctr" indent="0" marL="0">
-                        <a:buNone/>
-                      </a:pPr>
-                      <a:r>
-                        <a:rPr lang="en-US" sz="500" dirty="0">
-                          <a:solidFill>
-                            <a:srgbClr val="999999"/>
-                          </a:solidFill>
-                          <a:latin typeface="Calibri" pitchFamily="34" charset="0"/>
-                          <a:ea typeface="Calibri" pitchFamily="34" charset="-122"/>
-                          <a:cs typeface="Calibri" pitchFamily="34" charset="-120"/>
-                        </a:rPr>
-                        <a:t>0.00%</a:t>
-                      </a:r>
-                      <a:endParaRPr lang="en-US" sz="500" dirty="0">
-                        <a:latin typeface="Calibri" charset="0"/>
-                        <a:ea typeface="Calibri" charset="0"/>
-                        <a:cs typeface="Calibri" charset="0"/>
-                      </a:endParaRPr>
-                    </a:p>
-                  </a:txBody>
-                  <a:tcPr marL="91440" marR="91440" marT="45720" marB="45720">
-                    <a:lnL w="2540" cap="flat" cmpd="sng" algn="ctr">
-                      <a:solidFill>
-                        <a:srgbClr val="EEEEEE"/>
-                      </a:solidFill>
-                      <a:prstDash val="solid"/>
-                      <a:round/>
-                      <a:headEnd type="none" w="med" len="med"/>
-                      <a:tailEnd type="none" w="med" len="med"/>
-                    </a:lnL>
-                    <a:lnR w="2540" cap="flat" cmpd="sng" algn="ctr">
-                      <a:solidFill>
-                        <a:srgbClr val="EEEEEE"/>
-                      </a:solidFill>
-                      <a:prstDash val="solid"/>
-                      <a:round/>
-                      <a:headEnd type="none" w="med" len="med"/>
-                      <a:tailEnd type="none" w="med" len="med"/>
-                    </a:lnR>
-                    <a:lnT w="2540" cap="flat" cmpd="sng" algn="ctr">
-                      <a:solidFill>
-                        <a:srgbClr val="EEEEEE"/>
-                      </a:solidFill>
-                      <a:prstDash val="solid"/>
-                      <a:round/>
-                      <a:headEnd type="none" w="med" len="med"/>
-                      <a:tailEnd type="none" w="med" len="med"/>
-                    </a:lnT>
-                    <a:lnB w="2540" cap="flat" cmpd="sng" algn="ctr">
-                      <a:solidFill>
-                        <a:srgbClr val="EEEEEE"/>
-                      </a:solidFill>
-                      <a:prstDash val="solid"/>
-                      <a:round/>
-                      <a:headEnd type="none" w="med" len="med"/>
-                      <a:tailEnd type="none" w="med" len="med"/>
-                    </a:lnB>
-                  </a:tcPr>
-                </a:tc>
-                <a:tc>
-                  <a:txBody>
-                    <a:bodyPr/>
-                    <a:lstStyle/>
-                    <a:p>
-                      <a:pPr algn="ctr" indent="0" marL="0">
-                        <a:buNone/>
-                      </a:pPr>
-                      <a:r>
-                        <a:rPr lang="en-US" sz="500" dirty="0">
-                          <a:solidFill>
-                            <a:srgbClr val="999999"/>
-                          </a:solidFill>
-                          <a:latin typeface="Calibri" pitchFamily="34" charset="0"/>
-                          <a:ea typeface="Calibri" pitchFamily="34" charset="-122"/>
-                          <a:cs typeface="Calibri" pitchFamily="34" charset="-120"/>
-                        </a:rPr>
-                        <a:t>0.00%</a:t>
-                      </a:r>
-                      <a:endParaRPr lang="en-US" sz="500" dirty="0">
-                        <a:latin typeface="Calibri" charset="0"/>
-                        <a:ea typeface="Calibri" charset="0"/>
-                        <a:cs typeface="Calibri" charset="0"/>
-                      </a:endParaRPr>
-                    </a:p>
-                  </a:txBody>
-                  <a:tcPr marL="91440" marR="91440" marT="45720" marB="45720">
-                    <a:lnL w="2540" cap="flat" cmpd="sng" algn="ctr">
-                      <a:solidFill>
-                        <a:srgbClr val="EEEEEE"/>
-                      </a:solidFill>
-                      <a:prstDash val="solid"/>
-                      <a:round/>
-                      <a:headEnd type="none" w="med" len="med"/>
-                      <a:tailEnd type="none" w="med" len="med"/>
-                    </a:lnL>
-                    <a:lnR w="2540" cap="flat" cmpd="sng" algn="ctr">
-                      <a:solidFill>
-                        <a:srgbClr val="EEEEEE"/>
-                      </a:solidFill>
-                      <a:prstDash val="solid"/>
-                      <a:round/>
-                      <a:headEnd type="none" w="med" len="med"/>
-                      <a:tailEnd type="none" w="med" len="med"/>
-                    </a:lnR>
-                    <a:lnT w="2540" cap="flat" cmpd="sng" algn="ctr">
-                      <a:solidFill>
-                        <a:srgbClr val="EEEEEE"/>
-                      </a:solidFill>
-                      <a:prstDash val="solid"/>
-                      <a:round/>
-                      <a:headEnd type="none" w="med" len="med"/>
-                      <a:tailEnd type="none" w="med" len="med"/>
-                    </a:lnT>
-                    <a:lnB w="2540" cap="flat" cmpd="sng" algn="ctr">
-                      <a:solidFill>
-                        <a:srgbClr val="EEEEEE"/>
-                      </a:solidFill>
-                      <a:prstDash val="solid"/>
-                      <a:round/>
-                      <a:headEnd type="none" w="med" len="med"/>
-                      <a:tailEnd type="none" w="med" len="med"/>
-                    </a:lnB>
-                  </a:tcPr>
-                </a:tc>
-                <a:tc>
-                  <a:txBody>
-                    <a:bodyPr/>
-                    <a:lstStyle/>
-                    <a:p>
-                      <a:pPr algn="ctr" indent="0" marL="0">
-                        <a:buNone/>
-                      </a:pPr>
-                      <a:r>
-                        <a:rPr lang="en-US" sz="500" dirty="0">
-                          <a:solidFill>
-                            <a:srgbClr val="999999"/>
-                          </a:solidFill>
-                          <a:latin typeface="Calibri" pitchFamily="34" charset="0"/>
-                          <a:ea typeface="Calibri" pitchFamily="34" charset="-122"/>
-                          <a:cs typeface="Calibri" pitchFamily="34" charset="-120"/>
-                        </a:rPr>
-                        <a:t>0.00%</a:t>
-                      </a:r>
-                      <a:endParaRPr lang="en-US" sz="500" dirty="0">
-                        <a:latin typeface="Calibri" charset="0"/>
-                        <a:ea typeface="Calibri" charset="0"/>
-                        <a:cs typeface="Calibri" charset="0"/>
-                      </a:endParaRPr>
-                    </a:p>
-                  </a:txBody>
-                  <a:tcPr marL="91440" marR="91440" marT="45720" marB="45720">
-                    <a:lnL w="2540" cap="flat" cmpd="sng" algn="ctr">
-                      <a:solidFill>
-                        <a:srgbClr val="EEEEEE"/>
-                      </a:solidFill>
-                      <a:prstDash val="solid"/>
-                      <a:round/>
-                      <a:headEnd type="none" w="med" len="med"/>
-                      <a:tailEnd type="none" w="med" len="med"/>
-                    </a:lnL>
-                    <a:lnR w="2540" cap="flat" cmpd="sng" algn="ctr">
-                      <a:solidFill>
-                        <a:srgbClr val="EEEEEE"/>
-                      </a:solidFill>
-                      <a:prstDash val="solid"/>
-                      <a:round/>
-                      <a:headEnd type="none" w="med" len="med"/>
-                      <a:tailEnd type="none" w="med" len="med"/>
-                    </a:lnR>
-                    <a:lnT w="2540" cap="flat" cmpd="sng" algn="ctr">
-                      <a:solidFill>
-                        <a:srgbClr val="EEEEEE"/>
-                      </a:solidFill>
-                      <a:prstDash val="solid"/>
-                      <a:round/>
-                      <a:headEnd type="none" w="med" len="med"/>
-                      <a:tailEnd type="none" w="med" len="med"/>
-                    </a:lnT>
-                    <a:lnB w="2540" cap="flat" cmpd="sng" algn="ctr">
-                      <a:solidFill>
-                        <a:srgbClr val="EEEEEE"/>
-                      </a:solidFill>
-                      <a:prstDash val="solid"/>
-                      <a:round/>
-                      <a:headEnd type="none" w="med" len="med"/>
-                      <a:tailEnd type="none" w="med" len="med"/>
-                    </a:lnB>
-                  </a:tcPr>
-                </a:tc>
-                <a:tc>
-                  <a:txBody>
-                    <a:bodyPr/>
-                    <a:lstStyle/>
-                    <a:p>
-                      <a:pPr algn="ctr" indent="0" marL="0">
-                        <a:buNone/>
-                      </a:pPr>
-                      <a:r>
-                        <a:rPr lang="en-US" sz="500" dirty="0">
-                          <a:solidFill>
-                            <a:srgbClr val="999999"/>
-                          </a:solidFill>
-                          <a:latin typeface="Calibri" pitchFamily="34" charset="0"/>
-                          <a:ea typeface="Calibri" pitchFamily="34" charset="-122"/>
-                          <a:cs typeface="Calibri" pitchFamily="34" charset="-120"/>
-                        </a:rPr>
-                        <a:t>0.89%</a:t>
-                      </a:r>
-                      <a:endParaRPr lang="en-US" sz="500" dirty="0">
-                        <a:latin typeface="Calibri" charset="0"/>
-                        <a:ea typeface="Calibri" charset="0"/>
-                        <a:cs typeface="Calibri" charset="0"/>
-                      </a:endParaRPr>
-                    </a:p>
-                  </a:txBody>
-                  <a:tcPr marL="91440" marR="91440" marT="45720" marB="45720">
-                    <a:lnL w="2540" cap="flat" cmpd="sng" algn="ctr">
-                      <a:solidFill>
-                        <a:srgbClr val="EEEEEE"/>
-                      </a:solidFill>
-                      <a:prstDash val="solid"/>
-                      <a:round/>
-                      <a:headEnd type="none" w="med" len="med"/>
-                      <a:tailEnd type="none" w="med" len="med"/>
-                    </a:lnL>
-                    <a:lnR w="2540" cap="flat" cmpd="sng" algn="ctr">
-                      <a:solidFill>
-                        <a:srgbClr val="EEEEEE"/>
-                      </a:solidFill>
-                      <a:prstDash val="solid"/>
-                      <a:round/>
-                      <a:headEnd type="none" w="med" len="med"/>
-                      <a:tailEnd type="none" w="med" len="med"/>
-                    </a:lnR>
-                    <a:lnT w="2540" cap="flat" cmpd="sng" algn="ctr">
-                      <a:solidFill>
-                        <a:srgbClr val="EEEEEE"/>
-                      </a:solidFill>
-                      <a:prstDash val="solid"/>
-                      <a:round/>
-                      <a:headEnd type="none" w="med" len="med"/>
-                      <a:tailEnd type="none" w="med" len="med"/>
-                    </a:lnT>
-                    <a:lnB w="2540" cap="flat" cmpd="sng" algn="ctr">
-                      <a:solidFill>
-                        <a:srgbClr val="EEEEEE"/>
-                      </a:solidFill>
-                      <a:prstDash val="solid"/>
-                      <a:round/>
-                      <a:headEnd type="none" w="med" len="med"/>
-                      <a:tailEnd type="none" w="med" len="med"/>
-                    </a:lnB>
-                  </a:tcPr>
-                </a:tc>
-                <a:tc>
-                  <a:txBody>
-                    <a:bodyPr/>
-                    <a:lstStyle/>
-                    <a:p>
-                      <a:pPr algn="ctr" indent="0" marL="0">
-                        <a:buNone/>
-                      </a:pPr>
-                      <a:r>
-                        <a:rPr lang="en-US" sz="500" b="1" dirty="0">
-                          <a:solidFill>
-                            <a:srgbClr val="999999"/>
-                          </a:solidFill>
-                          <a:latin typeface="Calibri" pitchFamily="34" charset="0"/>
-                          <a:ea typeface="Calibri" pitchFamily="34" charset="-122"/>
-                          <a:cs typeface="Calibri" pitchFamily="34" charset="-120"/>
-                        </a:rPr>
-                        <a:t>0.94%</a:t>
+                        <a:t>6.41%</a:t>
                       </a:r>
                       <a:endParaRPr lang="en-US" sz="500" dirty="0">
                         <a:latin typeface="Calibri" charset="0"/>
@@ -16602,7 +16602,7 @@
                           <a:ea typeface="Calibri" pitchFamily="34" charset="-122"/>
                           <a:cs typeface="Calibri" pitchFamily="34" charset="-120"/>
                         </a:rPr>
-                        <a:t>0.02%</a:t>
+                        <a:t>2.31%</a:t>
                       </a:r>
                       <a:endParaRPr lang="en-US" sz="500" dirty="0">
                         <a:latin typeface="Calibri" charset="0"/>
@@ -16667,7 +16667,7 @@
                           <a:ea typeface="Calibri" pitchFamily="34" charset="-122"/>
                           <a:cs typeface="Calibri" pitchFamily="34" charset="-120"/>
                         </a:rPr>
-                        <a:t>0.02%</a:t>
+                        <a:t>2.11%</a:t>
                       </a:r>
                       <a:endParaRPr lang="en-US" sz="500" dirty="0">
                         <a:latin typeface="Calibri" charset="0"/>
@@ -16732,7 +16732,7 @@
                           <a:ea typeface="Calibri" pitchFamily="34" charset="-122"/>
                           <a:cs typeface="Calibri" pitchFamily="34" charset="-120"/>
                         </a:rPr>
-                        <a:t>0.02%</a:t>
+                        <a:t>1.97%</a:t>
                       </a:r>
                       <a:endParaRPr lang="en-US" sz="500" dirty="0">
                         <a:latin typeface="Calibri" charset="0"/>
@@ -16797,7 +16797,7 @@
                           <a:ea typeface="Calibri" pitchFamily="34" charset="-122"/>
                           <a:cs typeface="Calibri" pitchFamily="34" charset="-120"/>
                         </a:rPr>
-                        <a:t>0.02%</a:t>
+                        <a:t>2.49%</a:t>
                       </a:r>
                       <a:endParaRPr lang="en-US" sz="500" dirty="0">
                         <a:latin typeface="Calibri" charset="0"/>
@@ -16862,7 +16862,7 @@
                           <a:ea typeface="Calibri" pitchFamily="34" charset="-122"/>
                           <a:cs typeface="Calibri" pitchFamily="34" charset="-120"/>
                         </a:rPr>
-                        <a:t>0.03%</a:t>
+                        <a:t>3.28%</a:t>
                       </a:r>
                       <a:endParaRPr lang="en-US" sz="500" dirty="0">
                         <a:latin typeface="Calibri" charset="0"/>
@@ -16927,7 +16927,7 @@
                           <a:ea typeface="Calibri" pitchFamily="34" charset="-122"/>
                           <a:cs typeface="Calibri" pitchFamily="34" charset="-120"/>
                         </a:rPr>
-                        <a:t>0.02%</a:t>
+                        <a:t>2.14%</a:t>
                       </a:r>
                       <a:endParaRPr lang="en-US" sz="500" dirty="0">
                         <a:latin typeface="Calibri" charset="0"/>
@@ -16992,7 +16992,7 @@
                           <a:ea typeface="Calibri" pitchFamily="34" charset="-122"/>
                           <a:cs typeface="Calibri" pitchFamily="34" charset="-120"/>
                         </a:rPr>
-                        <a:t>0.02%</a:t>
+                        <a:t>1.96%</a:t>
                       </a:r>
                       <a:endParaRPr lang="en-US" sz="500" dirty="0">
                         <a:latin typeface="Calibri" charset="0"/>
@@ -17057,7 +17057,7 @@
                           <a:ea typeface="Calibri" pitchFamily="34" charset="-122"/>
                           <a:cs typeface="Calibri" pitchFamily="34" charset="-120"/>
                         </a:rPr>
-                        <a:t>0.02%</a:t>
+                        <a:t>1.52%</a:t>
                       </a:r>
                       <a:endParaRPr lang="en-US" sz="500" dirty="0">
                         <a:latin typeface="Calibri" charset="0"/>
@@ -17122,7 +17122,7 @@
                           <a:ea typeface="Calibri" pitchFamily="34" charset="-122"/>
                           <a:cs typeface="Calibri" pitchFamily="34" charset="-120"/>
                         </a:rPr>
-                        <a:t>0.01%</a:t>
+                        <a:t>1.34%</a:t>
                       </a:r>
                       <a:endParaRPr lang="en-US" sz="500" dirty="0">
                         <a:latin typeface="Calibri" charset="0"/>
@@ -17187,7 +17187,7 @@
                           <a:ea typeface="Calibri" pitchFamily="34" charset="-122"/>
                           <a:cs typeface="Calibri" pitchFamily="34" charset="-120"/>
                         </a:rPr>
-                        <a:t>0.01%</a:t>
+                        <a:t>1.12%</a:t>
                       </a:r>
                       <a:endParaRPr lang="en-US" sz="500" dirty="0">
                         <a:latin typeface="Calibri" charset="0"/>
@@ -17252,7 +17252,7 @@
                           <a:ea typeface="Calibri" pitchFamily="34" charset="-122"/>
                           <a:cs typeface="Calibri" pitchFamily="34" charset="-120"/>
                         </a:rPr>
-                        <a:t>0.01%</a:t>
+                        <a:t>0.67%</a:t>
                       </a:r>
                       <a:endParaRPr lang="en-US" sz="500" dirty="0">
                         <a:latin typeface="Calibri" charset="0"/>
@@ -17317,7 +17317,7 @@
                           <a:ea typeface="Calibri" pitchFamily="34" charset="-122"/>
                           <a:cs typeface="Calibri" pitchFamily="34" charset="-120"/>
                         </a:rPr>
-                        <a:t>0.01%</a:t>
+                        <a:t>0.67%</a:t>
                       </a:r>
                       <a:endParaRPr lang="en-US" sz="500" dirty="0">
                         <a:latin typeface="Calibri" charset="0"/>
@@ -17382,7 +17382,7 @@
                           <a:ea typeface="Calibri" pitchFamily="34" charset="-122"/>
                           <a:cs typeface="Calibri" pitchFamily="34" charset="-120"/>
                         </a:rPr>
-                        <a:t>0.22%</a:t>
+                        <a:t>23.80%</a:t>
                       </a:r>
                       <a:endParaRPr lang="en-US" sz="500" dirty="0">
                         <a:latin typeface="Calibri" charset="0"/>
@@ -18610,7 +18610,7 @@
                           <a:ea typeface="Calibri" pitchFamily="34" charset="-122"/>
                           <a:cs typeface="Calibri" pitchFamily="34" charset="-120"/>
                         </a:rPr>
-                        <a:t>0.00%</a:t>
+                        <a:t>0.04%</a:t>
                       </a:r>
                       <a:endParaRPr lang="en-US" sz="500" dirty="0">
                         <a:latin typeface="Calibri" charset="0"/>
@@ -18675,7 +18675,7 @@
                           <a:ea typeface="Calibri" pitchFamily="34" charset="-122"/>
                           <a:cs typeface="Calibri" pitchFamily="34" charset="-120"/>
                         </a:rPr>
-                        <a:t>0.00%</a:t>
+                        <a:t>0.03%</a:t>
                       </a:r>
                       <a:endParaRPr lang="en-US" sz="500" dirty="0">
                         <a:latin typeface="Calibri" charset="0"/>
@@ -18740,7 +18740,7 @@
                           <a:ea typeface="Calibri" pitchFamily="34" charset="-122"/>
                           <a:cs typeface="Calibri" pitchFamily="34" charset="-120"/>
                         </a:rPr>
-                        <a:t>0.00%</a:t>
+                        <a:t>0.08%</a:t>
                       </a:r>
                       <a:endParaRPr lang="en-US" sz="500" dirty="0">
                         <a:latin typeface="Calibri" charset="0"/>
@@ -18805,7 +18805,7 @@
                           <a:ea typeface="Calibri" pitchFamily="34" charset="-122"/>
                           <a:cs typeface="Calibri" pitchFamily="34" charset="-120"/>
                         </a:rPr>
-                        <a:t>0.00%</a:t>
+                        <a:t>0.02%</a:t>
                       </a:r>
                       <a:endParaRPr lang="en-US" sz="500" dirty="0">
                         <a:latin typeface="Calibri" charset="0"/>
@@ -18870,7 +18870,7 @@
                           <a:ea typeface="Calibri" pitchFamily="34" charset="-122"/>
                           <a:cs typeface="Calibri" pitchFamily="34" charset="-120"/>
                         </a:rPr>
-                        <a:t>0.00%</a:t>
+                        <a:t>0.01%</a:t>
                       </a:r>
                       <a:endParaRPr lang="en-US" sz="500" dirty="0">
                         <a:latin typeface="Calibri" charset="0"/>
@@ -18935,7 +18935,7 @@
                           <a:ea typeface="Calibri" pitchFamily="34" charset="-122"/>
                           <a:cs typeface="Calibri" pitchFamily="34" charset="-120"/>
                         </a:rPr>
-                        <a:t>0.00%</a:t>
+                        <a:t>0.02%</a:t>
                       </a:r>
                       <a:endParaRPr lang="en-US" sz="500" dirty="0">
                         <a:latin typeface="Calibri" charset="0"/>
@@ -19000,7 +19000,7 @@
                           <a:ea typeface="Calibri" pitchFamily="34" charset="-122"/>
                           <a:cs typeface="Calibri" pitchFamily="34" charset="-120"/>
                         </a:rPr>
-                        <a:t>0.00%</a:t>
+                        <a:t>0.02%</a:t>
                       </a:r>
                       <a:endParaRPr lang="en-US" sz="500" dirty="0">
                         <a:latin typeface="Calibri" charset="0"/>
@@ -19065,7 +19065,7 @@
                           <a:ea typeface="Calibri" pitchFamily="34" charset="-122"/>
                           <a:cs typeface="Calibri" pitchFamily="34" charset="-120"/>
                         </a:rPr>
-                        <a:t>0.00%</a:t>
+                        <a:t>0.02%</a:t>
                       </a:r>
                       <a:endParaRPr lang="en-US" sz="500" dirty="0">
                         <a:latin typeface="Calibri" charset="0"/>
@@ -19130,7 +19130,7 @@
                           <a:ea typeface="Calibri" pitchFamily="34" charset="-122"/>
                           <a:cs typeface="Calibri" pitchFamily="34" charset="-120"/>
                         </a:rPr>
-                        <a:t>0.00%</a:t>
+                        <a:t>0.02%</a:t>
                       </a:r>
                       <a:endParaRPr lang="en-US" sz="500" dirty="0">
                         <a:latin typeface="Calibri" charset="0"/>
@@ -19195,7 +19195,7 @@
                           <a:ea typeface="Calibri" pitchFamily="34" charset="-122"/>
                           <a:cs typeface="Calibri" pitchFamily="34" charset="-120"/>
                         </a:rPr>
-                        <a:t>0.00%</a:t>
+                        <a:t>0.04%</a:t>
                       </a:r>
                       <a:endParaRPr lang="en-US" sz="500" dirty="0">
                         <a:latin typeface="Calibri" charset="0"/>
@@ -19325,7 +19325,7 @@
                           <a:ea typeface="Calibri" pitchFamily="34" charset="-122"/>
                           <a:cs typeface="Calibri" pitchFamily="34" charset="-120"/>
                         </a:rPr>
-                        <a:t>0.60%</a:t>
+                        <a:t>0.89%</a:t>
                       </a:r>
                       <a:endParaRPr lang="en-US" sz="500" dirty="0">
                         <a:latin typeface="Calibri" charset="0"/>
@@ -19511,7 +19511,7 @@
                           <a:ea typeface="Calibri" pitchFamily="34" charset="-122"/>
                           <a:cs typeface="Calibri" pitchFamily="34" charset="-120"/>
                         </a:rPr>
-                        <a:t>0.02%</a:t>
+                        <a:t>2.06%</a:t>
                       </a:r>
                       <a:endParaRPr lang="en-US" sz="500" dirty="0">
                         <a:latin typeface="Calibri" charset="0"/>
@@ -19576,7 +19576,7 @@
                           <a:ea typeface="Calibri" pitchFamily="34" charset="-122"/>
                           <a:cs typeface="Calibri" pitchFamily="34" charset="-120"/>
                         </a:rPr>
-                        <a:t>0.02%</a:t>
+                        <a:t>2.16%</a:t>
                       </a:r>
                       <a:endParaRPr lang="en-US" sz="500" dirty="0">
                         <a:latin typeface="Calibri" charset="0"/>
@@ -19641,7 +19641,7 @@
                           <a:ea typeface="Calibri" pitchFamily="34" charset="-122"/>
                           <a:cs typeface="Calibri" pitchFamily="34" charset="-120"/>
                         </a:rPr>
-                        <a:t>0.02%</a:t>
+                        <a:t>2.06%</a:t>
                       </a:r>
                       <a:endParaRPr lang="en-US" sz="500" dirty="0">
                         <a:latin typeface="Calibri" charset="0"/>
@@ -19706,7 +19706,7 @@
                           <a:ea typeface="Calibri" pitchFamily="34" charset="-122"/>
                           <a:cs typeface="Calibri" pitchFamily="34" charset="-120"/>
                         </a:rPr>
-                        <a:t>0.01%</a:t>
+                        <a:t>1.45%</a:t>
                       </a:r>
                       <a:endParaRPr lang="en-US" sz="500" dirty="0">
                         <a:latin typeface="Calibri" charset="0"/>
@@ -19771,7 +19771,7 @@
                           <a:ea typeface="Calibri" pitchFamily="34" charset="-122"/>
                           <a:cs typeface="Calibri" pitchFamily="34" charset="-120"/>
                         </a:rPr>
-                        <a:t>0.01%</a:t>
+                        <a:t>1.30%</a:t>
                       </a:r>
                       <a:endParaRPr lang="en-US" sz="500" dirty="0">
                         <a:latin typeface="Calibri" charset="0"/>
@@ -19836,7 +19836,7 @@
                           <a:ea typeface="Calibri" pitchFamily="34" charset="-122"/>
                           <a:cs typeface="Calibri" pitchFamily="34" charset="-120"/>
                         </a:rPr>
-                        <a:t>0.01%</a:t>
+                        <a:t>1.34%</a:t>
                       </a:r>
                       <a:endParaRPr lang="en-US" sz="500" dirty="0">
                         <a:latin typeface="Calibri" charset="0"/>
@@ -19901,7 +19901,7 @@
                           <a:ea typeface="Calibri" pitchFamily="34" charset="-122"/>
                           <a:cs typeface="Calibri" pitchFamily="34" charset="-120"/>
                         </a:rPr>
-                        <a:t>0.01%</a:t>
+                        <a:t>1.08%</a:t>
                       </a:r>
                       <a:endParaRPr lang="en-US" sz="500" dirty="0">
                         <a:latin typeface="Calibri" charset="0"/>
@@ -19966,7 +19966,7 @@
                           <a:ea typeface="Calibri" pitchFamily="34" charset="-122"/>
                           <a:cs typeface="Calibri" pitchFamily="34" charset="-120"/>
                         </a:rPr>
-                        <a:t>0.01%</a:t>
+                        <a:t>0.97%</a:t>
                       </a:r>
                       <a:endParaRPr lang="en-US" sz="500" dirty="0">
                         <a:latin typeface="Calibri" charset="0"/>
@@ -20031,7 +20031,7 @@
                           <a:ea typeface="Calibri" pitchFamily="34" charset="-122"/>
                           <a:cs typeface="Calibri" pitchFamily="34" charset="-120"/>
                         </a:rPr>
-                        <a:t>0.01%</a:t>
+                        <a:t>0.56%</a:t>
                       </a:r>
                       <a:endParaRPr lang="en-US" sz="500" dirty="0">
                         <a:latin typeface="Calibri" charset="0"/>
@@ -20096,7 +20096,7 @@
                           <a:ea typeface="Calibri" pitchFamily="34" charset="-122"/>
                           <a:cs typeface="Calibri" pitchFamily="34" charset="-120"/>
                         </a:rPr>
-                        <a:t>0.02%</a:t>
+                        <a:t>1.93%</a:t>
                       </a:r>
                       <a:endParaRPr lang="en-US" sz="500" dirty="0">
                         <a:latin typeface="Calibri" charset="0"/>
@@ -20161,7 +20161,7 @@
                           <a:ea typeface="Calibri" pitchFamily="34" charset="-122"/>
                           <a:cs typeface="Calibri" pitchFamily="34" charset="-120"/>
                         </a:rPr>
-                        <a:t>0.01%</a:t>
+                        <a:t>0.89%</a:t>
                       </a:r>
                       <a:endParaRPr lang="en-US" sz="500" dirty="0">
                         <a:latin typeface="Calibri" charset="0"/>
@@ -20226,7 +20226,7 @@
                           <a:ea typeface="Calibri" pitchFamily="34" charset="-122"/>
                           <a:cs typeface="Calibri" pitchFamily="34" charset="-120"/>
                         </a:rPr>
-                        <a:t>0.01%</a:t>
+                        <a:t>0.97%</a:t>
                       </a:r>
                       <a:endParaRPr lang="en-US" sz="500" dirty="0">
                         <a:latin typeface="Calibri" charset="0"/>
@@ -20291,7 +20291,7 @@
                           <a:ea typeface="Calibri" pitchFamily="34" charset="-122"/>
                           <a:cs typeface="Calibri" pitchFamily="34" charset="-120"/>
                         </a:rPr>
-                        <a:t>0.17%</a:t>
+                        <a:t>18.09%</a:t>
                       </a:r>
                       <a:endParaRPr lang="en-US" sz="500" dirty="0">
                         <a:latin typeface="Calibri" charset="0"/>
@@ -21519,7 +21519,7 @@
                           <a:ea typeface="Calibri" pitchFamily="34" charset="-122"/>
                           <a:cs typeface="Calibri" pitchFamily="34" charset="-120"/>
                         </a:rPr>
-                        <a:t>0.00%</a:t>
+                        <a:t>0.06%</a:t>
                       </a:r>
                       <a:endParaRPr lang="en-US" sz="500" dirty="0">
                         <a:latin typeface="Calibri" charset="0"/>
@@ -21584,7 +21584,7 @@
                           <a:ea typeface="Calibri" pitchFamily="34" charset="-122"/>
                           <a:cs typeface="Calibri" pitchFamily="34" charset="-120"/>
                         </a:rPr>
-                        <a:t>0.00%</a:t>
+                        <a:t>0.06%</a:t>
                       </a:r>
                       <a:endParaRPr lang="en-US" sz="500" dirty="0">
                         <a:latin typeface="Calibri" charset="0"/>
@@ -21649,7 +21649,7 @@
                           <a:ea typeface="Calibri" pitchFamily="34" charset="-122"/>
                           <a:cs typeface="Calibri" pitchFamily="34" charset="-120"/>
                         </a:rPr>
-                        <a:t>0.00%</a:t>
+                        <a:t>0.11%</a:t>
                       </a:r>
                       <a:endParaRPr lang="en-US" sz="500" dirty="0">
                         <a:latin typeface="Calibri" charset="0"/>
@@ -21714,7 +21714,7 @@
                           <a:ea typeface="Calibri" pitchFamily="34" charset="-122"/>
                           <a:cs typeface="Calibri" pitchFamily="34" charset="-120"/>
                         </a:rPr>
-                        <a:t>0.00%</a:t>
+                        <a:t>0.39%</a:t>
                       </a:r>
                       <a:endParaRPr lang="en-US" sz="500" dirty="0">
                         <a:latin typeface="Calibri" charset="0"/>
@@ -21779,7 +21779,7 @@
                           <a:ea typeface="Calibri" pitchFamily="34" charset="-122"/>
                           <a:cs typeface="Calibri" pitchFamily="34" charset="-120"/>
                         </a:rPr>
-                        <a:t>0.00%</a:t>
+                        <a:t>0.48%</a:t>
                       </a:r>
                       <a:endParaRPr lang="en-US" sz="500" dirty="0">
                         <a:latin typeface="Calibri" charset="0"/>
@@ -21844,7 +21844,7 @@
                           <a:ea typeface="Calibri" pitchFamily="34" charset="-122"/>
                           <a:cs typeface="Calibri" pitchFamily="34" charset="-120"/>
                         </a:rPr>
-                        <a:t>0.01%</a:t>
+                        <a:t>0.70%</a:t>
                       </a:r>
                       <a:endParaRPr lang="en-US" sz="500" dirty="0">
                         <a:latin typeface="Calibri" charset="0"/>
@@ -21909,7 +21909,7 @@
                           <a:ea typeface="Calibri" pitchFamily="34" charset="-122"/>
                           <a:cs typeface="Calibri" pitchFamily="34" charset="-120"/>
                         </a:rPr>
-                        <a:t>0.01%</a:t>
+                        <a:t>1.21%</a:t>
                       </a:r>
                       <a:endParaRPr lang="en-US" sz="500" dirty="0">
                         <a:latin typeface="Calibri" charset="0"/>
@@ -21974,7 +21974,7 @@
                           <a:ea typeface="Calibri" pitchFamily="34" charset="-122"/>
                           <a:cs typeface="Calibri" pitchFamily="34" charset="-120"/>
                         </a:rPr>
-                        <a:t>0.02%</a:t>
+                        <a:t>1.68%</a:t>
                       </a:r>
                       <a:endParaRPr lang="en-US" sz="500" dirty="0">
                         <a:latin typeface="Calibri" charset="0"/>
@@ -22039,7 +22039,7 @@
                           <a:ea typeface="Calibri" pitchFamily="34" charset="-122"/>
                           <a:cs typeface="Calibri" pitchFamily="34" charset="-120"/>
                         </a:rPr>
-                        <a:t>0.02%</a:t>
+                        <a:t>2.10%</a:t>
                       </a:r>
                       <a:endParaRPr lang="en-US" sz="500" dirty="0">
                         <a:latin typeface="Calibri" charset="0"/>
@@ -22104,7 +22104,7 @@
                           <a:ea typeface="Calibri" pitchFamily="34" charset="-122"/>
                           <a:cs typeface="Calibri" pitchFamily="34" charset="-120"/>
                         </a:rPr>
-                        <a:t>0.03%</a:t>
+                        <a:t>2.54%</a:t>
                       </a:r>
                       <a:endParaRPr lang="en-US" sz="500" dirty="0">
                         <a:latin typeface="Calibri" charset="0"/>
@@ -22234,7 +22234,7 @@
                           <a:ea typeface="Calibri" pitchFamily="34" charset="-122"/>
                           <a:cs typeface="Calibri" pitchFamily="34" charset="-120"/>
                         </a:rPr>
-                        <a:t>8.53%</a:t>
+                        <a:t>18.95%</a:t>
                       </a:r>
                       <a:endParaRPr lang="en-US" sz="500" dirty="0">
                         <a:latin typeface="Calibri" charset="0"/>
@@ -22420,7 +22420,7 @@
                           <a:ea typeface="Calibri" pitchFamily="34" charset="-122"/>
                           <a:cs typeface="Calibri" pitchFamily="34" charset="-120"/>
                         </a:rPr>
-                        <a:t>0.01%</a:t>
+                        <a:t>0.64%</a:t>
                       </a:r>
                       <a:endParaRPr lang="en-US" sz="500" dirty="0">
                         <a:latin typeface="Calibri" charset="0"/>
@@ -22485,7 +22485,7 @@
                           <a:ea typeface="Calibri" pitchFamily="34" charset="-122"/>
                           <a:cs typeface="Calibri" pitchFamily="34" charset="-120"/>
                         </a:rPr>
-                        <a:t>0.01%</a:t>
+                        <a:t>0.59%</a:t>
                       </a:r>
                       <a:endParaRPr lang="en-US" sz="500" dirty="0">
                         <a:latin typeface="Calibri" charset="0"/>
@@ -22550,7 +22550,7 @@
                           <a:ea typeface="Calibri" pitchFamily="34" charset="-122"/>
                           <a:cs typeface="Calibri" pitchFamily="34" charset="-120"/>
                         </a:rPr>
-                        <a:t>0.01%</a:t>
+                        <a:t>1.07%</a:t>
                       </a:r>
                       <a:endParaRPr lang="en-US" sz="500" dirty="0">
                         <a:latin typeface="Calibri" charset="0"/>
@@ -22615,7 +22615,7 @@
                           <a:ea typeface="Calibri" pitchFamily="34" charset="-122"/>
                           <a:cs typeface="Calibri" pitchFamily="34" charset="-120"/>
                         </a:rPr>
-                        <a:t>0.01%</a:t>
+                        <a:t>1.44%</a:t>
                       </a:r>
                       <a:endParaRPr lang="en-US" sz="500" dirty="0">
                         <a:latin typeface="Calibri" charset="0"/>
@@ -22680,7 +22680,7 @@
                           <a:ea typeface="Calibri" pitchFamily="34" charset="-122"/>
                           <a:cs typeface="Calibri" pitchFamily="34" charset="-120"/>
                         </a:rPr>
-                        <a:t>0.02%</a:t>
+                        <a:t>1.92%</a:t>
                       </a:r>
                       <a:endParaRPr lang="en-US" sz="500" dirty="0">
                         <a:latin typeface="Calibri" charset="0"/>
@@ -22745,7 +22745,7 @@
                           <a:ea typeface="Calibri" pitchFamily="34" charset="-122"/>
                           <a:cs typeface="Calibri" pitchFamily="34" charset="-120"/>
                         </a:rPr>
-                        <a:t>0.02%</a:t>
+                        <a:t>1.54%</a:t>
                       </a:r>
                       <a:endParaRPr lang="en-US" sz="500" dirty="0">
                         <a:latin typeface="Calibri" charset="0"/>
@@ -22810,7 +22810,7 @@
                           <a:ea typeface="Calibri" pitchFamily="34" charset="-122"/>
                           <a:cs typeface="Calibri" pitchFamily="34" charset="-120"/>
                         </a:rPr>
-                        <a:t>0.01%</a:t>
+                        <a:t>1.49%</a:t>
                       </a:r>
                       <a:endParaRPr lang="en-US" sz="500" dirty="0">
                         <a:latin typeface="Calibri" charset="0"/>
@@ -22875,7 +22875,7 @@
                           <a:ea typeface="Calibri" pitchFamily="34" charset="-122"/>
                           <a:cs typeface="Calibri" pitchFamily="34" charset="-120"/>
                         </a:rPr>
-                        <a:t>0.03%</a:t>
+                        <a:t>2.98%</a:t>
                       </a:r>
                       <a:endParaRPr lang="en-US" sz="500" dirty="0">
                         <a:latin typeface="Calibri" charset="0"/>
@@ -22940,7 +22940,7 @@
                           <a:ea typeface="Calibri" pitchFamily="34" charset="-122"/>
                           <a:cs typeface="Calibri" pitchFamily="34" charset="-120"/>
                         </a:rPr>
-                        <a:t>0.02%</a:t>
+                        <a:t>2.19%</a:t>
                       </a:r>
                       <a:endParaRPr lang="en-US" sz="500" dirty="0">
                         <a:latin typeface="Calibri" charset="0"/>
@@ -23005,7 +23005,7 @@
                           <a:ea typeface="Calibri" pitchFamily="34" charset="-122"/>
                           <a:cs typeface="Calibri" pitchFamily="34" charset="-120"/>
                         </a:rPr>
-                        <a:t>0.02%</a:t>
+                        <a:t>2.23%</a:t>
                       </a:r>
                       <a:endParaRPr lang="en-US" sz="500" dirty="0">
                         <a:latin typeface="Calibri" charset="0"/>
@@ -23070,7 +23070,7 @@
                           <a:ea typeface="Calibri" pitchFamily="34" charset="-122"/>
                           <a:cs typeface="Calibri" pitchFamily="34" charset="-120"/>
                         </a:rPr>
-                        <a:t>0.02%</a:t>
+                        <a:t>2.09%</a:t>
                       </a:r>
                       <a:endParaRPr lang="en-US" sz="500" dirty="0">
                         <a:latin typeface="Calibri" charset="0"/>
@@ -23135,7 +23135,7 @@
                           <a:ea typeface="Calibri" pitchFamily="34" charset="-122"/>
                           <a:cs typeface="Calibri" pitchFamily="34" charset="-120"/>
                         </a:rPr>
-                        <a:t>0.02%</a:t>
+                        <a:t>1.96%</a:t>
                       </a:r>
                       <a:endParaRPr lang="en-US" sz="500" dirty="0">
                         <a:latin typeface="Calibri" charset="0"/>
@@ -23200,7 +23200,7 @@
                           <a:ea typeface="Calibri" pitchFamily="34" charset="-122"/>
                           <a:cs typeface="Calibri" pitchFamily="34" charset="-120"/>
                         </a:rPr>
-                        <a:t>0.20%</a:t>
+                        <a:t>22.08%</a:t>
                       </a:r>
                       <a:endParaRPr lang="en-US" sz="500" dirty="0">
                         <a:latin typeface="Calibri" charset="0"/>
@@ -24428,7 +24428,7 @@
                           <a:ea typeface="Calibri" pitchFamily="34" charset="-122"/>
                           <a:cs typeface="Calibri" pitchFamily="34" charset="-120"/>
                         </a:rPr>
-                        <a:t>0.04%</a:t>
+                        <a:t>4.11%</a:t>
                       </a:r>
                       <a:endParaRPr lang="en-US" sz="500" dirty="0">
                         <a:latin typeface="Calibri" charset="0"/>
@@ -24493,7 +24493,7 @@
                           <a:ea typeface="Calibri" pitchFamily="34" charset="-122"/>
                           <a:cs typeface="Calibri" pitchFamily="34" charset="-120"/>
                         </a:rPr>
-                        <a:t>0.04%</a:t>
+                        <a:t>4.18%</a:t>
                       </a:r>
                       <a:endParaRPr lang="en-US" sz="500" dirty="0">
                         <a:latin typeface="Calibri" charset="0"/>
@@ -24558,7 +24558,7 @@
                           <a:ea typeface="Calibri" pitchFamily="34" charset="-122"/>
                           <a:cs typeface="Calibri" pitchFamily="34" charset="-120"/>
                         </a:rPr>
-                        <a:t>0.04%</a:t>
+                        <a:t>4.28%</a:t>
                       </a:r>
                       <a:endParaRPr lang="en-US" sz="500" dirty="0">
                         <a:latin typeface="Calibri" charset="0"/>
@@ -24623,7 +24623,7 @@
                           <a:ea typeface="Calibri" pitchFamily="34" charset="-122"/>
                           <a:cs typeface="Calibri" pitchFamily="34" charset="-120"/>
                         </a:rPr>
-                        <a:t>0.04%</a:t>
+                        <a:t>4.41%</a:t>
                       </a:r>
                       <a:endParaRPr lang="en-US" sz="500" dirty="0">
                         <a:latin typeface="Calibri" charset="0"/>
@@ -24688,7 +24688,7 @@
                           <a:ea typeface="Calibri" pitchFamily="34" charset="-122"/>
                           <a:cs typeface="Calibri" pitchFamily="34" charset="-120"/>
                         </a:rPr>
-                        <a:t>0.05%</a:t>
+                        <a:t>4.52%</a:t>
                       </a:r>
                       <a:endParaRPr lang="en-US" sz="500" dirty="0">
                         <a:latin typeface="Calibri" charset="0"/>
@@ -24753,7 +24753,7 @@
                           <a:ea typeface="Calibri" pitchFamily="34" charset="-122"/>
                           <a:cs typeface="Calibri" pitchFamily="34" charset="-120"/>
                         </a:rPr>
-                        <a:t>0.05%</a:t>
+                        <a:t>4.58%</a:t>
                       </a:r>
                       <a:endParaRPr lang="en-US" sz="500" dirty="0">
                         <a:latin typeface="Calibri" charset="0"/>
@@ -24818,7 +24818,7 @@
                           <a:ea typeface="Calibri" pitchFamily="34" charset="-122"/>
                           <a:cs typeface="Calibri" pitchFamily="34" charset="-120"/>
                         </a:rPr>
-                        <a:t>0.05%</a:t>
+                        <a:t>4.75%</a:t>
                       </a:r>
                       <a:endParaRPr lang="en-US" sz="500" dirty="0">
                         <a:latin typeface="Calibri" charset="0"/>
@@ -24883,7 +24883,7 @@
                           <a:ea typeface="Calibri" pitchFamily="34" charset="-122"/>
                           <a:cs typeface="Calibri" pitchFamily="34" charset="-120"/>
                         </a:rPr>
-                        <a:t>0.05%</a:t>
+                        <a:t>4.68%</a:t>
                       </a:r>
                       <a:endParaRPr lang="en-US" sz="500" dirty="0">
                         <a:latin typeface="Calibri" charset="0"/>
@@ -24948,7 +24948,7 @@
                           <a:ea typeface="Calibri" pitchFamily="34" charset="-122"/>
                           <a:cs typeface="Calibri" pitchFamily="34" charset="-120"/>
                         </a:rPr>
-                        <a:t>0.05%</a:t>
+                        <a:t>4.57%</a:t>
                       </a:r>
                       <a:endParaRPr lang="en-US" sz="500" dirty="0">
                         <a:latin typeface="Calibri" charset="0"/>
@@ -25013,7 +25013,7 @@
                           <a:ea typeface="Calibri" pitchFamily="34" charset="-122"/>
                           <a:cs typeface="Calibri" pitchFamily="34" charset="-120"/>
                         </a:rPr>
-                        <a:t>0.04%</a:t>
+                        <a:t>4.22%</a:t>
                       </a:r>
                       <a:endParaRPr lang="en-US" sz="500" dirty="0">
                         <a:latin typeface="Calibri" charset="0"/>
@@ -25143,7 +25143,7 @@
                           <a:ea typeface="Calibri" pitchFamily="34" charset="-122"/>
                           <a:cs typeface="Calibri" pitchFamily="34" charset="-120"/>
                         </a:rPr>
-                        <a:t>7.96%</a:t>
+                        <a:t>65.78%</a:t>
                       </a:r>
                       <a:endParaRPr lang="en-US" sz="500" dirty="0">
                         <a:latin typeface="Calibri" charset="0"/>
@@ -25329,7 +25329,7 @@
                           <a:ea typeface="Calibri" pitchFamily="34" charset="-122"/>
                           <a:cs typeface="Calibri" pitchFamily="34" charset="-120"/>
                         </a:rPr>
-                        <a:t>0.03%</a:t>
+                        <a:t>2.62%</a:t>
                       </a:r>
                       <a:endParaRPr lang="en-US" sz="500" dirty="0">
                         <a:latin typeface="Calibri" charset="0"/>
@@ -25394,7 +25394,7 @@
                           <a:ea typeface="Calibri" pitchFamily="34" charset="-122"/>
                           <a:cs typeface="Calibri" pitchFamily="34" charset="-120"/>
                         </a:rPr>
-                        <a:t>0.04%</a:t>
+                        <a:t>3.72%</a:t>
                       </a:r>
                       <a:endParaRPr lang="en-US" sz="500" dirty="0">
                         <a:latin typeface="Calibri" charset="0"/>
@@ -25459,7 +25459,7 @@
                           <a:ea typeface="Calibri" pitchFamily="34" charset="-122"/>
                           <a:cs typeface="Calibri" pitchFamily="34" charset="-120"/>
                         </a:rPr>
-                        <a:t>0.04%</a:t>
+                        <a:t>3.88%</a:t>
                       </a:r>
                       <a:endParaRPr lang="en-US" sz="500" dirty="0">
                         <a:latin typeface="Calibri" charset="0"/>
@@ -25524,7 +25524,7 @@
                           <a:ea typeface="Calibri" pitchFamily="34" charset="-122"/>
                           <a:cs typeface="Calibri" pitchFamily="34" charset="-120"/>
                         </a:rPr>
-                        <a:t>0.03%</a:t>
+                        <a:t>3.01%</a:t>
                       </a:r>
                       <a:endParaRPr lang="en-US" sz="500" dirty="0">
                         <a:latin typeface="Calibri" charset="0"/>
@@ -25589,7 +25589,7 @@
                           <a:ea typeface="Calibri" pitchFamily="34" charset="-122"/>
                           <a:cs typeface="Calibri" pitchFamily="34" charset="-120"/>
                         </a:rPr>
-                        <a:t>0.03%</a:t>
+                        <a:t>2.55%</a:t>
                       </a:r>
                       <a:endParaRPr lang="en-US" sz="500" dirty="0">
                         <a:latin typeface="Calibri" charset="0"/>
@@ -25654,7 +25654,7 @@
                           <a:ea typeface="Calibri" pitchFamily="34" charset="-122"/>
                           <a:cs typeface="Calibri" pitchFamily="34" charset="-120"/>
                         </a:rPr>
-                        <a:t>0.03%</a:t>
+                        <a:t>2.69%</a:t>
                       </a:r>
                       <a:endParaRPr lang="en-US" sz="500" dirty="0">
                         <a:latin typeface="Calibri" charset="0"/>
@@ -25719,7 +25719,7 @@
                           <a:ea typeface="Calibri" pitchFamily="34" charset="-122"/>
                           <a:cs typeface="Calibri" pitchFamily="34" charset="-120"/>
                         </a:rPr>
-                        <a:t>0.02%</a:t>
+                        <a:t>2.07%</a:t>
                       </a:r>
                       <a:endParaRPr lang="en-US" sz="500" dirty="0">
                         <a:latin typeface="Calibri" charset="0"/>
@@ -25784,7 +25784,7 @@
                           <a:ea typeface="Calibri" pitchFamily="34" charset="-122"/>
                           <a:cs typeface="Calibri" pitchFamily="34" charset="-120"/>
                         </a:rPr>
-                        <a:t>0.03%</a:t>
+                        <a:t>2.69%</a:t>
                       </a:r>
                       <a:endParaRPr lang="en-US" sz="500" dirty="0">
                         <a:latin typeface="Calibri" charset="0"/>
@@ -25849,7 +25849,7 @@
                           <a:ea typeface="Calibri" pitchFamily="34" charset="-122"/>
                           <a:cs typeface="Calibri" pitchFamily="34" charset="-120"/>
                         </a:rPr>
-                        <a:t>0.03%</a:t>
+                        <a:t>3.31%</a:t>
                       </a:r>
                       <a:endParaRPr lang="en-US" sz="500" dirty="0">
                         <a:latin typeface="Calibri" charset="0"/>
@@ -25914,7 +25914,7 @@
                           <a:ea typeface="Calibri" pitchFamily="34" charset="-122"/>
                           <a:cs typeface="Calibri" pitchFamily="34" charset="-120"/>
                         </a:rPr>
-                        <a:t>0.03%</a:t>
+                        <a:t>2.78%</a:t>
                       </a:r>
                       <a:endParaRPr lang="en-US" sz="500" dirty="0">
                         <a:latin typeface="Calibri" charset="0"/>
@@ -25979,7 +25979,7 @@
                           <a:ea typeface="Calibri" pitchFamily="34" charset="-122"/>
                           <a:cs typeface="Calibri" pitchFamily="34" charset="-120"/>
                         </a:rPr>
-                        <a:t>0.02%</a:t>
+                        <a:t>2.23%</a:t>
                       </a:r>
                       <a:endParaRPr lang="en-US" sz="500" dirty="0">
                         <a:latin typeface="Calibri" charset="0"/>
@@ -26044,7 +26044,7 @@
                           <a:ea typeface="Calibri" pitchFamily="34" charset="-122"/>
                           <a:cs typeface="Calibri" pitchFamily="34" charset="-120"/>
                         </a:rPr>
-                        <a:t>0.02%</a:t>
+                        <a:t>2.46%</a:t>
                       </a:r>
                       <a:endParaRPr lang="en-US" sz="500" dirty="0">
                         <a:latin typeface="Calibri" charset="0"/>
@@ -26109,7 +26109,7 @@
                           <a:ea typeface="Calibri" pitchFamily="34" charset="-122"/>
                           <a:cs typeface="Calibri" pitchFamily="34" charset="-120"/>
                         </a:rPr>
-                        <a:t>0.34%</a:t>
+                        <a:t>39.82%</a:t>
                       </a:r>
                       <a:endParaRPr lang="en-US" sz="500" dirty="0">
                         <a:latin typeface="Calibri" charset="0"/>
@@ -27337,7 +27337,7 @@
                           <a:ea typeface="Calibri" pitchFamily="34" charset="-122"/>
                           <a:cs typeface="Calibri" pitchFamily="34" charset="-120"/>
                         </a:rPr>
-                        <a:t>0.04%</a:t>
+                        <a:t>4.37%</a:t>
                       </a:r>
                       <a:endParaRPr lang="en-US" sz="500" dirty="0">
                         <a:latin typeface="Calibri" charset="0"/>
@@ -27402,7 +27402,7 @@
                           <a:ea typeface="Calibri" pitchFamily="34" charset="-122"/>
                           <a:cs typeface="Calibri" pitchFamily="34" charset="-120"/>
                         </a:rPr>
-                        <a:t>0.04%</a:t>
+                        <a:t>4.31%</a:t>
                       </a:r>
                       <a:endParaRPr lang="en-US" sz="500" dirty="0">
                         <a:latin typeface="Calibri" charset="0"/>
@@ -27467,7 +27467,7 @@
                           <a:ea typeface="Calibri" pitchFamily="34" charset="-122"/>
                           <a:cs typeface="Calibri" pitchFamily="34" charset="-120"/>
                         </a:rPr>
-                        <a:t>0.04%</a:t>
+                        <a:t>4.28%</a:t>
                       </a:r>
                       <a:endParaRPr lang="en-US" sz="500" dirty="0">
                         <a:latin typeface="Calibri" charset="0"/>
@@ -27532,7 +27532,7 @@
                           <a:ea typeface="Calibri" pitchFamily="34" charset="-122"/>
                           <a:cs typeface="Calibri" pitchFamily="34" charset="-120"/>
                         </a:rPr>
-                        <a:t>0.04%</a:t>
+                        <a:t>4.25%</a:t>
                       </a:r>
                       <a:endParaRPr lang="en-US" sz="500" dirty="0">
                         <a:latin typeface="Calibri" charset="0"/>
@@ -27597,7 +27597,7 @@
                           <a:ea typeface="Calibri" pitchFamily="34" charset="-122"/>
                           <a:cs typeface="Calibri" pitchFamily="34" charset="-120"/>
                         </a:rPr>
-                        <a:t>0.04%</a:t>
+                        <a:t>4.25%</a:t>
                       </a:r>
                       <a:endParaRPr lang="en-US" sz="500" dirty="0">
                         <a:latin typeface="Calibri" charset="0"/>
@@ -27662,7 +27662,7 @@
                           <a:ea typeface="Calibri" pitchFamily="34" charset="-122"/>
                           <a:cs typeface="Calibri" pitchFamily="34" charset="-120"/>
                         </a:rPr>
-                        <a:t>0.04%</a:t>
+                        <a:t>4.22%</a:t>
                       </a:r>
                       <a:endParaRPr lang="en-US" sz="500" dirty="0">
                         <a:latin typeface="Calibri" charset="0"/>
@@ -27727,7 +27727,7 @@
                           <a:ea typeface="Calibri" pitchFamily="34" charset="-122"/>
                           <a:cs typeface="Calibri" pitchFamily="34" charset="-120"/>
                         </a:rPr>
-                        <a:t>0.04%</a:t>
+                        <a:t>4.25%</a:t>
                       </a:r>
                       <a:endParaRPr lang="en-US" sz="500" dirty="0">
                         <a:latin typeface="Calibri" charset="0"/>
@@ -27792,7 +27792,7 @@
                           <a:ea typeface="Calibri" pitchFamily="34" charset="-122"/>
                           <a:cs typeface="Calibri" pitchFamily="34" charset="-120"/>
                         </a:rPr>
-                        <a:t>0.04%</a:t>
+                        <a:t>4.08%</a:t>
                       </a:r>
                       <a:endParaRPr lang="en-US" sz="500" dirty="0">
                         <a:latin typeface="Calibri" charset="0"/>
@@ -27857,7 +27857,7 @@
                           <a:ea typeface="Calibri" pitchFamily="34" charset="-122"/>
                           <a:cs typeface="Calibri" pitchFamily="34" charset="-120"/>
                         </a:rPr>
-                        <a:t>0.04%</a:t>
+                        <a:t>3.95%</a:t>
                       </a:r>
                       <a:endParaRPr lang="en-US" sz="500" dirty="0">
                         <a:latin typeface="Calibri" charset="0"/>
@@ -27922,7 +27922,7 @@
                           <a:ea typeface="Calibri" pitchFamily="34" charset="-122"/>
                           <a:cs typeface="Calibri" pitchFamily="34" charset="-120"/>
                         </a:rPr>
-                        <a:t>0.04%</a:t>
+                        <a:t>3.76%</a:t>
                       </a:r>
                       <a:endParaRPr lang="en-US" sz="500" dirty="0">
                         <a:latin typeface="Calibri" charset="0"/>
@@ -28052,7 +28052,7 @@
                           <a:ea typeface="Calibri" pitchFamily="34" charset="-122"/>
                           <a:cs typeface="Calibri" pitchFamily="34" charset="-120"/>
                         </a:rPr>
-                        <a:t>-2.58%</a:t>
+                        <a:t>46.00%</a:t>
                       </a:r>
                       <a:endParaRPr lang="en-US" sz="500" dirty="0">
                         <a:latin typeface="Calibri" charset="0"/>
@@ -28238,7 +28238,7 @@
                           <a:ea typeface="Calibri" pitchFamily="34" charset="-122"/>
                           <a:cs typeface="Calibri" pitchFamily="34" charset="-120"/>
                         </a:rPr>
-                        <a:t>0.02%</a:t>
+                        <a:t>2.05%</a:t>
                       </a:r>
                       <a:endParaRPr lang="en-US" sz="500" dirty="0">
                         <a:latin typeface="Calibri" charset="0"/>
@@ -28303,7 +28303,7 @@
                           <a:ea typeface="Calibri" pitchFamily="34" charset="-122"/>
                           <a:cs typeface="Calibri" pitchFamily="34" charset="-120"/>
                         </a:rPr>
-                        <a:t>0.02%</a:t>
+                        <a:t>1.86%</a:t>
                       </a:r>
                       <a:endParaRPr lang="en-US" sz="500" dirty="0">
                         <a:latin typeface="Calibri" charset="0"/>
@@ -28368,7 +28368,7 @@
                           <a:ea typeface="Calibri" pitchFamily="34" charset="-122"/>
                           <a:cs typeface="Calibri" pitchFamily="34" charset="-120"/>
                         </a:rPr>
-                        <a:t>0.02%</a:t>
+                        <a:t>2.37%</a:t>
                       </a:r>
                       <a:endParaRPr lang="en-US" sz="500" dirty="0">
                         <a:latin typeface="Calibri" charset="0"/>
@@ -28433,7 +28433,7 @@
                           <a:ea typeface="Calibri" pitchFamily="34" charset="-122"/>
                           <a:cs typeface="Calibri" pitchFamily="34" charset="-120"/>
                         </a:rPr>
-                        <a:t>0.02%</a:t>
+                        <a:t>2.10%</a:t>
                       </a:r>
                       <a:endParaRPr lang="en-US" sz="500" dirty="0">
                         <a:latin typeface="Calibri" charset="0"/>
@@ -28498,7 +28498,7 @@
                           <a:ea typeface="Calibri" pitchFamily="34" charset="-122"/>
                           <a:cs typeface="Calibri" pitchFamily="34" charset="-120"/>
                         </a:rPr>
-                        <a:t>0.02%</a:t>
+                        <a:t>1.63%</a:t>
                       </a:r>
                       <a:endParaRPr lang="en-US" sz="500" dirty="0">
                         <a:latin typeface="Calibri" charset="0"/>
@@ -28563,7 +28563,7 @@
                           <a:ea typeface="Calibri" pitchFamily="34" charset="-122"/>
                           <a:cs typeface="Calibri" pitchFamily="34" charset="-120"/>
                         </a:rPr>
-                        <a:t>0.01%</a:t>
+                        <a:t>0.84%</a:t>
                       </a:r>
                       <a:endParaRPr lang="en-US" sz="500" dirty="0">
                         <a:latin typeface="Calibri" charset="0"/>
@@ -28628,7 +28628,7 @@
                           <a:ea typeface="Calibri" pitchFamily="34" charset="-122"/>
                           <a:cs typeface="Calibri" pitchFamily="34" charset="-120"/>
                         </a:rPr>
-                        <a:t>0.01%</a:t>
+                        <a:t>0.51%</a:t>
                       </a:r>
                       <a:endParaRPr lang="en-US" sz="500" dirty="0">
                         <a:latin typeface="Calibri" charset="0"/>
@@ -28693,7 +28693,7 @@
                           <a:ea typeface="Calibri" pitchFamily="34" charset="-122"/>
                           <a:cs typeface="Calibri" pitchFamily="34" charset="-120"/>
                         </a:rPr>
-                        <a:t>0.01%</a:t>
+                        <a:t>0.81%</a:t>
                       </a:r>
                       <a:endParaRPr lang="en-US" sz="500" dirty="0">
                         <a:latin typeface="Calibri" charset="0"/>
@@ -28758,7 +28758,7 @@
                           <a:ea typeface="Calibri" pitchFamily="34" charset="-122"/>
                           <a:cs typeface="Calibri" pitchFamily="34" charset="-120"/>
                         </a:rPr>
-                        <a:t>0.03%</a:t>
+                        <a:t>3.35%</a:t>
                       </a:r>
                       <a:endParaRPr lang="en-US" sz="500" dirty="0">
                         <a:latin typeface="Calibri" charset="0"/>
@@ -28823,7 +28823,7 @@
                           <a:ea typeface="Calibri" pitchFamily="34" charset="-122"/>
                           <a:cs typeface="Calibri" pitchFamily="34" charset="-120"/>
                         </a:rPr>
-                        <a:t>0.00%</a:t>
+                        <a:t>0.40%</a:t>
                       </a:r>
                       <a:endParaRPr lang="en-US" sz="500" dirty="0">
                         <a:latin typeface="Calibri" charset="0"/>
@@ -28888,7 +28888,7 @@
                           <a:ea typeface="Calibri" pitchFamily="34" charset="-122"/>
                           <a:cs typeface="Calibri" pitchFamily="34" charset="-120"/>
                         </a:rPr>
-                        <a:t>0.02%</a:t>
+                        <a:t>1.98%</a:t>
                       </a:r>
                       <a:endParaRPr lang="en-US" sz="500" dirty="0">
                         <a:latin typeface="Calibri" charset="0"/>
@@ -28953,7 +28953,7 @@
                           <a:ea typeface="Calibri" pitchFamily="34" charset="-122"/>
                           <a:cs typeface="Calibri" pitchFamily="34" charset="-120"/>
                         </a:rPr>
-                        <a:t>0.04%</a:t>
+                        <a:t>3.73%</a:t>
                       </a:r>
                       <a:endParaRPr lang="en-US" sz="500" dirty="0">
                         <a:latin typeface="Calibri" charset="0"/>
@@ -29018,7 +29018,7 @@
                           <a:ea typeface="Calibri" pitchFamily="34" charset="-122"/>
                           <a:cs typeface="Calibri" pitchFamily="34" charset="-120"/>
                         </a:rPr>
-                        <a:t>0.22%</a:t>
+                        <a:t>23.84%</a:t>
                       </a:r>
                       <a:endParaRPr lang="en-US" sz="500" dirty="0">
                         <a:latin typeface="Calibri" charset="0"/>
@@ -31147,7 +31147,7 @@
                           <a:ea typeface="Calibri" pitchFamily="34" charset="-122"/>
                           <a:cs typeface="Calibri" pitchFamily="34" charset="-120"/>
                         </a:rPr>
-                        <a:t>0.03%</a:t>
+                        <a:t>2.81%</a:t>
                       </a:r>
                       <a:endParaRPr lang="en-US" sz="500" dirty="0">
                         <a:latin typeface="Calibri" charset="0"/>
@@ -31806,7 +31806,7 @@
                           <a:ea typeface="Calibri" pitchFamily="34" charset="-122"/>
                           <a:cs typeface="Calibri" pitchFamily="34" charset="-120"/>
                         </a:rPr>
-                        <a:t>0.03%</a:t>
+                        <a:t>2.81%</a:t>
                       </a:r>
                       <a:endParaRPr lang="en-US" sz="500" dirty="0">
                         <a:latin typeface="Calibri" charset="0"/>

--- a/folletos/2026-04/pptx/FIP_VANTRUST_LIQUIDEZ_TEMPORAL.pptx
+++ b/folletos/2026-04/pptx/FIP_VANTRUST_LIQUIDEZ_TEMPORAL.pptx
@@ -2987,7 +2987,7 @@
                 <a:ea typeface="Calibri" pitchFamily="34" charset="-122"/>
                 <a:cs typeface="Calibri" pitchFamily="34" charset="-120"/>
               </a:rPr>
-              <a:t>prueba CLP</a:t>
+              <a:t>prueba 13 CLP</a:t>
             </a:r>
             <a:endParaRPr lang="en-US" sz="800" dirty="0"/>
           </a:p>

--- a/folletos/2026-04/pptx/FIP_VANTRUST_LIQUIDEZ_TEMPORAL.pptx
+++ b/folletos/2026-04/pptx/FIP_VANTRUST_LIQUIDEZ_TEMPORAL.pptx
@@ -4625,7 +4625,7 @@
                 <a:ea typeface="Calibri" pitchFamily="34" charset="-122"/>
                 <a:cs typeface="Calibri" pitchFamily="34" charset="-120"/>
               </a:rPr>
-              <a:t>prueba CLP</a:t>
+              <a:t>prueba 13 CLP</a:t>
             </a:r>
             <a:endParaRPr lang="en-US" sz="800" dirty="0"/>
           </a:p>

--- a/folletos/2026-04/pptx/FIP_VANTRUST_LIQUIDEZ_TEMPORAL.pptx
+++ b/folletos/2026-04/pptx/FIP_VANTRUST_LIQUIDEZ_TEMPORAL.pptx
@@ -189,9 +189,9 @@
           </c:marker>
           <c:cat>
             <c:multiLvlStrRef>
-              <c:f>Sheet1!$A$2:$A$95</c:f>
+              <c:f>Sheet1!$A$2:$A$96</c:f>
               <c:multiLvlStrCache>
-                <c:ptCount val="94"/>
+                <c:ptCount val="95"/>
                 <c:lvl>
                   <c:pt idx="0">
                     <c:v>Apr 2017</c:v>
@@ -474,6 +474,9 @@
                   </c:pt>
                   <c:pt idx="93">
                     <c:v>Jan 2025</c:v>
+                  </c:pt>
+                  <c:pt idx="94">
+                    <c:v>Apr 2026</c:v>
                   </c:pt>
                 </c:lvl>
               </c:multiLvlStrCache>
@@ -481,10 +484,10 @@
           </c:cat>
           <c:val>
             <c:numRef>
-              <c:f>Sheet1!$B$2:$B$95</c:f>
+              <c:f>Sheet1!$B$2:$B$96</c:f>
               <c:numCache>
                 <c:formatCode>General</c:formatCode>
-                <c:ptCount val="94"/>
+                <c:ptCount val="95"/>
                 <c:pt idx="0">
                   <c:v>100</c:v>
                 </c:pt>
@@ -766,6 +769,9 @@
                 </c:pt>
                 <c:pt idx="93">
                   <c:v>141.51</c:v>
+                </c:pt>
+                <c:pt idx="94">
+                  <c:v>111.64</c:v>
                 </c:pt>
               </c:numCache>
             </c:numRef>
@@ -781,7 +787,7 @@
               <c:strCache>
                 <c:ptCount val="1"/>
                 <c:pt idx="0">
-                  <c:v>USD Money Market</c:v>
+                  <c:v>FIP LIQUIDEZ TEMPORAL</c:v>
                 </c:pt>
               </c:strCache>
             </c:strRef>
@@ -843,9 +849,9 @@
           </c:marker>
           <c:cat>
             <c:multiLvlStrRef>
-              <c:f>Sheet1!$A$2:$A$95</c:f>
+              <c:f>Sheet1!$A$2:$A$96</c:f>
               <c:multiLvlStrCache>
-                <c:ptCount val="94"/>
+                <c:ptCount val="95"/>
                 <c:lvl>
                   <c:pt idx="0">
                     <c:v>Apr 2017</c:v>
@@ -1128,6 +1134,9 @@
                   </c:pt>
                   <c:pt idx="93">
                     <c:v>Jan 2025</c:v>
+                  </c:pt>
+                  <c:pt idx="94">
+                    <c:v>Apr 2026</c:v>
                   </c:pt>
                 </c:lvl>
               </c:multiLvlStrCache>
@@ -1135,10 +1144,10 @@
           </c:cat>
           <c:val>
             <c:numRef>
-              <c:f>Sheet1!$C$2:$C$95</c:f>
+              <c:f>Sheet1!$C$2:$C$96</c:f>
               <c:numCache>
                 <c:formatCode>General</c:formatCode>
-                <c:ptCount val="94"/>
+                <c:ptCount val="95"/>
                 <c:pt idx="0">
                   <c:v>100</c:v>
                 </c:pt>
@@ -1420,6 +1429,9 @@
                 </c:pt>
                 <c:pt idx="93">
                   <c:v>115.82</c:v>
+                </c:pt>
+                <c:pt idx="94">
+                  <c:v/>
                 </c:pt>
               </c:numCache>
             </c:numRef>
@@ -1497,9 +1509,9 @@
           </c:marker>
           <c:cat>
             <c:multiLvlStrRef>
-              <c:f>Sheet1!$A$2:$A$95</c:f>
+              <c:f>Sheet1!$A$2:$A$96</c:f>
               <c:multiLvlStrCache>
-                <c:ptCount val="94"/>
+                <c:ptCount val="95"/>
                 <c:lvl>
                   <c:pt idx="0">
                     <c:v>Apr 2017</c:v>
@@ -1782,6 +1794,9 @@
                   </c:pt>
                   <c:pt idx="93">
                     <c:v>Jan 2025</c:v>
+                  </c:pt>
+                  <c:pt idx="94">
+                    <c:v>Apr 2026</c:v>
                   </c:pt>
                 </c:lvl>
               </c:multiLvlStrCache>
@@ -1789,10 +1804,10 @@
           </c:cat>
           <c:val>
             <c:numRef>
-              <c:f>Sheet1!$D$2:$D$95</c:f>
+              <c:f>Sheet1!$D$2:$D$96</c:f>
               <c:numCache>
                 <c:formatCode>General</c:formatCode>
-                <c:ptCount val="94"/>
+                <c:ptCount val="95"/>
                 <c:pt idx="0">
                   <c:v>100</c:v>
                 </c:pt>
@@ -2074,6 +2089,9 @@
                 </c:pt>
                 <c:pt idx="93">
                   <c:v>115.51</c:v>
+                </c:pt>
+                <c:pt idx="94">
+                  <c:v/>
                 </c:pt>
               </c:numCache>
             </c:numRef>
@@ -4625,7 +4643,7 @@
                 <a:ea typeface="Calibri" pitchFamily="34" charset="-122"/>
                 <a:cs typeface="Calibri" pitchFamily="34" charset="-120"/>
               </a:rPr>
-              <a:t>prueba 13 CLP</a:t>
+              <a:t>prueba CLP</a:t>
             </a:r>
             <a:endParaRPr lang="en-US" sz="800" dirty="0"/>
           </a:p>
@@ -5206,417 +5224,7 @@
                           <a:ea typeface="Calibri" pitchFamily="34" charset="-122"/>
                           <a:cs typeface="Calibri" pitchFamily="34" charset="-120"/>
                         </a:rPr>
-                        <a:t>ICP (Benchmark)</a:t>
-                      </a:r>
-                      <a:endParaRPr lang="en-US" sz="750" dirty="0">
-                        <a:latin typeface="Calibri" charset="0"/>
-                        <a:ea typeface="Calibri" charset="0"/>
-                        <a:cs typeface="Calibri" charset="0"/>
-                      </a:endParaRPr>
-                    </a:p>
-                  </a:txBody>
-                  <a:tcPr marL="91440" marR="91440" marT="45720" marB="45720">
-                    <a:lnL w="3810" cap="flat" cmpd="sng" algn="ctr">
-                      <a:solidFill>
-                        <a:srgbClr val="DDDDDD"/>
-                      </a:solidFill>
-                      <a:prstDash val="solid"/>
-                      <a:round/>
-                      <a:headEnd type="none" w="med" len="med"/>
-                      <a:tailEnd type="none" w="med" len="med"/>
-                    </a:lnL>
-                    <a:lnR w="3810" cap="flat" cmpd="sng" algn="ctr">
-                      <a:solidFill>
-                        <a:srgbClr val="DDDDDD"/>
-                      </a:solidFill>
-                      <a:prstDash val="solid"/>
-                      <a:round/>
-                      <a:headEnd type="none" w="med" len="med"/>
-                      <a:tailEnd type="none" w="med" len="med"/>
-                    </a:lnR>
-                    <a:lnT w="3810" cap="flat" cmpd="sng" algn="ctr">
-                      <a:solidFill>
-                        <a:srgbClr val="DDDDDD"/>
-                      </a:solidFill>
-                      <a:prstDash val="solid"/>
-                      <a:round/>
-                      <a:headEnd type="none" w="med" len="med"/>
-                      <a:tailEnd type="none" w="med" len="med"/>
-                    </a:lnT>
-                    <a:lnB w="3810" cap="flat" cmpd="sng" algn="ctr">
-                      <a:solidFill>
-                        <a:srgbClr val="DDDDDD"/>
-                      </a:solidFill>
-                      <a:prstDash val="solid"/>
-                      <a:round/>
-                      <a:headEnd type="none" w="med" len="med"/>
-                      <a:tailEnd type="none" w="med" len="med"/>
-                    </a:lnB>
-                    <a:solidFill>
-                      <a:srgbClr val="F9F9F9"/>
-                    </a:solidFill>
-                  </a:tcPr>
-                </a:tc>
-                <a:tc>
-                  <a:txBody>
-                    <a:bodyPr/>
-                    <a:lstStyle/>
-                    <a:p>
-                      <a:pPr algn="ctr" indent="0" marL="0">
-                        <a:buNone/>
-                      </a:pPr>
-                      <a:r>
-                        <a:rPr lang="en-US" sz="750" dirty="0">
-                          <a:solidFill>
-                            <a:srgbClr val="333333"/>
-                          </a:solidFill>
-                          <a:latin typeface="Calibri" pitchFamily="34" charset="0"/>
-                          <a:ea typeface="Calibri" pitchFamily="34" charset="-122"/>
-                          <a:cs typeface="Calibri" pitchFamily="34" charset="-120"/>
-                        </a:rPr>
-                        <a:t>0.37%</a:t>
-                      </a:r>
-                      <a:endParaRPr lang="en-US" sz="750" dirty="0">
-                        <a:latin typeface="Calibri" charset="0"/>
-                        <a:ea typeface="Calibri" charset="0"/>
-                        <a:cs typeface="Calibri" charset="0"/>
-                      </a:endParaRPr>
-                    </a:p>
-                  </a:txBody>
-                  <a:tcPr marL="91440" marR="91440" marT="45720" marB="45720">
-                    <a:lnL w="3810" cap="flat" cmpd="sng" algn="ctr">
-                      <a:solidFill>
-                        <a:srgbClr val="DDDDDD"/>
-                      </a:solidFill>
-                      <a:prstDash val="solid"/>
-                      <a:round/>
-                      <a:headEnd type="none" w="med" len="med"/>
-                      <a:tailEnd type="none" w="med" len="med"/>
-                    </a:lnL>
-                    <a:lnR w="3810" cap="flat" cmpd="sng" algn="ctr">
-                      <a:solidFill>
-                        <a:srgbClr val="DDDDDD"/>
-                      </a:solidFill>
-                      <a:prstDash val="solid"/>
-                      <a:round/>
-                      <a:headEnd type="none" w="med" len="med"/>
-                      <a:tailEnd type="none" w="med" len="med"/>
-                    </a:lnR>
-                    <a:lnT w="3810" cap="flat" cmpd="sng" algn="ctr">
-                      <a:solidFill>
-                        <a:srgbClr val="DDDDDD"/>
-                      </a:solidFill>
-                      <a:prstDash val="solid"/>
-                      <a:round/>
-                      <a:headEnd type="none" w="med" len="med"/>
-                      <a:tailEnd type="none" w="med" len="med"/>
-                    </a:lnT>
-                    <a:lnB w="3810" cap="flat" cmpd="sng" algn="ctr">
-                      <a:solidFill>
-                        <a:srgbClr val="DDDDDD"/>
-                      </a:solidFill>
-                      <a:prstDash val="solid"/>
-                      <a:round/>
-                      <a:headEnd type="none" w="med" len="med"/>
-                      <a:tailEnd type="none" w="med" len="med"/>
-                    </a:lnB>
-                    <a:solidFill>
-                      <a:srgbClr val="F9F9F9"/>
-                    </a:solidFill>
-                  </a:tcPr>
-                </a:tc>
-                <a:tc>
-                  <a:txBody>
-                    <a:bodyPr/>
-                    <a:lstStyle/>
-                    <a:p>
-                      <a:pPr algn="ctr" indent="0" marL="0">
-                        <a:buNone/>
-                      </a:pPr>
-                      <a:r>
-                        <a:rPr lang="en-US" sz="750" dirty="0">
-                          <a:solidFill>
-                            <a:srgbClr val="333333"/>
-                          </a:solidFill>
-                          <a:latin typeface="Calibri" pitchFamily="34" charset="0"/>
-                          <a:ea typeface="Calibri" pitchFamily="34" charset="-122"/>
-                          <a:cs typeface="Calibri" pitchFamily="34" charset="-120"/>
-                        </a:rPr>
-                        <a:t>1.13%</a:t>
-                      </a:r>
-                      <a:endParaRPr lang="en-US" sz="750" dirty="0">
-                        <a:latin typeface="Calibri" charset="0"/>
-                        <a:ea typeface="Calibri" charset="0"/>
-                        <a:cs typeface="Calibri" charset="0"/>
-                      </a:endParaRPr>
-                    </a:p>
-                  </a:txBody>
-                  <a:tcPr marL="91440" marR="91440" marT="45720" marB="45720">
-                    <a:lnL w="3810" cap="flat" cmpd="sng" algn="ctr">
-                      <a:solidFill>
-                        <a:srgbClr val="DDDDDD"/>
-                      </a:solidFill>
-                      <a:prstDash val="solid"/>
-                      <a:round/>
-                      <a:headEnd type="none" w="med" len="med"/>
-                      <a:tailEnd type="none" w="med" len="med"/>
-                    </a:lnL>
-                    <a:lnR w="3810" cap="flat" cmpd="sng" algn="ctr">
-                      <a:solidFill>
-                        <a:srgbClr val="DDDDDD"/>
-                      </a:solidFill>
-                      <a:prstDash val="solid"/>
-                      <a:round/>
-                      <a:headEnd type="none" w="med" len="med"/>
-                      <a:tailEnd type="none" w="med" len="med"/>
-                    </a:lnR>
-                    <a:lnT w="3810" cap="flat" cmpd="sng" algn="ctr">
-                      <a:solidFill>
-                        <a:srgbClr val="DDDDDD"/>
-                      </a:solidFill>
-                      <a:prstDash val="solid"/>
-                      <a:round/>
-                      <a:headEnd type="none" w="med" len="med"/>
-                      <a:tailEnd type="none" w="med" len="med"/>
-                    </a:lnT>
-                    <a:lnB w="3810" cap="flat" cmpd="sng" algn="ctr">
-                      <a:solidFill>
-                        <a:srgbClr val="DDDDDD"/>
-                      </a:solidFill>
-                      <a:prstDash val="solid"/>
-                      <a:round/>
-                      <a:headEnd type="none" w="med" len="med"/>
-                      <a:tailEnd type="none" w="med" len="med"/>
-                    </a:lnB>
-                    <a:solidFill>
-                      <a:srgbClr val="F9F9F9"/>
-                    </a:solidFill>
-                  </a:tcPr>
-                </a:tc>
-                <a:tc>
-                  <a:txBody>
-                    <a:bodyPr/>
-                    <a:lstStyle/>
-                    <a:p>
-                      <a:pPr algn="ctr" indent="0" marL="0">
-                        <a:buNone/>
-                      </a:pPr>
-                      <a:r>
-                        <a:rPr lang="en-US" sz="750" dirty="0">
-                          <a:solidFill>
-                            <a:srgbClr val="333333"/>
-                          </a:solidFill>
-                          <a:latin typeface="Calibri" pitchFamily="34" charset="0"/>
-                          <a:ea typeface="Calibri" pitchFamily="34" charset="-122"/>
-                          <a:cs typeface="Calibri" pitchFamily="34" charset="-120"/>
-                        </a:rPr>
-                        <a:t>2.28%</a:t>
-                      </a:r>
-                      <a:endParaRPr lang="en-US" sz="750" dirty="0">
-                        <a:latin typeface="Calibri" charset="0"/>
-                        <a:ea typeface="Calibri" charset="0"/>
-                        <a:cs typeface="Calibri" charset="0"/>
-                      </a:endParaRPr>
-                    </a:p>
-                  </a:txBody>
-                  <a:tcPr marL="91440" marR="91440" marT="45720" marB="45720">
-                    <a:lnL w="3810" cap="flat" cmpd="sng" algn="ctr">
-                      <a:solidFill>
-                        <a:srgbClr val="DDDDDD"/>
-                      </a:solidFill>
-                      <a:prstDash val="solid"/>
-                      <a:round/>
-                      <a:headEnd type="none" w="med" len="med"/>
-                      <a:tailEnd type="none" w="med" len="med"/>
-                    </a:lnL>
-                    <a:lnR w="3810" cap="flat" cmpd="sng" algn="ctr">
-                      <a:solidFill>
-                        <a:srgbClr val="DDDDDD"/>
-                      </a:solidFill>
-                      <a:prstDash val="solid"/>
-                      <a:round/>
-                      <a:headEnd type="none" w="med" len="med"/>
-                      <a:tailEnd type="none" w="med" len="med"/>
-                    </a:lnR>
-                    <a:lnT w="3810" cap="flat" cmpd="sng" algn="ctr">
-                      <a:solidFill>
-                        <a:srgbClr val="DDDDDD"/>
-                      </a:solidFill>
-                      <a:prstDash val="solid"/>
-                      <a:round/>
-                      <a:headEnd type="none" w="med" len="med"/>
-                      <a:tailEnd type="none" w="med" len="med"/>
-                    </a:lnT>
-                    <a:lnB w="3810" cap="flat" cmpd="sng" algn="ctr">
-                      <a:solidFill>
-                        <a:srgbClr val="DDDDDD"/>
-                      </a:solidFill>
-                      <a:prstDash val="solid"/>
-                      <a:round/>
-                      <a:headEnd type="none" w="med" len="med"/>
-                      <a:tailEnd type="none" w="med" len="med"/>
-                    </a:lnB>
-                    <a:solidFill>
-                      <a:srgbClr val="F9F9F9"/>
-                    </a:solidFill>
-                  </a:tcPr>
-                </a:tc>
-                <a:tc>
-                  <a:txBody>
-                    <a:bodyPr/>
-                    <a:lstStyle/>
-                    <a:p>
-                      <a:pPr algn="ctr" indent="0" marL="0">
-                        <a:buNone/>
-                      </a:pPr>
-                      <a:r>
-                        <a:rPr lang="en-US" sz="750" dirty="0">
-                          <a:solidFill>
-                            <a:srgbClr val="333333"/>
-                          </a:solidFill>
-                          <a:latin typeface="Calibri" pitchFamily="34" charset="0"/>
-                          <a:ea typeface="Calibri" pitchFamily="34" charset="-122"/>
-                          <a:cs typeface="Calibri" pitchFamily="34" charset="-120"/>
-                        </a:rPr>
-                        <a:t>4.78%</a:t>
-                      </a:r>
-                      <a:endParaRPr lang="en-US" sz="750" dirty="0">
-                        <a:latin typeface="Calibri" charset="0"/>
-                        <a:ea typeface="Calibri" charset="0"/>
-                        <a:cs typeface="Calibri" charset="0"/>
-                      </a:endParaRPr>
-                    </a:p>
-                  </a:txBody>
-                  <a:tcPr marL="91440" marR="91440" marT="45720" marB="45720">
-                    <a:lnL w="3810" cap="flat" cmpd="sng" algn="ctr">
-                      <a:solidFill>
-                        <a:srgbClr val="DDDDDD"/>
-                      </a:solidFill>
-                      <a:prstDash val="solid"/>
-                      <a:round/>
-                      <a:headEnd type="none" w="med" len="med"/>
-                      <a:tailEnd type="none" w="med" len="med"/>
-                    </a:lnL>
-                    <a:lnR w="3810" cap="flat" cmpd="sng" algn="ctr">
-                      <a:solidFill>
-                        <a:srgbClr val="DDDDDD"/>
-                      </a:solidFill>
-                      <a:prstDash val="solid"/>
-                      <a:round/>
-                      <a:headEnd type="none" w="med" len="med"/>
-                      <a:tailEnd type="none" w="med" len="med"/>
-                    </a:lnR>
-                    <a:lnT w="3810" cap="flat" cmpd="sng" algn="ctr">
-                      <a:solidFill>
-                        <a:srgbClr val="DDDDDD"/>
-                      </a:solidFill>
-                      <a:prstDash val="solid"/>
-                      <a:round/>
-                      <a:headEnd type="none" w="med" len="med"/>
-                      <a:tailEnd type="none" w="med" len="med"/>
-                    </a:lnT>
-                    <a:lnB w="3810" cap="flat" cmpd="sng" algn="ctr">
-                      <a:solidFill>
-                        <a:srgbClr val="DDDDDD"/>
-                      </a:solidFill>
-                      <a:prstDash val="solid"/>
-                      <a:round/>
-                      <a:headEnd type="none" w="med" len="med"/>
-                      <a:tailEnd type="none" w="med" len="med"/>
-                    </a:lnB>
-                    <a:solidFill>
-                      <a:srgbClr val="F9F9F9"/>
-                    </a:solidFill>
-                  </a:tcPr>
-                </a:tc>
-                <a:tc>
-                  <a:txBody>
-                    <a:bodyPr/>
-                    <a:lstStyle/>
-                    <a:p>
-                      <a:pPr algn="ctr" indent="0" marL="0">
-                        <a:buNone/>
-                      </a:pPr>
-                      <a:r>
-                        <a:rPr lang="en-US" sz="750" dirty="0">
-                          <a:solidFill>
-                            <a:srgbClr val="333333"/>
-                          </a:solidFill>
-                          <a:latin typeface="Calibri" pitchFamily="34" charset="0"/>
-                          <a:ea typeface="Calibri" pitchFamily="34" charset="-122"/>
-                          <a:cs typeface="Calibri" pitchFamily="34" charset="-120"/>
-                        </a:rPr>
-                        <a:t>3.62%</a:t>
-                      </a:r>
-                      <a:endParaRPr lang="en-US" sz="750" dirty="0">
-                        <a:latin typeface="Calibri" charset="0"/>
-                        <a:ea typeface="Calibri" charset="0"/>
-                        <a:cs typeface="Calibri" charset="0"/>
-                      </a:endParaRPr>
-                    </a:p>
-                  </a:txBody>
-                  <a:tcPr marL="91440" marR="91440" marT="45720" marB="45720">
-                    <a:lnL w="3810" cap="flat" cmpd="sng" algn="ctr">
-                      <a:solidFill>
-                        <a:srgbClr val="DDDDDD"/>
-                      </a:solidFill>
-                      <a:prstDash val="solid"/>
-                      <a:round/>
-                      <a:headEnd type="none" w="med" len="med"/>
-                      <a:tailEnd type="none" w="med" len="med"/>
-                    </a:lnL>
-                    <a:lnR w="3810" cap="flat" cmpd="sng" algn="ctr">
-                      <a:solidFill>
-                        <a:srgbClr val="DDDDDD"/>
-                      </a:solidFill>
-                      <a:prstDash val="solid"/>
-                      <a:round/>
-                      <a:headEnd type="none" w="med" len="med"/>
-                      <a:tailEnd type="none" w="med" len="med"/>
-                    </a:lnR>
-                    <a:lnT w="3810" cap="flat" cmpd="sng" algn="ctr">
-                      <a:solidFill>
-                        <a:srgbClr val="DDDDDD"/>
-                      </a:solidFill>
-                      <a:prstDash val="solid"/>
-                      <a:round/>
-                      <a:headEnd type="none" w="med" len="med"/>
-                      <a:tailEnd type="none" w="med" len="med"/>
-                    </a:lnT>
-                    <a:lnB w="3810" cap="flat" cmpd="sng" algn="ctr">
-                      <a:solidFill>
-                        <a:srgbClr val="DDDDDD"/>
-                      </a:solidFill>
-                      <a:prstDash val="solid"/>
-                      <a:round/>
-                      <a:headEnd type="none" w="med" len="med"/>
-                      <a:tailEnd type="none" w="med" len="med"/>
-                    </a:lnB>
-                    <a:solidFill>
-                      <a:srgbClr val="F9F9F9"/>
-                    </a:solidFill>
-                  </a:tcPr>
-                </a:tc>
-              </a:tr>
-              <a:tr h="182880">
-                <a:tc>
-                  <a:txBody>
-                    <a:bodyPr/>
-                    <a:lstStyle/>
-                    <a:p>
-                      <a:pPr algn="l" indent="0" marL="0">
-                        <a:buNone/>
-                      </a:pPr>
-                      <a:r>
-                        <a:rPr lang="en-US" sz="750" b="1" dirty="0">
-                          <a:solidFill>
-                            <a:srgbClr val="000000"/>
-                          </a:solidFill>
-                          <a:latin typeface="Calibri" pitchFamily="34" charset="0"/>
-                          <a:ea typeface="Calibri" pitchFamily="34" charset="-122"/>
-                          <a:cs typeface="Calibri" pitchFamily="34" charset="-120"/>
-                        </a:rPr>
-                        <a:t>Competencia</a:t>
+                        <a:t>—</a:t>
                       </a:r>
                       <a:endParaRPr lang="en-US" sz="750" dirty="0">
                         <a:latin typeface="Calibri" charset="0"/>
@@ -5684,7 +5292,7 @@
                           <a:ea typeface="Calibri" pitchFamily="34" charset="-122"/>
                           <a:cs typeface="Calibri" pitchFamily="34" charset="-120"/>
                         </a:rPr>
-                        <a:t>0.26%</a:t>
+                        <a:t>—</a:t>
                       </a:r>
                       <a:endParaRPr lang="en-US" sz="750" dirty="0">
                         <a:latin typeface="Calibri" charset="0"/>
@@ -5752,7 +5360,7 @@
                           <a:ea typeface="Calibri" pitchFamily="34" charset="-122"/>
                           <a:cs typeface="Calibri" pitchFamily="34" charset="-120"/>
                         </a:rPr>
-                        <a:t>0.77%</a:t>
+                        <a:t>—</a:t>
                       </a:r>
                       <a:endParaRPr lang="en-US" sz="750" dirty="0">
                         <a:latin typeface="Calibri" charset="0"/>
@@ -5820,7 +5428,7 @@
                           <a:ea typeface="Calibri" pitchFamily="34" charset="-122"/>
                           <a:cs typeface="Calibri" pitchFamily="34" charset="-120"/>
                         </a:rPr>
-                        <a:t>1.62%</a:t>
+                        <a:t>—</a:t>
                       </a:r>
                       <a:endParaRPr lang="en-US" sz="750" dirty="0">
                         <a:latin typeface="Calibri" charset="0"/>
@@ -5888,7 +5496,7 @@
                           <a:ea typeface="Calibri" pitchFamily="34" charset="-122"/>
                           <a:cs typeface="Calibri" pitchFamily="34" charset="-120"/>
                         </a:rPr>
-                        <a:t>3.43%</a:t>
+                        <a:t>—</a:t>
                       </a:r>
                       <a:endParaRPr lang="en-US" sz="750" dirty="0">
                         <a:latin typeface="Calibri" charset="0"/>
@@ -5956,7 +5564,7 @@
                           <a:ea typeface="Calibri" pitchFamily="34" charset="-122"/>
                           <a:cs typeface="Calibri" pitchFamily="34" charset="-120"/>
                         </a:rPr>
-                        <a:t>2.32%</a:t>
+                        <a:t>—</a:t>
                       </a:r>
                       <a:endParaRPr lang="en-US" sz="750" dirty="0">
                         <a:latin typeface="Calibri" charset="0"/>
@@ -6026,7 +5634,7 @@
                           <a:ea typeface="Calibri" pitchFamily="34" charset="-122"/>
                           <a:cs typeface="Calibri" pitchFamily="34" charset="-120"/>
                         </a:rPr>
-                        <a:t>USD Money Market</a:t>
+                        <a:t>—</a:t>
                       </a:r>
                       <a:endParaRPr lang="en-US" sz="750" dirty="0">
                         <a:latin typeface="Calibri" charset="0"/>
@@ -6073,7 +5681,7 @@
                       <a:tailEnd type="none" w="med" len="med"/>
                     </a:lnB>
                     <a:solidFill>
-                      <a:srgbClr val="F9F9F9"/>
+                      <a:srgbClr val="FFFFFF"/>
                     </a:solidFill>
                   </a:tcPr>
                 </a:tc>
@@ -6094,7 +5702,7 @@
                           <a:ea typeface="Calibri" pitchFamily="34" charset="-122"/>
                           <a:cs typeface="Calibri" pitchFamily="34" charset="-120"/>
                         </a:rPr>
-                        <a:t>0.09%</a:t>
+                        <a:t>—</a:t>
                       </a:r>
                       <a:endParaRPr lang="en-US" sz="750" dirty="0">
                         <a:latin typeface="Calibri" charset="0"/>
@@ -6141,7 +5749,7 @@
                       <a:tailEnd type="none" w="med" len="med"/>
                     </a:lnB>
                     <a:solidFill>
-                      <a:srgbClr val="F9F9F9"/>
+                      <a:srgbClr val="FFFFFF"/>
                     </a:solidFill>
                   </a:tcPr>
                 </a:tc>
@@ -6162,7 +5770,7 @@
                           <a:ea typeface="Calibri" pitchFamily="34" charset="-122"/>
                           <a:cs typeface="Calibri" pitchFamily="34" charset="-120"/>
                         </a:rPr>
-                        <a:t>87674.19%</a:t>
+                        <a:t>—</a:t>
                       </a:r>
                       <a:endParaRPr lang="en-US" sz="750" dirty="0">
                         <a:latin typeface="Calibri" charset="0"/>
@@ -6209,7 +5817,7 @@
                       <a:tailEnd type="none" w="med" len="med"/>
                     </a:lnB>
                     <a:solidFill>
-                      <a:srgbClr val="F9F9F9"/>
+                      <a:srgbClr val="FFFFFF"/>
                     </a:solidFill>
                   </a:tcPr>
                 </a:tc>
@@ -6230,7 +5838,7 @@
                           <a:ea typeface="Calibri" pitchFamily="34" charset="-122"/>
                           <a:cs typeface="Calibri" pitchFamily="34" charset="-120"/>
                         </a:rPr>
-                        <a:t>88315.45%</a:t>
+                        <a:t>—</a:t>
                       </a:r>
                       <a:endParaRPr lang="en-US" sz="750" dirty="0">
                         <a:latin typeface="Calibri" charset="0"/>
@@ -6277,7 +5885,7 @@
                       <a:tailEnd type="none" w="med" len="med"/>
                     </a:lnB>
                     <a:solidFill>
-                      <a:srgbClr val="F9F9F9"/>
+                      <a:srgbClr val="FFFFFF"/>
                     </a:solidFill>
                   </a:tcPr>
                 </a:tc>
@@ -6298,7 +5906,7 @@
                           <a:ea typeface="Calibri" pitchFamily="34" charset="-122"/>
                           <a:cs typeface="Calibri" pitchFamily="34" charset="-120"/>
                         </a:rPr>
-                        <a:t>88880.40%</a:t>
+                        <a:t>—</a:t>
                       </a:r>
                       <a:endParaRPr lang="en-US" sz="750" dirty="0">
                         <a:latin typeface="Calibri" charset="0"/>
@@ -6345,7 +5953,7 @@
                       <a:tailEnd type="none" w="med" len="med"/>
                     </a:lnB>
                     <a:solidFill>
-                      <a:srgbClr val="F9F9F9"/>
+                      <a:srgbClr val="FFFFFF"/>
                     </a:solidFill>
                   </a:tcPr>
                 </a:tc>
@@ -6413,7 +6021,417 @@
                       <a:tailEnd type="none" w="med" len="med"/>
                     </a:lnB>
                     <a:solidFill>
-                      <a:srgbClr val="F9F9F9"/>
+                      <a:srgbClr val="FFFFFF"/>
+                    </a:solidFill>
+                  </a:tcPr>
+                </a:tc>
+              </a:tr>
+              <a:tr h="182880">
+                <a:tc>
+                  <a:txBody>
+                    <a:bodyPr/>
+                    <a:lstStyle/>
+                    <a:p>
+                      <a:pPr algn="l" indent="0" marL="0">
+                        <a:buNone/>
+                      </a:pPr>
+                      <a:r>
+                        <a:rPr lang="en-US" sz="750" b="1" dirty="0">
+                          <a:solidFill>
+                            <a:srgbClr val="000000"/>
+                          </a:solidFill>
+                          <a:latin typeface="Calibri" pitchFamily="34" charset="0"/>
+                          <a:ea typeface="Calibri" pitchFamily="34" charset="-122"/>
+                          <a:cs typeface="Calibri" pitchFamily="34" charset="-120"/>
+                        </a:rPr>
+                        <a:t>—</a:t>
+                      </a:r>
+                      <a:endParaRPr lang="en-US" sz="750" dirty="0">
+                        <a:latin typeface="Calibri" charset="0"/>
+                        <a:ea typeface="Calibri" charset="0"/>
+                        <a:cs typeface="Calibri" charset="0"/>
+                      </a:endParaRPr>
+                    </a:p>
+                  </a:txBody>
+                  <a:tcPr marL="91440" marR="91440" marT="45720" marB="45720">
+                    <a:lnL w="3810" cap="flat" cmpd="sng" algn="ctr">
+                      <a:solidFill>
+                        <a:srgbClr val="DDDDDD"/>
+                      </a:solidFill>
+                      <a:prstDash val="solid"/>
+                      <a:round/>
+                      <a:headEnd type="none" w="med" len="med"/>
+                      <a:tailEnd type="none" w="med" len="med"/>
+                    </a:lnL>
+                    <a:lnR w="3810" cap="flat" cmpd="sng" algn="ctr">
+                      <a:solidFill>
+                        <a:srgbClr val="DDDDDD"/>
+                      </a:solidFill>
+                      <a:prstDash val="solid"/>
+                      <a:round/>
+                      <a:headEnd type="none" w="med" len="med"/>
+                      <a:tailEnd type="none" w="med" len="med"/>
+                    </a:lnR>
+                    <a:lnT w="3810" cap="flat" cmpd="sng" algn="ctr">
+                      <a:solidFill>
+                        <a:srgbClr val="DDDDDD"/>
+                      </a:solidFill>
+                      <a:prstDash val="solid"/>
+                      <a:round/>
+                      <a:headEnd type="none" w="med" len="med"/>
+                      <a:tailEnd type="none" w="med" len="med"/>
+                    </a:lnT>
+                    <a:lnB w="3810" cap="flat" cmpd="sng" algn="ctr">
+                      <a:solidFill>
+                        <a:srgbClr val="DDDDDD"/>
+                      </a:solidFill>
+                      <a:prstDash val="solid"/>
+                      <a:round/>
+                      <a:headEnd type="none" w="med" len="med"/>
+                      <a:tailEnd type="none" w="med" len="med"/>
+                    </a:lnB>
+                    <a:solidFill>
+                      <a:srgbClr val="FFFFFF"/>
+                    </a:solidFill>
+                  </a:tcPr>
+                </a:tc>
+                <a:tc>
+                  <a:txBody>
+                    <a:bodyPr/>
+                    <a:lstStyle/>
+                    <a:p>
+                      <a:pPr algn="ctr" indent="0" marL="0">
+                        <a:buNone/>
+                      </a:pPr>
+                      <a:r>
+                        <a:rPr lang="en-US" sz="750" dirty="0">
+                          <a:solidFill>
+                            <a:srgbClr val="333333"/>
+                          </a:solidFill>
+                          <a:latin typeface="Calibri" pitchFamily="34" charset="0"/>
+                          <a:ea typeface="Calibri" pitchFamily="34" charset="-122"/>
+                          <a:cs typeface="Calibri" pitchFamily="34" charset="-120"/>
+                        </a:rPr>
+                        <a:t>—</a:t>
+                      </a:r>
+                      <a:endParaRPr lang="en-US" sz="750" dirty="0">
+                        <a:latin typeface="Calibri" charset="0"/>
+                        <a:ea typeface="Calibri" charset="0"/>
+                        <a:cs typeface="Calibri" charset="0"/>
+                      </a:endParaRPr>
+                    </a:p>
+                  </a:txBody>
+                  <a:tcPr marL="91440" marR="91440" marT="45720" marB="45720">
+                    <a:lnL w="3810" cap="flat" cmpd="sng" algn="ctr">
+                      <a:solidFill>
+                        <a:srgbClr val="DDDDDD"/>
+                      </a:solidFill>
+                      <a:prstDash val="solid"/>
+                      <a:round/>
+                      <a:headEnd type="none" w="med" len="med"/>
+                      <a:tailEnd type="none" w="med" len="med"/>
+                    </a:lnL>
+                    <a:lnR w="3810" cap="flat" cmpd="sng" algn="ctr">
+                      <a:solidFill>
+                        <a:srgbClr val="DDDDDD"/>
+                      </a:solidFill>
+                      <a:prstDash val="solid"/>
+                      <a:round/>
+                      <a:headEnd type="none" w="med" len="med"/>
+                      <a:tailEnd type="none" w="med" len="med"/>
+                    </a:lnR>
+                    <a:lnT w="3810" cap="flat" cmpd="sng" algn="ctr">
+                      <a:solidFill>
+                        <a:srgbClr val="DDDDDD"/>
+                      </a:solidFill>
+                      <a:prstDash val="solid"/>
+                      <a:round/>
+                      <a:headEnd type="none" w="med" len="med"/>
+                      <a:tailEnd type="none" w="med" len="med"/>
+                    </a:lnT>
+                    <a:lnB w="3810" cap="flat" cmpd="sng" algn="ctr">
+                      <a:solidFill>
+                        <a:srgbClr val="DDDDDD"/>
+                      </a:solidFill>
+                      <a:prstDash val="solid"/>
+                      <a:round/>
+                      <a:headEnd type="none" w="med" len="med"/>
+                      <a:tailEnd type="none" w="med" len="med"/>
+                    </a:lnB>
+                    <a:solidFill>
+                      <a:srgbClr val="FFFFFF"/>
+                    </a:solidFill>
+                  </a:tcPr>
+                </a:tc>
+                <a:tc>
+                  <a:txBody>
+                    <a:bodyPr/>
+                    <a:lstStyle/>
+                    <a:p>
+                      <a:pPr algn="ctr" indent="0" marL="0">
+                        <a:buNone/>
+                      </a:pPr>
+                      <a:r>
+                        <a:rPr lang="en-US" sz="750" dirty="0">
+                          <a:solidFill>
+                            <a:srgbClr val="333333"/>
+                          </a:solidFill>
+                          <a:latin typeface="Calibri" pitchFamily="34" charset="0"/>
+                          <a:ea typeface="Calibri" pitchFamily="34" charset="-122"/>
+                          <a:cs typeface="Calibri" pitchFamily="34" charset="-120"/>
+                        </a:rPr>
+                        <a:t>—</a:t>
+                      </a:r>
+                      <a:endParaRPr lang="en-US" sz="750" dirty="0">
+                        <a:latin typeface="Calibri" charset="0"/>
+                        <a:ea typeface="Calibri" charset="0"/>
+                        <a:cs typeface="Calibri" charset="0"/>
+                      </a:endParaRPr>
+                    </a:p>
+                  </a:txBody>
+                  <a:tcPr marL="91440" marR="91440" marT="45720" marB="45720">
+                    <a:lnL w="3810" cap="flat" cmpd="sng" algn="ctr">
+                      <a:solidFill>
+                        <a:srgbClr val="DDDDDD"/>
+                      </a:solidFill>
+                      <a:prstDash val="solid"/>
+                      <a:round/>
+                      <a:headEnd type="none" w="med" len="med"/>
+                      <a:tailEnd type="none" w="med" len="med"/>
+                    </a:lnL>
+                    <a:lnR w="3810" cap="flat" cmpd="sng" algn="ctr">
+                      <a:solidFill>
+                        <a:srgbClr val="DDDDDD"/>
+                      </a:solidFill>
+                      <a:prstDash val="solid"/>
+                      <a:round/>
+                      <a:headEnd type="none" w="med" len="med"/>
+                      <a:tailEnd type="none" w="med" len="med"/>
+                    </a:lnR>
+                    <a:lnT w="3810" cap="flat" cmpd="sng" algn="ctr">
+                      <a:solidFill>
+                        <a:srgbClr val="DDDDDD"/>
+                      </a:solidFill>
+                      <a:prstDash val="solid"/>
+                      <a:round/>
+                      <a:headEnd type="none" w="med" len="med"/>
+                      <a:tailEnd type="none" w="med" len="med"/>
+                    </a:lnT>
+                    <a:lnB w="3810" cap="flat" cmpd="sng" algn="ctr">
+                      <a:solidFill>
+                        <a:srgbClr val="DDDDDD"/>
+                      </a:solidFill>
+                      <a:prstDash val="solid"/>
+                      <a:round/>
+                      <a:headEnd type="none" w="med" len="med"/>
+                      <a:tailEnd type="none" w="med" len="med"/>
+                    </a:lnB>
+                    <a:solidFill>
+                      <a:srgbClr val="FFFFFF"/>
+                    </a:solidFill>
+                  </a:tcPr>
+                </a:tc>
+                <a:tc>
+                  <a:txBody>
+                    <a:bodyPr/>
+                    <a:lstStyle/>
+                    <a:p>
+                      <a:pPr algn="ctr" indent="0" marL="0">
+                        <a:buNone/>
+                      </a:pPr>
+                      <a:r>
+                        <a:rPr lang="en-US" sz="750" dirty="0">
+                          <a:solidFill>
+                            <a:srgbClr val="333333"/>
+                          </a:solidFill>
+                          <a:latin typeface="Calibri" pitchFamily="34" charset="0"/>
+                          <a:ea typeface="Calibri" pitchFamily="34" charset="-122"/>
+                          <a:cs typeface="Calibri" pitchFamily="34" charset="-120"/>
+                        </a:rPr>
+                        <a:t>—</a:t>
+                      </a:r>
+                      <a:endParaRPr lang="en-US" sz="750" dirty="0">
+                        <a:latin typeface="Calibri" charset="0"/>
+                        <a:ea typeface="Calibri" charset="0"/>
+                        <a:cs typeface="Calibri" charset="0"/>
+                      </a:endParaRPr>
+                    </a:p>
+                  </a:txBody>
+                  <a:tcPr marL="91440" marR="91440" marT="45720" marB="45720">
+                    <a:lnL w="3810" cap="flat" cmpd="sng" algn="ctr">
+                      <a:solidFill>
+                        <a:srgbClr val="DDDDDD"/>
+                      </a:solidFill>
+                      <a:prstDash val="solid"/>
+                      <a:round/>
+                      <a:headEnd type="none" w="med" len="med"/>
+                      <a:tailEnd type="none" w="med" len="med"/>
+                    </a:lnL>
+                    <a:lnR w="3810" cap="flat" cmpd="sng" algn="ctr">
+                      <a:solidFill>
+                        <a:srgbClr val="DDDDDD"/>
+                      </a:solidFill>
+                      <a:prstDash val="solid"/>
+                      <a:round/>
+                      <a:headEnd type="none" w="med" len="med"/>
+                      <a:tailEnd type="none" w="med" len="med"/>
+                    </a:lnR>
+                    <a:lnT w="3810" cap="flat" cmpd="sng" algn="ctr">
+                      <a:solidFill>
+                        <a:srgbClr val="DDDDDD"/>
+                      </a:solidFill>
+                      <a:prstDash val="solid"/>
+                      <a:round/>
+                      <a:headEnd type="none" w="med" len="med"/>
+                      <a:tailEnd type="none" w="med" len="med"/>
+                    </a:lnT>
+                    <a:lnB w="3810" cap="flat" cmpd="sng" algn="ctr">
+                      <a:solidFill>
+                        <a:srgbClr val="DDDDDD"/>
+                      </a:solidFill>
+                      <a:prstDash val="solid"/>
+                      <a:round/>
+                      <a:headEnd type="none" w="med" len="med"/>
+                      <a:tailEnd type="none" w="med" len="med"/>
+                    </a:lnB>
+                    <a:solidFill>
+                      <a:srgbClr val="FFFFFF"/>
+                    </a:solidFill>
+                  </a:tcPr>
+                </a:tc>
+                <a:tc>
+                  <a:txBody>
+                    <a:bodyPr/>
+                    <a:lstStyle/>
+                    <a:p>
+                      <a:pPr algn="ctr" indent="0" marL="0">
+                        <a:buNone/>
+                      </a:pPr>
+                      <a:r>
+                        <a:rPr lang="en-US" sz="750" dirty="0">
+                          <a:solidFill>
+                            <a:srgbClr val="333333"/>
+                          </a:solidFill>
+                          <a:latin typeface="Calibri" pitchFamily="34" charset="0"/>
+                          <a:ea typeface="Calibri" pitchFamily="34" charset="-122"/>
+                          <a:cs typeface="Calibri" pitchFamily="34" charset="-120"/>
+                        </a:rPr>
+                        <a:t>—</a:t>
+                      </a:r>
+                      <a:endParaRPr lang="en-US" sz="750" dirty="0">
+                        <a:latin typeface="Calibri" charset="0"/>
+                        <a:ea typeface="Calibri" charset="0"/>
+                        <a:cs typeface="Calibri" charset="0"/>
+                      </a:endParaRPr>
+                    </a:p>
+                  </a:txBody>
+                  <a:tcPr marL="91440" marR="91440" marT="45720" marB="45720">
+                    <a:lnL w="3810" cap="flat" cmpd="sng" algn="ctr">
+                      <a:solidFill>
+                        <a:srgbClr val="DDDDDD"/>
+                      </a:solidFill>
+                      <a:prstDash val="solid"/>
+                      <a:round/>
+                      <a:headEnd type="none" w="med" len="med"/>
+                      <a:tailEnd type="none" w="med" len="med"/>
+                    </a:lnL>
+                    <a:lnR w="3810" cap="flat" cmpd="sng" algn="ctr">
+                      <a:solidFill>
+                        <a:srgbClr val="DDDDDD"/>
+                      </a:solidFill>
+                      <a:prstDash val="solid"/>
+                      <a:round/>
+                      <a:headEnd type="none" w="med" len="med"/>
+                      <a:tailEnd type="none" w="med" len="med"/>
+                    </a:lnR>
+                    <a:lnT w="3810" cap="flat" cmpd="sng" algn="ctr">
+                      <a:solidFill>
+                        <a:srgbClr val="DDDDDD"/>
+                      </a:solidFill>
+                      <a:prstDash val="solid"/>
+                      <a:round/>
+                      <a:headEnd type="none" w="med" len="med"/>
+                      <a:tailEnd type="none" w="med" len="med"/>
+                    </a:lnT>
+                    <a:lnB w="3810" cap="flat" cmpd="sng" algn="ctr">
+                      <a:solidFill>
+                        <a:srgbClr val="DDDDDD"/>
+                      </a:solidFill>
+                      <a:prstDash val="solid"/>
+                      <a:round/>
+                      <a:headEnd type="none" w="med" len="med"/>
+                      <a:tailEnd type="none" w="med" len="med"/>
+                    </a:lnB>
+                    <a:solidFill>
+                      <a:srgbClr val="FFFFFF"/>
+                    </a:solidFill>
+                  </a:tcPr>
+                </a:tc>
+                <a:tc>
+                  <a:txBody>
+                    <a:bodyPr/>
+                    <a:lstStyle/>
+                    <a:p>
+                      <a:pPr algn="ctr" indent="0" marL="0">
+                        <a:buNone/>
+                      </a:pPr>
+                      <a:r>
+                        <a:rPr lang="en-US" sz="750" dirty="0">
+                          <a:solidFill>
+                            <a:srgbClr val="333333"/>
+                          </a:solidFill>
+                          <a:latin typeface="Calibri" pitchFamily="34" charset="0"/>
+                          <a:ea typeface="Calibri" pitchFamily="34" charset="-122"/>
+                          <a:cs typeface="Calibri" pitchFamily="34" charset="-120"/>
+                        </a:rPr>
+                        <a:t>—</a:t>
+                      </a:r>
+                      <a:endParaRPr lang="en-US" sz="750" dirty="0">
+                        <a:latin typeface="Calibri" charset="0"/>
+                        <a:ea typeface="Calibri" charset="0"/>
+                        <a:cs typeface="Calibri" charset="0"/>
+                      </a:endParaRPr>
+                    </a:p>
+                  </a:txBody>
+                  <a:tcPr marL="91440" marR="91440" marT="45720" marB="45720">
+                    <a:lnL w="3810" cap="flat" cmpd="sng" algn="ctr">
+                      <a:solidFill>
+                        <a:srgbClr val="DDDDDD"/>
+                      </a:solidFill>
+                      <a:prstDash val="solid"/>
+                      <a:round/>
+                      <a:headEnd type="none" w="med" len="med"/>
+                      <a:tailEnd type="none" w="med" len="med"/>
+                    </a:lnL>
+                    <a:lnR w="3810" cap="flat" cmpd="sng" algn="ctr">
+                      <a:solidFill>
+                        <a:srgbClr val="DDDDDD"/>
+                      </a:solidFill>
+                      <a:prstDash val="solid"/>
+                      <a:round/>
+                      <a:headEnd type="none" w="med" len="med"/>
+                      <a:tailEnd type="none" w="med" len="med"/>
+                    </a:lnR>
+                    <a:lnT w="3810" cap="flat" cmpd="sng" algn="ctr">
+                      <a:solidFill>
+                        <a:srgbClr val="DDDDDD"/>
+                      </a:solidFill>
+                      <a:prstDash val="solid"/>
+                      <a:round/>
+                      <a:headEnd type="none" w="med" len="med"/>
+                      <a:tailEnd type="none" w="med" len="med"/>
+                    </a:lnT>
+                    <a:lnB w="3810" cap="flat" cmpd="sng" algn="ctr">
+                      <a:solidFill>
+                        <a:srgbClr val="DDDDDD"/>
+                      </a:solidFill>
+                      <a:prstDash val="solid"/>
+                      <a:round/>
+                      <a:headEnd type="none" w="med" len="med"/>
+                      <a:tailEnd type="none" w="med" len="med"/>
+                    </a:lnB>
+                    <a:solidFill>
+                      <a:srgbClr val="FFFFFF"/>
                     </a:solidFill>
                   </a:tcPr>
                 </a:tc>
@@ -24630,2552 +24648,6 @@
                           <a:cs typeface="Calibri" pitchFamily="34" charset="-120"/>
                         </a:rPr>
                         <a:t>2.91%</a:t>
-                      </a:r>
-                      <a:endParaRPr lang="en-US" sz="500" dirty="0">
-                        <a:latin typeface="Calibri" charset="0"/>
-                        <a:ea typeface="Calibri" charset="0"/>
-                        <a:cs typeface="Calibri" charset="0"/>
-                      </a:endParaRPr>
-                    </a:p>
-                  </a:txBody>
-                  <a:tcPr marL="91440" marR="91440" marT="45720" marB="45720">
-                    <a:lnL w="2540" cap="flat" cmpd="sng" algn="ctr">
-                      <a:solidFill>
-                        <a:srgbClr val="EEEEEE"/>
-                      </a:solidFill>
-                      <a:prstDash val="solid"/>
-                      <a:round/>
-                      <a:headEnd type="none" w="med" len="med"/>
-                      <a:tailEnd type="none" w="med" len="med"/>
-                    </a:lnL>
-                    <a:lnR w="2540" cap="flat" cmpd="sng" algn="ctr">
-                      <a:solidFill>
-                        <a:srgbClr val="EEEEEE"/>
-                      </a:solidFill>
-                      <a:prstDash val="solid"/>
-                      <a:round/>
-                      <a:headEnd type="none" w="med" len="med"/>
-                      <a:tailEnd type="none" w="med" len="med"/>
-                    </a:lnR>
-                    <a:lnT w="2540" cap="flat" cmpd="sng" algn="ctr">
-                      <a:solidFill>
-                        <a:srgbClr val="EEEEEE"/>
-                      </a:solidFill>
-                      <a:prstDash val="solid"/>
-                      <a:round/>
-                      <a:headEnd type="none" w="med" len="med"/>
-                      <a:tailEnd type="none" w="med" len="med"/>
-                    </a:lnT>
-                    <a:lnB w="2540" cap="flat" cmpd="sng" algn="ctr">
-                      <a:solidFill>
-                        <a:srgbClr val="EEEEEE"/>
-                      </a:solidFill>
-                      <a:prstDash val="solid"/>
-                      <a:round/>
-                      <a:headEnd type="none" w="med" len="med"/>
-                      <a:tailEnd type="none" w="med" len="med"/>
-                    </a:lnB>
-                  </a:tcPr>
-                </a:tc>
-              </a:tr>
-              <a:tr h="123444">
-                <a:tc>
-                  <a:txBody>
-                    <a:bodyPr/>
-                    <a:lstStyle/>
-                    <a:p>
-                      <a:pPr algn="l" indent="0" marL="0">
-                        <a:buNone/>
-                      </a:pPr>
-                      <a:r>
-                        <a:rPr lang="en-US" sz="500" b="1" dirty="0">
-                          <a:solidFill>
-                            <a:srgbClr val="000000"/>
-                          </a:solidFill>
-                          <a:latin typeface="Calibri" pitchFamily="34" charset="0"/>
-                          <a:ea typeface="Calibri" pitchFamily="34" charset="-122"/>
-                          <a:cs typeface="Calibri" pitchFamily="34" charset="-120"/>
-                        </a:rPr>
-                        <a:t>2026</a:t>
-                      </a:r>
-                      <a:endParaRPr lang="en-US" sz="500" dirty="0">
-                        <a:latin typeface="Calibri" charset="0"/>
-                        <a:ea typeface="Calibri" charset="0"/>
-                        <a:cs typeface="Calibri" charset="0"/>
-                      </a:endParaRPr>
-                    </a:p>
-                  </a:txBody>
-                  <a:tcPr marL="91440" marR="91440" marT="45720" marB="45720">
-                    <a:lnL w="2540" cap="flat" cmpd="sng" algn="ctr">
-                      <a:solidFill>
-                        <a:srgbClr val="EEEEEE"/>
-                      </a:solidFill>
-                      <a:prstDash val="solid"/>
-                      <a:round/>
-                      <a:headEnd type="none" w="med" len="med"/>
-                      <a:tailEnd type="none" w="med" len="med"/>
-                    </a:lnL>
-                    <a:lnR w="2540" cap="flat" cmpd="sng" algn="ctr">
-                      <a:solidFill>
-                        <a:srgbClr val="EEEEEE"/>
-                      </a:solidFill>
-                      <a:prstDash val="solid"/>
-                      <a:round/>
-                      <a:headEnd type="none" w="med" len="med"/>
-                      <a:tailEnd type="none" w="med" len="med"/>
-                    </a:lnR>
-                    <a:lnT w="2540" cap="flat" cmpd="sng" algn="ctr">
-                      <a:solidFill>
-                        <a:srgbClr val="EEEEEE"/>
-                      </a:solidFill>
-                      <a:prstDash val="solid"/>
-                      <a:round/>
-                      <a:headEnd type="none" w="med" len="med"/>
-                      <a:tailEnd type="none" w="med" len="med"/>
-                    </a:lnT>
-                    <a:lnB w="2540" cap="flat" cmpd="sng" algn="ctr">
-                      <a:solidFill>
-                        <a:srgbClr val="EEEEEE"/>
-                      </a:solidFill>
-                      <a:prstDash val="solid"/>
-                      <a:round/>
-                      <a:headEnd type="none" w="med" len="med"/>
-                      <a:tailEnd type="none" w="med" len="med"/>
-                    </a:lnB>
-                  </a:tcPr>
-                </a:tc>
-                <a:tc>
-                  <a:txBody>
-                    <a:bodyPr/>
-                    <a:lstStyle/>
-                    <a:p>
-                      <a:pPr algn="l" indent="0" marL="0">
-                        <a:buNone/>
-                      </a:pPr>
-                      <a:r>
-                        <a:rPr lang="en-US" sz="500" dirty="0">
-                          <a:solidFill>
-                            <a:srgbClr val="777777"/>
-                          </a:solidFill>
-                          <a:latin typeface="Calibri" pitchFamily="34" charset="0"/>
-                          <a:ea typeface="Calibri" pitchFamily="34" charset="-122"/>
-                          <a:cs typeface="Calibri" pitchFamily="34" charset="-120"/>
-                        </a:rPr>
-                        <a:t>ICP (Benchmark)</a:t>
-                      </a:r>
-                      <a:endParaRPr lang="en-US" sz="500" dirty="0">
-                        <a:latin typeface="Calibri" charset="0"/>
-                        <a:ea typeface="Calibri" charset="0"/>
-                        <a:cs typeface="Calibri" charset="0"/>
-                      </a:endParaRPr>
-                    </a:p>
-                  </a:txBody>
-                  <a:tcPr marL="91440" marR="91440" marT="45720" marB="45720">
-                    <a:lnL w="2540" cap="flat" cmpd="sng" algn="ctr">
-                      <a:solidFill>
-                        <a:srgbClr val="EEEEEE"/>
-                      </a:solidFill>
-                      <a:prstDash val="solid"/>
-                      <a:round/>
-                      <a:headEnd type="none" w="med" len="med"/>
-                      <a:tailEnd type="none" w="med" len="med"/>
-                    </a:lnL>
-                    <a:lnR w="2540" cap="flat" cmpd="sng" algn="ctr">
-                      <a:solidFill>
-                        <a:srgbClr val="EEEEEE"/>
-                      </a:solidFill>
-                      <a:prstDash val="solid"/>
-                      <a:round/>
-                      <a:headEnd type="none" w="med" len="med"/>
-                      <a:tailEnd type="none" w="med" len="med"/>
-                    </a:lnR>
-                    <a:lnT w="2540" cap="flat" cmpd="sng" algn="ctr">
-                      <a:solidFill>
-                        <a:srgbClr val="EEEEEE"/>
-                      </a:solidFill>
-                      <a:prstDash val="solid"/>
-                      <a:round/>
-                      <a:headEnd type="none" w="med" len="med"/>
-                      <a:tailEnd type="none" w="med" len="med"/>
-                    </a:lnT>
-                    <a:lnB w="2540" cap="flat" cmpd="sng" algn="ctr">
-                      <a:solidFill>
-                        <a:srgbClr val="EEEEEE"/>
-                      </a:solidFill>
-                      <a:prstDash val="solid"/>
-                      <a:round/>
-                      <a:headEnd type="none" w="med" len="med"/>
-                      <a:tailEnd type="none" w="med" len="med"/>
-                    </a:lnB>
-                  </a:tcPr>
-                </a:tc>
-                <a:tc>
-                  <a:txBody>
-                    <a:bodyPr/>
-                    <a:lstStyle/>
-                    <a:p>
-                      <a:pPr algn="ctr" indent="0" marL="0">
-                        <a:buNone/>
-                      </a:pPr>
-                      <a:endParaRPr lang="en-US" sz="500" dirty="0">
-                        <a:latin typeface="Calibri" charset="0"/>
-                        <a:ea typeface="Calibri" charset="0"/>
-                        <a:cs typeface="Calibri" charset="0"/>
-                      </a:endParaRPr>
-                    </a:p>
-                  </a:txBody>
-                  <a:tcPr marL="91440" marR="91440" marT="45720" marB="45720">
-                    <a:lnL w="2540" cap="flat" cmpd="sng" algn="ctr">
-                      <a:solidFill>
-                        <a:srgbClr val="EEEEEE"/>
-                      </a:solidFill>
-                      <a:prstDash val="solid"/>
-                      <a:round/>
-                      <a:headEnd type="none" w="med" len="med"/>
-                      <a:tailEnd type="none" w="med" len="med"/>
-                    </a:lnL>
-                    <a:lnR w="2540" cap="flat" cmpd="sng" algn="ctr">
-                      <a:solidFill>
-                        <a:srgbClr val="EEEEEE"/>
-                      </a:solidFill>
-                      <a:prstDash val="solid"/>
-                      <a:round/>
-                      <a:headEnd type="none" w="med" len="med"/>
-                      <a:tailEnd type="none" w="med" len="med"/>
-                    </a:lnR>
-                    <a:lnT w="2540" cap="flat" cmpd="sng" algn="ctr">
-                      <a:solidFill>
-                        <a:srgbClr val="EEEEEE"/>
-                      </a:solidFill>
-                      <a:prstDash val="solid"/>
-                      <a:round/>
-                      <a:headEnd type="none" w="med" len="med"/>
-                      <a:tailEnd type="none" w="med" len="med"/>
-                    </a:lnT>
-                    <a:lnB w="2540" cap="flat" cmpd="sng" algn="ctr">
-                      <a:solidFill>
-                        <a:srgbClr val="EEEEEE"/>
-                      </a:solidFill>
-                      <a:prstDash val="solid"/>
-                      <a:round/>
-                      <a:headEnd type="none" w="med" len="med"/>
-                      <a:tailEnd type="none" w="med" len="med"/>
-                    </a:lnB>
-                  </a:tcPr>
-                </a:tc>
-                <a:tc>
-                  <a:txBody>
-                    <a:bodyPr/>
-                    <a:lstStyle/>
-                    <a:p>
-                      <a:pPr algn="ctr" indent="0" marL="0">
-                        <a:buNone/>
-                      </a:pPr>
-                      <a:endParaRPr lang="en-US" sz="500" dirty="0">
-                        <a:latin typeface="Calibri" charset="0"/>
-                        <a:ea typeface="Calibri" charset="0"/>
-                        <a:cs typeface="Calibri" charset="0"/>
-                      </a:endParaRPr>
-                    </a:p>
-                  </a:txBody>
-                  <a:tcPr marL="91440" marR="91440" marT="45720" marB="45720">
-                    <a:lnL w="2540" cap="flat" cmpd="sng" algn="ctr">
-                      <a:solidFill>
-                        <a:srgbClr val="EEEEEE"/>
-                      </a:solidFill>
-                      <a:prstDash val="solid"/>
-                      <a:round/>
-                      <a:headEnd type="none" w="med" len="med"/>
-                      <a:tailEnd type="none" w="med" len="med"/>
-                    </a:lnL>
-                    <a:lnR w="2540" cap="flat" cmpd="sng" algn="ctr">
-                      <a:solidFill>
-                        <a:srgbClr val="EEEEEE"/>
-                      </a:solidFill>
-                      <a:prstDash val="solid"/>
-                      <a:round/>
-                      <a:headEnd type="none" w="med" len="med"/>
-                      <a:tailEnd type="none" w="med" len="med"/>
-                    </a:lnR>
-                    <a:lnT w="2540" cap="flat" cmpd="sng" algn="ctr">
-                      <a:solidFill>
-                        <a:srgbClr val="EEEEEE"/>
-                      </a:solidFill>
-                      <a:prstDash val="solid"/>
-                      <a:round/>
-                      <a:headEnd type="none" w="med" len="med"/>
-                      <a:tailEnd type="none" w="med" len="med"/>
-                    </a:lnT>
-                    <a:lnB w="2540" cap="flat" cmpd="sng" algn="ctr">
-                      <a:solidFill>
-                        <a:srgbClr val="EEEEEE"/>
-                      </a:solidFill>
-                      <a:prstDash val="solid"/>
-                      <a:round/>
-                      <a:headEnd type="none" w="med" len="med"/>
-                      <a:tailEnd type="none" w="med" len="med"/>
-                    </a:lnB>
-                  </a:tcPr>
-                </a:tc>
-                <a:tc>
-                  <a:txBody>
-                    <a:bodyPr/>
-                    <a:lstStyle/>
-                    <a:p>
-                      <a:pPr algn="ctr" indent="0" marL="0">
-                        <a:buNone/>
-                      </a:pPr>
-                      <a:endParaRPr lang="en-US" sz="500" dirty="0">
-                        <a:latin typeface="Calibri" charset="0"/>
-                        <a:ea typeface="Calibri" charset="0"/>
-                        <a:cs typeface="Calibri" charset="0"/>
-                      </a:endParaRPr>
-                    </a:p>
-                  </a:txBody>
-                  <a:tcPr marL="91440" marR="91440" marT="45720" marB="45720">
-                    <a:lnL w="2540" cap="flat" cmpd="sng" algn="ctr">
-                      <a:solidFill>
-                        <a:srgbClr val="EEEEEE"/>
-                      </a:solidFill>
-                      <a:prstDash val="solid"/>
-                      <a:round/>
-                      <a:headEnd type="none" w="med" len="med"/>
-                      <a:tailEnd type="none" w="med" len="med"/>
-                    </a:lnL>
-                    <a:lnR w="2540" cap="flat" cmpd="sng" algn="ctr">
-                      <a:solidFill>
-                        <a:srgbClr val="EEEEEE"/>
-                      </a:solidFill>
-                      <a:prstDash val="solid"/>
-                      <a:round/>
-                      <a:headEnd type="none" w="med" len="med"/>
-                      <a:tailEnd type="none" w="med" len="med"/>
-                    </a:lnR>
-                    <a:lnT w="2540" cap="flat" cmpd="sng" algn="ctr">
-                      <a:solidFill>
-                        <a:srgbClr val="EEEEEE"/>
-                      </a:solidFill>
-                      <a:prstDash val="solid"/>
-                      <a:round/>
-                      <a:headEnd type="none" w="med" len="med"/>
-                      <a:tailEnd type="none" w="med" len="med"/>
-                    </a:lnT>
-                    <a:lnB w="2540" cap="flat" cmpd="sng" algn="ctr">
-                      <a:solidFill>
-                        <a:srgbClr val="EEEEEE"/>
-                      </a:solidFill>
-                      <a:prstDash val="solid"/>
-                      <a:round/>
-                      <a:headEnd type="none" w="med" len="med"/>
-                      <a:tailEnd type="none" w="med" len="med"/>
-                    </a:lnB>
-                  </a:tcPr>
-                </a:tc>
-                <a:tc>
-                  <a:txBody>
-                    <a:bodyPr/>
-                    <a:lstStyle/>
-                    <a:p>
-                      <a:pPr algn="ctr" indent="0" marL="0">
-                        <a:buNone/>
-                      </a:pPr>
-                      <a:endParaRPr lang="en-US" sz="500" dirty="0">
-                        <a:latin typeface="Calibri" charset="0"/>
-                        <a:ea typeface="Calibri" charset="0"/>
-                        <a:cs typeface="Calibri" charset="0"/>
-                      </a:endParaRPr>
-                    </a:p>
-                  </a:txBody>
-                  <a:tcPr marL="91440" marR="91440" marT="45720" marB="45720">
-                    <a:lnL w="2540" cap="flat" cmpd="sng" algn="ctr">
-                      <a:solidFill>
-                        <a:srgbClr val="EEEEEE"/>
-                      </a:solidFill>
-                      <a:prstDash val="solid"/>
-                      <a:round/>
-                      <a:headEnd type="none" w="med" len="med"/>
-                      <a:tailEnd type="none" w="med" len="med"/>
-                    </a:lnL>
-                    <a:lnR w="2540" cap="flat" cmpd="sng" algn="ctr">
-                      <a:solidFill>
-                        <a:srgbClr val="EEEEEE"/>
-                      </a:solidFill>
-                      <a:prstDash val="solid"/>
-                      <a:round/>
-                      <a:headEnd type="none" w="med" len="med"/>
-                      <a:tailEnd type="none" w="med" len="med"/>
-                    </a:lnR>
-                    <a:lnT w="2540" cap="flat" cmpd="sng" algn="ctr">
-                      <a:solidFill>
-                        <a:srgbClr val="EEEEEE"/>
-                      </a:solidFill>
-                      <a:prstDash val="solid"/>
-                      <a:round/>
-                      <a:headEnd type="none" w="med" len="med"/>
-                      <a:tailEnd type="none" w="med" len="med"/>
-                    </a:lnT>
-                    <a:lnB w="2540" cap="flat" cmpd="sng" algn="ctr">
-                      <a:solidFill>
-                        <a:srgbClr val="EEEEEE"/>
-                      </a:solidFill>
-                      <a:prstDash val="solid"/>
-                      <a:round/>
-                      <a:headEnd type="none" w="med" len="med"/>
-                      <a:tailEnd type="none" w="med" len="med"/>
-                    </a:lnB>
-                  </a:tcPr>
-                </a:tc>
-                <a:tc>
-                  <a:txBody>
-                    <a:bodyPr/>
-                    <a:lstStyle/>
-                    <a:p>
-                      <a:pPr algn="ctr" indent="0" marL="0">
-                        <a:buNone/>
-                      </a:pPr>
-                      <a:r>
-                        <a:rPr lang="en-US" sz="500" dirty="0">
-                          <a:solidFill>
-                            <a:srgbClr val="777777"/>
-                          </a:solidFill>
-                          <a:latin typeface="Calibri" pitchFamily="34" charset="0"/>
-                          <a:ea typeface="Calibri" pitchFamily="34" charset="-122"/>
-                          <a:cs typeface="Calibri" pitchFamily="34" charset="-120"/>
-                        </a:rPr>
-                        <a:t>0.37%</a:t>
-                      </a:r>
-                      <a:endParaRPr lang="en-US" sz="500" dirty="0">
-                        <a:latin typeface="Calibri" charset="0"/>
-                        <a:ea typeface="Calibri" charset="0"/>
-                        <a:cs typeface="Calibri" charset="0"/>
-                      </a:endParaRPr>
-                    </a:p>
-                  </a:txBody>
-                  <a:tcPr marL="91440" marR="91440" marT="45720" marB="45720">
-                    <a:lnL w="2540" cap="flat" cmpd="sng" algn="ctr">
-                      <a:solidFill>
-                        <a:srgbClr val="EEEEEE"/>
-                      </a:solidFill>
-                      <a:prstDash val="solid"/>
-                      <a:round/>
-                      <a:headEnd type="none" w="med" len="med"/>
-                      <a:tailEnd type="none" w="med" len="med"/>
-                    </a:lnL>
-                    <a:lnR w="2540" cap="flat" cmpd="sng" algn="ctr">
-                      <a:solidFill>
-                        <a:srgbClr val="EEEEEE"/>
-                      </a:solidFill>
-                      <a:prstDash val="solid"/>
-                      <a:round/>
-                      <a:headEnd type="none" w="med" len="med"/>
-                      <a:tailEnd type="none" w="med" len="med"/>
-                    </a:lnR>
-                    <a:lnT w="2540" cap="flat" cmpd="sng" algn="ctr">
-                      <a:solidFill>
-                        <a:srgbClr val="EEEEEE"/>
-                      </a:solidFill>
-                      <a:prstDash val="solid"/>
-                      <a:round/>
-                      <a:headEnd type="none" w="med" len="med"/>
-                      <a:tailEnd type="none" w="med" len="med"/>
-                    </a:lnT>
-                    <a:lnB w="2540" cap="flat" cmpd="sng" algn="ctr">
-                      <a:solidFill>
-                        <a:srgbClr val="EEEEEE"/>
-                      </a:solidFill>
-                      <a:prstDash val="solid"/>
-                      <a:round/>
-                      <a:headEnd type="none" w="med" len="med"/>
-                      <a:tailEnd type="none" w="med" len="med"/>
-                    </a:lnB>
-                  </a:tcPr>
-                </a:tc>
-                <a:tc>
-                  <a:txBody>
-                    <a:bodyPr/>
-                    <a:lstStyle/>
-                    <a:p>
-                      <a:pPr algn="ctr" indent="0" marL="0">
-                        <a:buNone/>
-                      </a:pPr>
-                      <a:endParaRPr lang="en-US" sz="500" dirty="0">
-                        <a:latin typeface="Calibri" charset="0"/>
-                        <a:ea typeface="Calibri" charset="0"/>
-                        <a:cs typeface="Calibri" charset="0"/>
-                      </a:endParaRPr>
-                    </a:p>
-                  </a:txBody>
-                  <a:tcPr marL="91440" marR="91440" marT="45720" marB="45720">
-                    <a:lnL w="2540" cap="flat" cmpd="sng" algn="ctr">
-                      <a:solidFill>
-                        <a:srgbClr val="EEEEEE"/>
-                      </a:solidFill>
-                      <a:prstDash val="solid"/>
-                      <a:round/>
-                      <a:headEnd type="none" w="med" len="med"/>
-                      <a:tailEnd type="none" w="med" len="med"/>
-                    </a:lnL>
-                    <a:lnR w="2540" cap="flat" cmpd="sng" algn="ctr">
-                      <a:solidFill>
-                        <a:srgbClr val="EEEEEE"/>
-                      </a:solidFill>
-                      <a:prstDash val="solid"/>
-                      <a:round/>
-                      <a:headEnd type="none" w="med" len="med"/>
-                      <a:tailEnd type="none" w="med" len="med"/>
-                    </a:lnR>
-                    <a:lnT w="2540" cap="flat" cmpd="sng" algn="ctr">
-                      <a:solidFill>
-                        <a:srgbClr val="EEEEEE"/>
-                      </a:solidFill>
-                      <a:prstDash val="solid"/>
-                      <a:round/>
-                      <a:headEnd type="none" w="med" len="med"/>
-                      <a:tailEnd type="none" w="med" len="med"/>
-                    </a:lnT>
-                    <a:lnB w="2540" cap="flat" cmpd="sng" algn="ctr">
-                      <a:solidFill>
-                        <a:srgbClr val="EEEEEE"/>
-                      </a:solidFill>
-                      <a:prstDash val="solid"/>
-                      <a:round/>
-                      <a:headEnd type="none" w="med" len="med"/>
-                      <a:tailEnd type="none" w="med" len="med"/>
-                    </a:lnB>
-                  </a:tcPr>
-                </a:tc>
-                <a:tc>
-                  <a:txBody>
-                    <a:bodyPr/>
-                    <a:lstStyle/>
-                    <a:p>
-                      <a:pPr algn="ctr" indent="0" marL="0">
-                        <a:buNone/>
-                      </a:pPr>
-                      <a:endParaRPr lang="en-US" sz="500" dirty="0">
-                        <a:latin typeface="Calibri" charset="0"/>
-                        <a:ea typeface="Calibri" charset="0"/>
-                        <a:cs typeface="Calibri" charset="0"/>
-                      </a:endParaRPr>
-                    </a:p>
-                  </a:txBody>
-                  <a:tcPr marL="91440" marR="91440" marT="45720" marB="45720">
-                    <a:lnL w="2540" cap="flat" cmpd="sng" algn="ctr">
-                      <a:solidFill>
-                        <a:srgbClr val="EEEEEE"/>
-                      </a:solidFill>
-                      <a:prstDash val="solid"/>
-                      <a:round/>
-                      <a:headEnd type="none" w="med" len="med"/>
-                      <a:tailEnd type="none" w="med" len="med"/>
-                    </a:lnL>
-                    <a:lnR w="2540" cap="flat" cmpd="sng" algn="ctr">
-                      <a:solidFill>
-                        <a:srgbClr val="EEEEEE"/>
-                      </a:solidFill>
-                      <a:prstDash val="solid"/>
-                      <a:round/>
-                      <a:headEnd type="none" w="med" len="med"/>
-                      <a:tailEnd type="none" w="med" len="med"/>
-                    </a:lnR>
-                    <a:lnT w="2540" cap="flat" cmpd="sng" algn="ctr">
-                      <a:solidFill>
-                        <a:srgbClr val="EEEEEE"/>
-                      </a:solidFill>
-                      <a:prstDash val="solid"/>
-                      <a:round/>
-                      <a:headEnd type="none" w="med" len="med"/>
-                      <a:tailEnd type="none" w="med" len="med"/>
-                    </a:lnT>
-                    <a:lnB w="2540" cap="flat" cmpd="sng" algn="ctr">
-                      <a:solidFill>
-                        <a:srgbClr val="EEEEEE"/>
-                      </a:solidFill>
-                      <a:prstDash val="solid"/>
-                      <a:round/>
-                      <a:headEnd type="none" w="med" len="med"/>
-                      <a:tailEnd type="none" w="med" len="med"/>
-                    </a:lnB>
-                  </a:tcPr>
-                </a:tc>
-                <a:tc>
-                  <a:txBody>
-                    <a:bodyPr/>
-                    <a:lstStyle/>
-                    <a:p>
-                      <a:pPr algn="ctr" indent="0" marL="0">
-                        <a:buNone/>
-                      </a:pPr>
-                      <a:endParaRPr lang="en-US" sz="500" dirty="0">
-                        <a:latin typeface="Calibri" charset="0"/>
-                        <a:ea typeface="Calibri" charset="0"/>
-                        <a:cs typeface="Calibri" charset="0"/>
-                      </a:endParaRPr>
-                    </a:p>
-                  </a:txBody>
-                  <a:tcPr marL="91440" marR="91440" marT="45720" marB="45720">
-                    <a:lnL w="2540" cap="flat" cmpd="sng" algn="ctr">
-                      <a:solidFill>
-                        <a:srgbClr val="EEEEEE"/>
-                      </a:solidFill>
-                      <a:prstDash val="solid"/>
-                      <a:round/>
-                      <a:headEnd type="none" w="med" len="med"/>
-                      <a:tailEnd type="none" w="med" len="med"/>
-                    </a:lnL>
-                    <a:lnR w="2540" cap="flat" cmpd="sng" algn="ctr">
-                      <a:solidFill>
-                        <a:srgbClr val="EEEEEE"/>
-                      </a:solidFill>
-                      <a:prstDash val="solid"/>
-                      <a:round/>
-                      <a:headEnd type="none" w="med" len="med"/>
-                      <a:tailEnd type="none" w="med" len="med"/>
-                    </a:lnR>
-                    <a:lnT w="2540" cap="flat" cmpd="sng" algn="ctr">
-                      <a:solidFill>
-                        <a:srgbClr val="EEEEEE"/>
-                      </a:solidFill>
-                      <a:prstDash val="solid"/>
-                      <a:round/>
-                      <a:headEnd type="none" w="med" len="med"/>
-                      <a:tailEnd type="none" w="med" len="med"/>
-                    </a:lnT>
-                    <a:lnB w="2540" cap="flat" cmpd="sng" algn="ctr">
-                      <a:solidFill>
-                        <a:srgbClr val="EEEEEE"/>
-                      </a:solidFill>
-                      <a:prstDash val="solid"/>
-                      <a:round/>
-                      <a:headEnd type="none" w="med" len="med"/>
-                      <a:tailEnd type="none" w="med" len="med"/>
-                    </a:lnB>
-                  </a:tcPr>
-                </a:tc>
-                <a:tc>
-                  <a:txBody>
-                    <a:bodyPr/>
-                    <a:lstStyle/>
-                    <a:p>
-                      <a:pPr algn="ctr" indent="0" marL="0">
-                        <a:buNone/>
-                      </a:pPr>
-                      <a:endParaRPr lang="en-US" sz="500" dirty="0">
-                        <a:latin typeface="Calibri" charset="0"/>
-                        <a:ea typeface="Calibri" charset="0"/>
-                        <a:cs typeface="Calibri" charset="0"/>
-                      </a:endParaRPr>
-                    </a:p>
-                  </a:txBody>
-                  <a:tcPr marL="91440" marR="91440" marT="45720" marB="45720">
-                    <a:lnL w="2540" cap="flat" cmpd="sng" algn="ctr">
-                      <a:solidFill>
-                        <a:srgbClr val="EEEEEE"/>
-                      </a:solidFill>
-                      <a:prstDash val="solid"/>
-                      <a:round/>
-                      <a:headEnd type="none" w="med" len="med"/>
-                      <a:tailEnd type="none" w="med" len="med"/>
-                    </a:lnL>
-                    <a:lnR w="2540" cap="flat" cmpd="sng" algn="ctr">
-                      <a:solidFill>
-                        <a:srgbClr val="EEEEEE"/>
-                      </a:solidFill>
-                      <a:prstDash val="solid"/>
-                      <a:round/>
-                      <a:headEnd type="none" w="med" len="med"/>
-                      <a:tailEnd type="none" w="med" len="med"/>
-                    </a:lnR>
-                    <a:lnT w="2540" cap="flat" cmpd="sng" algn="ctr">
-                      <a:solidFill>
-                        <a:srgbClr val="EEEEEE"/>
-                      </a:solidFill>
-                      <a:prstDash val="solid"/>
-                      <a:round/>
-                      <a:headEnd type="none" w="med" len="med"/>
-                      <a:tailEnd type="none" w="med" len="med"/>
-                    </a:lnT>
-                    <a:lnB w="2540" cap="flat" cmpd="sng" algn="ctr">
-                      <a:solidFill>
-                        <a:srgbClr val="EEEEEE"/>
-                      </a:solidFill>
-                      <a:prstDash val="solid"/>
-                      <a:round/>
-                      <a:headEnd type="none" w="med" len="med"/>
-                      <a:tailEnd type="none" w="med" len="med"/>
-                    </a:lnB>
-                  </a:tcPr>
-                </a:tc>
-                <a:tc>
-                  <a:txBody>
-                    <a:bodyPr/>
-                    <a:lstStyle/>
-                    <a:p>
-                      <a:pPr algn="ctr" indent="0" marL="0">
-                        <a:buNone/>
-                      </a:pPr>
-                      <a:endParaRPr lang="en-US" sz="500" dirty="0">
-                        <a:latin typeface="Calibri" charset="0"/>
-                        <a:ea typeface="Calibri" charset="0"/>
-                        <a:cs typeface="Calibri" charset="0"/>
-                      </a:endParaRPr>
-                    </a:p>
-                  </a:txBody>
-                  <a:tcPr marL="91440" marR="91440" marT="45720" marB="45720">
-                    <a:lnL w="2540" cap="flat" cmpd="sng" algn="ctr">
-                      <a:solidFill>
-                        <a:srgbClr val="EEEEEE"/>
-                      </a:solidFill>
-                      <a:prstDash val="solid"/>
-                      <a:round/>
-                      <a:headEnd type="none" w="med" len="med"/>
-                      <a:tailEnd type="none" w="med" len="med"/>
-                    </a:lnL>
-                    <a:lnR w="2540" cap="flat" cmpd="sng" algn="ctr">
-                      <a:solidFill>
-                        <a:srgbClr val="EEEEEE"/>
-                      </a:solidFill>
-                      <a:prstDash val="solid"/>
-                      <a:round/>
-                      <a:headEnd type="none" w="med" len="med"/>
-                      <a:tailEnd type="none" w="med" len="med"/>
-                    </a:lnR>
-                    <a:lnT w="2540" cap="flat" cmpd="sng" algn="ctr">
-                      <a:solidFill>
-                        <a:srgbClr val="EEEEEE"/>
-                      </a:solidFill>
-                      <a:prstDash val="solid"/>
-                      <a:round/>
-                      <a:headEnd type="none" w="med" len="med"/>
-                      <a:tailEnd type="none" w="med" len="med"/>
-                    </a:lnT>
-                    <a:lnB w="2540" cap="flat" cmpd="sng" algn="ctr">
-                      <a:solidFill>
-                        <a:srgbClr val="EEEEEE"/>
-                      </a:solidFill>
-                      <a:prstDash val="solid"/>
-                      <a:round/>
-                      <a:headEnd type="none" w="med" len="med"/>
-                      <a:tailEnd type="none" w="med" len="med"/>
-                    </a:lnB>
-                  </a:tcPr>
-                </a:tc>
-                <a:tc>
-                  <a:txBody>
-                    <a:bodyPr/>
-                    <a:lstStyle/>
-                    <a:p>
-                      <a:pPr algn="ctr" indent="0" marL="0">
-                        <a:buNone/>
-                      </a:pPr>
-                      <a:endParaRPr lang="en-US" sz="500" dirty="0">
-                        <a:latin typeface="Calibri" charset="0"/>
-                        <a:ea typeface="Calibri" charset="0"/>
-                        <a:cs typeface="Calibri" charset="0"/>
-                      </a:endParaRPr>
-                    </a:p>
-                  </a:txBody>
-                  <a:tcPr marL="91440" marR="91440" marT="45720" marB="45720">
-                    <a:lnL w="2540" cap="flat" cmpd="sng" algn="ctr">
-                      <a:solidFill>
-                        <a:srgbClr val="EEEEEE"/>
-                      </a:solidFill>
-                      <a:prstDash val="solid"/>
-                      <a:round/>
-                      <a:headEnd type="none" w="med" len="med"/>
-                      <a:tailEnd type="none" w="med" len="med"/>
-                    </a:lnL>
-                    <a:lnR w="2540" cap="flat" cmpd="sng" algn="ctr">
-                      <a:solidFill>
-                        <a:srgbClr val="EEEEEE"/>
-                      </a:solidFill>
-                      <a:prstDash val="solid"/>
-                      <a:round/>
-                      <a:headEnd type="none" w="med" len="med"/>
-                      <a:tailEnd type="none" w="med" len="med"/>
-                    </a:lnR>
-                    <a:lnT w="2540" cap="flat" cmpd="sng" algn="ctr">
-                      <a:solidFill>
-                        <a:srgbClr val="EEEEEE"/>
-                      </a:solidFill>
-                      <a:prstDash val="solid"/>
-                      <a:round/>
-                      <a:headEnd type="none" w="med" len="med"/>
-                      <a:tailEnd type="none" w="med" len="med"/>
-                    </a:lnT>
-                    <a:lnB w="2540" cap="flat" cmpd="sng" algn="ctr">
-                      <a:solidFill>
-                        <a:srgbClr val="EEEEEE"/>
-                      </a:solidFill>
-                      <a:prstDash val="solid"/>
-                      <a:round/>
-                      <a:headEnd type="none" w="med" len="med"/>
-                      <a:tailEnd type="none" w="med" len="med"/>
-                    </a:lnB>
-                  </a:tcPr>
-                </a:tc>
-                <a:tc>
-                  <a:txBody>
-                    <a:bodyPr/>
-                    <a:lstStyle/>
-                    <a:p>
-                      <a:pPr algn="ctr" indent="0" marL="0">
-                        <a:buNone/>
-                      </a:pPr>
-                      <a:endParaRPr lang="en-US" sz="500" dirty="0">
-                        <a:latin typeface="Calibri" charset="0"/>
-                        <a:ea typeface="Calibri" charset="0"/>
-                        <a:cs typeface="Calibri" charset="0"/>
-                      </a:endParaRPr>
-                    </a:p>
-                  </a:txBody>
-                  <a:tcPr marL="91440" marR="91440" marT="45720" marB="45720">
-                    <a:lnL w="2540" cap="flat" cmpd="sng" algn="ctr">
-                      <a:solidFill>
-                        <a:srgbClr val="EEEEEE"/>
-                      </a:solidFill>
-                      <a:prstDash val="solid"/>
-                      <a:round/>
-                      <a:headEnd type="none" w="med" len="med"/>
-                      <a:tailEnd type="none" w="med" len="med"/>
-                    </a:lnL>
-                    <a:lnR w="2540" cap="flat" cmpd="sng" algn="ctr">
-                      <a:solidFill>
-                        <a:srgbClr val="EEEEEE"/>
-                      </a:solidFill>
-                      <a:prstDash val="solid"/>
-                      <a:round/>
-                      <a:headEnd type="none" w="med" len="med"/>
-                      <a:tailEnd type="none" w="med" len="med"/>
-                    </a:lnR>
-                    <a:lnT w="2540" cap="flat" cmpd="sng" algn="ctr">
-                      <a:solidFill>
-                        <a:srgbClr val="EEEEEE"/>
-                      </a:solidFill>
-                      <a:prstDash val="solid"/>
-                      <a:round/>
-                      <a:headEnd type="none" w="med" len="med"/>
-                      <a:tailEnd type="none" w="med" len="med"/>
-                    </a:lnT>
-                    <a:lnB w="2540" cap="flat" cmpd="sng" algn="ctr">
-                      <a:solidFill>
-                        <a:srgbClr val="EEEEEE"/>
-                      </a:solidFill>
-                      <a:prstDash val="solid"/>
-                      <a:round/>
-                      <a:headEnd type="none" w="med" len="med"/>
-                      <a:tailEnd type="none" w="med" len="med"/>
-                    </a:lnB>
-                  </a:tcPr>
-                </a:tc>
-                <a:tc>
-                  <a:txBody>
-                    <a:bodyPr/>
-                    <a:lstStyle/>
-                    <a:p>
-                      <a:pPr algn="ctr" indent="0" marL="0">
-                        <a:buNone/>
-                      </a:pPr>
-                      <a:r>
-                        <a:rPr lang="en-US" sz="500" b="1" dirty="0">
-                          <a:solidFill>
-                            <a:srgbClr val="777777"/>
-                          </a:solidFill>
-                          <a:latin typeface="Calibri" pitchFamily="34" charset="0"/>
-                          <a:ea typeface="Calibri" pitchFamily="34" charset="-122"/>
-                          <a:cs typeface="Calibri" pitchFamily="34" charset="-120"/>
-                        </a:rPr>
-                        <a:t>3.62%</a:t>
-                      </a:r>
-                      <a:endParaRPr lang="en-US" sz="500" dirty="0">
-                        <a:latin typeface="Calibri" charset="0"/>
-                        <a:ea typeface="Calibri" charset="0"/>
-                        <a:cs typeface="Calibri" charset="0"/>
-                      </a:endParaRPr>
-                    </a:p>
-                  </a:txBody>
-                  <a:tcPr marL="91440" marR="91440" marT="45720" marB="45720">
-                    <a:lnL w="2540" cap="flat" cmpd="sng" algn="ctr">
-                      <a:solidFill>
-                        <a:srgbClr val="EEEEEE"/>
-                      </a:solidFill>
-                      <a:prstDash val="solid"/>
-                      <a:round/>
-                      <a:headEnd type="none" w="med" len="med"/>
-                      <a:tailEnd type="none" w="med" len="med"/>
-                    </a:lnL>
-                    <a:lnR w="2540" cap="flat" cmpd="sng" algn="ctr">
-                      <a:solidFill>
-                        <a:srgbClr val="EEEEEE"/>
-                      </a:solidFill>
-                      <a:prstDash val="solid"/>
-                      <a:round/>
-                      <a:headEnd type="none" w="med" len="med"/>
-                      <a:tailEnd type="none" w="med" len="med"/>
-                    </a:lnR>
-                    <a:lnT w="2540" cap="flat" cmpd="sng" algn="ctr">
-                      <a:solidFill>
-                        <a:srgbClr val="EEEEEE"/>
-                      </a:solidFill>
-                      <a:prstDash val="solid"/>
-                      <a:round/>
-                      <a:headEnd type="none" w="med" len="med"/>
-                      <a:tailEnd type="none" w="med" len="med"/>
-                    </a:lnT>
-                    <a:lnB w="2540" cap="flat" cmpd="sng" algn="ctr">
-                      <a:solidFill>
-                        <a:srgbClr val="EEEEEE"/>
-                      </a:solidFill>
-                      <a:prstDash val="solid"/>
-                      <a:round/>
-                      <a:headEnd type="none" w="med" len="med"/>
-                      <a:tailEnd type="none" w="med" len="med"/>
-                    </a:lnB>
-                  </a:tcPr>
-                </a:tc>
-              </a:tr>
-              <a:tr h="123444">
-                <a:tc>
-                  <a:txBody>
-                    <a:bodyPr/>
-                    <a:lstStyle/>
-                    <a:p>
-                      <a:pPr algn="l" indent="0" marL="0">
-                        <a:buNone/>
-                      </a:pPr>
-                      <a:endParaRPr lang="en-US" sz="500" dirty="0">
-                        <a:latin typeface="Calibri" charset="0"/>
-                        <a:ea typeface="Calibri" charset="0"/>
-                        <a:cs typeface="Calibri" charset="0"/>
-                      </a:endParaRPr>
-                    </a:p>
-                  </a:txBody>
-                  <a:tcPr marL="91440" marR="91440" marT="45720" marB="45720">
-                    <a:lnL w="2540" cap="flat" cmpd="sng" algn="ctr">
-                      <a:solidFill>
-                        <a:srgbClr val="EEEEEE"/>
-                      </a:solidFill>
-                      <a:prstDash val="solid"/>
-                      <a:round/>
-                      <a:headEnd type="none" w="med" len="med"/>
-                      <a:tailEnd type="none" w="med" len="med"/>
-                    </a:lnL>
-                    <a:lnR w="2540" cap="flat" cmpd="sng" algn="ctr">
-                      <a:solidFill>
-                        <a:srgbClr val="EEEEEE"/>
-                      </a:solidFill>
-                      <a:prstDash val="solid"/>
-                      <a:round/>
-                      <a:headEnd type="none" w="med" len="med"/>
-                      <a:tailEnd type="none" w="med" len="med"/>
-                    </a:lnR>
-                    <a:lnT w="2540" cap="flat" cmpd="sng" algn="ctr">
-                      <a:solidFill>
-                        <a:srgbClr val="EEEEEE"/>
-                      </a:solidFill>
-                      <a:prstDash val="solid"/>
-                      <a:round/>
-                      <a:headEnd type="none" w="med" len="med"/>
-                      <a:tailEnd type="none" w="med" len="med"/>
-                    </a:lnT>
-                    <a:lnB w="2540" cap="flat" cmpd="sng" algn="ctr">
-                      <a:solidFill>
-                        <a:srgbClr val="EEEEEE"/>
-                      </a:solidFill>
-                      <a:prstDash val="solid"/>
-                      <a:round/>
-                      <a:headEnd type="none" w="med" len="med"/>
-                      <a:tailEnd type="none" w="med" len="med"/>
-                    </a:lnB>
-                  </a:tcPr>
-                </a:tc>
-                <a:tc>
-                  <a:txBody>
-                    <a:bodyPr/>
-                    <a:lstStyle/>
-                    <a:p>
-                      <a:pPr algn="l" indent="0" marL="0">
-                        <a:buNone/>
-                      </a:pPr>
-                      <a:r>
-                        <a:rPr lang="en-US" sz="500" dirty="0">
-                          <a:solidFill>
-                            <a:srgbClr val="999999"/>
-                          </a:solidFill>
-                          <a:latin typeface="Calibri" pitchFamily="34" charset="0"/>
-                          <a:ea typeface="Calibri" pitchFamily="34" charset="-122"/>
-                          <a:cs typeface="Calibri" pitchFamily="34" charset="-120"/>
-                        </a:rPr>
-                        <a:t>Competencia</a:t>
-                      </a:r>
-                      <a:endParaRPr lang="en-US" sz="500" dirty="0">
-                        <a:latin typeface="Calibri" charset="0"/>
-                        <a:ea typeface="Calibri" charset="0"/>
-                        <a:cs typeface="Calibri" charset="0"/>
-                      </a:endParaRPr>
-                    </a:p>
-                  </a:txBody>
-                  <a:tcPr marL="91440" marR="91440" marT="45720" marB="45720">
-                    <a:lnL w="2540" cap="flat" cmpd="sng" algn="ctr">
-                      <a:solidFill>
-                        <a:srgbClr val="EEEEEE"/>
-                      </a:solidFill>
-                      <a:prstDash val="solid"/>
-                      <a:round/>
-                      <a:headEnd type="none" w="med" len="med"/>
-                      <a:tailEnd type="none" w="med" len="med"/>
-                    </a:lnL>
-                    <a:lnR w="2540" cap="flat" cmpd="sng" algn="ctr">
-                      <a:solidFill>
-                        <a:srgbClr val="EEEEEE"/>
-                      </a:solidFill>
-                      <a:prstDash val="solid"/>
-                      <a:round/>
-                      <a:headEnd type="none" w="med" len="med"/>
-                      <a:tailEnd type="none" w="med" len="med"/>
-                    </a:lnR>
-                    <a:lnT w="2540" cap="flat" cmpd="sng" algn="ctr">
-                      <a:solidFill>
-                        <a:srgbClr val="EEEEEE"/>
-                      </a:solidFill>
-                      <a:prstDash val="solid"/>
-                      <a:round/>
-                      <a:headEnd type="none" w="med" len="med"/>
-                      <a:tailEnd type="none" w="med" len="med"/>
-                    </a:lnT>
-                    <a:lnB w="2540" cap="flat" cmpd="sng" algn="ctr">
-                      <a:solidFill>
-                        <a:srgbClr val="EEEEEE"/>
-                      </a:solidFill>
-                      <a:prstDash val="solid"/>
-                      <a:round/>
-                      <a:headEnd type="none" w="med" len="med"/>
-                      <a:tailEnd type="none" w="med" len="med"/>
-                    </a:lnB>
-                  </a:tcPr>
-                </a:tc>
-                <a:tc>
-                  <a:txBody>
-                    <a:bodyPr/>
-                    <a:lstStyle/>
-                    <a:p>
-                      <a:pPr algn="ctr" indent="0" marL="0">
-                        <a:buNone/>
-                      </a:pPr>
-                      <a:endParaRPr lang="en-US" sz="500" dirty="0">
-                        <a:latin typeface="Calibri" charset="0"/>
-                        <a:ea typeface="Calibri" charset="0"/>
-                        <a:cs typeface="Calibri" charset="0"/>
-                      </a:endParaRPr>
-                    </a:p>
-                  </a:txBody>
-                  <a:tcPr marL="91440" marR="91440" marT="45720" marB="45720">
-                    <a:lnL w="2540" cap="flat" cmpd="sng" algn="ctr">
-                      <a:solidFill>
-                        <a:srgbClr val="EEEEEE"/>
-                      </a:solidFill>
-                      <a:prstDash val="solid"/>
-                      <a:round/>
-                      <a:headEnd type="none" w="med" len="med"/>
-                      <a:tailEnd type="none" w="med" len="med"/>
-                    </a:lnL>
-                    <a:lnR w="2540" cap="flat" cmpd="sng" algn="ctr">
-                      <a:solidFill>
-                        <a:srgbClr val="EEEEEE"/>
-                      </a:solidFill>
-                      <a:prstDash val="solid"/>
-                      <a:round/>
-                      <a:headEnd type="none" w="med" len="med"/>
-                      <a:tailEnd type="none" w="med" len="med"/>
-                    </a:lnR>
-                    <a:lnT w="2540" cap="flat" cmpd="sng" algn="ctr">
-                      <a:solidFill>
-                        <a:srgbClr val="EEEEEE"/>
-                      </a:solidFill>
-                      <a:prstDash val="solid"/>
-                      <a:round/>
-                      <a:headEnd type="none" w="med" len="med"/>
-                      <a:tailEnd type="none" w="med" len="med"/>
-                    </a:lnT>
-                    <a:lnB w="2540" cap="flat" cmpd="sng" algn="ctr">
-                      <a:solidFill>
-                        <a:srgbClr val="EEEEEE"/>
-                      </a:solidFill>
-                      <a:prstDash val="solid"/>
-                      <a:round/>
-                      <a:headEnd type="none" w="med" len="med"/>
-                      <a:tailEnd type="none" w="med" len="med"/>
-                    </a:lnB>
-                  </a:tcPr>
-                </a:tc>
-                <a:tc>
-                  <a:txBody>
-                    <a:bodyPr/>
-                    <a:lstStyle/>
-                    <a:p>
-                      <a:pPr algn="ctr" indent="0" marL="0">
-                        <a:buNone/>
-                      </a:pPr>
-                      <a:endParaRPr lang="en-US" sz="500" dirty="0">
-                        <a:latin typeface="Calibri" charset="0"/>
-                        <a:ea typeface="Calibri" charset="0"/>
-                        <a:cs typeface="Calibri" charset="0"/>
-                      </a:endParaRPr>
-                    </a:p>
-                  </a:txBody>
-                  <a:tcPr marL="91440" marR="91440" marT="45720" marB="45720">
-                    <a:lnL w="2540" cap="flat" cmpd="sng" algn="ctr">
-                      <a:solidFill>
-                        <a:srgbClr val="EEEEEE"/>
-                      </a:solidFill>
-                      <a:prstDash val="solid"/>
-                      <a:round/>
-                      <a:headEnd type="none" w="med" len="med"/>
-                      <a:tailEnd type="none" w="med" len="med"/>
-                    </a:lnL>
-                    <a:lnR w="2540" cap="flat" cmpd="sng" algn="ctr">
-                      <a:solidFill>
-                        <a:srgbClr val="EEEEEE"/>
-                      </a:solidFill>
-                      <a:prstDash val="solid"/>
-                      <a:round/>
-                      <a:headEnd type="none" w="med" len="med"/>
-                      <a:tailEnd type="none" w="med" len="med"/>
-                    </a:lnR>
-                    <a:lnT w="2540" cap="flat" cmpd="sng" algn="ctr">
-                      <a:solidFill>
-                        <a:srgbClr val="EEEEEE"/>
-                      </a:solidFill>
-                      <a:prstDash val="solid"/>
-                      <a:round/>
-                      <a:headEnd type="none" w="med" len="med"/>
-                      <a:tailEnd type="none" w="med" len="med"/>
-                    </a:lnT>
-                    <a:lnB w="2540" cap="flat" cmpd="sng" algn="ctr">
-                      <a:solidFill>
-                        <a:srgbClr val="EEEEEE"/>
-                      </a:solidFill>
-                      <a:prstDash val="solid"/>
-                      <a:round/>
-                      <a:headEnd type="none" w="med" len="med"/>
-                      <a:tailEnd type="none" w="med" len="med"/>
-                    </a:lnB>
-                  </a:tcPr>
-                </a:tc>
-                <a:tc>
-                  <a:txBody>
-                    <a:bodyPr/>
-                    <a:lstStyle/>
-                    <a:p>
-                      <a:pPr algn="ctr" indent="0" marL="0">
-                        <a:buNone/>
-                      </a:pPr>
-                      <a:endParaRPr lang="en-US" sz="500" dirty="0">
-                        <a:latin typeface="Calibri" charset="0"/>
-                        <a:ea typeface="Calibri" charset="0"/>
-                        <a:cs typeface="Calibri" charset="0"/>
-                      </a:endParaRPr>
-                    </a:p>
-                  </a:txBody>
-                  <a:tcPr marL="91440" marR="91440" marT="45720" marB="45720">
-                    <a:lnL w="2540" cap="flat" cmpd="sng" algn="ctr">
-                      <a:solidFill>
-                        <a:srgbClr val="EEEEEE"/>
-                      </a:solidFill>
-                      <a:prstDash val="solid"/>
-                      <a:round/>
-                      <a:headEnd type="none" w="med" len="med"/>
-                      <a:tailEnd type="none" w="med" len="med"/>
-                    </a:lnL>
-                    <a:lnR w="2540" cap="flat" cmpd="sng" algn="ctr">
-                      <a:solidFill>
-                        <a:srgbClr val="EEEEEE"/>
-                      </a:solidFill>
-                      <a:prstDash val="solid"/>
-                      <a:round/>
-                      <a:headEnd type="none" w="med" len="med"/>
-                      <a:tailEnd type="none" w="med" len="med"/>
-                    </a:lnR>
-                    <a:lnT w="2540" cap="flat" cmpd="sng" algn="ctr">
-                      <a:solidFill>
-                        <a:srgbClr val="EEEEEE"/>
-                      </a:solidFill>
-                      <a:prstDash val="solid"/>
-                      <a:round/>
-                      <a:headEnd type="none" w="med" len="med"/>
-                      <a:tailEnd type="none" w="med" len="med"/>
-                    </a:lnT>
-                    <a:lnB w="2540" cap="flat" cmpd="sng" algn="ctr">
-                      <a:solidFill>
-                        <a:srgbClr val="EEEEEE"/>
-                      </a:solidFill>
-                      <a:prstDash val="solid"/>
-                      <a:round/>
-                      <a:headEnd type="none" w="med" len="med"/>
-                      <a:tailEnd type="none" w="med" len="med"/>
-                    </a:lnB>
-                  </a:tcPr>
-                </a:tc>
-                <a:tc>
-                  <a:txBody>
-                    <a:bodyPr/>
-                    <a:lstStyle/>
-                    <a:p>
-                      <a:pPr algn="ctr" indent="0" marL="0">
-                        <a:buNone/>
-                      </a:pPr>
-                      <a:endParaRPr lang="en-US" sz="500" dirty="0">
-                        <a:latin typeface="Calibri" charset="0"/>
-                        <a:ea typeface="Calibri" charset="0"/>
-                        <a:cs typeface="Calibri" charset="0"/>
-                      </a:endParaRPr>
-                    </a:p>
-                  </a:txBody>
-                  <a:tcPr marL="91440" marR="91440" marT="45720" marB="45720">
-                    <a:lnL w="2540" cap="flat" cmpd="sng" algn="ctr">
-                      <a:solidFill>
-                        <a:srgbClr val="EEEEEE"/>
-                      </a:solidFill>
-                      <a:prstDash val="solid"/>
-                      <a:round/>
-                      <a:headEnd type="none" w="med" len="med"/>
-                      <a:tailEnd type="none" w="med" len="med"/>
-                    </a:lnL>
-                    <a:lnR w="2540" cap="flat" cmpd="sng" algn="ctr">
-                      <a:solidFill>
-                        <a:srgbClr val="EEEEEE"/>
-                      </a:solidFill>
-                      <a:prstDash val="solid"/>
-                      <a:round/>
-                      <a:headEnd type="none" w="med" len="med"/>
-                      <a:tailEnd type="none" w="med" len="med"/>
-                    </a:lnR>
-                    <a:lnT w="2540" cap="flat" cmpd="sng" algn="ctr">
-                      <a:solidFill>
-                        <a:srgbClr val="EEEEEE"/>
-                      </a:solidFill>
-                      <a:prstDash val="solid"/>
-                      <a:round/>
-                      <a:headEnd type="none" w="med" len="med"/>
-                      <a:tailEnd type="none" w="med" len="med"/>
-                    </a:lnT>
-                    <a:lnB w="2540" cap="flat" cmpd="sng" algn="ctr">
-                      <a:solidFill>
-                        <a:srgbClr val="EEEEEE"/>
-                      </a:solidFill>
-                      <a:prstDash val="solid"/>
-                      <a:round/>
-                      <a:headEnd type="none" w="med" len="med"/>
-                      <a:tailEnd type="none" w="med" len="med"/>
-                    </a:lnB>
-                  </a:tcPr>
-                </a:tc>
-                <a:tc>
-                  <a:txBody>
-                    <a:bodyPr/>
-                    <a:lstStyle/>
-                    <a:p>
-                      <a:pPr algn="ctr" indent="0" marL="0">
-                        <a:buNone/>
-                      </a:pPr>
-                      <a:r>
-                        <a:rPr lang="en-US" sz="500" dirty="0">
-                          <a:solidFill>
-                            <a:srgbClr val="999999"/>
-                          </a:solidFill>
-                          <a:latin typeface="Calibri" pitchFamily="34" charset="0"/>
-                          <a:ea typeface="Calibri" pitchFamily="34" charset="-122"/>
-                          <a:cs typeface="Calibri" pitchFamily="34" charset="-120"/>
-                        </a:rPr>
-                        <a:t>0.26%</a:t>
-                      </a:r>
-                      <a:endParaRPr lang="en-US" sz="500" dirty="0">
-                        <a:latin typeface="Calibri" charset="0"/>
-                        <a:ea typeface="Calibri" charset="0"/>
-                        <a:cs typeface="Calibri" charset="0"/>
-                      </a:endParaRPr>
-                    </a:p>
-                  </a:txBody>
-                  <a:tcPr marL="91440" marR="91440" marT="45720" marB="45720">
-                    <a:lnL w="2540" cap="flat" cmpd="sng" algn="ctr">
-                      <a:solidFill>
-                        <a:srgbClr val="EEEEEE"/>
-                      </a:solidFill>
-                      <a:prstDash val="solid"/>
-                      <a:round/>
-                      <a:headEnd type="none" w="med" len="med"/>
-                      <a:tailEnd type="none" w="med" len="med"/>
-                    </a:lnL>
-                    <a:lnR w="2540" cap="flat" cmpd="sng" algn="ctr">
-                      <a:solidFill>
-                        <a:srgbClr val="EEEEEE"/>
-                      </a:solidFill>
-                      <a:prstDash val="solid"/>
-                      <a:round/>
-                      <a:headEnd type="none" w="med" len="med"/>
-                      <a:tailEnd type="none" w="med" len="med"/>
-                    </a:lnR>
-                    <a:lnT w="2540" cap="flat" cmpd="sng" algn="ctr">
-                      <a:solidFill>
-                        <a:srgbClr val="EEEEEE"/>
-                      </a:solidFill>
-                      <a:prstDash val="solid"/>
-                      <a:round/>
-                      <a:headEnd type="none" w="med" len="med"/>
-                      <a:tailEnd type="none" w="med" len="med"/>
-                    </a:lnT>
-                    <a:lnB w="2540" cap="flat" cmpd="sng" algn="ctr">
-                      <a:solidFill>
-                        <a:srgbClr val="EEEEEE"/>
-                      </a:solidFill>
-                      <a:prstDash val="solid"/>
-                      <a:round/>
-                      <a:headEnd type="none" w="med" len="med"/>
-                      <a:tailEnd type="none" w="med" len="med"/>
-                    </a:lnB>
-                  </a:tcPr>
-                </a:tc>
-                <a:tc>
-                  <a:txBody>
-                    <a:bodyPr/>
-                    <a:lstStyle/>
-                    <a:p>
-                      <a:pPr algn="ctr" indent="0" marL="0">
-                        <a:buNone/>
-                      </a:pPr>
-                      <a:endParaRPr lang="en-US" sz="500" dirty="0">
-                        <a:latin typeface="Calibri" charset="0"/>
-                        <a:ea typeface="Calibri" charset="0"/>
-                        <a:cs typeface="Calibri" charset="0"/>
-                      </a:endParaRPr>
-                    </a:p>
-                  </a:txBody>
-                  <a:tcPr marL="91440" marR="91440" marT="45720" marB="45720">
-                    <a:lnL w="2540" cap="flat" cmpd="sng" algn="ctr">
-                      <a:solidFill>
-                        <a:srgbClr val="EEEEEE"/>
-                      </a:solidFill>
-                      <a:prstDash val="solid"/>
-                      <a:round/>
-                      <a:headEnd type="none" w="med" len="med"/>
-                      <a:tailEnd type="none" w="med" len="med"/>
-                    </a:lnL>
-                    <a:lnR w="2540" cap="flat" cmpd="sng" algn="ctr">
-                      <a:solidFill>
-                        <a:srgbClr val="EEEEEE"/>
-                      </a:solidFill>
-                      <a:prstDash val="solid"/>
-                      <a:round/>
-                      <a:headEnd type="none" w="med" len="med"/>
-                      <a:tailEnd type="none" w="med" len="med"/>
-                    </a:lnR>
-                    <a:lnT w="2540" cap="flat" cmpd="sng" algn="ctr">
-                      <a:solidFill>
-                        <a:srgbClr val="EEEEEE"/>
-                      </a:solidFill>
-                      <a:prstDash val="solid"/>
-                      <a:round/>
-                      <a:headEnd type="none" w="med" len="med"/>
-                      <a:tailEnd type="none" w="med" len="med"/>
-                    </a:lnT>
-                    <a:lnB w="2540" cap="flat" cmpd="sng" algn="ctr">
-                      <a:solidFill>
-                        <a:srgbClr val="EEEEEE"/>
-                      </a:solidFill>
-                      <a:prstDash val="solid"/>
-                      <a:round/>
-                      <a:headEnd type="none" w="med" len="med"/>
-                      <a:tailEnd type="none" w="med" len="med"/>
-                    </a:lnB>
-                  </a:tcPr>
-                </a:tc>
-                <a:tc>
-                  <a:txBody>
-                    <a:bodyPr/>
-                    <a:lstStyle/>
-                    <a:p>
-                      <a:pPr algn="ctr" indent="0" marL="0">
-                        <a:buNone/>
-                      </a:pPr>
-                      <a:endParaRPr lang="en-US" sz="500" dirty="0">
-                        <a:latin typeface="Calibri" charset="0"/>
-                        <a:ea typeface="Calibri" charset="0"/>
-                        <a:cs typeface="Calibri" charset="0"/>
-                      </a:endParaRPr>
-                    </a:p>
-                  </a:txBody>
-                  <a:tcPr marL="91440" marR="91440" marT="45720" marB="45720">
-                    <a:lnL w="2540" cap="flat" cmpd="sng" algn="ctr">
-                      <a:solidFill>
-                        <a:srgbClr val="EEEEEE"/>
-                      </a:solidFill>
-                      <a:prstDash val="solid"/>
-                      <a:round/>
-                      <a:headEnd type="none" w="med" len="med"/>
-                      <a:tailEnd type="none" w="med" len="med"/>
-                    </a:lnL>
-                    <a:lnR w="2540" cap="flat" cmpd="sng" algn="ctr">
-                      <a:solidFill>
-                        <a:srgbClr val="EEEEEE"/>
-                      </a:solidFill>
-                      <a:prstDash val="solid"/>
-                      <a:round/>
-                      <a:headEnd type="none" w="med" len="med"/>
-                      <a:tailEnd type="none" w="med" len="med"/>
-                    </a:lnR>
-                    <a:lnT w="2540" cap="flat" cmpd="sng" algn="ctr">
-                      <a:solidFill>
-                        <a:srgbClr val="EEEEEE"/>
-                      </a:solidFill>
-                      <a:prstDash val="solid"/>
-                      <a:round/>
-                      <a:headEnd type="none" w="med" len="med"/>
-                      <a:tailEnd type="none" w="med" len="med"/>
-                    </a:lnT>
-                    <a:lnB w="2540" cap="flat" cmpd="sng" algn="ctr">
-                      <a:solidFill>
-                        <a:srgbClr val="EEEEEE"/>
-                      </a:solidFill>
-                      <a:prstDash val="solid"/>
-                      <a:round/>
-                      <a:headEnd type="none" w="med" len="med"/>
-                      <a:tailEnd type="none" w="med" len="med"/>
-                    </a:lnB>
-                  </a:tcPr>
-                </a:tc>
-                <a:tc>
-                  <a:txBody>
-                    <a:bodyPr/>
-                    <a:lstStyle/>
-                    <a:p>
-                      <a:pPr algn="ctr" indent="0" marL="0">
-                        <a:buNone/>
-                      </a:pPr>
-                      <a:endParaRPr lang="en-US" sz="500" dirty="0">
-                        <a:latin typeface="Calibri" charset="0"/>
-                        <a:ea typeface="Calibri" charset="0"/>
-                        <a:cs typeface="Calibri" charset="0"/>
-                      </a:endParaRPr>
-                    </a:p>
-                  </a:txBody>
-                  <a:tcPr marL="91440" marR="91440" marT="45720" marB="45720">
-                    <a:lnL w="2540" cap="flat" cmpd="sng" algn="ctr">
-                      <a:solidFill>
-                        <a:srgbClr val="EEEEEE"/>
-                      </a:solidFill>
-                      <a:prstDash val="solid"/>
-                      <a:round/>
-                      <a:headEnd type="none" w="med" len="med"/>
-                      <a:tailEnd type="none" w="med" len="med"/>
-                    </a:lnL>
-                    <a:lnR w="2540" cap="flat" cmpd="sng" algn="ctr">
-                      <a:solidFill>
-                        <a:srgbClr val="EEEEEE"/>
-                      </a:solidFill>
-                      <a:prstDash val="solid"/>
-                      <a:round/>
-                      <a:headEnd type="none" w="med" len="med"/>
-                      <a:tailEnd type="none" w="med" len="med"/>
-                    </a:lnR>
-                    <a:lnT w="2540" cap="flat" cmpd="sng" algn="ctr">
-                      <a:solidFill>
-                        <a:srgbClr val="EEEEEE"/>
-                      </a:solidFill>
-                      <a:prstDash val="solid"/>
-                      <a:round/>
-                      <a:headEnd type="none" w="med" len="med"/>
-                      <a:tailEnd type="none" w="med" len="med"/>
-                    </a:lnT>
-                    <a:lnB w="2540" cap="flat" cmpd="sng" algn="ctr">
-                      <a:solidFill>
-                        <a:srgbClr val="EEEEEE"/>
-                      </a:solidFill>
-                      <a:prstDash val="solid"/>
-                      <a:round/>
-                      <a:headEnd type="none" w="med" len="med"/>
-                      <a:tailEnd type="none" w="med" len="med"/>
-                    </a:lnB>
-                  </a:tcPr>
-                </a:tc>
-                <a:tc>
-                  <a:txBody>
-                    <a:bodyPr/>
-                    <a:lstStyle/>
-                    <a:p>
-                      <a:pPr algn="ctr" indent="0" marL="0">
-                        <a:buNone/>
-                      </a:pPr>
-                      <a:endParaRPr lang="en-US" sz="500" dirty="0">
-                        <a:latin typeface="Calibri" charset="0"/>
-                        <a:ea typeface="Calibri" charset="0"/>
-                        <a:cs typeface="Calibri" charset="0"/>
-                      </a:endParaRPr>
-                    </a:p>
-                  </a:txBody>
-                  <a:tcPr marL="91440" marR="91440" marT="45720" marB="45720">
-                    <a:lnL w="2540" cap="flat" cmpd="sng" algn="ctr">
-                      <a:solidFill>
-                        <a:srgbClr val="EEEEEE"/>
-                      </a:solidFill>
-                      <a:prstDash val="solid"/>
-                      <a:round/>
-                      <a:headEnd type="none" w="med" len="med"/>
-                      <a:tailEnd type="none" w="med" len="med"/>
-                    </a:lnL>
-                    <a:lnR w="2540" cap="flat" cmpd="sng" algn="ctr">
-                      <a:solidFill>
-                        <a:srgbClr val="EEEEEE"/>
-                      </a:solidFill>
-                      <a:prstDash val="solid"/>
-                      <a:round/>
-                      <a:headEnd type="none" w="med" len="med"/>
-                      <a:tailEnd type="none" w="med" len="med"/>
-                    </a:lnR>
-                    <a:lnT w="2540" cap="flat" cmpd="sng" algn="ctr">
-                      <a:solidFill>
-                        <a:srgbClr val="EEEEEE"/>
-                      </a:solidFill>
-                      <a:prstDash val="solid"/>
-                      <a:round/>
-                      <a:headEnd type="none" w="med" len="med"/>
-                      <a:tailEnd type="none" w="med" len="med"/>
-                    </a:lnT>
-                    <a:lnB w="2540" cap="flat" cmpd="sng" algn="ctr">
-                      <a:solidFill>
-                        <a:srgbClr val="EEEEEE"/>
-                      </a:solidFill>
-                      <a:prstDash val="solid"/>
-                      <a:round/>
-                      <a:headEnd type="none" w="med" len="med"/>
-                      <a:tailEnd type="none" w="med" len="med"/>
-                    </a:lnB>
-                  </a:tcPr>
-                </a:tc>
-                <a:tc>
-                  <a:txBody>
-                    <a:bodyPr/>
-                    <a:lstStyle/>
-                    <a:p>
-                      <a:pPr algn="ctr" indent="0" marL="0">
-                        <a:buNone/>
-                      </a:pPr>
-                      <a:endParaRPr lang="en-US" sz="500" dirty="0">
-                        <a:latin typeface="Calibri" charset="0"/>
-                        <a:ea typeface="Calibri" charset="0"/>
-                        <a:cs typeface="Calibri" charset="0"/>
-                      </a:endParaRPr>
-                    </a:p>
-                  </a:txBody>
-                  <a:tcPr marL="91440" marR="91440" marT="45720" marB="45720">
-                    <a:lnL w="2540" cap="flat" cmpd="sng" algn="ctr">
-                      <a:solidFill>
-                        <a:srgbClr val="EEEEEE"/>
-                      </a:solidFill>
-                      <a:prstDash val="solid"/>
-                      <a:round/>
-                      <a:headEnd type="none" w="med" len="med"/>
-                      <a:tailEnd type="none" w="med" len="med"/>
-                    </a:lnL>
-                    <a:lnR w="2540" cap="flat" cmpd="sng" algn="ctr">
-                      <a:solidFill>
-                        <a:srgbClr val="EEEEEE"/>
-                      </a:solidFill>
-                      <a:prstDash val="solid"/>
-                      <a:round/>
-                      <a:headEnd type="none" w="med" len="med"/>
-                      <a:tailEnd type="none" w="med" len="med"/>
-                    </a:lnR>
-                    <a:lnT w="2540" cap="flat" cmpd="sng" algn="ctr">
-                      <a:solidFill>
-                        <a:srgbClr val="EEEEEE"/>
-                      </a:solidFill>
-                      <a:prstDash val="solid"/>
-                      <a:round/>
-                      <a:headEnd type="none" w="med" len="med"/>
-                      <a:tailEnd type="none" w="med" len="med"/>
-                    </a:lnT>
-                    <a:lnB w="2540" cap="flat" cmpd="sng" algn="ctr">
-                      <a:solidFill>
-                        <a:srgbClr val="EEEEEE"/>
-                      </a:solidFill>
-                      <a:prstDash val="solid"/>
-                      <a:round/>
-                      <a:headEnd type="none" w="med" len="med"/>
-                      <a:tailEnd type="none" w="med" len="med"/>
-                    </a:lnB>
-                  </a:tcPr>
-                </a:tc>
-                <a:tc>
-                  <a:txBody>
-                    <a:bodyPr/>
-                    <a:lstStyle/>
-                    <a:p>
-                      <a:pPr algn="ctr" indent="0" marL="0">
-                        <a:buNone/>
-                      </a:pPr>
-                      <a:endParaRPr lang="en-US" sz="500" dirty="0">
-                        <a:latin typeface="Calibri" charset="0"/>
-                        <a:ea typeface="Calibri" charset="0"/>
-                        <a:cs typeface="Calibri" charset="0"/>
-                      </a:endParaRPr>
-                    </a:p>
-                  </a:txBody>
-                  <a:tcPr marL="91440" marR="91440" marT="45720" marB="45720">
-                    <a:lnL w="2540" cap="flat" cmpd="sng" algn="ctr">
-                      <a:solidFill>
-                        <a:srgbClr val="EEEEEE"/>
-                      </a:solidFill>
-                      <a:prstDash val="solid"/>
-                      <a:round/>
-                      <a:headEnd type="none" w="med" len="med"/>
-                      <a:tailEnd type="none" w="med" len="med"/>
-                    </a:lnL>
-                    <a:lnR w="2540" cap="flat" cmpd="sng" algn="ctr">
-                      <a:solidFill>
-                        <a:srgbClr val="EEEEEE"/>
-                      </a:solidFill>
-                      <a:prstDash val="solid"/>
-                      <a:round/>
-                      <a:headEnd type="none" w="med" len="med"/>
-                      <a:tailEnd type="none" w="med" len="med"/>
-                    </a:lnR>
-                    <a:lnT w="2540" cap="flat" cmpd="sng" algn="ctr">
-                      <a:solidFill>
-                        <a:srgbClr val="EEEEEE"/>
-                      </a:solidFill>
-                      <a:prstDash val="solid"/>
-                      <a:round/>
-                      <a:headEnd type="none" w="med" len="med"/>
-                      <a:tailEnd type="none" w="med" len="med"/>
-                    </a:lnT>
-                    <a:lnB w="2540" cap="flat" cmpd="sng" algn="ctr">
-                      <a:solidFill>
-                        <a:srgbClr val="EEEEEE"/>
-                      </a:solidFill>
-                      <a:prstDash val="solid"/>
-                      <a:round/>
-                      <a:headEnd type="none" w="med" len="med"/>
-                      <a:tailEnd type="none" w="med" len="med"/>
-                    </a:lnB>
-                  </a:tcPr>
-                </a:tc>
-                <a:tc>
-                  <a:txBody>
-                    <a:bodyPr/>
-                    <a:lstStyle/>
-                    <a:p>
-                      <a:pPr algn="ctr" indent="0" marL="0">
-                        <a:buNone/>
-                      </a:pPr>
-                      <a:endParaRPr lang="en-US" sz="500" dirty="0">
-                        <a:latin typeface="Calibri" charset="0"/>
-                        <a:ea typeface="Calibri" charset="0"/>
-                        <a:cs typeface="Calibri" charset="0"/>
-                      </a:endParaRPr>
-                    </a:p>
-                  </a:txBody>
-                  <a:tcPr marL="91440" marR="91440" marT="45720" marB="45720">
-                    <a:lnL w="2540" cap="flat" cmpd="sng" algn="ctr">
-                      <a:solidFill>
-                        <a:srgbClr val="EEEEEE"/>
-                      </a:solidFill>
-                      <a:prstDash val="solid"/>
-                      <a:round/>
-                      <a:headEnd type="none" w="med" len="med"/>
-                      <a:tailEnd type="none" w="med" len="med"/>
-                    </a:lnL>
-                    <a:lnR w="2540" cap="flat" cmpd="sng" algn="ctr">
-                      <a:solidFill>
-                        <a:srgbClr val="EEEEEE"/>
-                      </a:solidFill>
-                      <a:prstDash val="solid"/>
-                      <a:round/>
-                      <a:headEnd type="none" w="med" len="med"/>
-                      <a:tailEnd type="none" w="med" len="med"/>
-                    </a:lnR>
-                    <a:lnT w="2540" cap="flat" cmpd="sng" algn="ctr">
-                      <a:solidFill>
-                        <a:srgbClr val="EEEEEE"/>
-                      </a:solidFill>
-                      <a:prstDash val="solid"/>
-                      <a:round/>
-                      <a:headEnd type="none" w="med" len="med"/>
-                      <a:tailEnd type="none" w="med" len="med"/>
-                    </a:lnT>
-                    <a:lnB w="2540" cap="flat" cmpd="sng" algn="ctr">
-                      <a:solidFill>
-                        <a:srgbClr val="EEEEEE"/>
-                      </a:solidFill>
-                      <a:prstDash val="solid"/>
-                      <a:round/>
-                      <a:headEnd type="none" w="med" len="med"/>
-                      <a:tailEnd type="none" w="med" len="med"/>
-                    </a:lnB>
-                  </a:tcPr>
-                </a:tc>
-                <a:tc>
-                  <a:txBody>
-                    <a:bodyPr/>
-                    <a:lstStyle/>
-                    <a:p>
-                      <a:pPr algn="ctr" indent="0" marL="0">
-                        <a:buNone/>
-                      </a:pPr>
-                      <a:r>
-                        <a:rPr lang="en-US" sz="500" b="1" dirty="0">
-                          <a:solidFill>
-                            <a:srgbClr val="999999"/>
-                          </a:solidFill>
-                          <a:latin typeface="Calibri" pitchFamily="34" charset="0"/>
-                          <a:ea typeface="Calibri" pitchFamily="34" charset="-122"/>
-                          <a:cs typeface="Calibri" pitchFamily="34" charset="-120"/>
-                        </a:rPr>
-                        <a:t>2.32%</a:t>
-                      </a:r>
-                      <a:endParaRPr lang="en-US" sz="500" dirty="0">
-                        <a:latin typeface="Calibri" charset="0"/>
-                        <a:ea typeface="Calibri" charset="0"/>
-                        <a:cs typeface="Calibri" charset="0"/>
-                      </a:endParaRPr>
-                    </a:p>
-                  </a:txBody>
-                  <a:tcPr marL="91440" marR="91440" marT="45720" marB="45720">
-                    <a:lnL w="2540" cap="flat" cmpd="sng" algn="ctr">
-                      <a:solidFill>
-                        <a:srgbClr val="EEEEEE"/>
-                      </a:solidFill>
-                      <a:prstDash val="solid"/>
-                      <a:round/>
-                      <a:headEnd type="none" w="med" len="med"/>
-                      <a:tailEnd type="none" w="med" len="med"/>
-                    </a:lnL>
-                    <a:lnR w="2540" cap="flat" cmpd="sng" algn="ctr">
-                      <a:solidFill>
-                        <a:srgbClr val="EEEEEE"/>
-                      </a:solidFill>
-                      <a:prstDash val="solid"/>
-                      <a:round/>
-                      <a:headEnd type="none" w="med" len="med"/>
-                      <a:tailEnd type="none" w="med" len="med"/>
-                    </a:lnR>
-                    <a:lnT w="2540" cap="flat" cmpd="sng" algn="ctr">
-                      <a:solidFill>
-                        <a:srgbClr val="EEEEEE"/>
-                      </a:solidFill>
-                      <a:prstDash val="solid"/>
-                      <a:round/>
-                      <a:headEnd type="none" w="med" len="med"/>
-                      <a:tailEnd type="none" w="med" len="med"/>
-                    </a:lnT>
-                    <a:lnB w="2540" cap="flat" cmpd="sng" algn="ctr">
-                      <a:solidFill>
-                        <a:srgbClr val="EEEEEE"/>
-                      </a:solidFill>
-                      <a:prstDash val="solid"/>
-                      <a:round/>
-                      <a:headEnd type="none" w="med" len="med"/>
-                      <a:tailEnd type="none" w="med" len="med"/>
-                    </a:lnB>
-                  </a:tcPr>
-                </a:tc>
-              </a:tr>
-              <a:tr h="123444">
-                <a:tc>
-                  <a:txBody>
-                    <a:bodyPr/>
-                    <a:lstStyle/>
-                    <a:p>
-                      <a:pPr algn="l" indent="0" marL="0">
-                        <a:buNone/>
-                      </a:pPr>
-                      <a:endParaRPr lang="en-US" sz="500" dirty="0">
-                        <a:latin typeface="Calibri" charset="0"/>
-                        <a:ea typeface="Calibri" charset="0"/>
-                        <a:cs typeface="Calibri" charset="0"/>
-                      </a:endParaRPr>
-                    </a:p>
-                  </a:txBody>
-                  <a:tcPr marL="91440" marR="91440" marT="45720" marB="45720">
-                    <a:lnL w="2540" cap="flat" cmpd="sng" algn="ctr">
-                      <a:solidFill>
-                        <a:srgbClr val="EEEEEE"/>
-                      </a:solidFill>
-                      <a:prstDash val="solid"/>
-                      <a:round/>
-                      <a:headEnd type="none" w="med" len="med"/>
-                      <a:tailEnd type="none" w="med" len="med"/>
-                    </a:lnL>
-                    <a:lnR w="2540" cap="flat" cmpd="sng" algn="ctr">
-                      <a:solidFill>
-                        <a:srgbClr val="EEEEEE"/>
-                      </a:solidFill>
-                      <a:prstDash val="solid"/>
-                      <a:round/>
-                      <a:headEnd type="none" w="med" len="med"/>
-                      <a:tailEnd type="none" w="med" len="med"/>
-                    </a:lnR>
-                    <a:lnT w="2540" cap="flat" cmpd="sng" algn="ctr">
-                      <a:solidFill>
-                        <a:srgbClr val="EEEEEE"/>
-                      </a:solidFill>
-                      <a:prstDash val="solid"/>
-                      <a:round/>
-                      <a:headEnd type="none" w="med" len="med"/>
-                      <a:tailEnd type="none" w="med" len="med"/>
-                    </a:lnT>
-                    <a:lnB w="2540" cap="flat" cmpd="sng" algn="ctr">
-                      <a:solidFill>
-                        <a:srgbClr val="EEEEEE"/>
-                      </a:solidFill>
-                      <a:prstDash val="solid"/>
-                      <a:round/>
-                      <a:headEnd type="none" w="med" len="med"/>
-                      <a:tailEnd type="none" w="med" len="med"/>
-                    </a:lnB>
-                  </a:tcPr>
-                </a:tc>
-                <a:tc>
-                  <a:txBody>
-                    <a:bodyPr/>
-                    <a:lstStyle/>
-                    <a:p>
-                      <a:pPr algn="l" indent="0" marL="0">
-                        <a:buNone/>
-                      </a:pPr>
-                      <a:r>
-                        <a:rPr lang="en-US" sz="500" dirty="0">
-                          <a:solidFill>
-                            <a:srgbClr val="000000"/>
-                          </a:solidFill>
-                          <a:latin typeface="Calibri" pitchFamily="34" charset="0"/>
-                          <a:ea typeface="Calibri" pitchFamily="34" charset="-122"/>
-                          <a:cs typeface="Calibri" pitchFamily="34" charset="-120"/>
-                        </a:rPr>
-                        <a:t>USD Money Market</a:t>
-                      </a:r>
-                      <a:endParaRPr lang="en-US" sz="500" dirty="0">
-                        <a:latin typeface="Calibri" charset="0"/>
-                        <a:ea typeface="Calibri" charset="0"/>
-                        <a:cs typeface="Calibri" charset="0"/>
-                      </a:endParaRPr>
-                    </a:p>
-                  </a:txBody>
-                  <a:tcPr marL="91440" marR="91440" marT="45720" marB="45720">
-                    <a:lnL w="2540" cap="flat" cmpd="sng" algn="ctr">
-                      <a:solidFill>
-                        <a:srgbClr val="EEEEEE"/>
-                      </a:solidFill>
-                      <a:prstDash val="solid"/>
-                      <a:round/>
-                      <a:headEnd type="none" w="med" len="med"/>
-                      <a:tailEnd type="none" w="med" len="med"/>
-                    </a:lnL>
-                    <a:lnR w="2540" cap="flat" cmpd="sng" algn="ctr">
-                      <a:solidFill>
-                        <a:srgbClr val="EEEEEE"/>
-                      </a:solidFill>
-                      <a:prstDash val="solid"/>
-                      <a:round/>
-                      <a:headEnd type="none" w="med" len="med"/>
-                      <a:tailEnd type="none" w="med" len="med"/>
-                    </a:lnR>
-                    <a:lnT w="2540" cap="flat" cmpd="sng" algn="ctr">
-                      <a:solidFill>
-                        <a:srgbClr val="EEEEEE"/>
-                      </a:solidFill>
-                      <a:prstDash val="solid"/>
-                      <a:round/>
-                      <a:headEnd type="none" w="med" len="med"/>
-                      <a:tailEnd type="none" w="med" len="med"/>
-                    </a:lnT>
-                    <a:lnB w="2540" cap="flat" cmpd="sng" algn="ctr">
-                      <a:solidFill>
-                        <a:srgbClr val="EEEEEE"/>
-                      </a:solidFill>
-                      <a:prstDash val="solid"/>
-                      <a:round/>
-                      <a:headEnd type="none" w="med" len="med"/>
-                      <a:tailEnd type="none" w="med" len="med"/>
-                    </a:lnB>
-                  </a:tcPr>
-                </a:tc>
-                <a:tc>
-                  <a:txBody>
-                    <a:bodyPr/>
-                    <a:lstStyle/>
-                    <a:p>
-                      <a:pPr algn="ctr" indent="0" marL="0">
-                        <a:buNone/>
-                      </a:pPr>
-                      <a:endParaRPr lang="en-US" sz="500" dirty="0">
-                        <a:latin typeface="Calibri" charset="0"/>
-                        <a:ea typeface="Calibri" charset="0"/>
-                        <a:cs typeface="Calibri" charset="0"/>
-                      </a:endParaRPr>
-                    </a:p>
-                  </a:txBody>
-                  <a:tcPr marL="91440" marR="91440" marT="45720" marB="45720">
-                    <a:lnL w="2540" cap="flat" cmpd="sng" algn="ctr">
-                      <a:solidFill>
-                        <a:srgbClr val="EEEEEE"/>
-                      </a:solidFill>
-                      <a:prstDash val="solid"/>
-                      <a:round/>
-                      <a:headEnd type="none" w="med" len="med"/>
-                      <a:tailEnd type="none" w="med" len="med"/>
-                    </a:lnL>
-                    <a:lnR w="2540" cap="flat" cmpd="sng" algn="ctr">
-                      <a:solidFill>
-                        <a:srgbClr val="EEEEEE"/>
-                      </a:solidFill>
-                      <a:prstDash val="solid"/>
-                      <a:round/>
-                      <a:headEnd type="none" w="med" len="med"/>
-                      <a:tailEnd type="none" w="med" len="med"/>
-                    </a:lnR>
-                    <a:lnT w="2540" cap="flat" cmpd="sng" algn="ctr">
-                      <a:solidFill>
-                        <a:srgbClr val="EEEEEE"/>
-                      </a:solidFill>
-                      <a:prstDash val="solid"/>
-                      <a:round/>
-                      <a:headEnd type="none" w="med" len="med"/>
-                      <a:tailEnd type="none" w="med" len="med"/>
-                    </a:lnT>
-                    <a:lnB w="2540" cap="flat" cmpd="sng" algn="ctr">
-                      <a:solidFill>
-                        <a:srgbClr val="EEEEEE"/>
-                      </a:solidFill>
-                      <a:prstDash val="solid"/>
-                      <a:round/>
-                      <a:headEnd type="none" w="med" len="med"/>
-                      <a:tailEnd type="none" w="med" len="med"/>
-                    </a:lnB>
-                  </a:tcPr>
-                </a:tc>
-                <a:tc>
-                  <a:txBody>
-                    <a:bodyPr/>
-                    <a:lstStyle/>
-                    <a:p>
-                      <a:pPr algn="ctr" indent="0" marL="0">
-                        <a:buNone/>
-                      </a:pPr>
-                      <a:endParaRPr lang="en-US" sz="500" dirty="0">
-                        <a:latin typeface="Calibri" charset="0"/>
-                        <a:ea typeface="Calibri" charset="0"/>
-                        <a:cs typeface="Calibri" charset="0"/>
-                      </a:endParaRPr>
-                    </a:p>
-                  </a:txBody>
-                  <a:tcPr marL="91440" marR="91440" marT="45720" marB="45720">
-                    <a:lnL w="2540" cap="flat" cmpd="sng" algn="ctr">
-                      <a:solidFill>
-                        <a:srgbClr val="EEEEEE"/>
-                      </a:solidFill>
-                      <a:prstDash val="solid"/>
-                      <a:round/>
-                      <a:headEnd type="none" w="med" len="med"/>
-                      <a:tailEnd type="none" w="med" len="med"/>
-                    </a:lnL>
-                    <a:lnR w="2540" cap="flat" cmpd="sng" algn="ctr">
-                      <a:solidFill>
-                        <a:srgbClr val="EEEEEE"/>
-                      </a:solidFill>
-                      <a:prstDash val="solid"/>
-                      <a:round/>
-                      <a:headEnd type="none" w="med" len="med"/>
-                      <a:tailEnd type="none" w="med" len="med"/>
-                    </a:lnR>
-                    <a:lnT w="2540" cap="flat" cmpd="sng" algn="ctr">
-                      <a:solidFill>
-                        <a:srgbClr val="EEEEEE"/>
-                      </a:solidFill>
-                      <a:prstDash val="solid"/>
-                      <a:round/>
-                      <a:headEnd type="none" w="med" len="med"/>
-                      <a:tailEnd type="none" w="med" len="med"/>
-                    </a:lnT>
-                    <a:lnB w="2540" cap="flat" cmpd="sng" algn="ctr">
-                      <a:solidFill>
-                        <a:srgbClr val="EEEEEE"/>
-                      </a:solidFill>
-                      <a:prstDash val="solid"/>
-                      <a:round/>
-                      <a:headEnd type="none" w="med" len="med"/>
-                      <a:tailEnd type="none" w="med" len="med"/>
-                    </a:lnB>
-                  </a:tcPr>
-                </a:tc>
-                <a:tc>
-                  <a:txBody>
-                    <a:bodyPr/>
-                    <a:lstStyle/>
-                    <a:p>
-                      <a:pPr algn="ctr" indent="0" marL="0">
-                        <a:buNone/>
-                      </a:pPr>
-                      <a:endParaRPr lang="en-US" sz="500" dirty="0">
-                        <a:latin typeface="Calibri" charset="0"/>
-                        <a:ea typeface="Calibri" charset="0"/>
-                        <a:cs typeface="Calibri" charset="0"/>
-                      </a:endParaRPr>
-                    </a:p>
-                  </a:txBody>
-                  <a:tcPr marL="91440" marR="91440" marT="45720" marB="45720">
-                    <a:lnL w="2540" cap="flat" cmpd="sng" algn="ctr">
-                      <a:solidFill>
-                        <a:srgbClr val="EEEEEE"/>
-                      </a:solidFill>
-                      <a:prstDash val="solid"/>
-                      <a:round/>
-                      <a:headEnd type="none" w="med" len="med"/>
-                      <a:tailEnd type="none" w="med" len="med"/>
-                    </a:lnL>
-                    <a:lnR w="2540" cap="flat" cmpd="sng" algn="ctr">
-                      <a:solidFill>
-                        <a:srgbClr val="EEEEEE"/>
-                      </a:solidFill>
-                      <a:prstDash val="solid"/>
-                      <a:round/>
-                      <a:headEnd type="none" w="med" len="med"/>
-                      <a:tailEnd type="none" w="med" len="med"/>
-                    </a:lnR>
-                    <a:lnT w="2540" cap="flat" cmpd="sng" algn="ctr">
-                      <a:solidFill>
-                        <a:srgbClr val="EEEEEE"/>
-                      </a:solidFill>
-                      <a:prstDash val="solid"/>
-                      <a:round/>
-                      <a:headEnd type="none" w="med" len="med"/>
-                      <a:tailEnd type="none" w="med" len="med"/>
-                    </a:lnT>
-                    <a:lnB w="2540" cap="flat" cmpd="sng" algn="ctr">
-                      <a:solidFill>
-                        <a:srgbClr val="EEEEEE"/>
-                      </a:solidFill>
-                      <a:prstDash val="solid"/>
-                      <a:round/>
-                      <a:headEnd type="none" w="med" len="med"/>
-                      <a:tailEnd type="none" w="med" len="med"/>
-                    </a:lnB>
-                  </a:tcPr>
-                </a:tc>
-                <a:tc>
-                  <a:txBody>
-                    <a:bodyPr/>
-                    <a:lstStyle/>
-                    <a:p>
-                      <a:pPr algn="ctr" indent="0" marL="0">
-                        <a:buNone/>
-                      </a:pPr>
-                      <a:endParaRPr lang="en-US" sz="500" dirty="0">
-                        <a:latin typeface="Calibri" charset="0"/>
-                        <a:ea typeface="Calibri" charset="0"/>
-                        <a:cs typeface="Calibri" charset="0"/>
-                      </a:endParaRPr>
-                    </a:p>
-                  </a:txBody>
-                  <a:tcPr marL="91440" marR="91440" marT="45720" marB="45720">
-                    <a:lnL w="2540" cap="flat" cmpd="sng" algn="ctr">
-                      <a:solidFill>
-                        <a:srgbClr val="EEEEEE"/>
-                      </a:solidFill>
-                      <a:prstDash val="solid"/>
-                      <a:round/>
-                      <a:headEnd type="none" w="med" len="med"/>
-                      <a:tailEnd type="none" w="med" len="med"/>
-                    </a:lnL>
-                    <a:lnR w="2540" cap="flat" cmpd="sng" algn="ctr">
-                      <a:solidFill>
-                        <a:srgbClr val="EEEEEE"/>
-                      </a:solidFill>
-                      <a:prstDash val="solid"/>
-                      <a:round/>
-                      <a:headEnd type="none" w="med" len="med"/>
-                      <a:tailEnd type="none" w="med" len="med"/>
-                    </a:lnR>
-                    <a:lnT w="2540" cap="flat" cmpd="sng" algn="ctr">
-                      <a:solidFill>
-                        <a:srgbClr val="EEEEEE"/>
-                      </a:solidFill>
-                      <a:prstDash val="solid"/>
-                      <a:round/>
-                      <a:headEnd type="none" w="med" len="med"/>
-                      <a:tailEnd type="none" w="med" len="med"/>
-                    </a:lnT>
-                    <a:lnB w="2540" cap="flat" cmpd="sng" algn="ctr">
-                      <a:solidFill>
-                        <a:srgbClr val="EEEEEE"/>
-                      </a:solidFill>
-                      <a:prstDash val="solid"/>
-                      <a:round/>
-                      <a:headEnd type="none" w="med" len="med"/>
-                      <a:tailEnd type="none" w="med" len="med"/>
-                    </a:lnB>
-                  </a:tcPr>
-                </a:tc>
-                <a:tc>
-                  <a:txBody>
-                    <a:bodyPr/>
-                    <a:lstStyle/>
-                    <a:p>
-                      <a:pPr algn="ctr" indent="0" marL="0">
-                        <a:buNone/>
-                      </a:pPr>
-                      <a:r>
-                        <a:rPr lang="en-US" sz="500" dirty="0">
-                          <a:solidFill>
-                            <a:srgbClr val="000000"/>
-                          </a:solidFill>
-                          <a:latin typeface="Calibri" pitchFamily="34" charset="0"/>
-                          <a:ea typeface="Calibri" pitchFamily="34" charset="-122"/>
-                          <a:cs typeface="Calibri" pitchFamily="34" charset="-120"/>
-                        </a:rPr>
-                        <a:t>0.09%</a:t>
-                      </a:r>
-                      <a:endParaRPr lang="en-US" sz="500" dirty="0">
-                        <a:latin typeface="Calibri" charset="0"/>
-                        <a:ea typeface="Calibri" charset="0"/>
-                        <a:cs typeface="Calibri" charset="0"/>
-                      </a:endParaRPr>
-                    </a:p>
-                  </a:txBody>
-                  <a:tcPr marL="91440" marR="91440" marT="45720" marB="45720">
-                    <a:lnL w="2540" cap="flat" cmpd="sng" algn="ctr">
-                      <a:solidFill>
-                        <a:srgbClr val="EEEEEE"/>
-                      </a:solidFill>
-                      <a:prstDash val="solid"/>
-                      <a:round/>
-                      <a:headEnd type="none" w="med" len="med"/>
-                      <a:tailEnd type="none" w="med" len="med"/>
-                    </a:lnL>
-                    <a:lnR w="2540" cap="flat" cmpd="sng" algn="ctr">
-                      <a:solidFill>
-                        <a:srgbClr val="EEEEEE"/>
-                      </a:solidFill>
-                      <a:prstDash val="solid"/>
-                      <a:round/>
-                      <a:headEnd type="none" w="med" len="med"/>
-                      <a:tailEnd type="none" w="med" len="med"/>
-                    </a:lnR>
-                    <a:lnT w="2540" cap="flat" cmpd="sng" algn="ctr">
-                      <a:solidFill>
-                        <a:srgbClr val="EEEEEE"/>
-                      </a:solidFill>
-                      <a:prstDash val="solid"/>
-                      <a:round/>
-                      <a:headEnd type="none" w="med" len="med"/>
-                      <a:tailEnd type="none" w="med" len="med"/>
-                    </a:lnT>
-                    <a:lnB w="2540" cap="flat" cmpd="sng" algn="ctr">
-                      <a:solidFill>
-                        <a:srgbClr val="EEEEEE"/>
-                      </a:solidFill>
-                      <a:prstDash val="solid"/>
-                      <a:round/>
-                      <a:headEnd type="none" w="med" len="med"/>
-                      <a:tailEnd type="none" w="med" len="med"/>
-                    </a:lnB>
-                  </a:tcPr>
-                </a:tc>
-                <a:tc>
-                  <a:txBody>
-                    <a:bodyPr/>
-                    <a:lstStyle/>
-                    <a:p>
-                      <a:pPr algn="ctr" indent="0" marL="0">
-                        <a:buNone/>
-                      </a:pPr>
-                      <a:endParaRPr lang="en-US" sz="500" dirty="0">
-                        <a:latin typeface="Calibri" charset="0"/>
-                        <a:ea typeface="Calibri" charset="0"/>
-                        <a:cs typeface="Calibri" charset="0"/>
-                      </a:endParaRPr>
-                    </a:p>
-                  </a:txBody>
-                  <a:tcPr marL="91440" marR="91440" marT="45720" marB="45720">
-                    <a:lnL w="2540" cap="flat" cmpd="sng" algn="ctr">
-                      <a:solidFill>
-                        <a:srgbClr val="EEEEEE"/>
-                      </a:solidFill>
-                      <a:prstDash val="solid"/>
-                      <a:round/>
-                      <a:headEnd type="none" w="med" len="med"/>
-                      <a:tailEnd type="none" w="med" len="med"/>
-                    </a:lnL>
-                    <a:lnR w="2540" cap="flat" cmpd="sng" algn="ctr">
-                      <a:solidFill>
-                        <a:srgbClr val="EEEEEE"/>
-                      </a:solidFill>
-                      <a:prstDash val="solid"/>
-                      <a:round/>
-                      <a:headEnd type="none" w="med" len="med"/>
-                      <a:tailEnd type="none" w="med" len="med"/>
-                    </a:lnR>
-                    <a:lnT w="2540" cap="flat" cmpd="sng" algn="ctr">
-                      <a:solidFill>
-                        <a:srgbClr val="EEEEEE"/>
-                      </a:solidFill>
-                      <a:prstDash val="solid"/>
-                      <a:round/>
-                      <a:headEnd type="none" w="med" len="med"/>
-                      <a:tailEnd type="none" w="med" len="med"/>
-                    </a:lnT>
-                    <a:lnB w="2540" cap="flat" cmpd="sng" algn="ctr">
-                      <a:solidFill>
-                        <a:srgbClr val="EEEEEE"/>
-                      </a:solidFill>
-                      <a:prstDash val="solid"/>
-                      <a:round/>
-                      <a:headEnd type="none" w="med" len="med"/>
-                      <a:tailEnd type="none" w="med" len="med"/>
-                    </a:lnB>
-                  </a:tcPr>
-                </a:tc>
-                <a:tc>
-                  <a:txBody>
-                    <a:bodyPr/>
-                    <a:lstStyle/>
-                    <a:p>
-                      <a:pPr algn="ctr" indent="0" marL="0">
-                        <a:buNone/>
-                      </a:pPr>
-                      <a:endParaRPr lang="en-US" sz="500" dirty="0">
-                        <a:latin typeface="Calibri" charset="0"/>
-                        <a:ea typeface="Calibri" charset="0"/>
-                        <a:cs typeface="Calibri" charset="0"/>
-                      </a:endParaRPr>
-                    </a:p>
-                  </a:txBody>
-                  <a:tcPr marL="91440" marR="91440" marT="45720" marB="45720">
-                    <a:lnL w="2540" cap="flat" cmpd="sng" algn="ctr">
-                      <a:solidFill>
-                        <a:srgbClr val="EEEEEE"/>
-                      </a:solidFill>
-                      <a:prstDash val="solid"/>
-                      <a:round/>
-                      <a:headEnd type="none" w="med" len="med"/>
-                      <a:tailEnd type="none" w="med" len="med"/>
-                    </a:lnL>
-                    <a:lnR w="2540" cap="flat" cmpd="sng" algn="ctr">
-                      <a:solidFill>
-                        <a:srgbClr val="EEEEEE"/>
-                      </a:solidFill>
-                      <a:prstDash val="solid"/>
-                      <a:round/>
-                      <a:headEnd type="none" w="med" len="med"/>
-                      <a:tailEnd type="none" w="med" len="med"/>
-                    </a:lnR>
-                    <a:lnT w="2540" cap="flat" cmpd="sng" algn="ctr">
-                      <a:solidFill>
-                        <a:srgbClr val="EEEEEE"/>
-                      </a:solidFill>
-                      <a:prstDash val="solid"/>
-                      <a:round/>
-                      <a:headEnd type="none" w="med" len="med"/>
-                      <a:tailEnd type="none" w="med" len="med"/>
-                    </a:lnT>
-                    <a:lnB w="2540" cap="flat" cmpd="sng" algn="ctr">
-                      <a:solidFill>
-                        <a:srgbClr val="EEEEEE"/>
-                      </a:solidFill>
-                      <a:prstDash val="solid"/>
-                      <a:round/>
-                      <a:headEnd type="none" w="med" len="med"/>
-                      <a:tailEnd type="none" w="med" len="med"/>
-                    </a:lnB>
-                  </a:tcPr>
-                </a:tc>
-                <a:tc>
-                  <a:txBody>
-                    <a:bodyPr/>
-                    <a:lstStyle/>
-                    <a:p>
-                      <a:pPr algn="ctr" indent="0" marL="0">
-                        <a:buNone/>
-                      </a:pPr>
-                      <a:endParaRPr lang="en-US" sz="500" dirty="0">
-                        <a:latin typeface="Calibri" charset="0"/>
-                        <a:ea typeface="Calibri" charset="0"/>
-                        <a:cs typeface="Calibri" charset="0"/>
-                      </a:endParaRPr>
-                    </a:p>
-                  </a:txBody>
-                  <a:tcPr marL="91440" marR="91440" marT="45720" marB="45720">
-                    <a:lnL w="2540" cap="flat" cmpd="sng" algn="ctr">
-                      <a:solidFill>
-                        <a:srgbClr val="EEEEEE"/>
-                      </a:solidFill>
-                      <a:prstDash val="solid"/>
-                      <a:round/>
-                      <a:headEnd type="none" w="med" len="med"/>
-                      <a:tailEnd type="none" w="med" len="med"/>
-                    </a:lnL>
-                    <a:lnR w="2540" cap="flat" cmpd="sng" algn="ctr">
-                      <a:solidFill>
-                        <a:srgbClr val="EEEEEE"/>
-                      </a:solidFill>
-                      <a:prstDash val="solid"/>
-                      <a:round/>
-                      <a:headEnd type="none" w="med" len="med"/>
-                      <a:tailEnd type="none" w="med" len="med"/>
-                    </a:lnR>
-                    <a:lnT w="2540" cap="flat" cmpd="sng" algn="ctr">
-                      <a:solidFill>
-                        <a:srgbClr val="EEEEEE"/>
-                      </a:solidFill>
-                      <a:prstDash val="solid"/>
-                      <a:round/>
-                      <a:headEnd type="none" w="med" len="med"/>
-                      <a:tailEnd type="none" w="med" len="med"/>
-                    </a:lnT>
-                    <a:lnB w="2540" cap="flat" cmpd="sng" algn="ctr">
-                      <a:solidFill>
-                        <a:srgbClr val="EEEEEE"/>
-                      </a:solidFill>
-                      <a:prstDash val="solid"/>
-                      <a:round/>
-                      <a:headEnd type="none" w="med" len="med"/>
-                      <a:tailEnd type="none" w="med" len="med"/>
-                    </a:lnB>
-                  </a:tcPr>
-                </a:tc>
-                <a:tc>
-                  <a:txBody>
-                    <a:bodyPr/>
-                    <a:lstStyle/>
-                    <a:p>
-                      <a:pPr algn="ctr" indent="0" marL="0">
-                        <a:buNone/>
-                      </a:pPr>
-                      <a:endParaRPr lang="en-US" sz="500" dirty="0">
-                        <a:latin typeface="Calibri" charset="0"/>
-                        <a:ea typeface="Calibri" charset="0"/>
-                        <a:cs typeface="Calibri" charset="0"/>
-                      </a:endParaRPr>
-                    </a:p>
-                  </a:txBody>
-                  <a:tcPr marL="91440" marR="91440" marT="45720" marB="45720">
-                    <a:lnL w="2540" cap="flat" cmpd="sng" algn="ctr">
-                      <a:solidFill>
-                        <a:srgbClr val="EEEEEE"/>
-                      </a:solidFill>
-                      <a:prstDash val="solid"/>
-                      <a:round/>
-                      <a:headEnd type="none" w="med" len="med"/>
-                      <a:tailEnd type="none" w="med" len="med"/>
-                    </a:lnL>
-                    <a:lnR w="2540" cap="flat" cmpd="sng" algn="ctr">
-                      <a:solidFill>
-                        <a:srgbClr val="EEEEEE"/>
-                      </a:solidFill>
-                      <a:prstDash val="solid"/>
-                      <a:round/>
-                      <a:headEnd type="none" w="med" len="med"/>
-                      <a:tailEnd type="none" w="med" len="med"/>
-                    </a:lnR>
-                    <a:lnT w="2540" cap="flat" cmpd="sng" algn="ctr">
-                      <a:solidFill>
-                        <a:srgbClr val="EEEEEE"/>
-                      </a:solidFill>
-                      <a:prstDash val="solid"/>
-                      <a:round/>
-                      <a:headEnd type="none" w="med" len="med"/>
-                      <a:tailEnd type="none" w="med" len="med"/>
-                    </a:lnT>
-                    <a:lnB w="2540" cap="flat" cmpd="sng" algn="ctr">
-                      <a:solidFill>
-                        <a:srgbClr val="EEEEEE"/>
-                      </a:solidFill>
-                      <a:prstDash val="solid"/>
-                      <a:round/>
-                      <a:headEnd type="none" w="med" len="med"/>
-                      <a:tailEnd type="none" w="med" len="med"/>
-                    </a:lnB>
-                  </a:tcPr>
-                </a:tc>
-                <a:tc>
-                  <a:txBody>
-                    <a:bodyPr/>
-                    <a:lstStyle/>
-                    <a:p>
-                      <a:pPr algn="ctr" indent="0" marL="0">
-                        <a:buNone/>
-                      </a:pPr>
-                      <a:endParaRPr lang="en-US" sz="500" dirty="0">
-                        <a:latin typeface="Calibri" charset="0"/>
-                        <a:ea typeface="Calibri" charset="0"/>
-                        <a:cs typeface="Calibri" charset="0"/>
-                      </a:endParaRPr>
-                    </a:p>
-                  </a:txBody>
-                  <a:tcPr marL="91440" marR="91440" marT="45720" marB="45720">
-                    <a:lnL w="2540" cap="flat" cmpd="sng" algn="ctr">
-                      <a:solidFill>
-                        <a:srgbClr val="EEEEEE"/>
-                      </a:solidFill>
-                      <a:prstDash val="solid"/>
-                      <a:round/>
-                      <a:headEnd type="none" w="med" len="med"/>
-                      <a:tailEnd type="none" w="med" len="med"/>
-                    </a:lnL>
-                    <a:lnR w="2540" cap="flat" cmpd="sng" algn="ctr">
-                      <a:solidFill>
-                        <a:srgbClr val="EEEEEE"/>
-                      </a:solidFill>
-                      <a:prstDash val="solid"/>
-                      <a:round/>
-                      <a:headEnd type="none" w="med" len="med"/>
-                      <a:tailEnd type="none" w="med" len="med"/>
-                    </a:lnR>
-                    <a:lnT w="2540" cap="flat" cmpd="sng" algn="ctr">
-                      <a:solidFill>
-                        <a:srgbClr val="EEEEEE"/>
-                      </a:solidFill>
-                      <a:prstDash val="solid"/>
-                      <a:round/>
-                      <a:headEnd type="none" w="med" len="med"/>
-                      <a:tailEnd type="none" w="med" len="med"/>
-                    </a:lnT>
-                    <a:lnB w="2540" cap="flat" cmpd="sng" algn="ctr">
-                      <a:solidFill>
-                        <a:srgbClr val="EEEEEE"/>
-                      </a:solidFill>
-                      <a:prstDash val="solid"/>
-                      <a:round/>
-                      <a:headEnd type="none" w="med" len="med"/>
-                      <a:tailEnd type="none" w="med" len="med"/>
-                    </a:lnB>
-                  </a:tcPr>
-                </a:tc>
-                <a:tc>
-                  <a:txBody>
-                    <a:bodyPr/>
-                    <a:lstStyle/>
-                    <a:p>
-                      <a:pPr algn="ctr" indent="0" marL="0">
-                        <a:buNone/>
-                      </a:pPr>
-                      <a:endParaRPr lang="en-US" sz="500" dirty="0">
-                        <a:latin typeface="Calibri" charset="0"/>
-                        <a:ea typeface="Calibri" charset="0"/>
-                        <a:cs typeface="Calibri" charset="0"/>
-                      </a:endParaRPr>
-                    </a:p>
-                  </a:txBody>
-                  <a:tcPr marL="91440" marR="91440" marT="45720" marB="45720">
-                    <a:lnL w="2540" cap="flat" cmpd="sng" algn="ctr">
-                      <a:solidFill>
-                        <a:srgbClr val="EEEEEE"/>
-                      </a:solidFill>
-                      <a:prstDash val="solid"/>
-                      <a:round/>
-                      <a:headEnd type="none" w="med" len="med"/>
-                      <a:tailEnd type="none" w="med" len="med"/>
-                    </a:lnL>
-                    <a:lnR w="2540" cap="flat" cmpd="sng" algn="ctr">
-                      <a:solidFill>
-                        <a:srgbClr val="EEEEEE"/>
-                      </a:solidFill>
-                      <a:prstDash val="solid"/>
-                      <a:round/>
-                      <a:headEnd type="none" w="med" len="med"/>
-                      <a:tailEnd type="none" w="med" len="med"/>
-                    </a:lnR>
-                    <a:lnT w="2540" cap="flat" cmpd="sng" algn="ctr">
-                      <a:solidFill>
-                        <a:srgbClr val="EEEEEE"/>
-                      </a:solidFill>
-                      <a:prstDash val="solid"/>
-                      <a:round/>
-                      <a:headEnd type="none" w="med" len="med"/>
-                      <a:tailEnd type="none" w="med" len="med"/>
-                    </a:lnT>
-                    <a:lnB w="2540" cap="flat" cmpd="sng" algn="ctr">
-                      <a:solidFill>
-                        <a:srgbClr val="EEEEEE"/>
-                      </a:solidFill>
-                      <a:prstDash val="solid"/>
-                      <a:round/>
-                      <a:headEnd type="none" w="med" len="med"/>
-                      <a:tailEnd type="none" w="med" len="med"/>
-                    </a:lnB>
-                  </a:tcPr>
-                </a:tc>
-                <a:tc>
-                  <a:txBody>
-                    <a:bodyPr/>
-                    <a:lstStyle/>
-                    <a:p>
-                      <a:pPr algn="ctr" indent="0" marL="0">
-                        <a:buNone/>
-                      </a:pPr>
-                      <a:endParaRPr lang="en-US" sz="500" dirty="0">
-                        <a:latin typeface="Calibri" charset="0"/>
-                        <a:ea typeface="Calibri" charset="0"/>
-                        <a:cs typeface="Calibri" charset="0"/>
-                      </a:endParaRPr>
-                    </a:p>
-                  </a:txBody>
-                  <a:tcPr marL="91440" marR="91440" marT="45720" marB="45720">
-                    <a:lnL w="2540" cap="flat" cmpd="sng" algn="ctr">
-                      <a:solidFill>
-                        <a:srgbClr val="EEEEEE"/>
-                      </a:solidFill>
-                      <a:prstDash val="solid"/>
-                      <a:round/>
-                      <a:headEnd type="none" w="med" len="med"/>
-                      <a:tailEnd type="none" w="med" len="med"/>
-                    </a:lnL>
-                    <a:lnR w="2540" cap="flat" cmpd="sng" algn="ctr">
-                      <a:solidFill>
-                        <a:srgbClr val="EEEEEE"/>
-                      </a:solidFill>
-                      <a:prstDash val="solid"/>
-                      <a:round/>
-                      <a:headEnd type="none" w="med" len="med"/>
-                      <a:tailEnd type="none" w="med" len="med"/>
-                    </a:lnR>
-                    <a:lnT w="2540" cap="flat" cmpd="sng" algn="ctr">
-                      <a:solidFill>
-                        <a:srgbClr val="EEEEEE"/>
-                      </a:solidFill>
-                      <a:prstDash val="solid"/>
-                      <a:round/>
-                      <a:headEnd type="none" w="med" len="med"/>
-                      <a:tailEnd type="none" w="med" len="med"/>
-                    </a:lnT>
-                    <a:lnB w="2540" cap="flat" cmpd="sng" algn="ctr">
-                      <a:solidFill>
-                        <a:srgbClr val="EEEEEE"/>
-                      </a:solidFill>
-                      <a:prstDash val="solid"/>
-                      <a:round/>
-                      <a:headEnd type="none" w="med" len="med"/>
-                      <a:tailEnd type="none" w="med" len="med"/>
-                    </a:lnB>
-                  </a:tcPr>
-                </a:tc>
-                <a:tc>
-                  <a:txBody>
-                    <a:bodyPr/>
-                    <a:lstStyle/>
-                    <a:p>
-                      <a:pPr algn="ctr" indent="0" marL="0">
-                        <a:buNone/>
-                      </a:pPr>
-                      <a:r>
-                        <a:rPr lang="en-US" sz="500" b="1" dirty="0">
-                          <a:solidFill>
-                            <a:srgbClr val="000000"/>
-                          </a:solidFill>
-                          <a:latin typeface="Calibri" pitchFamily="34" charset="0"/>
-                          <a:ea typeface="Calibri" pitchFamily="34" charset="-122"/>
-                          <a:cs typeface="Calibri" pitchFamily="34" charset="-120"/>
-                        </a:rPr>
-                        <a:t>—</a:t>
                       </a:r>
                       <a:endParaRPr lang="en-US" sz="500" dirty="0">
                         <a:latin typeface="Calibri" charset="0"/>

--- a/folletos/2026-04/pptx/FIP_VANTRUST_LIQUIDEZ_TEMPORAL.pptx
+++ b/folletos/2026-04/pptx/FIP_VANTRUST_LIQUIDEZ_TEMPORAL.pptx
@@ -4643,7 +4643,7 @@
                 <a:ea typeface="Calibri" pitchFamily="34" charset="-122"/>
                 <a:cs typeface="Calibri" pitchFamily="34" charset="-120"/>
               </a:rPr>
-              <a:t>prueba CLP</a:t>
+              <a:t>prueba 14 CLP</a:t>
             </a:r>
             <a:endParaRPr lang="en-US" sz="800" dirty="0"/>
           </a:p>
